--- a/Week_1/003-HTML_&_CSS/HTML-CSS.pptx
+++ b/Week_1/003-HTML_&_CSS/HTML-CSS.pptx
@@ -6,11 +6,10 @@
   </p:sldMasterIdLst>
   <p:sldIdLst>
     <p:sldId id="256" r:id="rId2"/>
-    <p:sldId id="257" r:id="rId3"/>
-    <p:sldId id="258" r:id="rId4"/>
-    <p:sldId id="260" r:id="rId5"/>
-    <p:sldId id="261" r:id="rId6"/>
-    <p:sldId id="262" r:id="rId7"/>
+    <p:sldId id="263" r:id="rId3"/>
+    <p:sldId id="264" r:id="rId4"/>
+    <p:sldId id="265" r:id="rId5"/>
+    <p:sldId id="262" r:id="rId6"/>
   </p:sldIdLst>
   <p:sldSz cx="12192000" cy="6858000"/>
   <p:notesSz cx="6858000" cy="9144000"/>
@@ -126,2896 +125,6 @@
 </p1510:revInfo>
 </file>
 
-<file path=ppt/diagrams/colors1.xml><?xml version="1.0" encoding="utf-8"?>
-<dgm:colorsDef xmlns:dgm="http://schemas.openxmlformats.org/drawingml/2006/diagram" xmlns:a="http://schemas.openxmlformats.org/drawingml/2006/main" uniqueId="urn:microsoft.com/office/officeart/2005/8/colors/accent1_2">
-  <dgm:title val=""/>
-  <dgm:desc val=""/>
-  <dgm:catLst>
-    <dgm:cat type="accent1" pri="11200"/>
-  </dgm:catLst>
-  <dgm:styleLbl name="node0">
-    <dgm:fillClrLst meth="repeat">
-      <a:schemeClr val="accent1"/>
-    </dgm:fillClrLst>
-    <dgm:linClrLst meth="repeat">
-      <a:schemeClr val="lt1"/>
-    </dgm:linClrLst>
-    <dgm:effectClrLst/>
-    <dgm:txLinClrLst/>
-    <dgm:txFillClrLst/>
-    <dgm:txEffectClrLst/>
-  </dgm:styleLbl>
-  <dgm:styleLbl name="alignNode1">
-    <dgm:fillClrLst meth="repeat">
-      <a:schemeClr val="accent1"/>
-    </dgm:fillClrLst>
-    <dgm:linClrLst meth="repeat">
-      <a:schemeClr val="accent1"/>
-    </dgm:linClrLst>
-    <dgm:effectClrLst/>
-    <dgm:txLinClrLst/>
-    <dgm:txFillClrLst/>
-    <dgm:txEffectClrLst/>
-  </dgm:styleLbl>
-  <dgm:styleLbl name="node1">
-    <dgm:fillClrLst meth="repeat">
-      <a:schemeClr val="accent1"/>
-    </dgm:fillClrLst>
-    <dgm:linClrLst meth="repeat">
-      <a:schemeClr val="lt1"/>
-    </dgm:linClrLst>
-    <dgm:effectClrLst/>
-    <dgm:txLinClrLst/>
-    <dgm:txFillClrLst/>
-    <dgm:txEffectClrLst/>
-  </dgm:styleLbl>
-  <dgm:styleLbl name="lnNode1">
-    <dgm:fillClrLst meth="repeat">
-      <a:schemeClr val="accent1"/>
-    </dgm:fillClrLst>
-    <dgm:linClrLst meth="repeat">
-      <a:schemeClr val="lt1"/>
-    </dgm:linClrLst>
-    <dgm:effectClrLst/>
-    <dgm:txLinClrLst/>
-    <dgm:txFillClrLst/>
-    <dgm:txEffectClrLst/>
-  </dgm:styleLbl>
-  <dgm:styleLbl name="vennNode1">
-    <dgm:fillClrLst meth="repeat">
-      <a:schemeClr val="accent1">
-        <a:alpha val="50000"/>
-      </a:schemeClr>
-    </dgm:fillClrLst>
-    <dgm:linClrLst meth="repeat">
-      <a:schemeClr val="lt1"/>
-    </dgm:linClrLst>
-    <dgm:effectClrLst/>
-    <dgm:txLinClrLst/>
-    <dgm:txFillClrLst/>
-    <dgm:txEffectClrLst/>
-  </dgm:styleLbl>
-  <dgm:styleLbl name="node2">
-    <dgm:fillClrLst meth="repeat">
-      <a:schemeClr val="accent1"/>
-    </dgm:fillClrLst>
-    <dgm:linClrLst meth="repeat">
-      <a:schemeClr val="lt1"/>
-    </dgm:linClrLst>
-    <dgm:effectClrLst/>
-    <dgm:txLinClrLst/>
-    <dgm:txFillClrLst/>
-    <dgm:txEffectClrLst/>
-  </dgm:styleLbl>
-  <dgm:styleLbl name="node3">
-    <dgm:fillClrLst meth="repeat">
-      <a:schemeClr val="accent1"/>
-    </dgm:fillClrLst>
-    <dgm:linClrLst meth="repeat">
-      <a:schemeClr val="lt1"/>
-    </dgm:linClrLst>
-    <dgm:effectClrLst/>
-    <dgm:txLinClrLst/>
-    <dgm:txFillClrLst/>
-    <dgm:txEffectClrLst/>
-  </dgm:styleLbl>
-  <dgm:styleLbl name="node4">
-    <dgm:fillClrLst meth="repeat">
-      <a:schemeClr val="accent1"/>
-    </dgm:fillClrLst>
-    <dgm:linClrLst meth="repeat">
-      <a:schemeClr val="lt1"/>
-    </dgm:linClrLst>
-    <dgm:effectClrLst/>
-    <dgm:txLinClrLst/>
-    <dgm:txFillClrLst/>
-    <dgm:txEffectClrLst/>
-  </dgm:styleLbl>
-  <dgm:styleLbl name="fgImgPlace1">
-    <dgm:fillClrLst meth="repeat">
-      <a:schemeClr val="accent1">
-        <a:tint val="50000"/>
-      </a:schemeClr>
-    </dgm:fillClrLst>
-    <dgm:linClrLst meth="repeat">
-      <a:schemeClr val="lt1"/>
-    </dgm:linClrLst>
-    <dgm:effectClrLst/>
-    <dgm:txLinClrLst/>
-    <dgm:txFillClrLst meth="repeat">
-      <a:schemeClr val="lt1"/>
-    </dgm:txFillClrLst>
-    <dgm:txEffectClrLst/>
-  </dgm:styleLbl>
-  <dgm:styleLbl name="alignImgPlace1">
-    <dgm:fillClrLst meth="repeat">
-      <a:schemeClr val="accent1">
-        <a:tint val="50000"/>
-      </a:schemeClr>
-    </dgm:fillClrLst>
-    <dgm:linClrLst meth="repeat">
-      <a:schemeClr val="lt1"/>
-    </dgm:linClrLst>
-    <dgm:effectClrLst/>
-    <dgm:txLinClrLst/>
-    <dgm:txFillClrLst meth="repeat">
-      <a:schemeClr val="lt1"/>
-    </dgm:txFillClrLst>
-    <dgm:txEffectClrLst/>
-  </dgm:styleLbl>
-  <dgm:styleLbl name="bgImgPlace1">
-    <dgm:fillClrLst meth="repeat">
-      <a:schemeClr val="accent1">
-        <a:tint val="50000"/>
-      </a:schemeClr>
-    </dgm:fillClrLst>
-    <dgm:linClrLst meth="repeat">
-      <a:schemeClr val="lt1"/>
-    </dgm:linClrLst>
-    <dgm:effectClrLst/>
-    <dgm:txLinClrLst/>
-    <dgm:txFillClrLst meth="repeat">
-      <a:schemeClr val="lt1"/>
-    </dgm:txFillClrLst>
-    <dgm:txEffectClrLst/>
-  </dgm:styleLbl>
-  <dgm:styleLbl name="sibTrans2D1">
-    <dgm:fillClrLst meth="repeat">
-      <a:schemeClr val="accent1">
-        <a:tint val="60000"/>
-      </a:schemeClr>
-    </dgm:fillClrLst>
-    <dgm:linClrLst meth="repeat">
-      <a:schemeClr val="accent1">
-        <a:tint val="60000"/>
-      </a:schemeClr>
-    </dgm:linClrLst>
-    <dgm:effectClrLst/>
-    <dgm:txLinClrLst/>
-    <dgm:txFillClrLst/>
-    <dgm:txEffectClrLst/>
-  </dgm:styleLbl>
-  <dgm:styleLbl name="fgSibTrans2D1">
-    <dgm:fillClrLst meth="repeat">
-      <a:schemeClr val="accent1">
-        <a:tint val="60000"/>
-      </a:schemeClr>
-    </dgm:fillClrLst>
-    <dgm:linClrLst meth="repeat">
-      <a:schemeClr val="accent1">
-        <a:tint val="60000"/>
-      </a:schemeClr>
-    </dgm:linClrLst>
-    <dgm:effectClrLst/>
-    <dgm:txLinClrLst/>
-    <dgm:txFillClrLst/>
-    <dgm:txEffectClrLst/>
-  </dgm:styleLbl>
-  <dgm:styleLbl name="bgSibTrans2D1">
-    <dgm:fillClrLst meth="repeat">
-      <a:schemeClr val="accent1">
-        <a:tint val="60000"/>
-      </a:schemeClr>
-    </dgm:fillClrLst>
-    <dgm:linClrLst meth="repeat">
-      <a:schemeClr val="accent1">
-        <a:tint val="60000"/>
-      </a:schemeClr>
-    </dgm:linClrLst>
-    <dgm:effectClrLst/>
-    <dgm:txLinClrLst/>
-    <dgm:txFillClrLst/>
-    <dgm:txEffectClrLst/>
-  </dgm:styleLbl>
-  <dgm:styleLbl name="sibTrans1D1">
-    <dgm:fillClrLst meth="repeat">
-      <a:schemeClr val="accent1"/>
-    </dgm:fillClrLst>
-    <dgm:linClrLst meth="repeat">
-      <a:schemeClr val="accent1"/>
-    </dgm:linClrLst>
-    <dgm:effectClrLst/>
-    <dgm:txLinClrLst/>
-    <dgm:txFillClrLst meth="repeat">
-      <a:schemeClr val="tx1"/>
-    </dgm:txFillClrLst>
-    <dgm:txEffectClrLst/>
-  </dgm:styleLbl>
-  <dgm:styleLbl name="callout">
-    <dgm:fillClrLst meth="repeat">
-      <a:schemeClr val="accent1"/>
-    </dgm:fillClrLst>
-    <dgm:linClrLst meth="repeat">
-      <a:schemeClr val="accent1">
-        <a:tint val="50000"/>
-      </a:schemeClr>
-    </dgm:linClrLst>
-    <dgm:effectClrLst/>
-    <dgm:txLinClrLst/>
-    <dgm:txFillClrLst meth="repeat">
-      <a:schemeClr val="tx1"/>
-    </dgm:txFillClrLst>
-    <dgm:txEffectClrLst/>
-  </dgm:styleLbl>
-  <dgm:styleLbl name="asst0">
-    <dgm:fillClrLst meth="repeat">
-      <a:schemeClr val="accent1"/>
-    </dgm:fillClrLst>
-    <dgm:linClrLst meth="repeat">
-      <a:schemeClr val="lt1"/>
-    </dgm:linClrLst>
-    <dgm:effectClrLst/>
-    <dgm:txLinClrLst/>
-    <dgm:txFillClrLst/>
-    <dgm:txEffectClrLst/>
-  </dgm:styleLbl>
-  <dgm:styleLbl name="asst1">
-    <dgm:fillClrLst meth="repeat">
-      <a:schemeClr val="accent1"/>
-    </dgm:fillClrLst>
-    <dgm:linClrLst meth="repeat">
-      <a:schemeClr val="lt1"/>
-    </dgm:linClrLst>
-    <dgm:effectClrLst/>
-    <dgm:txLinClrLst/>
-    <dgm:txFillClrLst/>
-    <dgm:txEffectClrLst/>
-  </dgm:styleLbl>
-  <dgm:styleLbl name="asst2">
-    <dgm:fillClrLst meth="repeat">
-      <a:schemeClr val="accent1"/>
-    </dgm:fillClrLst>
-    <dgm:linClrLst meth="repeat">
-      <a:schemeClr val="lt1"/>
-    </dgm:linClrLst>
-    <dgm:effectClrLst/>
-    <dgm:txLinClrLst/>
-    <dgm:txFillClrLst/>
-    <dgm:txEffectClrLst/>
-  </dgm:styleLbl>
-  <dgm:styleLbl name="asst3">
-    <dgm:fillClrLst meth="repeat">
-      <a:schemeClr val="accent1"/>
-    </dgm:fillClrLst>
-    <dgm:linClrLst meth="repeat">
-      <a:schemeClr val="lt1"/>
-    </dgm:linClrLst>
-    <dgm:effectClrLst/>
-    <dgm:txLinClrLst/>
-    <dgm:txFillClrLst/>
-    <dgm:txEffectClrLst/>
-  </dgm:styleLbl>
-  <dgm:styleLbl name="asst4">
-    <dgm:fillClrLst meth="repeat">
-      <a:schemeClr val="accent1"/>
-    </dgm:fillClrLst>
-    <dgm:linClrLst meth="repeat">
-      <a:schemeClr val="lt1"/>
-    </dgm:linClrLst>
-    <dgm:effectClrLst/>
-    <dgm:txLinClrLst/>
-    <dgm:txFillClrLst/>
-    <dgm:txEffectClrLst/>
-  </dgm:styleLbl>
-  <dgm:styleLbl name="parChTrans2D1">
-    <dgm:fillClrLst meth="repeat">
-      <a:schemeClr val="accent1">
-        <a:tint val="60000"/>
-      </a:schemeClr>
-    </dgm:fillClrLst>
-    <dgm:linClrLst meth="repeat">
-      <a:schemeClr val="accent1">
-        <a:tint val="60000"/>
-      </a:schemeClr>
-    </dgm:linClrLst>
-    <dgm:effectClrLst/>
-    <dgm:txLinClrLst/>
-    <dgm:txFillClrLst meth="repeat">
-      <a:schemeClr val="lt1"/>
-    </dgm:txFillClrLst>
-    <dgm:txEffectClrLst/>
-  </dgm:styleLbl>
-  <dgm:styleLbl name="parChTrans2D2">
-    <dgm:fillClrLst meth="repeat">
-      <a:schemeClr val="accent1"/>
-    </dgm:fillClrLst>
-    <dgm:linClrLst meth="repeat">
-      <a:schemeClr val="accent1"/>
-    </dgm:linClrLst>
-    <dgm:effectClrLst/>
-    <dgm:txLinClrLst/>
-    <dgm:txFillClrLst meth="repeat">
-      <a:schemeClr val="lt1"/>
-    </dgm:txFillClrLst>
-    <dgm:txEffectClrLst/>
-  </dgm:styleLbl>
-  <dgm:styleLbl name="parChTrans2D3">
-    <dgm:fillClrLst meth="repeat">
-      <a:schemeClr val="accent1"/>
-    </dgm:fillClrLst>
-    <dgm:linClrLst meth="repeat">
-      <a:schemeClr val="accent1"/>
-    </dgm:linClrLst>
-    <dgm:effectClrLst/>
-    <dgm:txLinClrLst/>
-    <dgm:txFillClrLst meth="repeat">
-      <a:schemeClr val="lt1"/>
-    </dgm:txFillClrLst>
-    <dgm:txEffectClrLst/>
-  </dgm:styleLbl>
-  <dgm:styleLbl name="parChTrans2D4">
-    <dgm:fillClrLst meth="repeat">
-      <a:schemeClr val="accent1"/>
-    </dgm:fillClrLst>
-    <dgm:linClrLst meth="repeat">
-      <a:schemeClr val="accent1"/>
-    </dgm:linClrLst>
-    <dgm:effectClrLst/>
-    <dgm:txLinClrLst/>
-    <dgm:txFillClrLst meth="repeat">
-      <a:schemeClr val="lt1"/>
-    </dgm:txFillClrLst>
-    <dgm:txEffectClrLst/>
-  </dgm:styleLbl>
-  <dgm:styleLbl name="parChTrans1D1">
-    <dgm:fillClrLst meth="repeat">
-      <a:schemeClr val="accent1"/>
-    </dgm:fillClrLst>
-    <dgm:linClrLst meth="repeat">
-      <a:schemeClr val="accent1">
-        <a:shade val="60000"/>
-      </a:schemeClr>
-    </dgm:linClrLst>
-    <dgm:effectClrLst/>
-    <dgm:txLinClrLst/>
-    <dgm:txFillClrLst meth="repeat">
-      <a:schemeClr val="tx1"/>
-    </dgm:txFillClrLst>
-    <dgm:txEffectClrLst/>
-  </dgm:styleLbl>
-  <dgm:styleLbl name="parChTrans1D2">
-    <dgm:fillClrLst meth="repeat">
-      <a:schemeClr val="accent1"/>
-    </dgm:fillClrLst>
-    <dgm:linClrLst meth="repeat">
-      <a:schemeClr val="accent1">
-        <a:shade val="60000"/>
-      </a:schemeClr>
-    </dgm:linClrLst>
-    <dgm:effectClrLst/>
-    <dgm:txLinClrLst/>
-    <dgm:txFillClrLst meth="repeat">
-      <a:schemeClr val="tx1"/>
-    </dgm:txFillClrLst>
-    <dgm:txEffectClrLst/>
-  </dgm:styleLbl>
-  <dgm:styleLbl name="parChTrans1D3">
-    <dgm:fillClrLst meth="repeat">
-      <a:schemeClr val="accent1"/>
-    </dgm:fillClrLst>
-    <dgm:linClrLst meth="repeat">
-      <a:schemeClr val="accent1">
-        <a:shade val="80000"/>
-      </a:schemeClr>
-    </dgm:linClrLst>
-    <dgm:effectClrLst/>
-    <dgm:txLinClrLst/>
-    <dgm:txFillClrLst meth="repeat">
-      <a:schemeClr val="tx1"/>
-    </dgm:txFillClrLst>
-    <dgm:txEffectClrLst/>
-  </dgm:styleLbl>
-  <dgm:styleLbl name="parChTrans1D4">
-    <dgm:fillClrLst meth="repeat">
-      <a:schemeClr val="accent1"/>
-    </dgm:fillClrLst>
-    <dgm:linClrLst meth="repeat">
-      <a:schemeClr val="accent1">
-        <a:shade val="80000"/>
-      </a:schemeClr>
-    </dgm:linClrLst>
-    <dgm:effectClrLst/>
-    <dgm:txLinClrLst/>
-    <dgm:txFillClrLst meth="repeat">
-      <a:schemeClr val="tx1"/>
-    </dgm:txFillClrLst>
-    <dgm:txEffectClrLst/>
-  </dgm:styleLbl>
-  <dgm:styleLbl name="fgAcc1">
-    <dgm:fillClrLst meth="repeat">
-      <a:schemeClr val="lt1">
-        <a:alpha val="90000"/>
-      </a:schemeClr>
-    </dgm:fillClrLst>
-    <dgm:linClrLst meth="repeat">
-      <a:schemeClr val="accent1"/>
-    </dgm:linClrLst>
-    <dgm:effectClrLst/>
-    <dgm:txLinClrLst/>
-    <dgm:txFillClrLst meth="repeat">
-      <a:schemeClr val="dk1"/>
-    </dgm:txFillClrLst>
-    <dgm:txEffectClrLst/>
-  </dgm:styleLbl>
-  <dgm:styleLbl name="conFgAcc1">
-    <dgm:fillClrLst meth="repeat">
-      <a:schemeClr val="lt1">
-        <a:alpha val="90000"/>
-      </a:schemeClr>
-    </dgm:fillClrLst>
-    <dgm:linClrLst meth="repeat">
-      <a:schemeClr val="accent1"/>
-    </dgm:linClrLst>
-    <dgm:effectClrLst/>
-    <dgm:txLinClrLst/>
-    <dgm:txFillClrLst meth="repeat">
-      <a:schemeClr val="dk1"/>
-    </dgm:txFillClrLst>
-    <dgm:txEffectClrLst/>
-  </dgm:styleLbl>
-  <dgm:styleLbl name="alignAcc1">
-    <dgm:fillClrLst meth="repeat">
-      <a:schemeClr val="lt1">
-        <a:alpha val="90000"/>
-      </a:schemeClr>
-    </dgm:fillClrLst>
-    <dgm:linClrLst meth="repeat">
-      <a:schemeClr val="accent1"/>
-    </dgm:linClrLst>
-    <dgm:effectClrLst/>
-    <dgm:txLinClrLst/>
-    <dgm:txFillClrLst meth="repeat">
-      <a:schemeClr val="dk1"/>
-    </dgm:txFillClrLst>
-    <dgm:txEffectClrLst/>
-  </dgm:styleLbl>
-  <dgm:styleLbl name="trAlignAcc1">
-    <dgm:fillClrLst meth="repeat">
-      <a:schemeClr val="lt1">
-        <a:alpha val="40000"/>
-      </a:schemeClr>
-    </dgm:fillClrLst>
-    <dgm:linClrLst meth="repeat">
-      <a:schemeClr val="accent1"/>
-    </dgm:linClrLst>
-    <dgm:effectClrLst/>
-    <dgm:txLinClrLst/>
-    <dgm:txFillClrLst meth="repeat">
-      <a:schemeClr val="dk1"/>
-    </dgm:txFillClrLst>
-    <dgm:txEffectClrLst/>
-  </dgm:styleLbl>
-  <dgm:styleLbl name="bgAcc1">
-    <dgm:fillClrLst meth="repeat">
-      <a:schemeClr val="lt1">
-        <a:alpha val="90000"/>
-      </a:schemeClr>
-    </dgm:fillClrLst>
-    <dgm:linClrLst meth="repeat">
-      <a:schemeClr val="accent1"/>
-    </dgm:linClrLst>
-    <dgm:effectClrLst/>
-    <dgm:txLinClrLst/>
-    <dgm:txFillClrLst meth="repeat">
-      <a:schemeClr val="dk1"/>
-    </dgm:txFillClrLst>
-    <dgm:txEffectClrLst/>
-  </dgm:styleLbl>
-  <dgm:styleLbl name="solidFgAcc1">
-    <dgm:fillClrLst meth="repeat">
-      <a:schemeClr val="lt1"/>
-    </dgm:fillClrLst>
-    <dgm:linClrLst meth="repeat">
-      <a:schemeClr val="accent1"/>
-    </dgm:linClrLst>
-    <dgm:effectClrLst/>
-    <dgm:txLinClrLst/>
-    <dgm:txFillClrLst meth="repeat">
-      <a:schemeClr val="dk1"/>
-    </dgm:txFillClrLst>
-    <dgm:txEffectClrLst/>
-  </dgm:styleLbl>
-  <dgm:styleLbl name="solidAlignAcc1">
-    <dgm:fillClrLst meth="repeat">
-      <a:schemeClr val="lt1"/>
-    </dgm:fillClrLst>
-    <dgm:linClrLst meth="repeat">
-      <a:schemeClr val="accent1"/>
-    </dgm:linClrLst>
-    <dgm:effectClrLst/>
-    <dgm:txLinClrLst/>
-    <dgm:txFillClrLst meth="repeat">
-      <a:schemeClr val="dk1"/>
-    </dgm:txFillClrLst>
-    <dgm:txEffectClrLst/>
-  </dgm:styleLbl>
-  <dgm:styleLbl name="solidBgAcc1">
-    <dgm:fillClrLst meth="repeat">
-      <a:schemeClr val="lt1"/>
-    </dgm:fillClrLst>
-    <dgm:linClrLst meth="repeat">
-      <a:schemeClr val="accent1"/>
-    </dgm:linClrLst>
-    <dgm:effectClrLst/>
-    <dgm:txLinClrLst/>
-    <dgm:txFillClrLst meth="repeat">
-      <a:schemeClr val="dk1"/>
-    </dgm:txFillClrLst>
-    <dgm:txEffectClrLst/>
-  </dgm:styleLbl>
-  <dgm:styleLbl name="fgAccFollowNode1">
-    <dgm:fillClrLst meth="repeat">
-      <a:schemeClr val="accent1">
-        <a:alpha val="90000"/>
-        <a:tint val="40000"/>
-      </a:schemeClr>
-    </dgm:fillClrLst>
-    <dgm:linClrLst meth="repeat">
-      <a:schemeClr val="accent1">
-        <a:alpha val="90000"/>
-        <a:tint val="40000"/>
-      </a:schemeClr>
-    </dgm:linClrLst>
-    <dgm:effectClrLst/>
-    <dgm:txLinClrLst/>
-    <dgm:txFillClrLst meth="repeat">
-      <a:schemeClr val="dk1"/>
-    </dgm:txFillClrLst>
-    <dgm:txEffectClrLst/>
-  </dgm:styleLbl>
-  <dgm:styleLbl name="alignAccFollowNode1">
-    <dgm:fillClrLst meth="repeat">
-      <a:schemeClr val="accent1">
-        <a:alpha val="90000"/>
-        <a:tint val="40000"/>
-      </a:schemeClr>
-    </dgm:fillClrLst>
-    <dgm:linClrLst meth="repeat">
-      <a:schemeClr val="accent1">
-        <a:alpha val="90000"/>
-        <a:tint val="40000"/>
-      </a:schemeClr>
-    </dgm:linClrLst>
-    <dgm:effectClrLst/>
-    <dgm:txLinClrLst/>
-    <dgm:txFillClrLst meth="repeat">
-      <a:schemeClr val="dk1"/>
-    </dgm:txFillClrLst>
-    <dgm:txEffectClrLst/>
-  </dgm:styleLbl>
-  <dgm:styleLbl name="bgAccFollowNode1">
-    <dgm:fillClrLst meth="repeat">
-      <a:schemeClr val="accent1">
-        <a:alpha val="90000"/>
-        <a:tint val="40000"/>
-      </a:schemeClr>
-    </dgm:fillClrLst>
-    <dgm:linClrLst meth="repeat">
-      <a:schemeClr val="accent1">
-        <a:alpha val="90000"/>
-        <a:tint val="40000"/>
-      </a:schemeClr>
-    </dgm:linClrLst>
-    <dgm:effectClrLst/>
-    <dgm:txLinClrLst/>
-    <dgm:txFillClrLst meth="repeat">
-      <a:schemeClr val="dk1"/>
-    </dgm:txFillClrLst>
-    <dgm:txEffectClrLst/>
-  </dgm:styleLbl>
-  <dgm:styleLbl name="fgAcc0">
-    <dgm:fillClrLst meth="repeat">
-      <a:schemeClr val="lt1">
-        <a:alpha val="90000"/>
-      </a:schemeClr>
-    </dgm:fillClrLst>
-    <dgm:linClrLst meth="repeat">
-      <a:schemeClr val="accent1"/>
-    </dgm:linClrLst>
-    <dgm:effectClrLst/>
-    <dgm:txLinClrLst/>
-    <dgm:txFillClrLst meth="repeat">
-      <a:schemeClr val="dk1"/>
-    </dgm:txFillClrLst>
-    <dgm:txEffectClrLst/>
-  </dgm:styleLbl>
-  <dgm:styleLbl name="fgAcc2">
-    <dgm:fillClrLst meth="repeat">
-      <a:schemeClr val="lt1">
-        <a:alpha val="90000"/>
-      </a:schemeClr>
-    </dgm:fillClrLst>
-    <dgm:linClrLst meth="repeat">
-      <a:schemeClr val="accent1"/>
-    </dgm:linClrLst>
-    <dgm:effectClrLst/>
-    <dgm:txLinClrLst/>
-    <dgm:txFillClrLst meth="repeat">
-      <a:schemeClr val="dk1"/>
-    </dgm:txFillClrLst>
-    <dgm:txEffectClrLst/>
-  </dgm:styleLbl>
-  <dgm:styleLbl name="fgAcc3">
-    <dgm:fillClrLst meth="repeat">
-      <a:schemeClr val="lt1">
-        <a:alpha val="90000"/>
-      </a:schemeClr>
-    </dgm:fillClrLst>
-    <dgm:linClrLst meth="repeat">
-      <a:schemeClr val="accent1"/>
-    </dgm:linClrLst>
-    <dgm:effectClrLst/>
-    <dgm:txLinClrLst/>
-    <dgm:txFillClrLst meth="repeat">
-      <a:schemeClr val="dk1"/>
-    </dgm:txFillClrLst>
-    <dgm:txEffectClrLst/>
-  </dgm:styleLbl>
-  <dgm:styleLbl name="fgAcc4">
-    <dgm:fillClrLst meth="repeat">
-      <a:schemeClr val="lt1">
-        <a:alpha val="90000"/>
-      </a:schemeClr>
-    </dgm:fillClrLst>
-    <dgm:linClrLst meth="repeat">
-      <a:schemeClr val="accent1"/>
-    </dgm:linClrLst>
-    <dgm:effectClrLst/>
-    <dgm:txLinClrLst/>
-    <dgm:txFillClrLst meth="repeat">
-      <a:schemeClr val="dk1"/>
-    </dgm:txFillClrLst>
-    <dgm:txEffectClrLst/>
-  </dgm:styleLbl>
-  <dgm:styleLbl name="bgShp">
-    <dgm:fillClrLst meth="repeat">
-      <a:schemeClr val="accent1">
-        <a:tint val="40000"/>
-      </a:schemeClr>
-    </dgm:fillClrLst>
-    <dgm:linClrLst meth="repeat">
-      <a:schemeClr val="accent1"/>
-    </dgm:linClrLst>
-    <dgm:effectClrLst/>
-    <dgm:txLinClrLst/>
-    <dgm:txFillClrLst meth="repeat">
-      <a:schemeClr val="dk1"/>
-    </dgm:txFillClrLst>
-    <dgm:txEffectClrLst/>
-  </dgm:styleLbl>
-  <dgm:styleLbl name="dkBgShp">
-    <dgm:fillClrLst meth="repeat">
-      <a:schemeClr val="accent1">
-        <a:shade val="80000"/>
-      </a:schemeClr>
-    </dgm:fillClrLst>
-    <dgm:linClrLst meth="repeat">
-      <a:schemeClr val="accent1"/>
-    </dgm:linClrLst>
-    <dgm:effectClrLst/>
-    <dgm:txLinClrLst/>
-    <dgm:txFillClrLst meth="repeat">
-      <a:schemeClr val="lt1"/>
-    </dgm:txFillClrLst>
-    <dgm:txEffectClrLst/>
-  </dgm:styleLbl>
-  <dgm:styleLbl name="trBgShp">
-    <dgm:fillClrLst meth="repeat">
-      <a:schemeClr val="accent1">
-        <a:tint val="50000"/>
-        <a:alpha val="40000"/>
-      </a:schemeClr>
-    </dgm:fillClrLst>
-    <dgm:linClrLst meth="repeat">
-      <a:schemeClr val="accent1"/>
-    </dgm:linClrLst>
-    <dgm:effectClrLst/>
-    <dgm:txLinClrLst/>
-    <dgm:txFillClrLst meth="repeat">
-      <a:schemeClr val="lt1"/>
-    </dgm:txFillClrLst>
-    <dgm:txEffectClrLst/>
-  </dgm:styleLbl>
-  <dgm:styleLbl name="fgShp">
-    <dgm:fillClrLst meth="repeat">
-      <a:schemeClr val="accent1">
-        <a:tint val="60000"/>
-      </a:schemeClr>
-    </dgm:fillClrLst>
-    <dgm:linClrLst meth="repeat">
-      <a:schemeClr val="lt1"/>
-    </dgm:linClrLst>
-    <dgm:effectClrLst/>
-    <dgm:txLinClrLst/>
-    <dgm:txFillClrLst meth="repeat">
-      <a:schemeClr val="dk1"/>
-    </dgm:txFillClrLst>
-    <dgm:txEffectClrLst/>
-  </dgm:styleLbl>
-  <dgm:styleLbl name="revTx">
-    <dgm:fillClrLst meth="repeat">
-      <a:schemeClr val="lt1">
-        <a:alpha val="0"/>
-      </a:schemeClr>
-    </dgm:fillClrLst>
-    <dgm:linClrLst meth="repeat">
-      <a:schemeClr val="dk1">
-        <a:alpha val="0"/>
-      </a:schemeClr>
-    </dgm:linClrLst>
-    <dgm:effectClrLst/>
-    <dgm:txLinClrLst/>
-    <dgm:txFillClrLst meth="repeat">
-      <a:schemeClr val="tx1"/>
-    </dgm:txFillClrLst>
-    <dgm:txEffectClrLst/>
-  </dgm:styleLbl>
-</dgm:colorsDef>
-</file>
-
-<file path=ppt/diagrams/data1.xml><?xml version="1.0" encoding="utf-8"?>
-<dgm:dataModel xmlns:dgm="http://schemas.openxmlformats.org/drawingml/2006/diagram" xmlns:a="http://schemas.openxmlformats.org/drawingml/2006/main">
-  <dgm:ptLst>
-    <dgm:pt modelId="{6726E050-110D-4658-B496-2252EDD5D109}" type="doc">
-      <dgm:prSet loTypeId="urn:microsoft.com/office/officeart/2018/2/layout/IconVerticalSolidList" loCatId="icon" qsTypeId="urn:microsoft.com/office/officeart/2005/8/quickstyle/simple1" qsCatId="simple" csTypeId="urn:microsoft.com/office/officeart/2005/8/colors/accent1_2" csCatId="accent1" phldr="1"/>
-      <dgm:spPr/>
-      <dgm:t>
-        <a:bodyPr/>
-        <a:lstStyle/>
-        <a:p>
-          <a:endParaRPr lang="en-US"/>
-        </a:p>
-      </dgm:t>
-    </dgm:pt>
-    <dgm:pt modelId="{57923C1A-FF59-4300-9997-9B5EFFCD9BFC}">
-      <dgm:prSet/>
-      <dgm:spPr/>
-      <dgm:t>
-        <a:bodyPr/>
-        <a:lstStyle/>
-        <a:p>
-          <a:pPr>
-            <a:lnSpc>
-              <a:spcPct val="100000"/>
-            </a:lnSpc>
-          </a:pPr>
-          <a:r>
-            <a:rPr lang="en-US"/>
-            <a:t>Introductions</a:t>
-          </a:r>
-        </a:p>
-      </dgm:t>
-    </dgm:pt>
-    <dgm:pt modelId="{2FA4B52F-8D46-4A76-B2B8-6677FB63F86C}" type="parTrans" cxnId="{AA9147CA-D6AF-437C-AE34-BAA5F20A547A}">
-      <dgm:prSet/>
-      <dgm:spPr/>
-      <dgm:t>
-        <a:bodyPr/>
-        <a:lstStyle/>
-        <a:p>
-          <a:endParaRPr lang="en-US"/>
-        </a:p>
-      </dgm:t>
-    </dgm:pt>
-    <dgm:pt modelId="{E1BA9985-B1BF-4BFF-AFF0-048E2215BD88}" type="sibTrans" cxnId="{AA9147CA-D6AF-437C-AE34-BAA5F20A547A}">
-      <dgm:prSet/>
-      <dgm:spPr/>
-      <dgm:t>
-        <a:bodyPr/>
-        <a:lstStyle/>
-        <a:p>
-          <a:endParaRPr lang="en-US"/>
-        </a:p>
-      </dgm:t>
-    </dgm:pt>
-    <dgm:pt modelId="{EA2DB709-2347-445B-9848-85D77F670862}">
-      <dgm:prSet/>
-      <dgm:spPr/>
-      <dgm:t>
-        <a:bodyPr/>
-        <a:lstStyle/>
-        <a:p>
-          <a:pPr>
-            <a:lnSpc>
-              <a:spcPct val="100000"/>
-            </a:lnSpc>
-          </a:pPr>
-          <a:r>
-            <a:rPr lang="en-US"/>
-            <a:t>What to Expect</a:t>
-          </a:r>
-        </a:p>
-      </dgm:t>
-    </dgm:pt>
-    <dgm:pt modelId="{8BF4C137-F227-4C28-95A4-F210521D190E}" type="parTrans" cxnId="{FD6A8E58-6D21-409C-889A-7E66BC4677F7}">
-      <dgm:prSet/>
-      <dgm:spPr/>
-      <dgm:t>
-        <a:bodyPr/>
-        <a:lstStyle/>
-        <a:p>
-          <a:endParaRPr lang="en-US"/>
-        </a:p>
-      </dgm:t>
-    </dgm:pt>
-    <dgm:pt modelId="{A8BA4347-4386-4AA2-8329-B0C65B7CAEDC}" type="sibTrans" cxnId="{FD6A8E58-6D21-409C-889A-7E66BC4677F7}">
-      <dgm:prSet/>
-      <dgm:spPr/>
-      <dgm:t>
-        <a:bodyPr/>
-        <a:lstStyle/>
-        <a:p>
-          <a:endParaRPr lang="en-US"/>
-        </a:p>
-      </dgm:t>
-    </dgm:pt>
-    <dgm:pt modelId="{0A104462-619F-4DC7-BFF1-9C9A22513BB5}">
-      <dgm:prSet/>
-      <dgm:spPr/>
-      <dgm:t>
-        <a:bodyPr/>
-        <a:lstStyle/>
-        <a:p>
-          <a:pPr>
-            <a:lnSpc>
-              <a:spcPct val="100000"/>
-            </a:lnSpc>
-          </a:pPr>
-          <a:r>
-            <a:rPr lang="en-US"/>
-            <a:t>How to Excel in this Course</a:t>
-          </a:r>
-        </a:p>
-      </dgm:t>
-    </dgm:pt>
-    <dgm:pt modelId="{EEE27C43-63A5-4528-AC22-72821129BE47}" type="parTrans" cxnId="{5B9560AB-F1C8-42FF-9B08-3250BBA89DF9}">
-      <dgm:prSet/>
-      <dgm:spPr/>
-      <dgm:t>
-        <a:bodyPr/>
-        <a:lstStyle/>
-        <a:p>
-          <a:endParaRPr lang="en-US"/>
-        </a:p>
-      </dgm:t>
-    </dgm:pt>
-    <dgm:pt modelId="{FE9586A2-A7C4-4FC2-9E55-398D3A44D157}" type="sibTrans" cxnId="{5B9560AB-F1C8-42FF-9B08-3250BBA89DF9}">
-      <dgm:prSet/>
-      <dgm:spPr/>
-      <dgm:t>
-        <a:bodyPr/>
-        <a:lstStyle/>
-        <a:p>
-          <a:endParaRPr lang="en-US"/>
-        </a:p>
-      </dgm:t>
-    </dgm:pt>
-    <dgm:pt modelId="{7FF25906-3454-4A54-877E-EAD1BB173A8D}" type="pres">
-      <dgm:prSet presAssocID="{6726E050-110D-4658-B496-2252EDD5D109}" presName="root" presStyleCnt="0">
-        <dgm:presLayoutVars>
-          <dgm:dir/>
-          <dgm:resizeHandles val="exact"/>
-        </dgm:presLayoutVars>
-      </dgm:prSet>
-      <dgm:spPr/>
-    </dgm:pt>
-    <dgm:pt modelId="{9C9E42D0-6C64-45D7-A725-0E8364597ED8}" type="pres">
-      <dgm:prSet presAssocID="{57923C1A-FF59-4300-9997-9B5EFFCD9BFC}" presName="compNode" presStyleCnt="0"/>
-      <dgm:spPr/>
-    </dgm:pt>
-    <dgm:pt modelId="{94354C5B-BBC5-4AC9-A20D-73E61A8F6231}" type="pres">
-      <dgm:prSet presAssocID="{57923C1A-FF59-4300-9997-9B5EFFCD9BFC}" presName="bgRect" presStyleLbl="bgShp" presStyleIdx="0" presStyleCnt="3"/>
-      <dgm:spPr/>
-    </dgm:pt>
-    <dgm:pt modelId="{5648FDBD-141E-4873-86B4-6BC7A2C6D834}" type="pres">
-      <dgm:prSet presAssocID="{57923C1A-FF59-4300-9997-9B5EFFCD9BFC}" presName="iconRect" presStyleLbl="node1" presStyleIdx="0" presStyleCnt="3"/>
-      <dgm:spPr>
-        <a:blipFill>
-          <a:blip xmlns:r="http://schemas.openxmlformats.org/officeDocument/2006/relationships" r:embed="rId1">
-            <a:extLst>
-              <a:ext uri="{28A0092B-C50C-407E-A947-70E740481C1C}">
-                <a14:useLocalDpi xmlns:a14="http://schemas.microsoft.com/office/drawing/2010/main" val="0"/>
-              </a:ext>
-              <a:ext uri="{96DAC541-7B7A-43D3-8B79-37D633B846F1}">
-                <asvg:svgBlip xmlns:asvg="http://schemas.microsoft.com/office/drawing/2016/SVG/main" r:embed="rId2"/>
-              </a:ext>
-            </a:extLst>
-          </a:blip>
-          <a:stretch>
-            <a:fillRect/>
-          </a:stretch>
-        </a:blipFill>
-      </dgm:spPr>
-      <dgm:extLst>
-        <a:ext uri="{E40237B7-FDA0-4F09-8148-C483321AD2D9}">
-          <dgm14:cNvPr xmlns:dgm14="http://schemas.microsoft.com/office/drawing/2010/diagram" id="0" name="" descr="Handshake"/>
-        </a:ext>
-      </dgm:extLst>
-    </dgm:pt>
-    <dgm:pt modelId="{96682B1E-9176-4BB9-9A25-974EDBFAF284}" type="pres">
-      <dgm:prSet presAssocID="{57923C1A-FF59-4300-9997-9B5EFFCD9BFC}" presName="spaceRect" presStyleCnt="0"/>
-      <dgm:spPr/>
-    </dgm:pt>
-    <dgm:pt modelId="{459361BD-8E9E-4710-BD6B-F0798A448837}" type="pres">
-      <dgm:prSet presAssocID="{57923C1A-FF59-4300-9997-9B5EFFCD9BFC}" presName="parTx" presStyleLbl="revTx" presStyleIdx="0" presStyleCnt="3">
-        <dgm:presLayoutVars>
-          <dgm:chMax val="0"/>
-          <dgm:chPref val="0"/>
-        </dgm:presLayoutVars>
-      </dgm:prSet>
-      <dgm:spPr/>
-    </dgm:pt>
-    <dgm:pt modelId="{B643C6CA-7983-420D-B77A-74B078063629}" type="pres">
-      <dgm:prSet presAssocID="{E1BA9985-B1BF-4BFF-AFF0-048E2215BD88}" presName="sibTrans" presStyleCnt="0"/>
-      <dgm:spPr/>
-    </dgm:pt>
-    <dgm:pt modelId="{4D9ACDDC-669E-4936-B852-F3E2856B6CB4}" type="pres">
-      <dgm:prSet presAssocID="{EA2DB709-2347-445B-9848-85D77F670862}" presName="compNode" presStyleCnt="0"/>
-      <dgm:spPr/>
-    </dgm:pt>
-    <dgm:pt modelId="{83295714-FB3A-4E9A-9889-AA3B82C3770C}" type="pres">
-      <dgm:prSet presAssocID="{EA2DB709-2347-445B-9848-85D77F670862}" presName="bgRect" presStyleLbl="bgShp" presStyleIdx="1" presStyleCnt="3"/>
-      <dgm:spPr/>
-    </dgm:pt>
-    <dgm:pt modelId="{3989ACC5-978D-4FCC-91E8-0FA6CCDB06AB}" type="pres">
-      <dgm:prSet presAssocID="{EA2DB709-2347-445B-9848-85D77F670862}" presName="iconRect" presStyleLbl="node1" presStyleIdx="1" presStyleCnt="3"/>
-      <dgm:spPr>
-        <a:blipFill>
-          <a:blip xmlns:r="http://schemas.openxmlformats.org/officeDocument/2006/relationships" r:embed="rId3">
-            <a:extLst>
-              <a:ext uri="{28A0092B-C50C-407E-A947-70E740481C1C}">
-                <a14:useLocalDpi xmlns:a14="http://schemas.microsoft.com/office/drawing/2010/main" val="0"/>
-              </a:ext>
-              <a:ext uri="{96DAC541-7B7A-43D3-8B79-37D633B846F1}">
-                <asvg:svgBlip xmlns:asvg="http://schemas.microsoft.com/office/drawing/2016/SVG/main" r:embed="rId4"/>
-              </a:ext>
-            </a:extLst>
-          </a:blip>
-          <a:stretch>
-            <a:fillRect/>
-          </a:stretch>
-        </a:blipFill>
-      </dgm:spPr>
-      <dgm:extLst>
-        <a:ext uri="{E40237B7-FDA0-4F09-8148-C483321AD2D9}">
-          <dgm14:cNvPr xmlns:dgm14="http://schemas.microsoft.com/office/drawing/2010/diagram" id="0" name="" descr="Head with Gears"/>
-        </a:ext>
-      </dgm:extLst>
-    </dgm:pt>
-    <dgm:pt modelId="{9B9BA50C-F4D4-4F29-B43E-AAFA582629EA}" type="pres">
-      <dgm:prSet presAssocID="{EA2DB709-2347-445B-9848-85D77F670862}" presName="spaceRect" presStyleCnt="0"/>
-      <dgm:spPr/>
-    </dgm:pt>
-    <dgm:pt modelId="{0A96CB8C-0E81-4823-B442-799062EA9C60}" type="pres">
-      <dgm:prSet presAssocID="{EA2DB709-2347-445B-9848-85D77F670862}" presName="parTx" presStyleLbl="revTx" presStyleIdx="1" presStyleCnt="3">
-        <dgm:presLayoutVars>
-          <dgm:chMax val="0"/>
-          <dgm:chPref val="0"/>
-        </dgm:presLayoutVars>
-      </dgm:prSet>
-      <dgm:spPr/>
-    </dgm:pt>
-    <dgm:pt modelId="{A16FF7F3-924B-4321-A995-D2C6A9DFF16A}" type="pres">
-      <dgm:prSet presAssocID="{A8BA4347-4386-4AA2-8329-B0C65B7CAEDC}" presName="sibTrans" presStyleCnt="0"/>
-      <dgm:spPr/>
-    </dgm:pt>
-    <dgm:pt modelId="{70F6743F-4AF4-4CAC-882C-D1E4188B43FE}" type="pres">
-      <dgm:prSet presAssocID="{0A104462-619F-4DC7-BFF1-9C9A22513BB5}" presName="compNode" presStyleCnt="0"/>
-      <dgm:spPr/>
-    </dgm:pt>
-    <dgm:pt modelId="{17710B87-EA1F-43D3-84CB-7A9900740D92}" type="pres">
-      <dgm:prSet presAssocID="{0A104462-619F-4DC7-BFF1-9C9A22513BB5}" presName="bgRect" presStyleLbl="bgShp" presStyleIdx="2" presStyleCnt="3"/>
-      <dgm:spPr/>
-    </dgm:pt>
-    <dgm:pt modelId="{44734F5C-C79B-402B-B528-1585A94E315F}" type="pres">
-      <dgm:prSet presAssocID="{0A104462-619F-4DC7-BFF1-9C9A22513BB5}" presName="iconRect" presStyleLbl="node1" presStyleIdx="2" presStyleCnt="3"/>
-      <dgm:spPr>
-        <a:blipFill>
-          <a:blip xmlns:r="http://schemas.openxmlformats.org/officeDocument/2006/relationships" r:embed="rId5">
-            <a:extLst>
-              <a:ext uri="{28A0092B-C50C-407E-A947-70E740481C1C}">
-                <a14:useLocalDpi xmlns:a14="http://schemas.microsoft.com/office/drawing/2010/main" val="0"/>
-              </a:ext>
-              <a:ext uri="{96DAC541-7B7A-43D3-8B79-37D633B846F1}">
-                <asvg:svgBlip xmlns:asvg="http://schemas.microsoft.com/office/drawing/2016/SVG/main" r:embed="rId6"/>
-              </a:ext>
-            </a:extLst>
-          </a:blip>
-          <a:stretch>
-            <a:fillRect/>
-          </a:stretch>
-        </a:blipFill>
-      </dgm:spPr>
-      <dgm:extLst>
-        <a:ext uri="{E40237B7-FDA0-4F09-8148-C483321AD2D9}">
-          <dgm14:cNvPr xmlns:dgm14="http://schemas.microsoft.com/office/drawing/2010/diagram" id="0" name="" descr="Bar chart"/>
-        </a:ext>
-      </dgm:extLst>
-    </dgm:pt>
-    <dgm:pt modelId="{4561652D-2B42-4BF3-B36B-0D27B50C33CD}" type="pres">
-      <dgm:prSet presAssocID="{0A104462-619F-4DC7-BFF1-9C9A22513BB5}" presName="spaceRect" presStyleCnt="0"/>
-      <dgm:spPr/>
-    </dgm:pt>
-    <dgm:pt modelId="{E463817E-6898-4C70-BAB2-E3944B75D82E}" type="pres">
-      <dgm:prSet presAssocID="{0A104462-619F-4DC7-BFF1-9C9A22513BB5}" presName="parTx" presStyleLbl="revTx" presStyleIdx="2" presStyleCnt="3">
-        <dgm:presLayoutVars>
-          <dgm:chMax val="0"/>
-          <dgm:chPref val="0"/>
-        </dgm:presLayoutVars>
-      </dgm:prSet>
-      <dgm:spPr/>
-    </dgm:pt>
-  </dgm:ptLst>
-  <dgm:cxnLst>
-    <dgm:cxn modelId="{7715E01D-9CCE-49DF-A6DC-4F79BFBBBECB}" type="presOf" srcId="{EA2DB709-2347-445B-9848-85D77F670862}" destId="{0A96CB8C-0E81-4823-B442-799062EA9C60}" srcOrd="0" destOrd="0" presId="urn:microsoft.com/office/officeart/2018/2/layout/IconVerticalSolidList"/>
-    <dgm:cxn modelId="{F28E252F-8064-4E32-85AA-308AF64BEECA}" type="presOf" srcId="{0A104462-619F-4DC7-BFF1-9C9A22513BB5}" destId="{E463817E-6898-4C70-BAB2-E3944B75D82E}" srcOrd="0" destOrd="0" presId="urn:microsoft.com/office/officeart/2018/2/layout/IconVerticalSolidList"/>
-    <dgm:cxn modelId="{55117766-26CF-4462-A69A-5BBED9A9E3E3}" type="presOf" srcId="{57923C1A-FF59-4300-9997-9B5EFFCD9BFC}" destId="{459361BD-8E9E-4710-BD6B-F0798A448837}" srcOrd="0" destOrd="0" presId="urn:microsoft.com/office/officeart/2018/2/layout/IconVerticalSolidList"/>
-    <dgm:cxn modelId="{23CBC84E-78E8-4C62-AC52-7CAF1690DFF0}" type="presOf" srcId="{6726E050-110D-4658-B496-2252EDD5D109}" destId="{7FF25906-3454-4A54-877E-EAD1BB173A8D}" srcOrd="0" destOrd="0" presId="urn:microsoft.com/office/officeart/2018/2/layout/IconVerticalSolidList"/>
-    <dgm:cxn modelId="{FD6A8E58-6D21-409C-889A-7E66BC4677F7}" srcId="{6726E050-110D-4658-B496-2252EDD5D109}" destId="{EA2DB709-2347-445B-9848-85D77F670862}" srcOrd="1" destOrd="0" parTransId="{8BF4C137-F227-4C28-95A4-F210521D190E}" sibTransId="{A8BA4347-4386-4AA2-8329-B0C65B7CAEDC}"/>
-    <dgm:cxn modelId="{5B9560AB-F1C8-42FF-9B08-3250BBA89DF9}" srcId="{6726E050-110D-4658-B496-2252EDD5D109}" destId="{0A104462-619F-4DC7-BFF1-9C9A22513BB5}" srcOrd="2" destOrd="0" parTransId="{EEE27C43-63A5-4528-AC22-72821129BE47}" sibTransId="{FE9586A2-A7C4-4FC2-9E55-398D3A44D157}"/>
-    <dgm:cxn modelId="{AA9147CA-D6AF-437C-AE34-BAA5F20A547A}" srcId="{6726E050-110D-4658-B496-2252EDD5D109}" destId="{57923C1A-FF59-4300-9997-9B5EFFCD9BFC}" srcOrd="0" destOrd="0" parTransId="{2FA4B52F-8D46-4A76-B2B8-6677FB63F86C}" sibTransId="{E1BA9985-B1BF-4BFF-AFF0-048E2215BD88}"/>
-    <dgm:cxn modelId="{98DBA39D-D11D-4C9F-A95B-427B990306F5}" type="presParOf" srcId="{7FF25906-3454-4A54-877E-EAD1BB173A8D}" destId="{9C9E42D0-6C64-45D7-A725-0E8364597ED8}" srcOrd="0" destOrd="0" presId="urn:microsoft.com/office/officeart/2018/2/layout/IconVerticalSolidList"/>
-    <dgm:cxn modelId="{16E5D0FC-46E9-4BC7-9838-252A52A73572}" type="presParOf" srcId="{9C9E42D0-6C64-45D7-A725-0E8364597ED8}" destId="{94354C5B-BBC5-4AC9-A20D-73E61A8F6231}" srcOrd="0" destOrd="0" presId="urn:microsoft.com/office/officeart/2018/2/layout/IconVerticalSolidList"/>
-    <dgm:cxn modelId="{7B687022-6EB4-476C-9D3A-222E982B5070}" type="presParOf" srcId="{9C9E42D0-6C64-45D7-A725-0E8364597ED8}" destId="{5648FDBD-141E-4873-86B4-6BC7A2C6D834}" srcOrd="1" destOrd="0" presId="urn:microsoft.com/office/officeart/2018/2/layout/IconVerticalSolidList"/>
-    <dgm:cxn modelId="{9906BB48-8DBB-462A-BBA5-7DE32B96F939}" type="presParOf" srcId="{9C9E42D0-6C64-45D7-A725-0E8364597ED8}" destId="{96682B1E-9176-4BB9-9A25-974EDBFAF284}" srcOrd="2" destOrd="0" presId="urn:microsoft.com/office/officeart/2018/2/layout/IconVerticalSolidList"/>
-    <dgm:cxn modelId="{2A54D2DC-326A-4621-8986-88CB1DACAC89}" type="presParOf" srcId="{9C9E42D0-6C64-45D7-A725-0E8364597ED8}" destId="{459361BD-8E9E-4710-BD6B-F0798A448837}" srcOrd="3" destOrd="0" presId="urn:microsoft.com/office/officeart/2018/2/layout/IconVerticalSolidList"/>
-    <dgm:cxn modelId="{E67105E2-0E48-408F-BADD-798B4F244396}" type="presParOf" srcId="{7FF25906-3454-4A54-877E-EAD1BB173A8D}" destId="{B643C6CA-7983-420D-B77A-74B078063629}" srcOrd="1" destOrd="0" presId="urn:microsoft.com/office/officeart/2018/2/layout/IconVerticalSolidList"/>
-    <dgm:cxn modelId="{00CE44EC-858B-4ED5-A58F-A254C98F6171}" type="presParOf" srcId="{7FF25906-3454-4A54-877E-EAD1BB173A8D}" destId="{4D9ACDDC-669E-4936-B852-F3E2856B6CB4}" srcOrd="2" destOrd="0" presId="urn:microsoft.com/office/officeart/2018/2/layout/IconVerticalSolidList"/>
-    <dgm:cxn modelId="{9D4A3467-8197-4EEF-BF82-A4F7F9249F1F}" type="presParOf" srcId="{4D9ACDDC-669E-4936-B852-F3E2856B6CB4}" destId="{83295714-FB3A-4E9A-9889-AA3B82C3770C}" srcOrd="0" destOrd="0" presId="urn:microsoft.com/office/officeart/2018/2/layout/IconVerticalSolidList"/>
-    <dgm:cxn modelId="{413F48F5-D121-405F-9CF7-89FF92F68AC9}" type="presParOf" srcId="{4D9ACDDC-669E-4936-B852-F3E2856B6CB4}" destId="{3989ACC5-978D-4FCC-91E8-0FA6CCDB06AB}" srcOrd="1" destOrd="0" presId="urn:microsoft.com/office/officeart/2018/2/layout/IconVerticalSolidList"/>
-    <dgm:cxn modelId="{30F3F9E9-6E47-427A-8F49-9F2F70D57FA9}" type="presParOf" srcId="{4D9ACDDC-669E-4936-B852-F3E2856B6CB4}" destId="{9B9BA50C-F4D4-4F29-B43E-AAFA582629EA}" srcOrd="2" destOrd="0" presId="urn:microsoft.com/office/officeart/2018/2/layout/IconVerticalSolidList"/>
-    <dgm:cxn modelId="{0ACF4DF1-09FF-4097-A672-E5F1DF866B1F}" type="presParOf" srcId="{4D9ACDDC-669E-4936-B852-F3E2856B6CB4}" destId="{0A96CB8C-0E81-4823-B442-799062EA9C60}" srcOrd="3" destOrd="0" presId="urn:microsoft.com/office/officeart/2018/2/layout/IconVerticalSolidList"/>
-    <dgm:cxn modelId="{76A2D53A-5193-4B8A-A1AF-8BE66BF27769}" type="presParOf" srcId="{7FF25906-3454-4A54-877E-EAD1BB173A8D}" destId="{A16FF7F3-924B-4321-A995-D2C6A9DFF16A}" srcOrd="3" destOrd="0" presId="urn:microsoft.com/office/officeart/2018/2/layout/IconVerticalSolidList"/>
-    <dgm:cxn modelId="{42E42AB0-482A-4779-80E2-99ABCE461288}" type="presParOf" srcId="{7FF25906-3454-4A54-877E-EAD1BB173A8D}" destId="{70F6743F-4AF4-4CAC-882C-D1E4188B43FE}" srcOrd="4" destOrd="0" presId="urn:microsoft.com/office/officeart/2018/2/layout/IconVerticalSolidList"/>
-    <dgm:cxn modelId="{38A2846F-0468-4CDA-90BA-02FB0D680827}" type="presParOf" srcId="{70F6743F-4AF4-4CAC-882C-D1E4188B43FE}" destId="{17710B87-EA1F-43D3-84CB-7A9900740D92}" srcOrd="0" destOrd="0" presId="urn:microsoft.com/office/officeart/2018/2/layout/IconVerticalSolidList"/>
-    <dgm:cxn modelId="{55582761-95E9-4759-9760-E7481E438D90}" type="presParOf" srcId="{70F6743F-4AF4-4CAC-882C-D1E4188B43FE}" destId="{44734F5C-C79B-402B-B528-1585A94E315F}" srcOrd="1" destOrd="0" presId="urn:microsoft.com/office/officeart/2018/2/layout/IconVerticalSolidList"/>
-    <dgm:cxn modelId="{9B366F6A-13DE-449B-B1FE-FF7EA60F3ECE}" type="presParOf" srcId="{70F6743F-4AF4-4CAC-882C-D1E4188B43FE}" destId="{4561652D-2B42-4BF3-B36B-0D27B50C33CD}" srcOrd="2" destOrd="0" presId="urn:microsoft.com/office/officeart/2018/2/layout/IconVerticalSolidList"/>
-    <dgm:cxn modelId="{50263C64-0797-4CBA-A298-978F41577B92}" type="presParOf" srcId="{70F6743F-4AF4-4CAC-882C-D1E4188B43FE}" destId="{E463817E-6898-4C70-BAB2-E3944B75D82E}" srcOrd="3" destOrd="0" presId="urn:microsoft.com/office/officeart/2018/2/layout/IconVerticalSolidList"/>
-  </dgm:cxnLst>
-  <dgm:bg/>
-  <dgm:whole/>
-  <dgm:extLst>
-    <a:ext uri="http://schemas.microsoft.com/office/drawing/2008/diagram">
-      <dsp:dataModelExt xmlns:dsp="http://schemas.microsoft.com/office/drawing/2008/diagram" relId="rId6" minVer="http://schemas.openxmlformats.org/drawingml/2006/diagram"/>
-    </a:ext>
-  </dgm:extLst>
-</dgm:dataModel>
-</file>
-
-<file path=ppt/diagrams/drawing1.xml><?xml version="1.0" encoding="utf-8"?>
-<dsp:drawing xmlns:dgm="http://schemas.openxmlformats.org/drawingml/2006/diagram" xmlns:dsp="http://schemas.microsoft.com/office/drawing/2008/diagram" xmlns:a="http://schemas.openxmlformats.org/drawingml/2006/main">
-  <dsp:spTree>
-    <dsp:nvGrpSpPr>
-      <dsp:cNvPr id="0" name=""/>
-      <dsp:cNvGrpSpPr/>
-    </dsp:nvGrpSpPr>
-    <dsp:grpSpPr/>
-    <dsp:sp modelId="{94354C5B-BBC5-4AC9-A20D-73E61A8F6231}">
-      <dsp:nvSpPr>
-        <dsp:cNvPr id="0" name=""/>
-        <dsp:cNvSpPr/>
-      </dsp:nvSpPr>
-      <dsp:spPr>
-        <a:xfrm>
-          <a:off x="0" y="449"/>
-          <a:ext cx="11029615" cy="1050687"/>
-        </a:xfrm>
-        <a:prstGeom prst="roundRect">
-          <a:avLst>
-            <a:gd name="adj" fmla="val 10000"/>
-          </a:avLst>
-        </a:prstGeom>
-        <a:solidFill>
-          <a:schemeClr val="accent1">
-            <a:tint val="40000"/>
-            <a:hueOff val="0"/>
-            <a:satOff val="0"/>
-            <a:lumOff val="0"/>
-            <a:alphaOff val="0"/>
-          </a:schemeClr>
-        </a:solidFill>
-        <a:ln>
-          <a:noFill/>
-        </a:ln>
-        <a:effectLst/>
-      </dsp:spPr>
-      <dsp:style>
-        <a:lnRef idx="0">
-          <a:scrgbClr r="0" g="0" b="0"/>
-        </a:lnRef>
-        <a:fillRef idx="1">
-          <a:scrgbClr r="0" g="0" b="0"/>
-        </a:fillRef>
-        <a:effectRef idx="0">
-          <a:scrgbClr r="0" g="0" b="0"/>
-        </a:effectRef>
-        <a:fontRef idx="minor"/>
-      </dsp:style>
-    </dsp:sp>
-    <dsp:sp modelId="{5648FDBD-141E-4873-86B4-6BC7A2C6D834}">
-      <dsp:nvSpPr>
-        <dsp:cNvPr id="0" name=""/>
-        <dsp:cNvSpPr/>
-      </dsp:nvSpPr>
-      <dsp:spPr>
-        <a:xfrm>
-          <a:off x="317832" y="236853"/>
-          <a:ext cx="577877" cy="577877"/>
-        </a:xfrm>
-        <a:prstGeom prst="rect">
-          <a:avLst/>
-        </a:prstGeom>
-        <a:blipFill>
-          <a:blip xmlns:r="http://schemas.openxmlformats.org/officeDocument/2006/relationships" r:embed="rId1">
-            <a:extLst>
-              <a:ext uri="{28A0092B-C50C-407E-A947-70E740481C1C}">
-                <a14:useLocalDpi xmlns:a14="http://schemas.microsoft.com/office/drawing/2010/main" val="0"/>
-              </a:ext>
-              <a:ext uri="{96DAC541-7B7A-43D3-8B79-37D633B846F1}">
-                <asvg:svgBlip xmlns:asvg="http://schemas.microsoft.com/office/drawing/2016/SVG/main" r:embed="rId2"/>
-              </a:ext>
-            </a:extLst>
-          </a:blip>
-          <a:stretch>
-            <a:fillRect/>
-          </a:stretch>
-        </a:blipFill>
-        <a:ln w="22225" cap="rnd" cmpd="sng" algn="ctr">
-          <a:solidFill>
-            <a:schemeClr val="lt1">
-              <a:hueOff val="0"/>
-              <a:satOff val="0"/>
-              <a:lumOff val="0"/>
-              <a:alphaOff val="0"/>
-            </a:schemeClr>
-          </a:solidFill>
-          <a:prstDash val="solid"/>
-        </a:ln>
-        <a:effectLst/>
-      </dsp:spPr>
-      <dsp:style>
-        <a:lnRef idx="2">
-          <a:scrgbClr r="0" g="0" b="0"/>
-        </a:lnRef>
-        <a:fillRef idx="1">
-          <a:scrgbClr r="0" g="0" b="0"/>
-        </a:fillRef>
-        <a:effectRef idx="0">
-          <a:scrgbClr r="0" g="0" b="0"/>
-        </a:effectRef>
-        <a:fontRef idx="minor">
-          <a:schemeClr val="lt1"/>
-        </a:fontRef>
-      </dsp:style>
-    </dsp:sp>
-    <dsp:sp modelId="{459361BD-8E9E-4710-BD6B-F0798A448837}">
-      <dsp:nvSpPr>
-        <dsp:cNvPr id="0" name=""/>
-        <dsp:cNvSpPr/>
-      </dsp:nvSpPr>
-      <dsp:spPr>
-        <a:xfrm>
-          <a:off x="1213543" y="449"/>
-          <a:ext cx="9816071" cy="1050687"/>
-        </a:xfrm>
-        <a:prstGeom prst="rect">
-          <a:avLst/>
-        </a:prstGeom>
-        <a:noFill/>
-        <a:ln>
-          <a:noFill/>
-        </a:ln>
-        <a:effectLst/>
-      </dsp:spPr>
-      <dsp:style>
-        <a:lnRef idx="0">
-          <a:scrgbClr r="0" g="0" b="0"/>
-        </a:lnRef>
-        <a:fillRef idx="0">
-          <a:scrgbClr r="0" g="0" b="0"/>
-        </a:fillRef>
-        <a:effectRef idx="0">
-          <a:scrgbClr r="0" g="0" b="0"/>
-        </a:effectRef>
-        <a:fontRef idx="minor"/>
-      </dsp:style>
-      <dsp:txBody>
-        <a:bodyPr spcFirstLastPara="0" vert="horz" wrap="square" lIns="111198" tIns="111198" rIns="111198" bIns="111198" numCol="1" spcCol="1270" anchor="ctr" anchorCtr="0">
-          <a:noAutofit/>
-        </a:bodyPr>
-        <a:lstStyle/>
-        <a:p>
-          <a:pPr marL="0" lvl="0" indent="0" algn="l" defTabSz="1111250">
-            <a:lnSpc>
-              <a:spcPct val="100000"/>
-            </a:lnSpc>
-            <a:spcBef>
-              <a:spcPct val="0"/>
-            </a:spcBef>
-            <a:spcAft>
-              <a:spcPct val="35000"/>
-            </a:spcAft>
-            <a:buNone/>
-          </a:pPr>
-          <a:r>
-            <a:rPr lang="en-US" sz="2500" kern="1200"/>
-            <a:t>Introductions</a:t>
-          </a:r>
-        </a:p>
-      </dsp:txBody>
-      <dsp:txXfrm>
-        <a:off x="1213543" y="449"/>
-        <a:ext cx="9816071" cy="1050687"/>
-      </dsp:txXfrm>
-    </dsp:sp>
-    <dsp:sp modelId="{83295714-FB3A-4E9A-9889-AA3B82C3770C}">
-      <dsp:nvSpPr>
-        <dsp:cNvPr id="0" name=""/>
-        <dsp:cNvSpPr/>
-      </dsp:nvSpPr>
-      <dsp:spPr>
-        <a:xfrm>
-          <a:off x="0" y="1313807"/>
-          <a:ext cx="11029615" cy="1050687"/>
-        </a:xfrm>
-        <a:prstGeom prst="roundRect">
-          <a:avLst>
-            <a:gd name="adj" fmla="val 10000"/>
-          </a:avLst>
-        </a:prstGeom>
-        <a:solidFill>
-          <a:schemeClr val="accent1">
-            <a:tint val="40000"/>
-            <a:hueOff val="0"/>
-            <a:satOff val="0"/>
-            <a:lumOff val="0"/>
-            <a:alphaOff val="0"/>
-          </a:schemeClr>
-        </a:solidFill>
-        <a:ln>
-          <a:noFill/>
-        </a:ln>
-        <a:effectLst/>
-      </dsp:spPr>
-      <dsp:style>
-        <a:lnRef idx="0">
-          <a:scrgbClr r="0" g="0" b="0"/>
-        </a:lnRef>
-        <a:fillRef idx="1">
-          <a:scrgbClr r="0" g="0" b="0"/>
-        </a:fillRef>
-        <a:effectRef idx="0">
-          <a:scrgbClr r="0" g="0" b="0"/>
-        </a:effectRef>
-        <a:fontRef idx="minor"/>
-      </dsp:style>
-    </dsp:sp>
-    <dsp:sp modelId="{3989ACC5-978D-4FCC-91E8-0FA6CCDB06AB}">
-      <dsp:nvSpPr>
-        <dsp:cNvPr id="0" name=""/>
-        <dsp:cNvSpPr/>
-      </dsp:nvSpPr>
-      <dsp:spPr>
-        <a:xfrm>
-          <a:off x="317832" y="1550212"/>
-          <a:ext cx="577877" cy="577877"/>
-        </a:xfrm>
-        <a:prstGeom prst="rect">
-          <a:avLst/>
-        </a:prstGeom>
-        <a:blipFill>
-          <a:blip xmlns:r="http://schemas.openxmlformats.org/officeDocument/2006/relationships" r:embed="rId3">
-            <a:extLst>
-              <a:ext uri="{28A0092B-C50C-407E-A947-70E740481C1C}">
-                <a14:useLocalDpi xmlns:a14="http://schemas.microsoft.com/office/drawing/2010/main" val="0"/>
-              </a:ext>
-              <a:ext uri="{96DAC541-7B7A-43D3-8B79-37D633B846F1}">
-                <asvg:svgBlip xmlns:asvg="http://schemas.microsoft.com/office/drawing/2016/SVG/main" r:embed="rId4"/>
-              </a:ext>
-            </a:extLst>
-          </a:blip>
-          <a:stretch>
-            <a:fillRect/>
-          </a:stretch>
-        </a:blipFill>
-        <a:ln w="22225" cap="rnd" cmpd="sng" algn="ctr">
-          <a:solidFill>
-            <a:schemeClr val="lt1">
-              <a:hueOff val="0"/>
-              <a:satOff val="0"/>
-              <a:lumOff val="0"/>
-              <a:alphaOff val="0"/>
-            </a:schemeClr>
-          </a:solidFill>
-          <a:prstDash val="solid"/>
-        </a:ln>
-        <a:effectLst/>
-      </dsp:spPr>
-      <dsp:style>
-        <a:lnRef idx="2">
-          <a:scrgbClr r="0" g="0" b="0"/>
-        </a:lnRef>
-        <a:fillRef idx="1">
-          <a:scrgbClr r="0" g="0" b="0"/>
-        </a:fillRef>
-        <a:effectRef idx="0">
-          <a:scrgbClr r="0" g="0" b="0"/>
-        </a:effectRef>
-        <a:fontRef idx="minor">
-          <a:schemeClr val="lt1"/>
-        </a:fontRef>
-      </dsp:style>
-    </dsp:sp>
-    <dsp:sp modelId="{0A96CB8C-0E81-4823-B442-799062EA9C60}">
-      <dsp:nvSpPr>
-        <dsp:cNvPr id="0" name=""/>
-        <dsp:cNvSpPr/>
-      </dsp:nvSpPr>
-      <dsp:spPr>
-        <a:xfrm>
-          <a:off x="1213543" y="1313807"/>
-          <a:ext cx="9816071" cy="1050687"/>
-        </a:xfrm>
-        <a:prstGeom prst="rect">
-          <a:avLst/>
-        </a:prstGeom>
-        <a:noFill/>
-        <a:ln>
-          <a:noFill/>
-        </a:ln>
-        <a:effectLst/>
-      </dsp:spPr>
-      <dsp:style>
-        <a:lnRef idx="0">
-          <a:scrgbClr r="0" g="0" b="0"/>
-        </a:lnRef>
-        <a:fillRef idx="0">
-          <a:scrgbClr r="0" g="0" b="0"/>
-        </a:fillRef>
-        <a:effectRef idx="0">
-          <a:scrgbClr r="0" g="0" b="0"/>
-        </a:effectRef>
-        <a:fontRef idx="minor"/>
-      </dsp:style>
-      <dsp:txBody>
-        <a:bodyPr spcFirstLastPara="0" vert="horz" wrap="square" lIns="111198" tIns="111198" rIns="111198" bIns="111198" numCol="1" spcCol="1270" anchor="ctr" anchorCtr="0">
-          <a:noAutofit/>
-        </a:bodyPr>
-        <a:lstStyle/>
-        <a:p>
-          <a:pPr marL="0" lvl="0" indent="0" algn="l" defTabSz="1111250">
-            <a:lnSpc>
-              <a:spcPct val="100000"/>
-            </a:lnSpc>
-            <a:spcBef>
-              <a:spcPct val="0"/>
-            </a:spcBef>
-            <a:spcAft>
-              <a:spcPct val="35000"/>
-            </a:spcAft>
-            <a:buNone/>
-          </a:pPr>
-          <a:r>
-            <a:rPr lang="en-US" sz="2500" kern="1200"/>
-            <a:t>What to Expect</a:t>
-          </a:r>
-        </a:p>
-      </dsp:txBody>
-      <dsp:txXfrm>
-        <a:off x="1213543" y="1313807"/>
-        <a:ext cx="9816071" cy="1050687"/>
-      </dsp:txXfrm>
-    </dsp:sp>
-    <dsp:sp modelId="{17710B87-EA1F-43D3-84CB-7A9900740D92}">
-      <dsp:nvSpPr>
-        <dsp:cNvPr id="0" name=""/>
-        <dsp:cNvSpPr/>
-      </dsp:nvSpPr>
-      <dsp:spPr>
-        <a:xfrm>
-          <a:off x="0" y="2627166"/>
-          <a:ext cx="11029615" cy="1050687"/>
-        </a:xfrm>
-        <a:prstGeom prst="roundRect">
-          <a:avLst>
-            <a:gd name="adj" fmla="val 10000"/>
-          </a:avLst>
-        </a:prstGeom>
-        <a:solidFill>
-          <a:schemeClr val="accent1">
-            <a:tint val="40000"/>
-            <a:hueOff val="0"/>
-            <a:satOff val="0"/>
-            <a:lumOff val="0"/>
-            <a:alphaOff val="0"/>
-          </a:schemeClr>
-        </a:solidFill>
-        <a:ln>
-          <a:noFill/>
-        </a:ln>
-        <a:effectLst/>
-      </dsp:spPr>
-      <dsp:style>
-        <a:lnRef idx="0">
-          <a:scrgbClr r="0" g="0" b="0"/>
-        </a:lnRef>
-        <a:fillRef idx="1">
-          <a:scrgbClr r="0" g="0" b="0"/>
-        </a:fillRef>
-        <a:effectRef idx="0">
-          <a:scrgbClr r="0" g="0" b="0"/>
-        </a:effectRef>
-        <a:fontRef idx="minor"/>
-      </dsp:style>
-    </dsp:sp>
-    <dsp:sp modelId="{44734F5C-C79B-402B-B528-1585A94E315F}">
-      <dsp:nvSpPr>
-        <dsp:cNvPr id="0" name=""/>
-        <dsp:cNvSpPr/>
-      </dsp:nvSpPr>
-      <dsp:spPr>
-        <a:xfrm>
-          <a:off x="317832" y="2863571"/>
-          <a:ext cx="577877" cy="577877"/>
-        </a:xfrm>
-        <a:prstGeom prst="rect">
-          <a:avLst/>
-        </a:prstGeom>
-        <a:blipFill>
-          <a:blip xmlns:r="http://schemas.openxmlformats.org/officeDocument/2006/relationships" r:embed="rId5">
-            <a:extLst>
-              <a:ext uri="{28A0092B-C50C-407E-A947-70E740481C1C}">
-                <a14:useLocalDpi xmlns:a14="http://schemas.microsoft.com/office/drawing/2010/main" val="0"/>
-              </a:ext>
-              <a:ext uri="{96DAC541-7B7A-43D3-8B79-37D633B846F1}">
-                <asvg:svgBlip xmlns:asvg="http://schemas.microsoft.com/office/drawing/2016/SVG/main" r:embed="rId6"/>
-              </a:ext>
-            </a:extLst>
-          </a:blip>
-          <a:stretch>
-            <a:fillRect/>
-          </a:stretch>
-        </a:blipFill>
-        <a:ln w="22225" cap="rnd" cmpd="sng" algn="ctr">
-          <a:solidFill>
-            <a:schemeClr val="lt1">
-              <a:hueOff val="0"/>
-              <a:satOff val="0"/>
-              <a:lumOff val="0"/>
-              <a:alphaOff val="0"/>
-            </a:schemeClr>
-          </a:solidFill>
-          <a:prstDash val="solid"/>
-        </a:ln>
-        <a:effectLst/>
-      </dsp:spPr>
-      <dsp:style>
-        <a:lnRef idx="2">
-          <a:scrgbClr r="0" g="0" b="0"/>
-        </a:lnRef>
-        <a:fillRef idx="1">
-          <a:scrgbClr r="0" g="0" b="0"/>
-        </a:fillRef>
-        <a:effectRef idx="0">
-          <a:scrgbClr r="0" g="0" b="0"/>
-        </a:effectRef>
-        <a:fontRef idx="minor">
-          <a:schemeClr val="lt1"/>
-        </a:fontRef>
-      </dsp:style>
-    </dsp:sp>
-    <dsp:sp modelId="{E463817E-6898-4C70-BAB2-E3944B75D82E}">
-      <dsp:nvSpPr>
-        <dsp:cNvPr id="0" name=""/>
-        <dsp:cNvSpPr/>
-      </dsp:nvSpPr>
-      <dsp:spPr>
-        <a:xfrm>
-          <a:off x="1213543" y="2627166"/>
-          <a:ext cx="9816071" cy="1050687"/>
-        </a:xfrm>
-        <a:prstGeom prst="rect">
-          <a:avLst/>
-        </a:prstGeom>
-        <a:noFill/>
-        <a:ln>
-          <a:noFill/>
-        </a:ln>
-        <a:effectLst/>
-      </dsp:spPr>
-      <dsp:style>
-        <a:lnRef idx="0">
-          <a:scrgbClr r="0" g="0" b="0"/>
-        </a:lnRef>
-        <a:fillRef idx="0">
-          <a:scrgbClr r="0" g="0" b="0"/>
-        </a:fillRef>
-        <a:effectRef idx="0">
-          <a:scrgbClr r="0" g="0" b="0"/>
-        </a:effectRef>
-        <a:fontRef idx="minor"/>
-      </dsp:style>
-      <dsp:txBody>
-        <a:bodyPr spcFirstLastPara="0" vert="horz" wrap="square" lIns="111198" tIns="111198" rIns="111198" bIns="111198" numCol="1" spcCol="1270" anchor="ctr" anchorCtr="0">
-          <a:noAutofit/>
-        </a:bodyPr>
-        <a:lstStyle/>
-        <a:p>
-          <a:pPr marL="0" lvl="0" indent="0" algn="l" defTabSz="1111250">
-            <a:lnSpc>
-              <a:spcPct val="100000"/>
-            </a:lnSpc>
-            <a:spcBef>
-              <a:spcPct val="0"/>
-            </a:spcBef>
-            <a:spcAft>
-              <a:spcPct val="35000"/>
-            </a:spcAft>
-            <a:buNone/>
-          </a:pPr>
-          <a:r>
-            <a:rPr lang="en-US" sz="2500" kern="1200"/>
-            <a:t>How to Excel in this Course</a:t>
-          </a:r>
-        </a:p>
-      </dsp:txBody>
-      <dsp:txXfrm>
-        <a:off x="1213543" y="2627166"/>
-        <a:ext cx="9816071" cy="1050687"/>
-      </dsp:txXfrm>
-    </dsp:sp>
-  </dsp:spTree>
-</dsp:drawing>
-</file>
-
-<file path=ppt/diagrams/layout1.xml><?xml version="1.0" encoding="utf-8"?>
-<dgm:layoutDef xmlns:dgm="http://schemas.openxmlformats.org/drawingml/2006/diagram" xmlns:a="http://schemas.openxmlformats.org/drawingml/2006/main" uniqueId="urn:microsoft.com/office/officeart/2018/2/layout/IconVerticalSolidList">
-  <dgm:title val="Icon Vertical Solid List"/>
-  <dgm:desc val="Use to show a series of visuals from top to bottom with Level 1 or Level 1 and Level 2 text grouped in a shape. Works best with icons or small pictures with lengthier descriptions."/>
-  <dgm:catLst>
-    <dgm:cat type="icon" pri="500"/>
-  </dgm:catLst>
-  <dgm:sampData useDef="1">
-    <dgm:dataModel>
-      <dgm:ptLst/>
-      <dgm:bg/>
-      <dgm:whole/>
-    </dgm:dataModel>
-  </dgm:sampData>
-  <dgm:styleData useDef="1">
-    <dgm:dataModel>
-      <dgm:ptLst/>
-      <dgm:bg/>
-      <dgm:whole/>
-    </dgm:dataModel>
-  </dgm:styleData>
-  <dgm:clrData useDef="1">
-    <dgm:dataModel>
-      <dgm:ptLst/>
-      <dgm:bg/>
-      <dgm:whole/>
-    </dgm:dataModel>
-  </dgm:clrData>
-  <dgm:layoutNode name="root">
-    <dgm:varLst>
-      <dgm:dir/>
-      <dgm:resizeHandles val="exact"/>
-    </dgm:varLst>
-    <dgm:choose name="Name0">
-      <dgm:if name="Name1" axis="self" func="var" arg="dir" op="equ" val="norm">
-        <dgm:alg type="lin">
-          <dgm:param type="linDir" val="fromT"/>
-          <dgm:param type="nodeHorzAlign" val="l"/>
-        </dgm:alg>
-      </dgm:if>
-      <dgm:else name="Name2">
-        <dgm:alg type="lin">
-          <dgm:param type="linDir" val="fromT"/>
-          <dgm:param type="nodeHorzAlign" val="r"/>
-        </dgm:alg>
-      </dgm:else>
-    </dgm:choose>
-    <dgm:shape xmlns:r="http://schemas.openxmlformats.org/officeDocument/2006/relationships" r:blip="">
-      <dgm:adjLst/>
-    </dgm:shape>
-    <dgm:presOf/>
-    <dgm:choose name="Name3">
-      <dgm:if name="Name4" axis="ch" ptType="node" func="cnt" op="lte" val="3">
-        <dgm:constrLst>
-          <dgm:constr type="h" for="ch" forName="compNode" refType="h" fact="0.3"/>
-          <dgm:constr type="w" for="ch" forName="compNode" refType="w"/>
-          <dgm:constr type="h" for="ch" forName="sibTrans" refType="h" refFor="ch" refForName="compNode" fact="0.25"/>
-          <dgm:constr type="primFontSz" for="des" forName="parTx" val="25"/>
-          <dgm:constr type="primFontSz" for="des" forName="desTx" refType="primFontSz" refFor="des" refForName="parTx" op="lte" fact="0.75"/>
-          <dgm:constr type="h" for="des" forName="compNode" op="equ"/>
-          <dgm:constr type="h" for="des" forName="bgRect" op="equ"/>
-          <dgm:constr type="h" for="des" forName="iconRect" op="equ"/>
-          <dgm:constr type="w" for="des" forName="iconRect" op="equ"/>
-          <dgm:constr type="h" for="des" forName="spaceRect" op="equ"/>
-          <dgm:constr type="h" for="des" forName="parTx" op="equ"/>
-          <dgm:constr type="h" for="des" forName="desTx" op="equ"/>
-        </dgm:constrLst>
-      </dgm:if>
-      <dgm:if name="Name5" axis="ch" ptType="node" func="cnt" op="lte" val="4">
-        <dgm:constrLst>
-          <dgm:constr type="h" for="ch" forName="compNode" refType="h" fact="0.3"/>
-          <dgm:constr type="w" for="ch" forName="compNode" refType="w"/>
-          <dgm:constr type="h" for="ch" forName="sibTrans" refType="h" refFor="ch" refForName="compNode" fact="0.25"/>
-          <dgm:constr type="primFontSz" for="des" forName="parTx" val="22"/>
-          <dgm:constr type="primFontSz" for="des" forName="desTx" refType="primFontSz" refFor="des" refForName="parTx" op="lte" fact="0.75"/>
-          <dgm:constr type="h" for="des" forName="compNode" op="equ"/>
-          <dgm:constr type="h" for="des" forName="bgRect" op="equ"/>
-          <dgm:constr type="h" for="des" forName="iconRect" op="equ"/>
-          <dgm:constr type="w" for="des" forName="iconRect" op="equ"/>
-          <dgm:constr type="h" for="des" forName="spaceRect" op="equ"/>
-          <dgm:constr type="h" for="des" forName="parTx" op="equ"/>
-          <dgm:constr type="h" for="des" forName="desTx" op="equ"/>
-        </dgm:constrLst>
-      </dgm:if>
-      <dgm:if name="Name6" axis="ch" ptType="node" func="cnt" op="lte" val="6">
-        <dgm:constrLst>
-          <dgm:constr type="h" for="ch" forName="compNode" refType="h" fact="0.3"/>
-          <dgm:constr type="w" for="ch" forName="compNode" refType="w"/>
-          <dgm:constr type="h" for="ch" forName="sibTrans" refType="h" refFor="ch" refForName="compNode" fact="0.25"/>
-          <dgm:constr type="primFontSz" for="des" forName="parTx" val="19"/>
-          <dgm:constr type="primFontSz" for="des" forName="desTx" refType="primFontSz" refFor="des" refForName="parTx" op="lte" fact="0.75"/>
-          <dgm:constr type="h" for="des" forName="compNode" op="equ"/>
-          <dgm:constr type="h" for="des" forName="bgRect" op="equ"/>
-          <dgm:constr type="h" for="des" forName="iconRect" op="equ"/>
-          <dgm:constr type="w" for="des" forName="iconRect" op="equ"/>
-          <dgm:constr type="h" for="des" forName="spaceRect" op="equ"/>
-          <dgm:constr type="h" for="des" forName="parTx" op="equ"/>
-          <dgm:constr type="h" for="des" forName="desTx" op="equ"/>
-        </dgm:constrLst>
-      </dgm:if>
-      <dgm:else name="Name7">
-        <dgm:constrLst>
-          <dgm:constr type="h" for="ch" forName="compNode" refType="h" fact="0.3"/>
-          <dgm:constr type="w" for="ch" forName="compNode" refType="w"/>
-          <dgm:constr type="h" for="ch" forName="sibTrans" refType="h" refFor="ch" refForName="compNode" fact="0.25"/>
-          <dgm:constr type="primFontSz" for="des" forName="parTx" val="16"/>
-          <dgm:constr type="primFontSz" for="des" forName="desTx" refType="primFontSz" refFor="des" refForName="parTx" op="lte" fact="0.75"/>
-          <dgm:constr type="h" for="des" forName="compNode" op="equ"/>
-          <dgm:constr type="h" for="des" forName="bgRect" op="equ"/>
-          <dgm:constr type="h" for="des" forName="iconRect" op="equ"/>
-          <dgm:constr type="w" for="des" forName="iconRect" op="equ"/>
-          <dgm:constr type="h" for="des" forName="spaceRect" op="equ"/>
-          <dgm:constr type="h" for="des" forName="parTx" op="equ"/>
-          <dgm:constr type="h" for="des" forName="desTx" op="equ"/>
-        </dgm:constrLst>
-      </dgm:else>
-    </dgm:choose>
-    <dgm:ruleLst>
-      <dgm:rule type="h" for="ch" forName="compNode" val="0" fact="NaN" max="NaN"/>
-    </dgm:ruleLst>
-    <dgm:forEach name="Name8" axis="ch" ptType="node">
-      <dgm:layoutNode name="compNode">
-        <dgm:alg type="composite"/>
-        <dgm:shape xmlns:r="http://schemas.openxmlformats.org/officeDocument/2006/relationships" r:blip="">
-          <dgm:adjLst/>
-        </dgm:shape>
-        <dgm:presOf axis="self"/>
-        <dgm:choose name="Name9">
-          <dgm:if name="Name10" axis="ch" ptType="node" func="cnt" op="gte" val="1">
-            <dgm:constrLst>
-              <dgm:constr type="w" for="ch" forName="bgRect" refType="w"/>
-              <dgm:constr type="h" for="ch" forName="bgRect" refType="h"/>
-              <dgm:constr type="l" for="ch" forName="bgRect"/>
-              <dgm:constr type="t" for="ch" forName="bgRect"/>
-              <dgm:constr type="h" for="ch" forName="iconRect" refType="h" fact="0.55"/>
-              <dgm:constr type="w" for="ch" forName="iconRect" refType="h" refFor="ch" refForName="iconRect"/>
-              <dgm:constr type="l" for="ch" forName="iconRect" refType="h" refFor="ch" refForName="iconRect" fact="0.55"/>
-              <dgm:constr type="ctrY" for="ch" forName="iconRect" refType="ctrY" refFor="ch" refForName="bgRect"/>
-              <dgm:constr type="w" for="ch" forName="spaceRect" refType="l" refFor="ch" refForName="iconRect"/>
-              <dgm:constr type="h" for="ch" forName="spaceRect" refType="h"/>
-              <dgm:constr type="l" for="ch" forName="spaceRect" refType="r" refFor="ch" refForName="iconRect"/>
-              <dgm:constr type="t" for="ch" forName="spaceRect"/>
-              <dgm:constr type="w" for="ch" forName="parTx" refType="w" fact="0.45"/>
-              <dgm:constr type="h" for="ch" forName="parTx" refType="h"/>
-              <dgm:constr type="l" for="ch" forName="parTx" refType="r" refFor="ch" refForName="spaceRect"/>
-              <dgm:constr type="t" for="ch" forName="parTx"/>
-              <dgm:constr type="h" for="ch" forName="desTx" refType="h"/>
-              <dgm:constr type="l" for="ch" forName="desTx" refType="r" refFor="ch" refForName="parTx"/>
-              <dgm:constr type="t" for="ch" forName="desTx"/>
-            </dgm:constrLst>
-          </dgm:if>
-          <dgm:else name="Name11">
-            <dgm:constrLst>
-              <dgm:constr type="w" for="ch" forName="bgRect" refType="w"/>
-              <dgm:constr type="h" for="ch" forName="bgRect" refType="h"/>
-              <dgm:constr type="l" for="ch" forName="bgRect"/>
-              <dgm:constr type="t" for="ch" forName="bgRect"/>
-              <dgm:constr type="h" for="ch" forName="iconRect" refType="h" fact="0.55"/>
-              <dgm:constr type="w" for="ch" forName="iconRect" refType="h" refFor="ch" refForName="iconRect"/>
-              <dgm:constr type="l" for="ch" forName="iconRect" refType="h" refFor="ch" refForName="iconRect" fact="0.55"/>
-              <dgm:constr type="ctrY" for="ch" forName="iconRect" refType="ctrY" refFor="ch" refForName="bgRect"/>
-              <dgm:constr type="w" for="ch" forName="spaceRect" refType="l" refFor="ch" refForName="iconRect"/>
-              <dgm:constr type="h" for="ch" forName="spaceRect" refType="h"/>
-              <dgm:constr type="l" for="ch" forName="spaceRect" refType="r" refFor="ch" refForName="iconRect"/>
-              <dgm:constr type="t" for="ch" forName="spaceRect"/>
-              <dgm:constr type="h" for="ch" forName="parTx" refType="h"/>
-              <dgm:constr type="l" for="ch" forName="parTx" refType="r" refFor="ch" refForName="spaceRect"/>
-              <dgm:constr type="t" for="ch" forName="parTx"/>
-            </dgm:constrLst>
-          </dgm:else>
-        </dgm:choose>
-        <dgm:ruleLst>
-          <dgm:rule type="h" val="INF" fact="NaN" max="NaN"/>
-        </dgm:ruleLst>
-        <dgm:layoutNode name="bgRect" styleLbl="bgShp">
-          <dgm:alg type="sp"/>
-          <dgm:shape xmlns:r="http://schemas.openxmlformats.org/officeDocument/2006/relationships" type="roundRect" r:blip="">
-            <dgm:adjLst>
-              <dgm:adj idx="1" val="0.1"/>
-            </dgm:adjLst>
-          </dgm:shape>
-          <dgm:presOf/>
-          <dgm:constrLst/>
-          <dgm:ruleLst/>
-        </dgm:layoutNode>
-        <dgm:layoutNode name="iconRect" styleLbl="node1">
-          <dgm:alg type="sp"/>
-          <dgm:shape xmlns:r="http://schemas.openxmlformats.org/officeDocument/2006/relationships" type="rect" r:blip="" blipPhldr="1">
-            <dgm:adjLst/>
-          </dgm:shape>
-          <dgm:presOf/>
-          <dgm:constrLst/>
-          <dgm:ruleLst/>
-        </dgm:layoutNode>
-        <dgm:layoutNode name="spaceRect">
-          <dgm:alg type="sp"/>
-          <dgm:shape xmlns:r="http://schemas.openxmlformats.org/officeDocument/2006/relationships" r:blip="">
-            <dgm:adjLst/>
-          </dgm:shape>
-          <dgm:presOf/>
-          <dgm:constrLst/>
-          <dgm:ruleLst/>
-        </dgm:layoutNode>
-        <dgm:layoutNode name="parTx" styleLbl="revTx">
-          <dgm:varLst>
-            <dgm:chMax val="0"/>
-            <dgm:chPref val="0"/>
-          </dgm:varLst>
-          <dgm:alg type="tx">
-            <dgm:param type="txAnchorVert" val="mid"/>
-            <dgm:param type="parTxLTRAlign" val="l"/>
-            <dgm:param type="shpTxLTRAlignCh" val="l"/>
-            <dgm:param type="parTxRTLAlign" val="r"/>
-            <dgm:param type="shpTxRTLAlignCh" val="r"/>
-          </dgm:alg>
-          <dgm:shape xmlns:r="http://schemas.openxmlformats.org/officeDocument/2006/relationships" type="rect" r:blip="">
-            <dgm:adjLst/>
-          </dgm:shape>
-          <dgm:presOf axis="self" ptType="node"/>
-          <dgm:constrLst>
-            <dgm:constr type="lMarg" refType="h" fact="0.3"/>
-            <dgm:constr type="rMarg" refType="h" fact="0.3"/>
-            <dgm:constr type="tMarg" refType="h" fact="0.3"/>
-            <dgm:constr type="bMarg" refType="h" fact="0.3"/>
-          </dgm:constrLst>
-          <dgm:ruleLst>
-            <dgm:rule type="primFontSz" val="14" fact="NaN" max="NaN"/>
-            <dgm:rule type="h" val="INF" fact="NaN" max="NaN"/>
-          </dgm:ruleLst>
-        </dgm:layoutNode>
-        <dgm:choose name="Name12">
-          <dgm:if name="Name13" axis="ch" ptType="node" func="cnt" op="gte" val="1">
-            <dgm:layoutNode name="desTx" styleLbl="revTx">
-              <dgm:varLst/>
-              <dgm:alg type="tx">
-                <dgm:param type="txAnchorVertCh" val="mid"/>
-                <dgm:param type="parTxLTRAlign" val="l"/>
-                <dgm:param type="shpTxLTRAlignCh" val="l"/>
-                <dgm:param type="parTxRTLAlign" val="r"/>
-                <dgm:param type="shpTxRTLAlignCh" val="r"/>
-                <dgm:param type="stBulletLvl" val="0"/>
-              </dgm:alg>
-              <dgm:shape xmlns:r="http://schemas.openxmlformats.org/officeDocument/2006/relationships" type="rect" r:blip="">
-                <dgm:adjLst/>
-              </dgm:shape>
-              <dgm:presOf axis="des" ptType="node"/>
-              <dgm:constrLst>
-                <dgm:constr type="primFontSz" val="18"/>
-                <dgm:constr type="secFontSz" refType="primFontSz"/>
-                <dgm:constr type="lMarg" refType="h" fact="0.3"/>
-                <dgm:constr type="rMarg" refType="h" fact="0.3"/>
-                <dgm:constr type="tMarg" refType="h" fact="0.3"/>
-                <dgm:constr type="bMarg" refType="h" fact="0.3"/>
-              </dgm:constrLst>
-              <dgm:ruleLst>
-                <dgm:rule type="primFontSz" val="11" fact="NaN" max="NaN"/>
-              </dgm:ruleLst>
-            </dgm:layoutNode>
-          </dgm:if>
-          <dgm:else name="Name14"/>
-        </dgm:choose>
-      </dgm:layoutNode>
-      <dgm:forEach name="Name15" axis="followSib" ptType="sibTrans" cnt="1">
-        <dgm:layoutNode name="sibTrans">
-          <dgm:alg type="sp"/>
-          <dgm:shape xmlns:r="http://schemas.openxmlformats.org/officeDocument/2006/relationships" r:blip="">
-            <dgm:adjLst/>
-          </dgm:shape>
-          <dgm:presOf axis="self"/>
-          <dgm:constrLst/>
-          <dgm:ruleLst/>
-        </dgm:layoutNode>
-      </dgm:forEach>
-    </dgm:forEach>
-  </dgm:layoutNode>
-  <dgm:extLst>
-    <a:ext uri="{68A01E43-0DF5-4B5B-8FA6-DAF915123BFB}">
-      <dgm1612:lstStyle xmlns:dgm1612="http://schemas.microsoft.com/office/drawing/2016/12/diagram">
-        <a:lvl1pPr>
-          <a:lnSpc>
-            <a:spcPct val="100000"/>
-          </a:lnSpc>
-        </a:lvl1pPr>
-        <a:lvl2pPr>
-          <a:lnSpc>
-            <a:spcPct val="100000"/>
-          </a:lnSpc>
-        </a:lvl2pPr>
-      </dgm1612:lstStyle>
-    </a:ext>
-  </dgm:extLst>
-</dgm:layoutDef>
-</file>
-
-<file path=ppt/diagrams/quickStyle1.xml><?xml version="1.0" encoding="utf-8"?>
-<dgm:styleDef xmlns:dgm="http://schemas.openxmlformats.org/drawingml/2006/diagram" xmlns:a="http://schemas.openxmlformats.org/drawingml/2006/main" uniqueId="urn:microsoft.com/office/officeart/2005/8/quickstyle/simple1">
-  <dgm:title val=""/>
-  <dgm:desc val=""/>
-  <dgm:catLst>
-    <dgm:cat type="simple" pri="10100"/>
-  </dgm:catLst>
-  <dgm:scene3d>
-    <a:camera prst="orthographicFront"/>
-    <a:lightRig rig="threePt" dir="t"/>
-  </dgm:scene3d>
-  <dgm:styleLbl name="node0">
-    <dgm:scene3d>
-      <a:camera prst="orthographicFront"/>
-      <a:lightRig rig="threePt" dir="t"/>
-    </dgm:scene3d>
-    <dgm:sp3d/>
-    <dgm:txPr/>
-    <dgm:style>
-      <a:lnRef idx="2">
-        <a:scrgbClr r="0" g="0" b="0"/>
-      </a:lnRef>
-      <a:fillRef idx="1">
-        <a:scrgbClr r="0" g="0" b="0"/>
-      </a:fillRef>
-      <a:effectRef idx="0">
-        <a:scrgbClr r="0" g="0" b="0"/>
-      </a:effectRef>
-      <a:fontRef idx="minor">
-        <a:schemeClr val="lt1"/>
-      </a:fontRef>
-    </dgm:style>
-  </dgm:styleLbl>
-  <dgm:styleLbl name="lnNode1">
-    <dgm:scene3d>
-      <a:camera prst="orthographicFront"/>
-      <a:lightRig rig="threePt" dir="t"/>
-    </dgm:scene3d>
-    <dgm:sp3d/>
-    <dgm:txPr/>
-    <dgm:style>
-      <a:lnRef idx="2">
-        <a:scrgbClr r="0" g="0" b="0"/>
-      </a:lnRef>
-      <a:fillRef idx="1">
-        <a:scrgbClr r="0" g="0" b="0"/>
-      </a:fillRef>
-      <a:effectRef idx="0">
-        <a:scrgbClr r="0" g="0" b="0"/>
-      </a:effectRef>
-      <a:fontRef idx="minor">
-        <a:schemeClr val="lt1"/>
-      </a:fontRef>
-    </dgm:style>
-  </dgm:styleLbl>
-  <dgm:styleLbl name="vennNode1">
-    <dgm:scene3d>
-      <a:camera prst="orthographicFront"/>
-      <a:lightRig rig="threePt" dir="t"/>
-    </dgm:scene3d>
-    <dgm:sp3d/>
-    <dgm:txPr/>
-    <dgm:style>
-      <a:lnRef idx="2">
-        <a:scrgbClr r="0" g="0" b="0"/>
-      </a:lnRef>
-      <a:fillRef idx="1">
-        <a:scrgbClr r="0" g="0" b="0"/>
-      </a:fillRef>
-      <a:effectRef idx="0">
-        <a:scrgbClr r="0" g="0" b="0"/>
-      </a:effectRef>
-      <a:fontRef idx="minor">
-        <a:schemeClr val="tx1"/>
-      </a:fontRef>
-    </dgm:style>
-  </dgm:styleLbl>
-  <dgm:styleLbl name="alignNode1">
-    <dgm:scene3d>
-      <a:camera prst="orthographicFront"/>
-      <a:lightRig rig="threePt" dir="t"/>
-    </dgm:scene3d>
-    <dgm:sp3d/>
-    <dgm:txPr/>
-    <dgm:style>
-      <a:lnRef idx="2">
-        <a:scrgbClr r="0" g="0" b="0"/>
-      </a:lnRef>
-      <a:fillRef idx="1">
-        <a:scrgbClr r="0" g="0" b="0"/>
-      </a:fillRef>
-      <a:effectRef idx="0">
-        <a:scrgbClr r="0" g="0" b="0"/>
-      </a:effectRef>
-      <a:fontRef idx="minor">
-        <a:schemeClr val="lt1"/>
-      </a:fontRef>
-    </dgm:style>
-  </dgm:styleLbl>
-  <dgm:styleLbl name="node1">
-    <dgm:scene3d>
-      <a:camera prst="orthographicFront"/>
-      <a:lightRig rig="threePt" dir="t"/>
-    </dgm:scene3d>
-    <dgm:sp3d/>
-    <dgm:txPr/>
-    <dgm:style>
-      <a:lnRef idx="2">
-        <a:scrgbClr r="0" g="0" b="0"/>
-      </a:lnRef>
-      <a:fillRef idx="1">
-        <a:scrgbClr r="0" g="0" b="0"/>
-      </a:fillRef>
-      <a:effectRef idx="0">
-        <a:scrgbClr r="0" g="0" b="0"/>
-      </a:effectRef>
-      <a:fontRef idx="minor">
-        <a:schemeClr val="lt1"/>
-      </a:fontRef>
-    </dgm:style>
-  </dgm:styleLbl>
-  <dgm:styleLbl name="node2">
-    <dgm:scene3d>
-      <a:camera prst="orthographicFront"/>
-      <a:lightRig rig="threePt" dir="t"/>
-    </dgm:scene3d>
-    <dgm:sp3d/>
-    <dgm:txPr/>
-    <dgm:style>
-      <a:lnRef idx="2">
-        <a:scrgbClr r="0" g="0" b="0"/>
-      </a:lnRef>
-      <a:fillRef idx="1">
-        <a:scrgbClr r="0" g="0" b="0"/>
-      </a:fillRef>
-      <a:effectRef idx="0">
-        <a:scrgbClr r="0" g="0" b="0"/>
-      </a:effectRef>
-      <a:fontRef idx="minor">
-        <a:schemeClr val="lt1"/>
-      </a:fontRef>
-    </dgm:style>
-  </dgm:styleLbl>
-  <dgm:styleLbl name="node3">
-    <dgm:scene3d>
-      <a:camera prst="orthographicFront"/>
-      <a:lightRig rig="threePt" dir="t"/>
-    </dgm:scene3d>
-    <dgm:sp3d/>
-    <dgm:txPr/>
-    <dgm:style>
-      <a:lnRef idx="2">
-        <a:scrgbClr r="0" g="0" b="0"/>
-      </a:lnRef>
-      <a:fillRef idx="1">
-        <a:scrgbClr r="0" g="0" b="0"/>
-      </a:fillRef>
-      <a:effectRef idx="0">
-        <a:scrgbClr r="0" g="0" b="0"/>
-      </a:effectRef>
-      <a:fontRef idx="minor">
-        <a:schemeClr val="lt1"/>
-      </a:fontRef>
-    </dgm:style>
-  </dgm:styleLbl>
-  <dgm:styleLbl name="node4">
-    <dgm:scene3d>
-      <a:camera prst="orthographicFront"/>
-      <a:lightRig rig="threePt" dir="t"/>
-    </dgm:scene3d>
-    <dgm:sp3d/>
-    <dgm:txPr/>
-    <dgm:style>
-      <a:lnRef idx="2">
-        <a:scrgbClr r="0" g="0" b="0"/>
-      </a:lnRef>
-      <a:fillRef idx="1">
-        <a:scrgbClr r="0" g="0" b="0"/>
-      </a:fillRef>
-      <a:effectRef idx="0">
-        <a:scrgbClr r="0" g="0" b="0"/>
-      </a:effectRef>
-      <a:fontRef idx="minor">
-        <a:schemeClr val="lt1"/>
-      </a:fontRef>
-    </dgm:style>
-  </dgm:styleLbl>
-  <dgm:styleLbl name="fgImgPlace1">
-    <dgm:scene3d>
-      <a:camera prst="orthographicFront"/>
-      <a:lightRig rig="threePt" dir="t"/>
-    </dgm:scene3d>
-    <dgm:sp3d/>
-    <dgm:txPr/>
-    <dgm:style>
-      <a:lnRef idx="2">
-        <a:scrgbClr r="0" g="0" b="0"/>
-      </a:lnRef>
-      <a:fillRef idx="1">
-        <a:scrgbClr r="0" g="0" b="0"/>
-      </a:fillRef>
-      <a:effectRef idx="0">
-        <a:scrgbClr r="0" g="0" b="0"/>
-      </a:effectRef>
-      <a:fontRef idx="minor"/>
-    </dgm:style>
-  </dgm:styleLbl>
-  <dgm:styleLbl name="alignImgPlace1">
-    <dgm:scene3d>
-      <a:camera prst="orthographicFront"/>
-      <a:lightRig rig="threePt" dir="t"/>
-    </dgm:scene3d>
-    <dgm:sp3d/>
-    <dgm:txPr/>
-    <dgm:style>
-      <a:lnRef idx="2">
-        <a:scrgbClr r="0" g="0" b="0"/>
-      </a:lnRef>
-      <a:fillRef idx="1">
-        <a:scrgbClr r="0" g="0" b="0"/>
-      </a:fillRef>
-      <a:effectRef idx="0">
-        <a:scrgbClr r="0" g="0" b="0"/>
-      </a:effectRef>
-      <a:fontRef idx="minor"/>
-    </dgm:style>
-  </dgm:styleLbl>
-  <dgm:styleLbl name="bgImgPlace1">
-    <dgm:scene3d>
-      <a:camera prst="orthographicFront"/>
-      <a:lightRig rig="threePt" dir="t"/>
-    </dgm:scene3d>
-    <dgm:sp3d/>
-    <dgm:txPr/>
-    <dgm:style>
-      <a:lnRef idx="2">
-        <a:scrgbClr r="0" g="0" b="0"/>
-      </a:lnRef>
-      <a:fillRef idx="1">
-        <a:scrgbClr r="0" g="0" b="0"/>
-      </a:fillRef>
-      <a:effectRef idx="0">
-        <a:scrgbClr r="0" g="0" b="0"/>
-      </a:effectRef>
-      <a:fontRef idx="minor"/>
-    </dgm:style>
-  </dgm:styleLbl>
-  <dgm:styleLbl name="sibTrans2D1">
-    <dgm:scene3d>
-      <a:camera prst="orthographicFront"/>
-      <a:lightRig rig="threePt" dir="t"/>
-    </dgm:scene3d>
-    <dgm:sp3d/>
-    <dgm:txPr/>
-    <dgm:style>
-      <a:lnRef idx="0">
-        <a:scrgbClr r="0" g="0" b="0"/>
-      </a:lnRef>
-      <a:fillRef idx="1">
-        <a:scrgbClr r="0" g="0" b="0"/>
-      </a:fillRef>
-      <a:effectRef idx="0">
-        <a:scrgbClr r="0" g="0" b="0"/>
-      </a:effectRef>
-      <a:fontRef idx="minor">
-        <a:schemeClr val="lt1"/>
-      </a:fontRef>
-    </dgm:style>
-  </dgm:styleLbl>
-  <dgm:styleLbl name="fgSibTrans2D1">
-    <dgm:scene3d>
-      <a:camera prst="orthographicFront"/>
-      <a:lightRig rig="threePt" dir="t"/>
-    </dgm:scene3d>
-    <dgm:sp3d/>
-    <dgm:txPr/>
-    <dgm:style>
-      <a:lnRef idx="0">
-        <a:scrgbClr r="0" g="0" b="0"/>
-      </a:lnRef>
-      <a:fillRef idx="1">
-        <a:scrgbClr r="0" g="0" b="0"/>
-      </a:fillRef>
-      <a:effectRef idx="0">
-        <a:scrgbClr r="0" g="0" b="0"/>
-      </a:effectRef>
-      <a:fontRef idx="minor">
-        <a:schemeClr val="lt1"/>
-      </a:fontRef>
-    </dgm:style>
-  </dgm:styleLbl>
-  <dgm:styleLbl name="bgSibTrans2D1">
-    <dgm:scene3d>
-      <a:camera prst="orthographicFront"/>
-      <a:lightRig rig="threePt" dir="t"/>
-    </dgm:scene3d>
-    <dgm:sp3d/>
-    <dgm:txPr/>
-    <dgm:style>
-      <a:lnRef idx="0">
-        <a:scrgbClr r="0" g="0" b="0"/>
-      </a:lnRef>
-      <a:fillRef idx="1">
-        <a:scrgbClr r="0" g="0" b="0"/>
-      </a:fillRef>
-      <a:effectRef idx="0">
-        <a:scrgbClr r="0" g="0" b="0"/>
-      </a:effectRef>
-      <a:fontRef idx="minor">
-        <a:schemeClr val="lt1"/>
-      </a:fontRef>
-    </dgm:style>
-  </dgm:styleLbl>
-  <dgm:styleLbl name="sibTrans1D1">
-    <dgm:scene3d>
-      <a:camera prst="orthographicFront"/>
-      <a:lightRig rig="threePt" dir="t"/>
-    </dgm:scene3d>
-    <dgm:sp3d/>
-    <dgm:txPr/>
-    <dgm:style>
-      <a:lnRef idx="1">
-        <a:scrgbClr r="0" g="0" b="0"/>
-      </a:lnRef>
-      <a:fillRef idx="0">
-        <a:scrgbClr r="0" g="0" b="0"/>
-      </a:fillRef>
-      <a:effectRef idx="0">
-        <a:scrgbClr r="0" g="0" b="0"/>
-      </a:effectRef>
-      <a:fontRef idx="minor"/>
-    </dgm:style>
-  </dgm:styleLbl>
-  <dgm:styleLbl name="callout">
-    <dgm:scene3d>
-      <a:camera prst="orthographicFront"/>
-      <a:lightRig rig="threePt" dir="t"/>
-    </dgm:scene3d>
-    <dgm:sp3d/>
-    <dgm:txPr/>
-    <dgm:style>
-      <a:lnRef idx="2">
-        <a:scrgbClr r="0" g="0" b="0"/>
-      </a:lnRef>
-      <a:fillRef idx="1">
-        <a:scrgbClr r="0" g="0" b="0"/>
-      </a:fillRef>
-      <a:effectRef idx="0">
-        <a:scrgbClr r="0" g="0" b="0"/>
-      </a:effectRef>
-      <a:fontRef idx="minor"/>
-    </dgm:style>
-  </dgm:styleLbl>
-  <dgm:styleLbl name="asst0">
-    <dgm:scene3d>
-      <a:camera prst="orthographicFront"/>
-      <a:lightRig rig="threePt" dir="t"/>
-    </dgm:scene3d>
-    <dgm:sp3d/>
-    <dgm:txPr/>
-    <dgm:style>
-      <a:lnRef idx="2">
-        <a:scrgbClr r="0" g="0" b="0"/>
-      </a:lnRef>
-      <a:fillRef idx="1">
-        <a:scrgbClr r="0" g="0" b="0"/>
-      </a:fillRef>
-      <a:effectRef idx="0">
-        <a:scrgbClr r="0" g="0" b="0"/>
-      </a:effectRef>
-      <a:fontRef idx="minor">
-        <a:schemeClr val="lt1"/>
-      </a:fontRef>
-    </dgm:style>
-  </dgm:styleLbl>
-  <dgm:styleLbl name="asst1">
-    <dgm:scene3d>
-      <a:camera prst="orthographicFront"/>
-      <a:lightRig rig="threePt" dir="t"/>
-    </dgm:scene3d>
-    <dgm:sp3d/>
-    <dgm:txPr/>
-    <dgm:style>
-      <a:lnRef idx="2">
-        <a:scrgbClr r="0" g="0" b="0"/>
-      </a:lnRef>
-      <a:fillRef idx="1">
-        <a:scrgbClr r="0" g="0" b="0"/>
-      </a:fillRef>
-      <a:effectRef idx="0">
-        <a:scrgbClr r="0" g="0" b="0"/>
-      </a:effectRef>
-      <a:fontRef idx="minor">
-        <a:schemeClr val="lt1"/>
-      </a:fontRef>
-    </dgm:style>
-  </dgm:styleLbl>
-  <dgm:styleLbl name="asst2">
-    <dgm:scene3d>
-      <a:camera prst="orthographicFront"/>
-      <a:lightRig rig="threePt" dir="t"/>
-    </dgm:scene3d>
-    <dgm:sp3d/>
-    <dgm:txPr/>
-    <dgm:style>
-      <a:lnRef idx="2">
-        <a:scrgbClr r="0" g="0" b="0"/>
-      </a:lnRef>
-      <a:fillRef idx="1">
-        <a:scrgbClr r="0" g="0" b="0"/>
-      </a:fillRef>
-      <a:effectRef idx="0">
-        <a:scrgbClr r="0" g="0" b="0"/>
-      </a:effectRef>
-      <a:fontRef idx="minor">
-        <a:schemeClr val="lt1"/>
-      </a:fontRef>
-    </dgm:style>
-  </dgm:styleLbl>
-  <dgm:styleLbl name="asst3">
-    <dgm:scene3d>
-      <a:camera prst="orthographicFront"/>
-      <a:lightRig rig="threePt" dir="t"/>
-    </dgm:scene3d>
-    <dgm:sp3d/>
-    <dgm:txPr/>
-    <dgm:style>
-      <a:lnRef idx="2">
-        <a:scrgbClr r="0" g="0" b="0"/>
-      </a:lnRef>
-      <a:fillRef idx="1">
-        <a:scrgbClr r="0" g="0" b="0"/>
-      </a:fillRef>
-      <a:effectRef idx="0">
-        <a:scrgbClr r="0" g="0" b="0"/>
-      </a:effectRef>
-      <a:fontRef idx="minor">
-        <a:schemeClr val="lt1"/>
-      </a:fontRef>
-    </dgm:style>
-  </dgm:styleLbl>
-  <dgm:styleLbl name="asst4">
-    <dgm:scene3d>
-      <a:camera prst="orthographicFront"/>
-      <a:lightRig rig="threePt" dir="t"/>
-    </dgm:scene3d>
-    <dgm:sp3d/>
-    <dgm:txPr/>
-    <dgm:style>
-      <a:lnRef idx="2">
-        <a:scrgbClr r="0" g="0" b="0"/>
-      </a:lnRef>
-      <a:fillRef idx="1">
-        <a:scrgbClr r="0" g="0" b="0"/>
-      </a:fillRef>
-      <a:effectRef idx="0">
-        <a:scrgbClr r="0" g="0" b="0"/>
-      </a:effectRef>
-      <a:fontRef idx="minor">
-        <a:schemeClr val="lt1"/>
-      </a:fontRef>
-    </dgm:style>
-  </dgm:styleLbl>
-  <dgm:styleLbl name="parChTrans2D1">
-    <dgm:scene3d>
-      <a:camera prst="orthographicFront"/>
-      <a:lightRig rig="threePt" dir="t"/>
-    </dgm:scene3d>
-    <dgm:sp3d/>
-    <dgm:txPr/>
-    <dgm:style>
-      <a:lnRef idx="2">
-        <a:scrgbClr r="0" g="0" b="0"/>
-      </a:lnRef>
-      <a:fillRef idx="1">
-        <a:scrgbClr r="0" g="0" b="0"/>
-      </a:fillRef>
-      <a:effectRef idx="0">
-        <a:scrgbClr r="0" g="0" b="0"/>
-      </a:effectRef>
-      <a:fontRef idx="minor">
-        <a:schemeClr val="lt1"/>
-      </a:fontRef>
-    </dgm:style>
-  </dgm:styleLbl>
-  <dgm:styleLbl name="parChTrans2D2">
-    <dgm:scene3d>
-      <a:camera prst="orthographicFront"/>
-      <a:lightRig rig="threePt" dir="t"/>
-    </dgm:scene3d>
-    <dgm:sp3d/>
-    <dgm:txPr/>
-    <dgm:style>
-      <a:lnRef idx="2">
-        <a:scrgbClr r="0" g="0" b="0"/>
-      </a:lnRef>
-      <a:fillRef idx="1">
-        <a:scrgbClr r="0" g="0" b="0"/>
-      </a:fillRef>
-      <a:effectRef idx="0">
-        <a:scrgbClr r="0" g="0" b="0"/>
-      </a:effectRef>
-      <a:fontRef idx="minor">
-        <a:schemeClr val="lt1"/>
-      </a:fontRef>
-    </dgm:style>
-  </dgm:styleLbl>
-  <dgm:styleLbl name="parChTrans2D3">
-    <dgm:scene3d>
-      <a:camera prst="orthographicFront"/>
-      <a:lightRig rig="threePt" dir="t"/>
-    </dgm:scene3d>
-    <dgm:sp3d/>
-    <dgm:txPr/>
-    <dgm:style>
-      <a:lnRef idx="2">
-        <a:scrgbClr r="0" g="0" b="0"/>
-      </a:lnRef>
-      <a:fillRef idx="1">
-        <a:scrgbClr r="0" g="0" b="0"/>
-      </a:fillRef>
-      <a:effectRef idx="0">
-        <a:scrgbClr r="0" g="0" b="0"/>
-      </a:effectRef>
-      <a:fontRef idx="minor">
-        <a:schemeClr val="lt1"/>
-      </a:fontRef>
-    </dgm:style>
-  </dgm:styleLbl>
-  <dgm:styleLbl name="parChTrans2D4">
-    <dgm:scene3d>
-      <a:camera prst="orthographicFront"/>
-      <a:lightRig rig="threePt" dir="t"/>
-    </dgm:scene3d>
-    <dgm:sp3d/>
-    <dgm:txPr/>
-    <dgm:style>
-      <a:lnRef idx="2">
-        <a:scrgbClr r="0" g="0" b="0"/>
-      </a:lnRef>
-      <a:fillRef idx="1">
-        <a:scrgbClr r="0" g="0" b="0"/>
-      </a:fillRef>
-      <a:effectRef idx="0">
-        <a:scrgbClr r="0" g="0" b="0"/>
-      </a:effectRef>
-      <a:fontRef idx="minor">
-        <a:schemeClr val="lt1"/>
-      </a:fontRef>
-    </dgm:style>
-  </dgm:styleLbl>
-  <dgm:styleLbl name="parChTrans1D1">
-    <dgm:scene3d>
-      <a:camera prst="orthographicFront"/>
-      <a:lightRig rig="threePt" dir="t"/>
-    </dgm:scene3d>
-    <dgm:sp3d/>
-    <dgm:txPr/>
-    <dgm:style>
-      <a:lnRef idx="2">
-        <a:scrgbClr r="0" g="0" b="0"/>
-      </a:lnRef>
-      <a:fillRef idx="0">
-        <a:scrgbClr r="0" g="0" b="0"/>
-      </a:fillRef>
-      <a:effectRef idx="0">
-        <a:scrgbClr r="0" g="0" b="0"/>
-      </a:effectRef>
-      <a:fontRef idx="minor"/>
-    </dgm:style>
-  </dgm:styleLbl>
-  <dgm:styleLbl name="parChTrans1D2">
-    <dgm:scene3d>
-      <a:camera prst="orthographicFront"/>
-      <a:lightRig rig="threePt" dir="t"/>
-    </dgm:scene3d>
-    <dgm:sp3d/>
-    <dgm:txPr/>
-    <dgm:style>
-      <a:lnRef idx="2">
-        <a:scrgbClr r="0" g="0" b="0"/>
-      </a:lnRef>
-      <a:fillRef idx="0">
-        <a:scrgbClr r="0" g="0" b="0"/>
-      </a:fillRef>
-      <a:effectRef idx="0">
-        <a:scrgbClr r="0" g="0" b="0"/>
-      </a:effectRef>
-      <a:fontRef idx="minor"/>
-    </dgm:style>
-  </dgm:styleLbl>
-  <dgm:styleLbl name="parChTrans1D3">
-    <dgm:scene3d>
-      <a:camera prst="orthographicFront"/>
-      <a:lightRig rig="threePt" dir="t"/>
-    </dgm:scene3d>
-    <dgm:sp3d/>
-    <dgm:txPr/>
-    <dgm:style>
-      <a:lnRef idx="2">
-        <a:scrgbClr r="0" g="0" b="0"/>
-      </a:lnRef>
-      <a:fillRef idx="0">
-        <a:scrgbClr r="0" g="0" b="0"/>
-      </a:fillRef>
-      <a:effectRef idx="0">
-        <a:scrgbClr r="0" g="0" b="0"/>
-      </a:effectRef>
-      <a:fontRef idx="minor"/>
-    </dgm:style>
-  </dgm:styleLbl>
-  <dgm:styleLbl name="parChTrans1D4">
-    <dgm:scene3d>
-      <a:camera prst="orthographicFront"/>
-      <a:lightRig rig="threePt" dir="t"/>
-    </dgm:scene3d>
-    <dgm:sp3d/>
-    <dgm:txPr/>
-    <dgm:style>
-      <a:lnRef idx="2">
-        <a:scrgbClr r="0" g="0" b="0"/>
-      </a:lnRef>
-      <a:fillRef idx="0">
-        <a:scrgbClr r="0" g="0" b="0"/>
-      </a:fillRef>
-      <a:effectRef idx="0">
-        <a:scrgbClr r="0" g="0" b="0"/>
-      </a:effectRef>
-      <a:fontRef idx="minor"/>
-    </dgm:style>
-  </dgm:styleLbl>
-  <dgm:styleLbl name="fgAcc1">
-    <dgm:scene3d>
-      <a:camera prst="orthographicFront"/>
-      <a:lightRig rig="threePt" dir="t"/>
-    </dgm:scene3d>
-    <dgm:sp3d/>
-    <dgm:txPr/>
-    <dgm:style>
-      <a:lnRef idx="2">
-        <a:scrgbClr r="0" g="0" b="0"/>
-      </a:lnRef>
-      <a:fillRef idx="1">
-        <a:scrgbClr r="0" g="0" b="0"/>
-      </a:fillRef>
-      <a:effectRef idx="0">
-        <a:scrgbClr r="0" g="0" b="0"/>
-      </a:effectRef>
-      <a:fontRef idx="minor"/>
-    </dgm:style>
-  </dgm:styleLbl>
-  <dgm:styleLbl name="conFgAcc1">
-    <dgm:scene3d>
-      <a:camera prst="orthographicFront"/>
-      <a:lightRig rig="threePt" dir="t"/>
-    </dgm:scene3d>
-    <dgm:sp3d/>
-    <dgm:txPr/>
-    <dgm:style>
-      <a:lnRef idx="2">
-        <a:scrgbClr r="0" g="0" b="0"/>
-      </a:lnRef>
-      <a:fillRef idx="1">
-        <a:scrgbClr r="0" g="0" b="0"/>
-      </a:fillRef>
-      <a:effectRef idx="0">
-        <a:scrgbClr r="0" g="0" b="0"/>
-      </a:effectRef>
-      <a:fontRef idx="minor"/>
-    </dgm:style>
-  </dgm:styleLbl>
-  <dgm:styleLbl name="alignAcc1">
-    <dgm:scene3d>
-      <a:camera prst="orthographicFront"/>
-      <a:lightRig rig="threePt" dir="t"/>
-    </dgm:scene3d>
-    <dgm:sp3d/>
-    <dgm:txPr/>
-    <dgm:style>
-      <a:lnRef idx="2">
-        <a:scrgbClr r="0" g="0" b="0"/>
-      </a:lnRef>
-      <a:fillRef idx="1">
-        <a:scrgbClr r="0" g="0" b="0"/>
-      </a:fillRef>
-      <a:effectRef idx="0">
-        <a:scrgbClr r="0" g="0" b="0"/>
-      </a:effectRef>
-      <a:fontRef idx="minor"/>
-    </dgm:style>
-  </dgm:styleLbl>
-  <dgm:styleLbl name="trAlignAcc1">
-    <dgm:scene3d>
-      <a:camera prst="orthographicFront"/>
-      <a:lightRig rig="threePt" dir="t"/>
-    </dgm:scene3d>
-    <dgm:sp3d/>
-    <dgm:txPr/>
-    <dgm:style>
-      <a:lnRef idx="1">
-        <a:scrgbClr r="0" g="0" b="0"/>
-      </a:lnRef>
-      <a:fillRef idx="1">
-        <a:scrgbClr r="0" g="0" b="0"/>
-      </a:fillRef>
-      <a:effectRef idx="0">
-        <a:scrgbClr r="0" g="0" b="0"/>
-      </a:effectRef>
-      <a:fontRef idx="minor"/>
-    </dgm:style>
-  </dgm:styleLbl>
-  <dgm:styleLbl name="bgAcc1">
-    <dgm:scene3d>
-      <a:camera prst="orthographicFront"/>
-      <a:lightRig rig="threePt" dir="t"/>
-    </dgm:scene3d>
-    <dgm:sp3d/>
-    <dgm:txPr/>
-    <dgm:style>
-      <a:lnRef idx="2">
-        <a:scrgbClr r="0" g="0" b="0"/>
-      </a:lnRef>
-      <a:fillRef idx="1">
-        <a:scrgbClr r="0" g="0" b="0"/>
-      </a:fillRef>
-      <a:effectRef idx="0">
-        <a:scrgbClr r="0" g="0" b="0"/>
-      </a:effectRef>
-      <a:fontRef idx="minor"/>
-    </dgm:style>
-  </dgm:styleLbl>
-  <dgm:styleLbl name="solidFgAcc1">
-    <dgm:scene3d>
-      <a:camera prst="orthographicFront"/>
-      <a:lightRig rig="threePt" dir="t"/>
-    </dgm:scene3d>
-    <dgm:sp3d/>
-    <dgm:txPr/>
-    <dgm:style>
-      <a:lnRef idx="2">
-        <a:scrgbClr r="0" g="0" b="0"/>
-      </a:lnRef>
-      <a:fillRef idx="1">
-        <a:scrgbClr r="0" g="0" b="0"/>
-      </a:fillRef>
-      <a:effectRef idx="0">
-        <a:scrgbClr r="0" g="0" b="0"/>
-      </a:effectRef>
-      <a:fontRef idx="minor"/>
-    </dgm:style>
-  </dgm:styleLbl>
-  <dgm:styleLbl name="solidAlignAcc1">
-    <dgm:scene3d>
-      <a:camera prst="orthographicFront"/>
-      <a:lightRig rig="threePt" dir="t"/>
-    </dgm:scene3d>
-    <dgm:sp3d/>
-    <dgm:txPr/>
-    <dgm:style>
-      <a:lnRef idx="2">
-        <a:scrgbClr r="0" g="0" b="0"/>
-      </a:lnRef>
-      <a:fillRef idx="1">
-        <a:scrgbClr r="0" g="0" b="0"/>
-      </a:fillRef>
-      <a:effectRef idx="0">
-        <a:scrgbClr r="0" g="0" b="0"/>
-      </a:effectRef>
-      <a:fontRef idx="minor"/>
-    </dgm:style>
-  </dgm:styleLbl>
-  <dgm:styleLbl name="solidBgAcc1">
-    <dgm:scene3d>
-      <a:camera prst="orthographicFront"/>
-      <a:lightRig rig="threePt" dir="t"/>
-    </dgm:scene3d>
-    <dgm:sp3d/>
-    <dgm:txPr/>
-    <dgm:style>
-      <a:lnRef idx="2">
-        <a:scrgbClr r="0" g="0" b="0"/>
-      </a:lnRef>
-      <a:fillRef idx="1">
-        <a:scrgbClr r="0" g="0" b="0"/>
-      </a:fillRef>
-      <a:effectRef idx="0">
-        <a:scrgbClr r="0" g="0" b="0"/>
-      </a:effectRef>
-      <a:fontRef idx="minor"/>
-    </dgm:style>
-  </dgm:styleLbl>
-  <dgm:styleLbl name="fgAccFollowNode1">
-    <dgm:scene3d>
-      <a:camera prst="orthographicFront"/>
-      <a:lightRig rig="threePt" dir="t"/>
-    </dgm:scene3d>
-    <dgm:sp3d/>
-    <dgm:txPr/>
-    <dgm:style>
-      <a:lnRef idx="2">
-        <a:scrgbClr r="0" g="0" b="0"/>
-      </a:lnRef>
-      <a:fillRef idx="1">
-        <a:scrgbClr r="0" g="0" b="0"/>
-      </a:fillRef>
-      <a:effectRef idx="0">
-        <a:scrgbClr r="0" g="0" b="0"/>
-      </a:effectRef>
-      <a:fontRef idx="minor"/>
-    </dgm:style>
-  </dgm:styleLbl>
-  <dgm:styleLbl name="alignAccFollowNode1">
-    <dgm:scene3d>
-      <a:camera prst="orthographicFront"/>
-      <a:lightRig rig="threePt" dir="t"/>
-    </dgm:scene3d>
-    <dgm:sp3d/>
-    <dgm:txPr/>
-    <dgm:style>
-      <a:lnRef idx="2">
-        <a:scrgbClr r="0" g="0" b="0"/>
-      </a:lnRef>
-      <a:fillRef idx="1">
-        <a:scrgbClr r="0" g="0" b="0"/>
-      </a:fillRef>
-      <a:effectRef idx="0">
-        <a:scrgbClr r="0" g="0" b="0"/>
-      </a:effectRef>
-      <a:fontRef idx="minor"/>
-    </dgm:style>
-  </dgm:styleLbl>
-  <dgm:styleLbl name="bgAccFollowNode1">
-    <dgm:scene3d>
-      <a:camera prst="orthographicFront"/>
-      <a:lightRig rig="threePt" dir="t"/>
-    </dgm:scene3d>
-    <dgm:sp3d/>
-    <dgm:txPr/>
-    <dgm:style>
-      <a:lnRef idx="2">
-        <a:scrgbClr r="0" g="0" b="0"/>
-      </a:lnRef>
-      <a:fillRef idx="1">
-        <a:scrgbClr r="0" g="0" b="0"/>
-      </a:fillRef>
-      <a:effectRef idx="0">
-        <a:scrgbClr r="0" g="0" b="0"/>
-      </a:effectRef>
-      <a:fontRef idx="minor"/>
-    </dgm:style>
-  </dgm:styleLbl>
-  <dgm:styleLbl name="fgAcc0">
-    <dgm:scene3d>
-      <a:camera prst="orthographicFront"/>
-      <a:lightRig rig="threePt" dir="t"/>
-    </dgm:scene3d>
-    <dgm:sp3d/>
-    <dgm:txPr/>
-    <dgm:style>
-      <a:lnRef idx="2">
-        <a:scrgbClr r="0" g="0" b="0"/>
-      </a:lnRef>
-      <a:fillRef idx="1">
-        <a:scrgbClr r="0" g="0" b="0"/>
-      </a:fillRef>
-      <a:effectRef idx="0">
-        <a:scrgbClr r="0" g="0" b="0"/>
-      </a:effectRef>
-      <a:fontRef idx="minor"/>
-    </dgm:style>
-  </dgm:styleLbl>
-  <dgm:styleLbl name="fgAcc2">
-    <dgm:scene3d>
-      <a:camera prst="orthographicFront"/>
-      <a:lightRig rig="threePt" dir="t"/>
-    </dgm:scene3d>
-    <dgm:sp3d/>
-    <dgm:txPr/>
-    <dgm:style>
-      <a:lnRef idx="2">
-        <a:scrgbClr r="0" g="0" b="0"/>
-      </a:lnRef>
-      <a:fillRef idx="1">
-        <a:scrgbClr r="0" g="0" b="0"/>
-      </a:fillRef>
-      <a:effectRef idx="0">
-        <a:scrgbClr r="0" g="0" b="0"/>
-      </a:effectRef>
-      <a:fontRef idx="minor"/>
-    </dgm:style>
-  </dgm:styleLbl>
-  <dgm:styleLbl name="fgAcc3">
-    <dgm:scene3d>
-      <a:camera prst="orthographicFront"/>
-      <a:lightRig rig="threePt" dir="t"/>
-    </dgm:scene3d>
-    <dgm:sp3d/>
-    <dgm:txPr/>
-    <dgm:style>
-      <a:lnRef idx="2">
-        <a:scrgbClr r="0" g="0" b="0"/>
-      </a:lnRef>
-      <a:fillRef idx="1">
-        <a:scrgbClr r="0" g="0" b="0"/>
-      </a:fillRef>
-      <a:effectRef idx="0">
-        <a:scrgbClr r="0" g="0" b="0"/>
-      </a:effectRef>
-      <a:fontRef idx="minor"/>
-    </dgm:style>
-  </dgm:styleLbl>
-  <dgm:styleLbl name="fgAcc4">
-    <dgm:scene3d>
-      <a:camera prst="orthographicFront"/>
-      <a:lightRig rig="threePt" dir="t"/>
-    </dgm:scene3d>
-    <dgm:sp3d/>
-    <dgm:txPr/>
-    <dgm:style>
-      <a:lnRef idx="2">
-        <a:scrgbClr r="0" g="0" b="0"/>
-      </a:lnRef>
-      <a:fillRef idx="1">
-        <a:scrgbClr r="0" g="0" b="0"/>
-      </a:fillRef>
-      <a:effectRef idx="0">
-        <a:scrgbClr r="0" g="0" b="0"/>
-      </a:effectRef>
-      <a:fontRef idx="minor"/>
-    </dgm:style>
-  </dgm:styleLbl>
-  <dgm:styleLbl name="bgShp">
-    <dgm:scene3d>
-      <a:camera prst="orthographicFront"/>
-      <a:lightRig rig="threePt" dir="t"/>
-    </dgm:scene3d>
-    <dgm:sp3d/>
-    <dgm:txPr/>
-    <dgm:style>
-      <a:lnRef idx="0">
-        <a:scrgbClr r="0" g="0" b="0"/>
-      </a:lnRef>
-      <a:fillRef idx="1">
-        <a:scrgbClr r="0" g="0" b="0"/>
-      </a:fillRef>
-      <a:effectRef idx="0">
-        <a:scrgbClr r="0" g="0" b="0"/>
-      </a:effectRef>
-      <a:fontRef idx="minor"/>
-    </dgm:style>
-  </dgm:styleLbl>
-  <dgm:styleLbl name="dkBgShp">
-    <dgm:scene3d>
-      <a:camera prst="orthographicFront"/>
-      <a:lightRig rig="threePt" dir="t"/>
-    </dgm:scene3d>
-    <dgm:sp3d/>
-    <dgm:txPr/>
-    <dgm:style>
-      <a:lnRef idx="0">
-        <a:scrgbClr r="0" g="0" b="0"/>
-      </a:lnRef>
-      <a:fillRef idx="1">
-        <a:scrgbClr r="0" g="0" b="0"/>
-      </a:fillRef>
-      <a:effectRef idx="0">
-        <a:scrgbClr r="0" g="0" b="0"/>
-      </a:effectRef>
-      <a:fontRef idx="minor"/>
-    </dgm:style>
-  </dgm:styleLbl>
-  <dgm:styleLbl name="trBgShp">
-    <dgm:scene3d>
-      <a:camera prst="orthographicFront"/>
-      <a:lightRig rig="threePt" dir="t"/>
-    </dgm:scene3d>
-    <dgm:sp3d/>
-    <dgm:txPr/>
-    <dgm:style>
-      <a:lnRef idx="0">
-        <a:scrgbClr r="0" g="0" b="0"/>
-      </a:lnRef>
-      <a:fillRef idx="1">
-        <a:scrgbClr r="0" g="0" b="0"/>
-      </a:fillRef>
-      <a:effectRef idx="0">
-        <a:scrgbClr r="0" g="0" b="0"/>
-      </a:effectRef>
-      <a:fontRef idx="minor"/>
-    </dgm:style>
-  </dgm:styleLbl>
-  <dgm:styleLbl name="fgShp">
-    <dgm:scene3d>
-      <a:camera prst="orthographicFront"/>
-      <a:lightRig rig="threePt" dir="t"/>
-    </dgm:scene3d>
-    <dgm:sp3d/>
-    <dgm:txPr/>
-    <dgm:style>
-      <a:lnRef idx="2">
-        <a:scrgbClr r="0" g="0" b="0"/>
-      </a:lnRef>
-      <a:fillRef idx="1">
-        <a:scrgbClr r="0" g="0" b="0"/>
-      </a:fillRef>
-      <a:effectRef idx="0">
-        <a:scrgbClr r="0" g="0" b="0"/>
-      </a:effectRef>
-      <a:fontRef idx="minor"/>
-    </dgm:style>
-  </dgm:styleLbl>
-  <dgm:styleLbl name="revTx">
-    <dgm:scene3d>
-      <a:camera prst="orthographicFront"/>
-      <a:lightRig rig="threePt" dir="t"/>
-    </dgm:scene3d>
-    <dgm:sp3d/>
-    <dgm:txPr/>
-    <dgm:style>
-      <a:lnRef idx="0">
-        <a:scrgbClr r="0" g="0" b="0"/>
-      </a:lnRef>
-      <a:fillRef idx="0">
-        <a:scrgbClr r="0" g="0" b="0"/>
-      </a:fillRef>
-      <a:effectRef idx="0">
-        <a:scrgbClr r="0" g="0" b="0"/>
-      </a:effectRef>
-      <a:fontRef idx="minor"/>
-    </dgm:style>
-  </dgm:styleLbl>
-</dgm:styleDef>
-</file>
-
 <file path=ppt/slideLayouts/slideLayout1.xml><?xml version="1.0" encoding="utf-8"?>
 <p:sldLayout xmlns:a="http://schemas.openxmlformats.org/drawingml/2006/main" xmlns:r="http://schemas.openxmlformats.org/officeDocument/2006/relationships" xmlns:p="http://schemas.openxmlformats.org/presentationml/2006/main" type="title" preserve="1">
   <p:cSld name="Title Slide">
@@ -3260,7 +369,7 @@
             <a:fld id="{B61BEF0D-F0BB-DE4B-95CE-6DB70DBA9567}" type="datetimeFigureOut">
               <a:rPr lang="en-US" dirty="0"/>
               <a:pPr/>
-              <a:t>9/19/2025</a:t>
+              <a:t>9/21/2025</a:t>
             </a:fld>
             <a:endParaRPr lang="en-US" dirty="0"/>
           </a:p>
@@ -3522,7 +631,7 @@
             <a:fld id="{B61BEF0D-F0BB-DE4B-95CE-6DB70DBA9567}" type="datetimeFigureOut">
               <a:rPr lang="en-US" dirty="0"/>
               <a:pPr/>
-              <a:t>9/19/2025</a:t>
+              <a:t>9/21/2025</a:t>
             </a:fld>
             <a:endParaRPr lang="en-US" dirty="0"/>
           </a:p>
@@ -3757,7 +866,7 @@
             <a:fld id="{B61BEF0D-F0BB-DE4B-95CE-6DB70DBA9567}" type="datetimeFigureOut">
               <a:rPr lang="en-US" dirty="0"/>
               <a:pPr/>
-              <a:t>9/19/2025</a:t>
+              <a:t>9/21/2025</a:t>
             </a:fld>
             <a:endParaRPr lang="en-US" dirty="0"/>
           </a:p>
@@ -3997,7 +1106,7 @@
             <a:fld id="{B61BEF0D-F0BB-DE4B-95CE-6DB70DBA9567}" type="datetimeFigureOut">
               <a:rPr lang="en-US" dirty="0"/>
               <a:pPr/>
-              <a:t>9/19/2025</a:t>
+              <a:t>9/21/2025</a:t>
             </a:fld>
             <a:endParaRPr lang="en-US" dirty="0"/>
           </a:p>
@@ -4305,7 +1414,7 @@
             <a:fld id="{B61BEF0D-F0BB-DE4B-95CE-6DB70DBA9567}" type="datetimeFigureOut">
               <a:rPr lang="en-US" dirty="0"/>
               <a:pPr/>
-              <a:t>9/19/2025</a:t>
+              <a:t>9/21/2025</a:t>
             </a:fld>
             <a:endParaRPr lang="en-US" dirty="0"/>
           </a:p>
@@ -4606,7 +1715,7 @@
             <a:fld id="{B61BEF0D-F0BB-DE4B-95CE-6DB70DBA9567}" type="datetimeFigureOut">
               <a:rPr lang="en-US" dirty="0"/>
               <a:pPr/>
-              <a:t>9/19/2025</a:t>
+              <a:t>9/21/2025</a:t>
             </a:fld>
             <a:endParaRPr lang="en-US" dirty="0"/>
           </a:p>
@@ -5027,7 +2136,7 @@
             <a:fld id="{B61BEF0D-F0BB-DE4B-95CE-6DB70DBA9567}" type="datetimeFigureOut">
               <a:rPr lang="en-US" dirty="0"/>
               <a:pPr/>
-              <a:t>9/19/2025</a:t>
+              <a:t>9/21/2025</a:t>
             </a:fld>
             <a:endParaRPr lang="en-US" dirty="0"/>
           </a:p>
@@ -5190,7 +2299,7 @@
             <a:fld id="{B61BEF0D-F0BB-DE4B-95CE-6DB70DBA9567}" type="datetimeFigureOut">
               <a:rPr lang="en-US" dirty="0"/>
               <a:pPr/>
-              <a:t>9/19/2025</a:t>
+              <a:t>9/21/2025</a:t>
             </a:fld>
             <a:endParaRPr lang="en-US" dirty="0"/>
           </a:p>
@@ -5287,7 +2396,7 @@
             <a:fld id="{B61BEF0D-F0BB-DE4B-95CE-6DB70DBA9567}" type="datetimeFigureOut">
               <a:rPr lang="en-US" dirty="0"/>
               <a:pPr/>
-              <a:t>9/19/2025</a:t>
+              <a:t>9/21/2025</a:t>
             </a:fld>
             <a:endParaRPr lang="en-US" dirty="0"/>
           </a:p>
@@ -5665,7 +2774,7 @@
             <a:fld id="{B61BEF0D-F0BB-DE4B-95CE-6DB70DBA9567}" type="datetimeFigureOut">
               <a:rPr lang="en-US" dirty="0"/>
               <a:pPr/>
-              <a:t>9/19/2025</a:t>
+              <a:t>9/21/2025</a:t>
             </a:fld>
             <a:endParaRPr lang="en-US" dirty="0"/>
           </a:p>
@@ -5951,7 +3060,7 @@
             <a:fld id="{B61BEF0D-F0BB-DE4B-95CE-6DB70DBA9567}" type="datetimeFigureOut">
               <a:rPr lang="en-US" dirty="0"/>
               <a:pPr/>
-              <a:t>9/19/2025</a:t>
+              <a:t>9/21/2025</a:t>
             </a:fld>
             <a:endParaRPr lang="en-US" dirty="0"/>
           </a:p>
@@ -6190,7 +3299,7 @@
             <a:fld id="{B61BEF0D-F0BB-DE4B-95CE-6DB70DBA9567}" type="datetimeFigureOut">
               <a:rPr lang="en-US" dirty="0"/>
               <a:pPr/>
-              <a:t>9/19/2025</a:t>
+              <a:t>9/21/2025</a:t>
             </a:fld>
             <a:endParaRPr lang="en-US" dirty="0"/>
           </a:p>
@@ -6809,29 +3918,7 @@
           <a:p>
             <a:r>
               <a:rPr lang="en-US" dirty="0"/>
-              <a:t>Welcome To Training</a:t>
-            </a:r>
-          </a:p>
-        </p:txBody>
-      </p:sp>
-      <p:sp>
-        <p:nvSpPr>
-          <p:cNvPr id="3" name="Subtitle 2"/>
-          <p:cNvSpPr>
-            <a:spLocks noGrp="1"/>
-          </p:cNvSpPr>
-          <p:nvPr>
-            <p:ph type="subTitle" idx="1"/>
-          </p:nvPr>
-        </p:nvSpPr>
-        <p:spPr/>
-        <p:txBody>
-          <a:bodyPr/>
-          <a:lstStyle/>
-          <a:p>
-            <a:r>
-              <a:rPr lang="en-US" dirty="0"/>
-              <a:t>An Introduction</a:t>
+              <a:t>HTML &amp; CSS</a:t>
             </a:r>
           </a:p>
         </p:txBody>
@@ -6871,7 +3958,7 @@
           <p:cNvPr id="2" name="Title 1">
             <a:extLst>
               <a:ext uri="{FF2B5EF4-FFF2-40B4-BE49-F238E27FC236}">
-                <a16:creationId xmlns:a16="http://schemas.microsoft.com/office/drawing/2014/main" id="{AC2C488F-53EE-158B-83F1-79F64C7EB47E}"/>
+                <a16:creationId xmlns:a16="http://schemas.microsoft.com/office/drawing/2014/main" id="{BCED98FA-9764-D2AA-5BFC-9F9105D6B5AB}"/>
               </a:ext>
             </a:extLst>
           </p:cNvPr>
@@ -6889,41 +3976,82 @@
           <a:p>
             <a:r>
               <a:rPr lang="en-US" dirty="0"/>
-              <a:t>Overview</a:t>
-            </a:r>
-          </a:p>
-        </p:txBody>
-      </p:sp>
-      <p:graphicFrame>
-        <p:nvGraphicFramePr>
-          <p:cNvPr id="5" name="Content Placeholder 2">
+              <a:t>What is HTML?</a:t>
+            </a:r>
+          </a:p>
+        </p:txBody>
+      </p:sp>
+      <p:sp>
+        <p:nvSpPr>
+          <p:cNvPr id="3" name="Content Placeholder 2">
             <a:extLst>
               <a:ext uri="{FF2B5EF4-FFF2-40B4-BE49-F238E27FC236}">
-                <a16:creationId xmlns:a16="http://schemas.microsoft.com/office/drawing/2014/main" id="{DBCF0C0D-391B-0915-F0DA-93E9EAB33EAA}"/>
+                <a16:creationId xmlns:a16="http://schemas.microsoft.com/office/drawing/2014/main" id="{C97DB542-4722-CBA0-5177-D4F999BEB043}"/>
               </a:ext>
             </a:extLst>
           </p:cNvPr>
-          <p:cNvGraphicFramePr>
-            <a:graphicFrameLocks noGrp="1"/>
-          </p:cNvGraphicFramePr>
+          <p:cNvSpPr>
+            <a:spLocks noGrp="1"/>
+          </p:cNvSpPr>
           <p:nvPr>
             <p:ph idx="1"/>
           </p:nvPr>
-        </p:nvGraphicFramePr>
-        <p:xfrm>
-          <a:off x="581192" y="2180496"/>
-          <a:ext cx="11029615" cy="3678303"/>
-        </p:xfrm>
-        <a:graphic>
-          <a:graphicData uri="http://schemas.openxmlformats.org/drawingml/2006/diagram">
-            <dgm:relIds xmlns:dgm="http://schemas.openxmlformats.org/drawingml/2006/diagram" xmlns:r="http://schemas.openxmlformats.org/officeDocument/2006/relationships" r:dm="rId2" r:lo="rId3" r:qs="rId4" r:cs="rId5"/>
-          </a:graphicData>
-        </a:graphic>
-      </p:graphicFrame>
+        </p:nvSpPr>
+        <p:spPr>
+          <a:xfrm>
+            <a:off x="581192" y="1938449"/>
+            <a:ext cx="11029615" cy="3678303"/>
+          </a:xfrm>
+        </p:spPr>
+        <p:txBody>
+          <a:bodyPr/>
+          <a:lstStyle/>
+          <a:p>
+            <a:r>
+              <a:rPr lang="en-US" dirty="0"/>
+              <a:t>Definition: </a:t>
+            </a:r>
+            <a:r>
+              <a:rPr lang="en-US" dirty="0">
+                <a:solidFill>
+                  <a:schemeClr val="accent2"/>
+                </a:solidFill>
+              </a:rPr>
+              <a:t>HTML</a:t>
+            </a:r>
+            <a:r>
+              <a:rPr lang="en-US" dirty="0"/>
+              <a:t> – </a:t>
+            </a:r>
+            <a:r>
+              <a:rPr lang="en-US" dirty="0" err="1"/>
+              <a:t>HyperText</a:t>
+            </a:r>
+            <a:r>
+              <a:rPr lang="en-US" dirty="0"/>
+              <a:t> Markup Language is the standard markup language used to create and structure content on the web. </a:t>
+            </a:r>
+          </a:p>
+          <a:p>
+            <a:pPr lvl="1"/>
+            <a:r>
+              <a:rPr lang="en-US" dirty="0"/>
+              <a:t>It tells browsers what to display (text, images, links, forms, etc.) and how to organize the content.</a:t>
+            </a:r>
+          </a:p>
+          <a:p>
+            <a:pPr lvl="1"/>
+            <a:r>
+              <a:rPr lang="en-US" dirty="0"/>
+              <a:t>Markup Language != Programming Language – HTML doesn’t do any logic, it structures information.</a:t>
+            </a:r>
+          </a:p>
+        </p:txBody>
+      </p:sp>
     </p:spTree>
     <p:extLst>
       <p:ext uri="{BB962C8B-B14F-4D97-AF65-F5344CB8AC3E}">
-        <p14:creationId xmlns:p14="http://schemas.microsoft.com/office/powerpoint/2010/main" val="3663456343"/>
+        <p14:creationId xmlns:p14="http://schemas.microsoft.com/office/powerpoint/2010/main" val="3451514112"/>
       </p:ext>
     </p:extLst>
   </p:cSld>
@@ -6938,7 +4066,13 @@
   <p:cSld>
     <p:spTree>
       <p:nvGrpSpPr>
-        <p:cNvPr id="1" name=""/>
+        <p:cNvPr id="1" name="">
+          <a:extLst>
+            <a:ext uri="{FF2B5EF4-FFF2-40B4-BE49-F238E27FC236}">
+              <a16:creationId xmlns:a16="http://schemas.microsoft.com/office/drawing/2014/main" id="{3F54B5BB-F81D-F145-7253-41B75CEC8606}"/>
+            </a:ext>
+          </a:extLst>
+        </p:cNvPr>
         <p:cNvGrpSpPr/>
         <p:nvPr/>
       </p:nvGrpSpPr>
@@ -6955,7 +4089,7 @@
           <p:cNvPr id="2" name="Title 1">
             <a:extLst>
               <a:ext uri="{FF2B5EF4-FFF2-40B4-BE49-F238E27FC236}">
-                <a16:creationId xmlns:a16="http://schemas.microsoft.com/office/drawing/2014/main" id="{1DD3C9AD-CEB2-5802-6F5E-C97C9360809F}"/>
+                <a16:creationId xmlns:a16="http://schemas.microsoft.com/office/drawing/2014/main" id="{C8EFAE85-F629-4FB0-2956-ED49F2F26D56}"/>
               </a:ext>
             </a:extLst>
           </p:cNvPr>
@@ -6973,7 +4107,7 @@
           <a:p>
             <a:r>
               <a:rPr lang="en-US" dirty="0"/>
-              <a:t>Introductions</a:t>
+              <a:t>Elements &amp; Tags</a:t>
             </a:r>
           </a:p>
         </p:txBody>
@@ -6983,7 +4117,7 @@
           <p:cNvPr id="3" name="Content Placeholder 2">
             <a:extLst>
               <a:ext uri="{FF2B5EF4-FFF2-40B4-BE49-F238E27FC236}">
-                <a16:creationId xmlns:a16="http://schemas.microsoft.com/office/drawing/2014/main" id="{67C6C32F-873A-1EB8-6503-0C374A94874A}"/>
+                <a16:creationId xmlns:a16="http://schemas.microsoft.com/office/drawing/2014/main" id="{315125C2-DF31-1C1C-9B89-211387C83113}"/>
               </a:ext>
             </a:extLst>
           </p:cNvPr>
@@ -6996,68 +4130,76 @@
         </p:nvSpPr>
         <p:spPr>
           <a:xfrm>
-            <a:off x="581192" y="2180496"/>
-            <a:ext cx="11029615" cy="3972217"/>
+            <a:off x="581193" y="2050711"/>
+            <a:ext cx="11029615" cy="748917"/>
           </a:xfrm>
         </p:spPr>
         <p:txBody>
           <a:bodyPr>
-            <a:normAutofit/>
+            <a:normAutofit fontScale="92500"/>
           </a:bodyPr>
           <a:lstStyle/>
           <a:p>
-            <a:pPr marL="305435" indent="-305435"/>
+            <a:r>
+              <a:rPr lang="en-US" dirty="0"/>
+              <a:t>Definition: </a:t>
+            </a:r>
             <a:r>
               <a:rPr lang="en-US" dirty="0">
-                <a:latin typeface="Gill Sans MT"/>
-                <a:cs typeface="Segoe UI"/>
+                <a:solidFill>
+                  <a:schemeClr val="accent2"/>
+                </a:solidFill>
               </a:rPr>
-              <a:t>I’ve been at Revature 4 years</a:t>
-            </a:r>
-          </a:p>
-          <a:p>
-            <a:pPr marL="305435" indent="-305435"/>
+              <a:t>Elements</a:t>
+            </a:r>
+            <a:r>
+              <a:rPr lang="en-US" dirty="0"/>
+              <a:t> and </a:t>
+            </a:r>
             <a:r>
               <a:rPr lang="en-US" dirty="0">
-                <a:latin typeface="Gill Sans MT"/>
-                <a:cs typeface="Segoe UI"/>
+                <a:solidFill>
+                  <a:schemeClr val="accent2"/>
+                </a:solidFill>
               </a:rPr>
-              <a:t>I teach Salesforce, ServiceNow, &amp; .NET</a:t>
-            </a:r>
-          </a:p>
-          <a:p>
-            <a:pPr marL="305435" indent="-305435"/>
+              <a:t>Tags</a:t>
+            </a:r>
+            <a:r>
+              <a:rPr lang="en-US" dirty="0"/>
+              <a:t> – define different parts of a webpage, they are the building blocks of the page. </a:t>
+            </a:r>
+          </a:p>
+          <a:p>
+            <a:r>
+              <a:rPr lang="en-US" dirty="0"/>
+              <a:t>Definition: </a:t>
+            </a:r>
             <a:r>
               <a:rPr lang="en-US" dirty="0">
-                <a:latin typeface="Gill Sans MT"/>
-                <a:cs typeface="Segoe UI"/>
+                <a:solidFill>
+                  <a:schemeClr val="accent2"/>
+                </a:solidFill>
               </a:rPr>
-              <a:t>Currently hold the CSA certification</a:t>
-            </a:r>
-          </a:p>
-          <a:p>
-            <a:pPr marL="305435" indent="-305435"/>
-            <a:r>
-              <a:rPr lang="en-US" dirty="0">
-                <a:latin typeface="Gill Sans MT"/>
-                <a:cs typeface="Segoe UI"/>
-              </a:rPr>
-              <a:t>Current favorite game: WoW </a:t>
+              <a:t>Attributes</a:t>
+            </a:r>
+            <a:r>
+              <a:rPr lang="en-US" dirty="0"/>
+              <a:t> – modifiers that either apply identification to an element or alter the elements behavior or styling.</a:t>
             </a:r>
           </a:p>
         </p:txBody>
       </p:sp>
       <p:pic>
         <p:nvPicPr>
-          <p:cNvPr id="5" name="Picture 4" descr="A person in a suit&#10;&#10;AI-generated content may be incorrect.">
+          <p:cNvPr id="3074" name="Picture 2">
             <a:extLst>
               <a:ext uri="{FF2B5EF4-FFF2-40B4-BE49-F238E27FC236}">
-                <a16:creationId xmlns:a16="http://schemas.microsoft.com/office/drawing/2014/main" id="{CC025A48-B339-8A17-FC35-75E691CF8E32}"/>
+                <a16:creationId xmlns:a16="http://schemas.microsoft.com/office/drawing/2014/main" id="{EF651936-D3F6-F4FE-AFF1-8B7F2C820D49}"/>
               </a:ext>
             </a:extLst>
           </p:cNvPr>
           <p:cNvPicPr>
-            <a:picLocks noChangeAspect="1"/>
+            <a:picLocks noChangeAspect="1" noChangeArrowheads="1"/>
           </p:cNvPicPr>
           <p:nvPr/>
         </p:nvPicPr>
@@ -7069,24 +4211,35 @@
               </a:ext>
             </a:extLst>
           </a:blip>
+          <a:srcRect/>
           <a:stretch>
             <a:fillRect/>
           </a:stretch>
         </p:blipFill>
-        <p:spPr>
-          <a:xfrm>
-            <a:off x="6800850" y="2737854"/>
-            <a:ext cx="2857500" cy="2857500"/>
+        <p:spPr bwMode="auto">
+          <a:xfrm>
+            <a:off x="3200400" y="2990949"/>
+            <a:ext cx="5791200" cy="3362325"/>
           </a:xfrm>
           <a:prstGeom prst="rect">
             <a:avLst/>
           </a:prstGeom>
+          <a:noFill/>
+          <a:extLst>
+            <a:ext uri="{909E8E84-426E-40DD-AFC4-6F175D3DCCD1}">
+              <a14:hiddenFill xmlns:a14="http://schemas.microsoft.com/office/drawing/2010/main">
+                <a:solidFill>
+                  <a:srgbClr val="FFFFFF"/>
+                </a:solidFill>
+              </a14:hiddenFill>
+            </a:ext>
+          </a:extLst>
         </p:spPr>
       </p:pic>
     </p:spTree>
     <p:extLst>
       <p:ext uri="{BB962C8B-B14F-4D97-AF65-F5344CB8AC3E}">
-        <p14:creationId xmlns:p14="http://schemas.microsoft.com/office/powerpoint/2010/main" val="487246811"/>
+        <p14:creationId xmlns:p14="http://schemas.microsoft.com/office/powerpoint/2010/main" val="678615049"/>
       </p:ext>
     </p:extLst>
   </p:cSld>
@@ -7099,17 +4252,15 @@
 <file path=ppt/slides/slide4.xml><?xml version="1.0" encoding="utf-8"?>
 <p:sld xmlns:a="http://schemas.openxmlformats.org/drawingml/2006/main" xmlns:r="http://schemas.openxmlformats.org/officeDocument/2006/relationships" xmlns:p="http://schemas.openxmlformats.org/presentationml/2006/main">
   <p:cSld>
-    <p:bg>
-      <p:bgPr>
-        <a:solidFill>
-          <a:schemeClr val="bg1"/>
-        </a:solidFill>
-        <a:effectLst/>
-      </p:bgPr>
-    </p:bg>
     <p:spTree>
       <p:nvGrpSpPr>
-        <p:cNvPr id="1" name=""/>
+        <p:cNvPr id="1" name="">
+          <a:extLst>
+            <a:ext uri="{FF2B5EF4-FFF2-40B4-BE49-F238E27FC236}">
+              <a16:creationId xmlns:a16="http://schemas.microsoft.com/office/drawing/2014/main" id="{F17DCC17-A883-CB7F-C4E3-A9970226B2A6}"/>
+            </a:ext>
+          </a:extLst>
+        </p:cNvPr>
         <p:cNvGrpSpPr/>
         <p:nvPr/>
       </p:nvGrpSpPr>
@@ -7126,7 +4277,7 @@
           <p:cNvPr id="2" name="Title 1">
             <a:extLst>
               <a:ext uri="{FF2B5EF4-FFF2-40B4-BE49-F238E27FC236}">
-                <a16:creationId xmlns:a16="http://schemas.microsoft.com/office/drawing/2014/main" id="{8E398399-EA03-424C-8D31-C6B6817F6EA9}"/>
+                <a16:creationId xmlns:a16="http://schemas.microsoft.com/office/drawing/2014/main" id="{CC66DC8C-99C9-50B3-E951-F16635EF19B4}"/>
               </a:ext>
             </a:extLst>
           </p:cNvPr>
@@ -7137,96 +4288,24 @@
             <p:ph type="title"/>
           </p:nvPr>
         </p:nvSpPr>
-        <p:spPr>
-          <a:xfrm>
-            <a:off x="581192" y="702156"/>
-            <a:ext cx="11029616" cy="1013800"/>
-          </a:xfrm>
-        </p:spPr>
-        <p:txBody>
-          <a:bodyPr>
-            <a:normAutofit/>
-          </a:bodyPr>
+        <p:spPr/>
+        <p:txBody>
+          <a:bodyPr/>
           <a:lstStyle/>
           <a:p>
             <a:r>
               <a:rPr lang="en-US" dirty="0"/>
-              <a:t>What to Expect</a:t>
-            </a:r>
-          </a:p>
-        </p:txBody>
-      </p:sp>
-      <p:sp>
-        <p:nvSpPr>
-          <p:cNvPr id="11" name="Rectangle 10">
+              <a:t>HTML Page Structure</a:t>
+            </a:r>
+          </a:p>
+        </p:txBody>
+      </p:sp>
+      <p:pic>
+        <p:nvPicPr>
+          <p:cNvPr id="7" name="Picture 6">
             <a:extLst>
               <a:ext uri="{FF2B5EF4-FFF2-40B4-BE49-F238E27FC236}">
-                <a16:creationId xmlns:a16="http://schemas.microsoft.com/office/drawing/2014/main" id="{9AE5ECF4-F003-4F1C-B9D1-DBB1C70A8F2D}"/>
-              </a:ext>
-              <a:ext uri="{C183D7F6-B498-43B3-948B-1728B52AA6E4}">
-                <adec:decorative xmlns:adec="http://schemas.microsoft.com/office/drawing/2017/decorative" val="1"/>
-              </a:ext>
-            </a:extLst>
-          </p:cNvPr>
-          <p:cNvSpPr>
-            <a:spLocks noGrp="1" noRot="1" noChangeAspect="1" noMove="1" noResize="1" noEditPoints="1" noAdjustHandles="1" noChangeArrowheads="1" noChangeShapeType="1" noTextEdit="1"/>
-          </p:cNvSpPr>
-          <p:nvPr>
-            <p:extLst>
-              <p:ext uri="{386F3935-93C4-4BCD-93E2-E3B085C9AB24}">
-                <p16:designElem xmlns:p16="http://schemas.microsoft.com/office/powerpoint/2015/main" val="1"/>
-              </p:ext>
-            </p:extLst>
-          </p:nvPr>
-        </p:nvSpPr>
-        <p:spPr>
-          <a:xfrm>
-            <a:off x="446534" y="2180496"/>
-            <a:ext cx="3703320" cy="4045683"/>
-          </a:xfrm>
-          <a:prstGeom prst="rect">
-            <a:avLst/>
-          </a:prstGeom>
-          <a:solidFill>
-            <a:schemeClr val="bg1"/>
-          </a:solidFill>
-          <a:ln w="38100">
-            <a:solidFill>
-              <a:schemeClr val="accent1"/>
-            </a:solidFill>
-          </a:ln>
-        </p:spPr>
-        <p:style>
-          <a:lnRef idx="2">
-            <a:schemeClr val="accent1">
-              <a:shade val="50000"/>
-            </a:schemeClr>
-          </a:lnRef>
-          <a:fillRef idx="1">
-            <a:schemeClr val="accent1"/>
-          </a:fillRef>
-          <a:effectRef idx="0">
-            <a:schemeClr val="accent1"/>
-          </a:effectRef>
-          <a:fontRef idx="minor">
-            <a:schemeClr val="lt1"/>
-          </a:fontRef>
-        </p:style>
-        <p:txBody>
-          <a:bodyPr rtlCol="0" anchor="ctr"/>
-          <a:lstStyle/>
-          <a:p>
-            <a:pPr algn="ctr"/>
-            <a:endParaRPr lang="en-US"/>
-          </a:p>
-        </p:txBody>
-      </p:sp>
-      <p:pic>
-        <p:nvPicPr>
-          <p:cNvPr id="6" name="Picture 5" descr="A logo of a coffee cup&#10;&#10;AI-generated content may be incorrect.">
-            <a:extLst>
-              <a:ext uri="{FF2B5EF4-FFF2-40B4-BE49-F238E27FC236}">
-                <a16:creationId xmlns:a16="http://schemas.microsoft.com/office/drawing/2014/main" id="{1443CB83-FEC9-7C45-7E5D-605CF7E416A7}"/>
+                <a16:creationId xmlns:a16="http://schemas.microsoft.com/office/drawing/2014/main" id="{AC6B5967-D522-6A04-DD34-083435BEC252}"/>
               </a:ext>
             </a:extLst>
           </p:cNvPr>
@@ -7236,138 +4315,98 @@
           <p:nvPr/>
         </p:nvPicPr>
         <p:blipFill>
-          <a:blip r:embed="rId2" cstate="print">
-            <a:extLst>
-              <a:ext uri="{28A0092B-C50C-407E-A947-70E740481C1C}">
-                <a14:useLocalDpi xmlns:a14="http://schemas.microsoft.com/office/drawing/2010/main" val="0"/>
-              </a:ext>
-            </a:extLst>
-          </a:blip>
+          <a:blip r:embed="rId2"/>
           <a:stretch>
             <a:fillRect/>
           </a:stretch>
         </p:blipFill>
         <p:spPr>
           <a:xfrm>
-            <a:off x="887110" y="2361057"/>
-            <a:ext cx="2845404" cy="1778378"/>
+            <a:off x="674711" y="2303748"/>
+            <a:ext cx="5801535" cy="3810532"/>
           </a:xfrm>
           <a:prstGeom prst="rect">
             <a:avLst/>
           </a:prstGeom>
         </p:spPr>
       </p:pic>
-      <p:pic>
-        <p:nvPicPr>
-          <p:cNvPr id="4" name="Picture 3" descr="ServiceNow logo transparent PNG - StickPNG">
+      <p:sp>
+        <p:nvSpPr>
+          <p:cNvPr id="8" name="TextBox 7">
             <a:extLst>
               <a:ext uri="{FF2B5EF4-FFF2-40B4-BE49-F238E27FC236}">
-                <a16:creationId xmlns:a16="http://schemas.microsoft.com/office/drawing/2014/main" id="{9720925D-B793-4C31-82D2-B813C1DC8C88}"/>
+                <a16:creationId xmlns:a16="http://schemas.microsoft.com/office/drawing/2014/main" id="{F1D90330-908D-1200-5BE0-49E33DABFCA7}"/>
               </a:ext>
             </a:extLst>
           </p:cNvPr>
-          <p:cNvPicPr>
-            <a:picLocks noChangeAspect="1"/>
-          </p:cNvPicPr>
+          <p:cNvSpPr txBox="1"/>
           <p:nvPr/>
-        </p:nvPicPr>
-        <p:blipFill>
-          <a:blip r:embed="rId3"/>
-          <a:stretch>
-            <a:fillRect/>
-          </a:stretch>
-        </p:blipFill>
-        <p:spPr>
-          <a:xfrm>
-            <a:off x="657225" y="4836014"/>
-            <a:ext cx="3305175" cy="570142"/>
+        </p:nvSpPr>
+        <p:spPr>
+          <a:xfrm>
+            <a:off x="7037294" y="3331851"/>
+            <a:ext cx="3908612" cy="1754326"/>
           </a:xfrm>
           <a:prstGeom prst="rect">
             <a:avLst/>
           </a:prstGeom>
-        </p:spPr>
-      </p:pic>
-      <p:sp>
-        <p:nvSpPr>
-          <p:cNvPr id="3" name="Content Placeholder 2">
-            <a:extLst>
-              <a:ext uri="{FF2B5EF4-FFF2-40B4-BE49-F238E27FC236}">
-                <a16:creationId xmlns:a16="http://schemas.microsoft.com/office/drawing/2014/main" id="{F6826B51-4938-4211-37F2-2A081C5D1792}"/>
-              </a:ext>
-            </a:extLst>
-          </p:cNvPr>
-          <p:cNvSpPr>
-            <a:spLocks noGrp="1"/>
-          </p:cNvSpPr>
-          <p:nvPr>
-            <p:ph idx="1"/>
-          </p:nvPr>
-        </p:nvSpPr>
-        <p:spPr>
-          <a:xfrm>
-            <a:off x="4505325" y="2180496"/>
-            <a:ext cx="7105481" cy="4045683"/>
-          </a:xfrm>
-        </p:spPr>
-        <p:txBody>
-          <a:bodyPr>
-            <a:normAutofit/>
+          <a:noFill/>
+        </p:spPr>
+        <p:txBody>
+          <a:bodyPr wrap="square" rtlCol="0">
+            <a:spAutoFit/>
           </a:bodyPr>
           <a:lstStyle/>
           <a:p>
-            <a:pPr marL="305435" indent="-305435"/>
-            <a:r>
-              <a:rPr lang="en-US" dirty="0"/>
-              <a:t>13-week course</a:t>
-            </a:r>
-          </a:p>
-          <a:p>
-            <a:pPr marL="629435" lvl="1" indent="-305435"/>
-            <a:r>
-              <a:rPr lang="en-US" dirty="0"/>
-              <a:t>First 8 weeks is ServiceNow</a:t>
-            </a:r>
-          </a:p>
-          <a:p>
-            <a:pPr marL="629435" lvl="1" indent="-305435"/>
-            <a:r>
-              <a:rPr lang="en-US" dirty="0"/>
-              <a:t>Remaining 5 weeks will focus on Java</a:t>
-            </a:r>
-          </a:p>
-          <a:p>
-            <a:pPr marL="305435" indent="-305435"/>
-            <a:r>
-              <a:rPr lang="en-US" dirty="0"/>
-              <a:t>Various Assessment Types</a:t>
-            </a:r>
-          </a:p>
-          <a:p>
-            <a:pPr marL="629435" lvl="1" indent="-305435"/>
-            <a:r>
-              <a:rPr lang="en-US" dirty="0"/>
-              <a:t>Exams – Multiple Choice, Multiple Select, Short Answers</a:t>
-            </a:r>
-          </a:p>
-          <a:p>
-            <a:pPr marL="629435" lvl="1" indent="-305435"/>
-            <a:r>
-              <a:rPr lang="en-US" dirty="0"/>
-              <a:t>QC – Panel-Type Live Interviews</a:t>
-            </a:r>
-          </a:p>
-          <a:p>
-            <a:pPr marL="629435" lvl="1" indent="-305435"/>
-            <a:r>
-              <a:rPr lang="en-US" dirty="0"/>
-              <a:t>1-on-1s – Evaluations completed by the trainer (Loom or face-to-face)</a:t>
-            </a:r>
-          </a:p>
-          <a:p>
-            <a:pPr marL="629435" lvl="1" indent="-305435"/>
-            <a:r>
-              <a:rPr lang="en-US" dirty="0"/>
-              <a:t>Projects – Assigned project work that covers discussed topics (keep up day-to-day and you won’t be behind)</a:t>
+            <a:pPr marL="285750" indent="-285750">
+              <a:buClr>
+                <a:schemeClr val="accent2"/>
+              </a:buClr>
+              <a:buFont typeface="Wingdings" panose="05000000000000000000" pitchFamily="2" charset="2"/>
+              <a:buChar char="§"/>
+            </a:pPr>
+            <a:r>
+              <a:rPr lang="en-US" dirty="0"/>
+              <a:t>&lt;!DOCTYPE html&gt; defines the page document type and version</a:t>
+            </a:r>
+          </a:p>
+          <a:p>
+            <a:pPr marL="285750" indent="-285750">
+              <a:buClr>
+                <a:schemeClr val="accent2"/>
+              </a:buClr>
+              <a:buFont typeface="Wingdings" panose="05000000000000000000" pitchFamily="2" charset="2"/>
+              <a:buChar char="§"/>
+            </a:pPr>
+            <a:r>
+              <a:rPr lang="en-US" dirty="0"/>
+              <a:t>&lt;html&gt; is the root element</a:t>
+            </a:r>
+          </a:p>
+          <a:p>
+            <a:pPr marL="285750" indent="-285750">
+              <a:buClr>
+                <a:schemeClr val="accent2"/>
+              </a:buClr>
+              <a:buFont typeface="Wingdings" panose="05000000000000000000" pitchFamily="2" charset="2"/>
+              <a:buChar char="§"/>
+            </a:pPr>
+            <a:r>
+              <a:rPr lang="en-US" dirty="0"/>
+              <a:t>&lt;head&gt; is where metadata is defined</a:t>
+            </a:r>
+          </a:p>
+          <a:p>
+            <a:pPr marL="285750" indent="-285750">
+              <a:buClr>
+                <a:schemeClr val="accent2"/>
+              </a:buClr>
+              <a:buFont typeface="Wingdings" panose="05000000000000000000" pitchFamily="2" charset="2"/>
+              <a:buChar char="§"/>
+            </a:pPr>
+            <a:r>
+              <a:rPr lang="en-US" dirty="0"/>
+              <a:t>&lt;body&gt; is where we include content that will be visible to the user</a:t>
             </a:r>
           </a:p>
         </p:txBody>
@@ -7375,7 +4414,7 @@
     </p:spTree>
     <p:extLst>
       <p:ext uri="{BB962C8B-B14F-4D97-AF65-F5344CB8AC3E}">
-        <p14:creationId xmlns:p14="http://schemas.microsoft.com/office/powerpoint/2010/main" val="2540692116"/>
+        <p14:creationId xmlns:p14="http://schemas.microsoft.com/office/powerpoint/2010/main" val="3937583421"/>
       </p:ext>
     </p:extLst>
   </p:cSld>
@@ -7386,240 +4425,6 @@
 </file>
 
 <file path=ppt/slides/slide5.xml><?xml version="1.0" encoding="utf-8"?>
-<p:sld xmlns:a="http://schemas.openxmlformats.org/drawingml/2006/main" xmlns:r="http://schemas.openxmlformats.org/officeDocument/2006/relationships" xmlns:p="http://schemas.openxmlformats.org/presentationml/2006/main">
-  <p:cSld>
-    <p:spTree>
-      <p:nvGrpSpPr>
-        <p:cNvPr id="1" name=""/>
-        <p:cNvGrpSpPr/>
-        <p:nvPr/>
-      </p:nvGrpSpPr>
-      <p:grpSpPr>
-        <a:xfrm>
-          <a:off x="0" y="0"/>
-          <a:ext cx="0" cy="0"/>
-          <a:chOff x="0" y="0"/>
-          <a:chExt cx="0" cy="0"/>
-        </a:xfrm>
-      </p:grpSpPr>
-      <p:sp>
-        <p:nvSpPr>
-          <p:cNvPr id="2" name="Title 1">
-            <a:extLst>
-              <a:ext uri="{FF2B5EF4-FFF2-40B4-BE49-F238E27FC236}">
-                <a16:creationId xmlns:a16="http://schemas.microsoft.com/office/drawing/2014/main" id="{04992356-009E-B671-396C-A5A470486D9E}"/>
-              </a:ext>
-            </a:extLst>
-          </p:cNvPr>
-          <p:cNvSpPr>
-            <a:spLocks noGrp="1"/>
-          </p:cNvSpPr>
-          <p:nvPr>
-            <p:ph type="title"/>
-          </p:nvPr>
-        </p:nvSpPr>
-        <p:spPr/>
-        <p:txBody>
-          <a:bodyPr/>
-          <a:lstStyle/>
-          <a:p>
-            <a:r>
-              <a:rPr lang="en-US" dirty="0"/>
-              <a:t>How to Excel in this Course</a:t>
-            </a:r>
-          </a:p>
-        </p:txBody>
-      </p:sp>
-      <p:sp>
-        <p:nvSpPr>
-          <p:cNvPr id="3" name="Content Placeholder 2">
-            <a:extLst>
-              <a:ext uri="{FF2B5EF4-FFF2-40B4-BE49-F238E27FC236}">
-                <a16:creationId xmlns:a16="http://schemas.microsoft.com/office/drawing/2014/main" id="{429EFB58-5DAE-C3C2-2D49-7AE40E75910D}"/>
-              </a:ext>
-            </a:extLst>
-          </p:cNvPr>
-          <p:cNvSpPr>
-            <a:spLocks noGrp="1"/>
-          </p:cNvSpPr>
-          <p:nvPr>
-            <p:ph idx="1"/>
-          </p:nvPr>
-        </p:nvSpPr>
-        <p:spPr>
-          <a:xfrm>
-            <a:off x="581191" y="2052918"/>
-            <a:ext cx="11029615" cy="1681246"/>
-          </a:xfrm>
-        </p:spPr>
-        <p:txBody>
-          <a:bodyPr/>
-          <a:lstStyle/>
-          <a:p>
-            <a:r>
-              <a:rPr lang="en-US" dirty="0"/>
-              <a:t>We will use slide decks throughout the course. </a:t>
-            </a:r>
-          </a:p>
-          <a:p>
-            <a:r>
-              <a:rPr lang="en-US" dirty="0"/>
-              <a:t>If it is on the slide deck, it is important, and you should consider writing it down. </a:t>
-            </a:r>
-          </a:p>
-          <a:p>
-            <a:r>
-              <a:rPr lang="en-US" dirty="0"/>
-              <a:t>Sometimes, you may see a definition, like this:</a:t>
-            </a:r>
-          </a:p>
-          <a:p>
-            <a:endParaRPr lang="en-US" dirty="0"/>
-          </a:p>
-        </p:txBody>
-      </p:sp>
-      <p:sp>
-        <p:nvSpPr>
-          <p:cNvPr id="4" name="TextBox 3">
-            <a:extLst>
-              <a:ext uri="{FF2B5EF4-FFF2-40B4-BE49-F238E27FC236}">
-                <a16:creationId xmlns:a16="http://schemas.microsoft.com/office/drawing/2014/main" id="{0352E508-0D10-9772-84C7-FCC523BB1A8A}"/>
-              </a:ext>
-            </a:extLst>
-          </p:cNvPr>
-          <p:cNvSpPr txBox="1"/>
-          <p:nvPr/>
-        </p:nvSpPr>
-        <p:spPr>
-          <a:xfrm>
-            <a:off x="1739151" y="3429000"/>
-            <a:ext cx="8713694" cy="646331"/>
-          </a:xfrm>
-          <a:prstGeom prst="rect">
-            <a:avLst/>
-          </a:prstGeom>
-          <a:noFill/>
-        </p:spPr>
-        <p:txBody>
-          <a:bodyPr wrap="square" rtlCol="0">
-            <a:spAutoFit/>
-          </a:bodyPr>
-          <a:lstStyle/>
-          <a:p>
-            <a:r>
-              <a:rPr lang="en-US" dirty="0"/>
-              <a:t>Definition: </a:t>
-            </a:r>
-            <a:r>
-              <a:rPr lang="en-US" dirty="0">
-                <a:solidFill>
-                  <a:srgbClr val="00B050"/>
-                </a:solidFill>
-              </a:rPr>
-              <a:t>ServiceNow</a:t>
-            </a:r>
-            <a:r>
-              <a:rPr lang="en-US" dirty="0"/>
-              <a:t> – A cloud-based, ITSM platform that helps organizations manage and automate their work processes across IT, HR, Customer Service, and more. </a:t>
-            </a:r>
-          </a:p>
-        </p:txBody>
-      </p:sp>
-      <p:sp>
-        <p:nvSpPr>
-          <p:cNvPr id="5" name="TextBox 4">
-            <a:extLst>
-              <a:ext uri="{FF2B5EF4-FFF2-40B4-BE49-F238E27FC236}">
-                <a16:creationId xmlns:a16="http://schemas.microsoft.com/office/drawing/2014/main" id="{A54BB974-FD75-0303-8FBE-56D4DFC4209D}"/>
-              </a:ext>
-            </a:extLst>
-          </p:cNvPr>
-          <p:cNvSpPr txBox="1"/>
-          <p:nvPr/>
-        </p:nvSpPr>
-        <p:spPr>
-          <a:xfrm>
-            <a:off x="581190" y="4361691"/>
-            <a:ext cx="8858645" cy="1477328"/>
-          </a:xfrm>
-          <a:prstGeom prst="rect">
-            <a:avLst/>
-          </a:prstGeom>
-          <a:noFill/>
-        </p:spPr>
-        <p:txBody>
-          <a:bodyPr wrap="square" rtlCol="0">
-            <a:spAutoFit/>
-          </a:bodyPr>
-          <a:lstStyle/>
-          <a:p>
-            <a:pPr marL="285750" indent="-285750">
-              <a:buClr>
-                <a:schemeClr val="accent2"/>
-              </a:buClr>
-              <a:buFont typeface="Wingdings" panose="05000000000000000000" pitchFamily="2" charset="2"/>
-              <a:buChar char="§"/>
-            </a:pPr>
-            <a:r>
-              <a:rPr lang="en-US" dirty="0"/>
-              <a:t>If you see a definition:</a:t>
-            </a:r>
-          </a:p>
-          <a:p>
-            <a:pPr marL="742950" lvl="1" indent="-285750">
-              <a:buClr>
-                <a:schemeClr val="accent2"/>
-              </a:buClr>
-              <a:buFont typeface="Wingdings" panose="05000000000000000000" pitchFamily="2" charset="2"/>
-              <a:buChar char="§"/>
-            </a:pPr>
-            <a:r>
-              <a:rPr lang="en-US" dirty="0"/>
-              <a:t>Write it down</a:t>
-            </a:r>
-          </a:p>
-          <a:p>
-            <a:pPr marL="742950" lvl="1" indent="-285750">
-              <a:buClr>
-                <a:schemeClr val="accent2"/>
-              </a:buClr>
-              <a:buFont typeface="Wingdings" panose="05000000000000000000" pitchFamily="2" charset="2"/>
-              <a:buChar char="§"/>
-            </a:pPr>
-            <a:r>
-              <a:rPr lang="en-US" dirty="0"/>
-              <a:t>Write down what its context is in the larger scope</a:t>
-            </a:r>
-          </a:p>
-          <a:p>
-            <a:pPr marL="742950" lvl="1" indent="-285750">
-              <a:buClr>
-                <a:schemeClr val="accent2"/>
-              </a:buClr>
-              <a:buFont typeface="Wingdings" panose="05000000000000000000" pitchFamily="2" charset="2"/>
-              <a:buChar char="§"/>
-            </a:pPr>
-            <a:r>
-              <a:rPr lang="en-US" dirty="0"/>
-              <a:t>E.G. ServiceNow is often just one piece in an enterprise system.  An organization may have many off-the-shelf software products that may integrate with ServiceNow.</a:t>
-            </a:r>
-          </a:p>
-        </p:txBody>
-      </p:sp>
-    </p:spTree>
-    <p:extLst>
-      <p:ext uri="{BB962C8B-B14F-4D97-AF65-F5344CB8AC3E}">
-        <p14:creationId xmlns:p14="http://schemas.microsoft.com/office/powerpoint/2010/main" val="3870370440"/>
-      </p:ext>
-    </p:extLst>
-  </p:cSld>
-  <p:clrMapOvr>
-    <a:masterClrMapping/>
-  </p:clrMapOvr>
-</p:sld>
-</file>
-
-<file path=ppt/slides/slide6.xml><?xml version="1.0" encoding="utf-8"?>
 <p:sld xmlns:a="http://schemas.openxmlformats.org/drawingml/2006/main" xmlns:r="http://schemas.openxmlformats.org/officeDocument/2006/relationships" xmlns:p="http://schemas.openxmlformats.org/presentationml/2006/main">
   <p:cSld>
     <p:spTree>

--- a/Week_1/003-HTML_&_CSS/HTML-CSS.pptx
+++ b/Week_1/003-HTML_&_CSS/HTML-CSS.pptx
@@ -9,7 +9,24 @@
     <p:sldId id="263" r:id="rId3"/>
     <p:sldId id="264" r:id="rId4"/>
     <p:sldId id="265" r:id="rId5"/>
-    <p:sldId id="262" r:id="rId6"/>
+    <p:sldId id="267" r:id="rId6"/>
+    <p:sldId id="262" r:id="rId7"/>
+    <p:sldId id="266" r:id="rId8"/>
+    <p:sldId id="268" r:id="rId9"/>
+    <p:sldId id="269" r:id="rId10"/>
+    <p:sldId id="270" r:id="rId11"/>
+    <p:sldId id="272" r:id="rId12"/>
+    <p:sldId id="271" r:id="rId13"/>
+    <p:sldId id="273" r:id="rId14"/>
+    <p:sldId id="274" r:id="rId15"/>
+    <p:sldId id="275" r:id="rId16"/>
+    <p:sldId id="276" r:id="rId17"/>
+    <p:sldId id="278" r:id="rId18"/>
+    <p:sldId id="279" r:id="rId19"/>
+    <p:sldId id="280" r:id="rId20"/>
+    <p:sldId id="281" r:id="rId21"/>
+    <p:sldId id="282" r:id="rId22"/>
+    <p:sldId id="277" r:id="rId23"/>
   </p:sldIdLst>
   <p:sldSz cx="12192000" cy="6858000"/>
   <p:notesSz cx="6858000" cy="9144000"/>
@@ -369,7 +386,7 @@
             <a:fld id="{B61BEF0D-F0BB-DE4B-95CE-6DB70DBA9567}" type="datetimeFigureOut">
               <a:rPr lang="en-US" dirty="0"/>
               <a:pPr/>
-              <a:t>9/21/2025</a:t>
+              <a:t>9/22/2025</a:t>
             </a:fld>
             <a:endParaRPr lang="en-US" dirty="0"/>
           </a:p>
@@ -631,7 +648,7 @@
             <a:fld id="{B61BEF0D-F0BB-DE4B-95CE-6DB70DBA9567}" type="datetimeFigureOut">
               <a:rPr lang="en-US" dirty="0"/>
               <a:pPr/>
-              <a:t>9/21/2025</a:t>
+              <a:t>9/22/2025</a:t>
             </a:fld>
             <a:endParaRPr lang="en-US" dirty="0"/>
           </a:p>
@@ -866,7 +883,7 @@
             <a:fld id="{B61BEF0D-F0BB-DE4B-95CE-6DB70DBA9567}" type="datetimeFigureOut">
               <a:rPr lang="en-US" dirty="0"/>
               <a:pPr/>
-              <a:t>9/21/2025</a:t>
+              <a:t>9/22/2025</a:t>
             </a:fld>
             <a:endParaRPr lang="en-US" dirty="0"/>
           </a:p>
@@ -1106,7 +1123,7 @@
             <a:fld id="{B61BEF0D-F0BB-DE4B-95CE-6DB70DBA9567}" type="datetimeFigureOut">
               <a:rPr lang="en-US" dirty="0"/>
               <a:pPr/>
-              <a:t>9/21/2025</a:t>
+              <a:t>9/22/2025</a:t>
             </a:fld>
             <a:endParaRPr lang="en-US" dirty="0"/>
           </a:p>
@@ -1414,7 +1431,7 @@
             <a:fld id="{B61BEF0D-F0BB-DE4B-95CE-6DB70DBA9567}" type="datetimeFigureOut">
               <a:rPr lang="en-US" dirty="0"/>
               <a:pPr/>
-              <a:t>9/21/2025</a:t>
+              <a:t>9/22/2025</a:t>
             </a:fld>
             <a:endParaRPr lang="en-US" dirty="0"/>
           </a:p>
@@ -1715,7 +1732,7 @@
             <a:fld id="{B61BEF0D-F0BB-DE4B-95CE-6DB70DBA9567}" type="datetimeFigureOut">
               <a:rPr lang="en-US" dirty="0"/>
               <a:pPr/>
-              <a:t>9/21/2025</a:t>
+              <a:t>9/22/2025</a:t>
             </a:fld>
             <a:endParaRPr lang="en-US" dirty="0"/>
           </a:p>
@@ -2136,7 +2153,7 @@
             <a:fld id="{B61BEF0D-F0BB-DE4B-95CE-6DB70DBA9567}" type="datetimeFigureOut">
               <a:rPr lang="en-US" dirty="0"/>
               <a:pPr/>
-              <a:t>9/21/2025</a:t>
+              <a:t>9/22/2025</a:t>
             </a:fld>
             <a:endParaRPr lang="en-US" dirty="0"/>
           </a:p>
@@ -2299,7 +2316,7 @@
             <a:fld id="{B61BEF0D-F0BB-DE4B-95CE-6DB70DBA9567}" type="datetimeFigureOut">
               <a:rPr lang="en-US" dirty="0"/>
               <a:pPr/>
-              <a:t>9/21/2025</a:t>
+              <a:t>9/22/2025</a:t>
             </a:fld>
             <a:endParaRPr lang="en-US" dirty="0"/>
           </a:p>
@@ -2396,7 +2413,7 @@
             <a:fld id="{B61BEF0D-F0BB-DE4B-95CE-6DB70DBA9567}" type="datetimeFigureOut">
               <a:rPr lang="en-US" dirty="0"/>
               <a:pPr/>
-              <a:t>9/21/2025</a:t>
+              <a:t>9/22/2025</a:t>
             </a:fld>
             <a:endParaRPr lang="en-US" dirty="0"/>
           </a:p>
@@ -2774,7 +2791,7 @@
             <a:fld id="{B61BEF0D-F0BB-DE4B-95CE-6DB70DBA9567}" type="datetimeFigureOut">
               <a:rPr lang="en-US" dirty="0"/>
               <a:pPr/>
-              <a:t>9/21/2025</a:t>
+              <a:t>9/22/2025</a:t>
             </a:fld>
             <a:endParaRPr lang="en-US" dirty="0"/>
           </a:p>
@@ -3060,7 +3077,7 @@
             <a:fld id="{B61BEF0D-F0BB-DE4B-95CE-6DB70DBA9567}" type="datetimeFigureOut">
               <a:rPr lang="en-US" dirty="0"/>
               <a:pPr/>
-              <a:t>9/21/2025</a:t>
+              <a:t>9/22/2025</a:t>
             </a:fld>
             <a:endParaRPr lang="en-US" dirty="0"/>
           </a:p>
@@ -3299,7 +3316,7 @@
             <a:fld id="{B61BEF0D-F0BB-DE4B-95CE-6DB70DBA9567}" type="datetimeFigureOut">
               <a:rPr lang="en-US" dirty="0"/>
               <a:pPr/>
-              <a:t>9/21/2025</a:t>
+              <a:t>9/22/2025</a:t>
             </a:fld>
             <a:endParaRPr lang="en-US" dirty="0"/>
           </a:p>
@@ -3918,7 +3935,7 @@
           <a:p>
             <a:r>
               <a:rPr lang="en-US" dirty="0"/>
-              <a:t>HTML &amp; CSS</a:t>
+              <a:t>HTML</a:t>
             </a:r>
           </a:p>
         </p:txBody>
@@ -3927,6 +3944,2414 @@
     <p:extLst>
       <p:ext uri="{BB962C8B-B14F-4D97-AF65-F5344CB8AC3E}">
         <p14:creationId xmlns:p14="http://schemas.microsoft.com/office/powerpoint/2010/main" val="109857222"/>
+      </p:ext>
+    </p:extLst>
+  </p:cSld>
+  <p:clrMapOvr>
+    <a:masterClrMapping/>
+  </p:clrMapOvr>
+</p:sld>
+</file>
+
+<file path=ppt/slides/slide10.xml><?xml version="1.0" encoding="utf-8"?>
+<p:sld xmlns:a="http://schemas.openxmlformats.org/drawingml/2006/main" xmlns:r="http://schemas.openxmlformats.org/officeDocument/2006/relationships" xmlns:p="http://schemas.openxmlformats.org/presentationml/2006/main">
+  <p:cSld>
+    <p:spTree>
+      <p:nvGrpSpPr>
+        <p:cNvPr id="1" name=""/>
+        <p:cNvGrpSpPr/>
+        <p:nvPr/>
+      </p:nvGrpSpPr>
+      <p:grpSpPr>
+        <a:xfrm>
+          <a:off x="0" y="0"/>
+          <a:ext cx="0" cy="0"/>
+          <a:chOff x="0" y="0"/>
+          <a:chExt cx="0" cy="0"/>
+        </a:xfrm>
+      </p:grpSpPr>
+      <p:sp>
+        <p:nvSpPr>
+          <p:cNvPr id="2" name="Title 1">
+            <a:extLst>
+              <a:ext uri="{FF2B5EF4-FFF2-40B4-BE49-F238E27FC236}">
+                <a16:creationId xmlns:a16="http://schemas.microsoft.com/office/drawing/2014/main" id="{B9270620-8DC3-2E8C-C9B4-7E32BB3DAE87}"/>
+              </a:ext>
+            </a:extLst>
+          </p:cNvPr>
+          <p:cNvSpPr>
+            <a:spLocks noGrp="1"/>
+          </p:cNvSpPr>
+          <p:nvPr>
+            <p:ph type="title"/>
+          </p:nvPr>
+        </p:nvSpPr>
+        <p:spPr/>
+        <p:txBody>
+          <a:bodyPr/>
+          <a:lstStyle/>
+          <a:p>
+            <a:r>
+              <a:rPr lang="en-US" dirty="0"/>
+              <a:t>Block vs inline</a:t>
+            </a:r>
+          </a:p>
+        </p:txBody>
+      </p:sp>
+      <p:sp>
+        <p:nvSpPr>
+          <p:cNvPr id="3" name="Content Placeholder 2">
+            <a:extLst>
+              <a:ext uri="{FF2B5EF4-FFF2-40B4-BE49-F238E27FC236}">
+                <a16:creationId xmlns:a16="http://schemas.microsoft.com/office/drawing/2014/main" id="{A2875E89-814E-723B-9AF5-309A346D9417}"/>
+              </a:ext>
+            </a:extLst>
+          </p:cNvPr>
+          <p:cNvSpPr>
+            <a:spLocks noGrp="1"/>
+          </p:cNvSpPr>
+          <p:nvPr>
+            <p:ph idx="1"/>
+          </p:nvPr>
+        </p:nvSpPr>
+        <p:spPr>
+          <a:xfrm>
+            <a:off x="581192" y="2180497"/>
+            <a:ext cx="11029615" cy="1664140"/>
+          </a:xfrm>
+        </p:spPr>
+        <p:txBody>
+          <a:bodyPr/>
+          <a:lstStyle/>
+          <a:p>
+            <a:r>
+              <a:rPr lang="en-US" dirty="0"/>
+              <a:t>div takes up all of the available width of its container element</a:t>
+            </a:r>
+          </a:p>
+          <a:p>
+            <a:r>
+              <a:rPr lang="en-US" dirty="0"/>
+              <a:t>span does NOT take up all the width of its container element</a:t>
+            </a:r>
+          </a:p>
+        </p:txBody>
+      </p:sp>
+      <p:pic>
+        <p:nvPicPr>
+          <p:cNvPr id="5" name="Picture 4">
+            <a:extLst>
+              <a:ext uri="{FF2B5EF4-FFF2-40B4-BE49-F238E27FC236}">
+                <a16:creationId xmlns:a16="http://schemas.microsoft.com/office/drawing/2014/main" id="{8F3D87B7-9D7A-98EA-B60D-17051A0CB955}"/>
+              </a:ext>
+            </a:extLst>
+          </p:cNvPr>
+          <p:cNvPicPr>
+            <a:picLocks noChangeAspect="1"/>
+          </p:cNvPicPr>
+          <p:nvPr/>
+        </p:nvPicPr>
+        <p:blipFill>
+          <a:blip r:embed="rId2"/>
+          <a:stretch>
+            <a:fillRect/>
+          </a:stretch>
+        </p:blipFill>
+        <p:spPr>
+          <a:xfrm>
+            <a:off x="294464" y="3879635"/>
+            <a:ext cx="5801535" cy="724001"/>
+          </a:xfrm>
+          <a:prstGeom prst="rect">
+            <a:avLst/>
+          </a:prstGeom>
+        </p:spPr>
+      </p:pic>
+      <p:pic>
+        <p:nvPicPr>
+          <p:cNvPr id="7" name="Picture 6">
+            <a:extLst>
+              <a:ext uri="{FF2B5EF4-FFF2-40B4-BE49-F238E27FC236}">
+                <a16:creationId xmlns:a16="http://schemas.microsoft.com/office/drawing/2014/main" id="{00DD80AC-7E3C-22B3-5E03-D58A5286EEFF}"/>
+              </a:ext>
+            </a:extLst>
+          </p:cNvPr>
+          <p:cNvPicPr>
+            <a:picLocks noChangeAspect="1"/>
+          </p:cNvPicPr>
+          <p:nvPr/>
+        </p:nvPicPr>
+        <p:blipFill>
+          <a:blip r:embed="rId3"/>
+          <a:stretch>
+            <a:fillRect/>
+          </a:stretch>
+        </p:blipFill>
+        <p:spPr>
+          <a:xfrm>
+            <a:off x="7312381" y="2525327"/>
+            <a:ext cx="2069098" cy="1807345"/>
+          </a:xfrm>
+          <a:prstGeom prst="rect">
+            <a:avLst/>
+          </a:prstGeom>
+        </p:spPr>
+      </p:pic>
+      <p:pic>
+        <p:nvPicPr>
+          <p:cNvPr id="9" name="Picture 8">
+            <a:extLst>
+              <a:ext uri="{FF2B5EF4-FFF2-40B4-BE49-F238E27FC236}">
+                <a16:creationId xmlns:a16="http://schemas.microsoft.com/office/drawing/2014/main" id="{F552C4D2-D3CC-6E8E-6D28-0239D763B0D5}"/>
+              </a:ext>
+            </a:extLst>
+          </p:cNvPr>
+          <p:cNvPicPr>
+            <a:picLocks noChangeAspect="1"/>
+          </p:cNvPicPr>
+          <p:nvPr/>
+        </p:nvPicPr>
+        <p:blipFill>
+          <a:blip r:embed="rId4"/>
+          <a:stretch>
+            <a:fillRect/>
+          </a:stretch>
+        </p:blipFill>
+        <p:spPr>
+          <a:xfrm>
+            <a:off x="294464" y="5362637"/>
+            <a:ext cx="5763429" cy="733527"/>
+          </a:xfrm>
+          <a:prstGeom prst="rect">
+            <a:avLst/>
+          </a:prstGeom>
+        </p:spPr>
+      </p:pic>
+      <p:pic>
+        <p:nvPicPr>
+          <p:cNvPr id="13" name="Picture 12">
+            <a:extLst>
+              <a:ext uri="{FF2B5EF4-FFF2-40B4-BE49-F238E27FC236}">
+                <a16:creationId xmlns:a16="http://schemas.microsoft.com/office/drawing/2014/main" id="{4C277121-C2FF-74F3-B089-2D6D58480E4A}"/>
+              </a:ext>
+            </a:extLst>
+          </p:cNvPr>
+          <p:cNvPicPr>
+            <a:picLocks noChangeAspect="1"/>
+          </p:cNvPicPr>
+          <p:nvPr/>
+        </p:nvPicPr>
+        <p:blipFill>
+          <a:blip r:embed="rId5"/>
+          <a:stretch>
+            <a:fillRect/>
+          </a:stretch>
+        </p:blipFill>
+        <p:spPr>
+          <a:xfrm>
+            <a:off x="6922630" y="4443267"/>
+            <a:ext cx="4477375" cy="2086266"/>
+          </a:xfrm>
+          <a:prstGeom prst="rect">
+            <a:avLst/>
+          </a:prstGeom>
+        </p:spPr>
+      </p:pic>
+    </p:spTree>
+    <p:extLst>
+      <p:ext uri="{BB962C8B-B14F-4D97-AF65-F5344CB8AC3E}">
+        <p14:creationId xmlns:p14="http://schemas.microsoft.com/office/powerpoint/2010/main" val="2286958566"/>
+      </p:ext>
+    </p:extLst>
+  </p:cSld>
+  <p:clrMapOvr>
+    <a:masterClrMapping/>
+  </p:clrMapOvr>
+</p:sld>
+</file>
+
+<file path=ppt/slides/slide11.xml><?xml version="1.0" encoding="utf-8"?>
+<p:sld xmlns:a="http://schemas.openxmlformats.org/drawingml/2006/main" xmlns:r="http://schemas.openxmlformats.org/officeDocument/2006/relationships" xmlns:p="http://schemas.openxmlformats.org/presentationml/2006/main">
+  <p:cSld>
+    <p:spTree>
+      <p:nvGrpSpPr>
+        <p:cNvPr id="1" name="">
+          <a:extLst>
+            <a:ext uri="{FF2B5EF4-FFF2-40B4-BE49-F238E27FC236}">
+              <a16:creationId xmlns:a16="http://schemas.microsoft.com/office/drawing/2014/main" id="{4F2E701B-95B4-5AAB-10D2-18E8D8F4A868}"/>
+            </a:ext>
+          </a:extLst>
+        </p:cNvPr>
+        <p:cNvGrpSpPr/>
+        <p:nvPr/>
+      </p:nvGrpSpPr>
+      <p:grpSpPr>
+        <a:xfrm>
+          <a:off x="0" y="0"/>
+          <a:ext cx="0" cy="0"/>
+          <a:chOff x="0" y="0"/>
+          <a:chExt cx="0" cy="0"/>
+        </a:xfrm>
+      </p:grpSpPr>
+      <p:sp>
+        <p:nvSpPr>
+          <p:cNvPr id="2" name="Title 1">
+            <a:extLst>
+              <a:ext uri="{FF2B5EF4-FFF2-40B4-BE49-F238E27FC236}">
+                <a16:creationId xmlns:a16="http://schemas.microsoft.com/office/drawing/2014/main" id="{7315FEFC-045E-1B2E-1573-BC2B6D5911C5}"/>
+              </a:ext>
+            </a:extLst>
+          </p:cNvPr>
+          <p:cNvSpPr>
+            <a:spLocks noGrp="1"/>
+          </p:cNvSpPr>
+          <p:nvPr>
+            <p:ph type="title"/>
+          </p:nvPr>
+        </p:nvSpPr>
+        <p:spPr/>
+        <p:txBody>
+          <a:bodyPr/>
+          <a:lstStyle/>
+          <a:p>
+            <a:r>
+              <a:rPr lang="en-US" dirty="0"/>
+              <a:t>Challenge – Create a header </a:t>
+            </a:r>
+          </a:p>
+        </p:txBody>
+      </p:sp>
+      <p:sp>
+        <p:nvSpPr>
+          <p:cNvPr id="3" name="Content Placeholder 2">
+            <a:extLst>
+              <a:ext uri="{FF2B5EF4-FFF2-40B4-BE49-F238E27FC236}">
+                <a16:creationId xmlns:a16="http://schemas.microsoft.com/office/drawing/2014/main" id="{1C630443-EB5A-0190-6AFA-A35581763A62}"/>
+              </a:ext>
+            </a:extLst>
+          </p:cNvPr>
+          <p:cNvSpPr>
+            <a:spLocks noGrp="1"/>
+          </p:cNvSpPr>
+          <p:nvPr>
+            <p:ph idx="1"/>
+          </p:nvPr>
+        </p:nvSpPr>
+        <p:spPr>
+          <a:xfrm>
+            <a:off x="695492" y="2226544"/>
+            <a:ext cx="5317584" cy="1681246"/>
+          </a:xfrm>
+        </p:spPr>
+        <p:txBody>
+          <a:bodyPr/>
+          <a:lstStyle/>
+          <a:p>
+            <a:r>
+              <a:rPr lang="en-US" dirty="0"/>
+              <a:t>Create a header with a company logo</a:t>
+            </a:r>
+          </a:p>
+        </p:txBody>
+      </p:sp>
+      <p:sp>
+        <p:nvSpPr>
+          <p:cNvPr id="6" name="TextBox 5">
+            <a:extLst>
+              <a:ext uri="{FF2B5EF4-FFF2-40B4-BE49-F238E27FC236}">
+                <a16:creationId xmlns:a16="http://schemas.microsoft.com/office/drawing/2014/main" id="{8B07A20F-8838-CD4E-32D7-8CD54DCA94AC}"/>
+              </a:ext>
+            </a:extLst>
+          </p:cNvPr>
+          <p:cNvSpPr txBox="1"/>
+          <p:nvPr/>
+        </p:nvSpPr>
+        <p:spPr>
+          <a:xfrm>
+            <a:off x="1228165" y="2402747"/>
+            <a:ext cx="756938" cy="369332"/>
+          </a:xfrm>
+          <a:prstGeom prst="rect">
+            <a:avLst/>
+          </a:prstGeom>
+          <a:noFill/>
+        </p:spPr>
+        <p:txBody>
+          <a:bodyPr wrap="none" rtlCol="0">
+            <a:spAutoFit/>
+          </a:bodyPr>
+          <a:lstStyle/>
+          <a:p>
+            <a:r>
+              <a:rPr lang="en-US" b="1" dirty="0"/>
+              <a:t>Goal:</a:t>
+            </a:r>
+          </a:p>
+        </p:txBody>
+      </p:sp>
+      <p:sp>
+        <p:nvSpPr>
+          <p:cNvPr id="7" name="TextBox 6">
+            <a:extLst>
+              <a:ext uri="{FF2B5EF4-FFF2-40B4-BE49-F238E27FC236}">
+                <a16:creationId xmlns:a16="http://schemas.microsoft.com/office/drawing/2014/main" id="{8B9832EB-026B-FE94-A00B-A07D40713C7E}"/>
+              </a:ext>
+            </a:extLst>
+          </p:cNvPr>
+          <p:cNvSpPr txBox="1"/>
+          <p:nvPr/>
+        </p:nvSpPr>
+        <p:spPr>
+          <a:xfrm>
+            <a:off x="6722919" y="2402747"/>
+            <a:ext cx="4887890" cy="369332"/>
+          </a:xfrm>
+          <a:prstGeom prst="rect">
+            <a:avLst/>
+          </a:prstGeom>
+          <a:noFill/>
+        </p:spPr>
+        <p:txBody>
+          <a:bodyPr wrap="square" rtlCol="0">
+            <a:spAutoFit/>
+          </a:bodyPr>
+          <a:lstStyle/>
+          <a:p>
+            <a:r>
+              <a:rPr lang="en-US" b="1" dirty="0"/>
+              <a:t>Scenario:  			   15 min</a:t>
+            </a:r>
+          </a:p>
+        </p:txBody>
+      </p:sp>
+      <p:sp>
+        <p:nvSpPr>
+          <p:cNvPr id="8" name="Content Placeholder 2">
+            <a:extLst>
+              <a:ext uri="{FF2B5EF4-FFF2-40B4-BE49-F238E27FC236}">
+                <a16:creationId xmlns:a16="http://schemas.microsoft.com/office/drawing/2014/main" id="{D09ADDFD-CE7D-45CF-0AF5-FFD0CE9E58F9}"/>
+              </a:ext>
+            </a:extLst>
+          </p:cNvPr>
+          <p:cNvSpPr txBox="1">
+            <a:spLocks/>
+          </p:cNvSpPr>
+          <p:nvPr/>
+        </p:nvSpPr>
+        <p:spPr>
+          <a:xfrm>
+            <a:off x="6545749" y="2772078"/>
+            <a:ext cx="4661642" cy="2776667"/>
+          </a:xfrm>
+          <a:prstGeom prst="rect">
+            <a:avLst/>
+          </a:prstGeom>
+        </p:spPr>
+        <p:txBody>
+          <a:bodyPr vert="horz" lIns="91440" tIns="45720" rIns="91440" bIns="45720" rtlCol="0" anchor="ctr">
+            <a:normAutofit/>
+          </a:bodyPr>
+          <a:lstStyle>
+            <a:lvl1pPr marL="306000" indent="-306000" algn="l" defTabSz="457200" rtl="0" eaLnBrk="1" latinLnBrk="0" hangingPunct="1">
+              <a:spcBef>
+                <a:spcPct val="20000"/>
+              </a:spcBef>
+              <a:spcAft>
+                <a:spcPts val="600"/>
+              </a:spcAft>
+              <a:buClr>
+                <a:schemeClr val="accent2"/>
+              </a:buClr>
+              <a:buSzPct val="92000"/>
+              <a:buFont typeface="Wingdings 2" panose="05020102010507070707" pitchFamily="18" charset="2"/>
+              <a:buChar char=""/>
+              <a:defRPr sz="1800" kern="1200">
+                <a:solidFill>
+                  <a:schemeClr val="tx2"/>
+                </a:solidFill>
+                <a:latin typeface="+mn-lt"/>
+                <a:ea typeface="+mn-ea"/>
+                <a:cs typeface="+mn-cs"/>
+              </a:defRPr>
+            </a:lvl1pPr>
+            <a:lvl2pPr marL="630000" indent="-306000" algn="l" defTabSz="457200" rtl="0" eaLnBrk="1" latinLnBrk="0" hangingPunct="1">
+              <a:spcBef>
+                <a:spcPct val="20000"/>
+              </a:spcBef>
+              <a:spcAft>
+                <a:spcPts val="600"/>
+              </a:spcAft>
+              <a:buClr>
+                <a:schemeClr val="accent2"/>
+              </a:buClr>
+              <a:buSzPct val="92000"/>
+              <a:buFont typeface="Wingdings 2" panose="05020102010507070707" pitchFamily="18" charset="2"/>
+              <a:buChar char=""/>
+              <a:defRPr sz="1600" kern="1200">
+                <a:solidFill>
+                  <a:schemeClr val="tx2"/>
+                </a:solidFill>
+                <a:latin typeface="+mn-lt"/>
+                <a:ea typeface="+mn-ea"/>
+                <a:cs typeface="+mn-cs"/>
+              </a:defRPr>
+            </a:lvl2pPr>
+            <a:lvl3pPr marL="900000" indent="-270000" algn="l" defTabSz="457200" rtl="0" eaLnBrk="1" latinLnBrk="0" hangingPunct="1">
+              <a:spcBef>
+                <a:spcPct val="20000"/>
+              </a:spcBef>
+              <a:spcAft>
+                <a:spcPts val="600"/>
+              </a:spcAft>
+              <a:buClr>
+                <a:schemeClr val="accent2"/>
+              </a:buClr>
+              <a:buSzPct val="92000"/>
+              <a:buFont typeface="Wingdings 2" panose="05020102010507070707" pitchFamily="18" charset="2"/>
+              <a:buChar char=""/>
+              <a:defRPr sz="1400" kern="1200">
+                <a:solidFill>
+                  <a:schemeClr val="tx2"/>
+                </a:solidFill>
+                <a:latin typeface="+mn-lt"/>
+                <a:ea typeface="+mn-ea"/>
+                <a:cs typeface="+mn-cs"/>
+              </a:defRPr>
+            </a:lvl3pPr>
+            <a:lvl4pPr marL="1242000" indent="-234000" algn="l" defTabSz="457200" rtl="0" eaLnBrk="1" latinLnBrk="0" hangingPunct="1">
+              <a:spcBef>
+                <a:spcPct val="20000"/>
+              </a:spcBef>
+              <a:spcAft>
+                <a:spcPts val="600"/>
+              </a:spcAft>
+              <a:buClr>
+                <a:schemeClr val="accent2"/>
+              </a:buClr>
+              <a:buSzPct val="92000"/>
+              <a:buFont typeface="Wingdings 2" panose="05020102010507070707" pitchFamily="18" charset="2"/>
+              <a:buChar char=""/>
+              <a:defRPr sz="1200" kern="1200">
+                <a:solidFill>
+                  <a:schemeClr val="tx2"/>
+                </a:solidFill>
+                <a:latin typeface="+mn-lt"/>
+                <a:ea typeface="+mn-ea"/>
+                <a:cs typeface="+mn-cs"/>
+              </a:defRPr>
+            </a:lvl4pPr>
+            <a:lvl5pPr marL="1602000" indent="-234000" algn="l" defTabSz="457200" rtl="0" eaLnBrk="1" latinLnBrk="0" hangingPunct="1">
+              <a:spcBef>
+                <a:spcPct val="20000"/>
+              </a:spcBef>
+              <a:spcAft>
+                <a:spcPts val="600"/>
+              </a:spcAft>
+              <a:buClr>
+                <a:schemeClr val="accent2"/>
+              </a:buClr>
+              <a:buSzPct val="92000"/>
+              <a:buFont typeface="Wingdings 2" panose="05020102010507070707" pitchFamily="18" charset="2"/>
+              <a:buChar char=""/>
+              <a:defRPr sz="1200" kern="1200">
+                <a:solidFill>
+                  <a:schemeClr val="tx2"/>
+                </a:solidFill>
+                <a:latin typeface="+mn-lt"/>
+                <a:ea typeface="+mn-ea"/>
+                <a:cs typeface="+mn-cs"/>
+              </a:defRPr>
+            </a:lvl5pPr>
+            <a:lvl6pPr marL="1900000" indent="-228600" algn="l" defTabSz="457200" rtl="0" eaLnBrk="1" latinLnBrk="0" hangingPunct="1">
+              <a:spcBef>
+                <a:spcPct val="20000"/>
+              </a:spcBef>
+              <a:spcAft>
+                <a:spcPts val="600"/>
+              </a:spcAft>
+              <a:buClr>
+                <a:schemeClr val="accent2"/>
+              </a:buClr>
+              <a:buSzPct val="92000"/>
+              <a:buFont typeface="Wingdings 2" panose="05020102010507070707" pitchFamily="18" charset="2"/>
+              <a:buChar char=""/>
+              <a:defRPr sz="1200" kern="1200">
+                <a:solidFill>
+                  <a:schemeClr val="tx2"/>
+                </a:solidFill>
+                <a:latin typeface="+mn-lt"/>
+                <a:ea typeface="+mn-ea"/>
+                <a:cs typeface="+mn-cs"/>
+              </a:defRPr>
+            </a:lvl6pPr>
+            <a:lvl7pPr marL="2200000" indent="-228600" algn="l" defTabSz="457200" rtl="0" eaLnBrk="1" latinLnBrk="0" hangingPunct="1">
+              <a:spcBef>
+                <a:spcPct val="20000"/>
+              </a:spcBef>
+              <a:spcAft>
+                <a:spcPts val="600"/>
+              </a:spcAft>
+              <a:buClr>
+                <a:schemeClr val="accent2"/>
+              </a:buClr>
+              <a:buSzPct val="92000"/>
+              <a:buFont typeface="Wingdings 2" panose="05020102010507070707" pitchFamily="18" charset="2"/>
+              <a:buChar char=""/>
+              <a:defRPr sz="1200" kern="1200">
+                <a:solidFill>
+                  <a:schemeClr val="tx2"/>
+                </a:solidFill>
+                <a:latin typeface="+mn-lt"/>
+                <a:ea typeface="+mn-ea"/>
+                <a:cs typeface="+mn-cs"/>
+              </a:defRPr>
+            </a:lvl7pPr>
+            <a:lvl8pPr marL="2500000" indent="-228600" algn="l" defTabSz="457200" rtl="0" eaLnBrk="1" latinLnBrk="0" hangingPunct="1">
+              <a:spcBef>
+                <a:spcPct val="20000"/>
+              </a:spcBef>
+              <a:spcAft>
+                <a:spcPts val="600"/>
+              </a:spcAft>
+              <a:buClr>
+                <a:schemeClr val="accent2"/>
+              </a:buClr>
+              <a:buSzPct val="92000"/>
+              <a:buFont typeface="Wingdings 2" panose="05020102010507070707" pitchFamily="18" charset="2"/>
+              <a:buChar char=""/>
+              <a:defRPr sz="1200" kern="1200">
+                <a:solidFill>
+                  <a:schemeClr val="tx2"/>
+                </a:solidFill>
+                <a:latin typeface="+mn-lt"/>
+                <a:ea typeface="+mn-ea"/>
+                <a:cs typeface="+mn-cs"/>
+              </a:defRPr>
+            </a:lvl8pPr>
+            <a:lvl9pPr marL="2800000" indent="-228600" algn="l" defTabSz="457200" rtl="0" eaLnBrk="1" latinLnBrk="0" hangingPunct="1">
+              <a:spcBef>
+                <a:spcPct val="20000"/>
+              </a:spcBef>
+              <a:spcAft>
+                <a:spcPts val="600"/>
+              </a:spcAft>
+              <a:buClr>
+                <a:schemeClr val="accent2"/>
+              </a:buClr>
+              <a:buSzPct val="92000"/>
+              <a:buFont typeface="Wingdings 2" panose="05020102010507070707" pitchFamily="18" charset="2"/>
+              <a:buChar char=""/>
+              <a:defRPr sz="1200" kern="1200">
+                <a:solidFill>
+                  <a:schemeClr val="tx2"/>
+                </a:solidFill>
+                <a:latin typeface="+mn-lt"/>
+                <a:ea typeface="+mn-ea"/>
+                <a:cs typeface="+mn-cs"/>
+              </a:defRPr>
+            </a:lvl9pPr>
+          </a:lstStyle>
+          <a:p>
+            <a:r>
+              <a:rPr lang="en-US" dirty="0"/>
+              <a:t>Your organization needs a static site to advertise their new product. </a:t>
+            </a:r>
+          </a:p>
+          <a:p>
+            <a:r>
+              <a:rPr lang="en-US" dirty="0"/>
+              <a:t>Further develop the site by creating a header with a logo, next to the logo, include the company name</a:t>
+            </a:r>
+          </a:p>
+          <a:p>
+            <a:r>
+              <a:rPr lang="en-US" dirty="0"/>
+              <a:t>Make sure your site is responsive to different sized screens by making the initial width consistent with the device viewport</a:t>
+            </a:r>
+          </a:p>
+        </p:txBody>
+      </p:sp>
+    </p:spTree>
+    <p:extLst>
+      <p:ext uri="{BB962C8B-B14F-4D97-AF65-F5344CB8AC3E}">
+        <p14:creationId xmlns:p14="http://schemas.microsoft.com/office/powerpoint/2010/main" val="1355766569"/>
+      </p:ext>
+    </p:extLst>
+  </p:cSld>
+  <p:clrMapOvr>
+    <a:masterClrMapping/>
+  </p:clrMapOvr>
+</p:sld>
+</file>
+
+<file path=ppt/slides/slide12.xml><?xml version="1.0" encoding="utf-8"?>
+<p:sld xmlns:a="http://schemas.openxmlformats.org/drawingml/2006/main" xmlns:r="http://schemas.openxmlformats.org/officeDocument/2006/relationships" xmlns:p="http://schemas.openxmlformats.org/presentationml/2006/main">
+  <p:cSld>
+    <p:spTree>
+      <p:nvGrpSpPr>
+        <p:cNvPr id="1" name=""/>
+        <p:cNvGrpSpPr/>
+        <p:nvPr/>
+      </p:nvGrpSpPr>
+      <p:grpSpPr>
+        <a:xfrm>
+          <a:off x="0" y="0"/>
+          <a:ext cx="0" cy="0"/>
+          <a:chOff x="0" y="0"/>
+          <a:chExt cx="0" cy="0"/>
+        </a:xfrm>
+      </p:grpSpPr>
+      <p:sp>
+        <p:nvSpPr>
+          <p:cNvPr id="2" name="Title 1">
+            <a:extLst>
+              <a:ext uri="{FF2B5EF4-FFF2-40B4-BE49-F238E27FC236}">
+                <a16:creationId xmlns:a16="http://schemas.microsoft.com/office/drawing/2014/main" id="{FABEA879-B806-66E8-2A8D-A6E4AF366475}"/>
+              </a:ext>
+            </a:extLst>
+          </p:cNvPr>
+          <p:cNvSpPr>
+            <a:spLocks noGrp="1"/>
+          </p:cNvSpPr>
+          <p:nvPr>
+            <p:ph type="title"/>
+          </p:nvPr>
+        </p:nvSpPr>
+        <p:spPr/>
+        <p:txBody>
+          <a:bodyPr/>
+          <a:lstStyle/>
+          <a:p>
+            <a:r>
+              <a:rPr lang="en-US" dirty="0"/>
+              <a:t>lists</a:t>
+            </a:r>
+          </a:p>
+        </p:txBody>
+      </p:sp>
+      <p:sp>
+        <p:nvSpPr>
+          <p:cNvPr id="3" name="Content Placeholder 2">
+            <a:extLst>
+              <a:ext uri="{FF2B5EF4-FFF2-40B4-BE49-F238E27FC236}">
+                <a16:creationId xmlns:a16="http://schemas.microsoft.com/office/drawing/2014/main" id="{E86C7140-1BDC-3981-A13B-A6E5D4002D25}"/>
+              </a:ext>
+            </a:extLst>
+          </p:cNvPr>
+          <p:cNvSpPr>
+            <a:spLocks noGrp="1"/>
+          </p:cNvSpPr>
+          <p:nvPr>
+            <p:ph idx="1"/>
+          </p:nvPr>
+        </p:nvSpPr>
+        <p:spPr>
+          <a:xfrm>
+            <a:off x="1079955" y="2281848"/>
+            <a:ext cx="4458399" cy="3678303"/>
+          </a:xfrm>
+        </p:spPr>
+        <p:txBody>
+          <a:bodyPr/>
+          <a:lstStyle/>
+          <a:p>
+            <a:r>
+              <a:rPr lang="en-US" dirty="0" err="1"/>
+              <a:t>ol</a:t>
+            </a:r>
+            <a:r>
+              <a:rPr lang="en-US" dirty="0"/>
+              <a:t> – ordered lists</a:t>
+            </a:r>
+          </a:p>
+          <a:p>
+            <a:r>
+              <a:rPr lang="en-US" dirty="0"/>
+              <a:t>ul – unordered lists</a:t>
+            </a:r>
+          </a:p>
+          <a:p>
+            <a:r>
+              <a:rPr lang="en-US" dirty="0"/>
+              <a:t>li – list item</a:t>
+            </a:r>
+          </a:p>
+        </p:txBody>
+      </p:sp>
+      <p:pic>
+        <p:nvPicPr>
+          <p:cNvPr id="5" name="Picture 4">
+            <a:extLst>
+              <a:ext uri="{FF2B5EF4-FFF2-40B4-BE49-F238E27FC236}">
+                <a16:creationId xmlns:a16="http://schemas.microsoft.com/office/drawing/2014/main" id="{5597CD86-2808-1677-5746-169E85B7EB29}"/>
+              </a:ext>
+            </a:extLst>
+          </p:cNvPr>
+          <p:cNvPicPr>
+            <a:picLocks noChangeAspect="1"/>
+          </p:cNvPicPr>
+          <p:nvPr/>
+        </p:nvPicPr>
+        <p:blipFill>
+          <a:blip r:embed="rId2"/>
+          <a:stretch>
+            <a:fillRect/>
+          </a:stretch>
+        </p:blipFill>
+        <p:spPr>
+          <a:xfrm>
+            <a:off x="4435757" y="2657114"/>
+            <a:ext cx="2912984" cy="2927770"/>
+          </a:xfrm>
+          <a:prstGeom prst="rect">
+            <a:avLst/>
+          </a:prstGeom>
+        </p:spPr>
+      </p:pic>
+      <p:pic>
+        <p:nvPicPr>
+          <p:cNvPr id="7" name="Picture 6">
+            <a:extLst>
+              <a:ext uri="{FF2B5EF4-FFF2-40B4-BE49-F238E27FC236}">
+                <a16:creationId xmlns:a16="http://schemas.microsoft.com/office/drawing/2014/main" id="{727F85E9-B2B5-723E-092B-C257CC9EA8B9}"/>
+              </a:ext>
+            </a:extLst>
+          </p:cNvPr>
+          <p:cNvPicPr>
+            <a:picLocks noChangeAspect="1"/>
+          </p:cNvPicPr>
+          <p:nvPr/>
+        </p:nvPicPr>
+        <p:blipFill>
+          <a:blip r:embed="rId3"/>
+          <a:stretch>
+            <a:fillRect/>
+          </a:stretch>
+        </p:blipFill>
+        <p:spPr>
+          <a:xfrm>
+            <a:off x="8050917" y="2086155"/>
+            <a:ext cx="3216991" cy="4069687"/>
+          </a:xfrm>
+          <a:prstGeom prst="rect">
+            <a:avLst/>
+          </a:prstGeom>
+        </p:spPr>
+      </p:pic>
+    </p:spTree>
+    <p:extLst>
+      <p:ext uri="{BB962C8B-B14F-4D97-AF65-F5344CB8AC3E}">
+        <p14:creationId xmlns:p14="http://schemas.microsoft.com/office/powerpoint/2010/main" val="199977824"/>
+      </p:ext>
+    </p:extLst>
+  </p:cSld>
+  <p:clrMapOvr>
+    <a:masterClrMapping/>
+  </p:clrMapOvr>
+</p:sld>
+</file>
+
+<file path=ppt/slides/slide13.xml><?xml version="1.0" encoding="utf-8"?>
+<p:sld xmlns:a="http://schemas.openxmlformats.org/drawingml/2006/main" xmlns:r="http://schemas.openxmlformats.org/officeDocument/2006/relationships" xmlns:p="http://schemas.openxmlformats.org/presentationml/2006/main">
+  <p:cSld>
+    <p:spTree>
+      <p:nvGrpSpPr>
+        <p:cNvPr id="1" name=""/>
+        <p:cNvGrpSpPr/>
+        <p:nvPr/>
+      </p:nvGrpSpPr>
+      <p:grpSpPr>
+        <a:xfrm>
+          <a:off x="0" y="0"/>
+          <a:ext cx="0" cy="0"/>
+          <a:chOff x="0" y="0"/>
+          <a:chExt cx="0" cy="0"/>
+        </a:xfrm>
+      </p:grpSpPr>
+      <p:sp>
+        <p:nvSpPr>
+          <p:cNvPr id="2" name="Title 1">
+            <a:extLst>
+              <a:ext uri="{FF2B5EF4-FFF2-40B4-BE49-F238E27FC236}">
+                <a16:creationId xmlns:a16="http://schemas.microsoft.com/office/drawing/2014/main" id="{377A486A-38EC-C74D-8E94-3E3D665715E5}"/>
+              </a:ext>
+            </a:extLst>
+          </p:cNvPr>
+          <p:cNvSpPr>
+            <a:spLocks noGrp="1"/>
+          </p:cNvSpPr>
+          <p:nvPr>
+            <p:ph type="title"/>
+          </p:nvPr>
+        </p:nvSpPr>
+        <p:spPr/>
+        <p:txBody>
+          <a:bodyPr/>
+          <a:lstStyle/>
+          <a:p>
+            <a:r>
+              <a:rPr lang="en-US" dirty="0"/>
+              <a:t>Tables</a:t>
+            </a:r>
+          </a:p>
+        </p:txBody>
+      </p:sp>
+      <p:sp>
+        <p:nvSpPr>
+          <p:cNvPr id="3" name="Content Placeholder 2">
+            <a:extLst>
+              <a:ext uri="{FF2B5EF4-FFF2-40B4-BE49-F238E27FC236}">
+                <a16:creationId xmlns:a16="http://schemas.microsoft.com/office/drawing/2014/main" id="{AFF89F5A-1EF1-07A2-A411-3175EF328AE4}"/>
+              </a:ext>
+            </a:extLst>
+          </p:cNvPr>
+          <p:cNvSpPr>
+            <a:spLocks noGrp="1"/>
+          </p:cNvSpPr>
+          <p:nvPr>
+            <p:ph idx="1"/>
+          </p:nvPr>
+        </p:nvSpPr>
+        <p:spPr>
+          <a:xfrm>
+            <a:off x="581192" y="2180496"/>
+            <a:ext cx="4510353" cy="3678303"/>
+          </a:xfrm>
+        </p:spPr>
+        <p:txBody>
+          <a:bodyPr/>
+          <a:lstStyle/>
+          <a:p>
+            <a:r>
+              <a:rPr lang="en-US" dirty="0"/>
+              <a:t>Table – defines the whole table</a:t>
+            </a:r>
+          </a:p>
+          <a:p>
+            <a:r>
+              <a:rPr lang="en-US" dirty="0"/>
+              <a:t>Thead – defines the table header</a:t>
+            </a:r>
+          </a:p>
+          <a:p>
+            <a:r>
+              <a:rPr lang="en-US" dirty="0"/>
+              <a:t>Tr – table row</a:t>
+            </a:r>
+          </a:p>
+          <a:p>
+            <a:r>
+              <a:rPr lang="en-US" dirty="0"/>
+              <a:t>Th – table header value</a:t>
+            </a:r>
+          </a:p>
+          <a:p>
+            <a:r>
+              <a:rPr lang="en-US" dirty="0" err="1"/>
+              <a:t>Tbody</a:t>
+            </a:r>
+            <a:r>
+              <a:rPr lang="en-US" dirty="0"/>
+              <a:t> – defines the table body </a:t>
+            </a:r>
+          </a:p>
+          <a:p>
+            <a:r>
+              <a:rPr lang="en-US" dirty="0"/>
+              <a:t>Td – table data </a:t>
+            </a:r>
+          </a:p>
+        </p:txBody>
+      </p:sp>
+      <p:pic>
+        <p:nvPicPr>
+          <p:cNvPr id="5" name="Picture 4">
+            <a:extLst>
+              <a:ext uri="{FF2B5EF4-FFF2-40B4-BE49-F238E27FC236}">
+                <a16:creationId xmlns:a16="http://schemas.microsoft.com/office/drawing/2014/main" id="{1692E059-3FCD-D475-2CE4-1570B67A072D}"/>
+              </a:ext>
+            </a:extLst>
+          </p:cNvPr>
+          <p:cNvPicPr>
+            <a:picLocks noChangeAspect="1"/>
+          </p:cNvPicPr>
+          <p:nvPr/>
+        </p:nvPicPr>
+        <p:blipFill>
+          <a:blip r:embed="rId2"/>
+          <a:stretch>
+            <a:fillRect/>
+          </a:stretch>
+        </p:blipFill>
+        <p:spPr>
+          <a:xfrm>
+            <a:off x="5912427" y="1992662"/>
+            <a:ext cx="5119950" cy="4445931"/>
+          </a:xfrm>
+          <a:prstGeom prst="rect">
+            <a:avLst/>
+          </a:prstGeom>
+        </p:spPr>
+      </p:pic>
+    </p:spTree>
+    <p:extLst>
+      <p:ext uri="{BB962C8B-B14F-4D97-AF65-F5344CB8AC3E}">
+        <p14:creationId xmlns:p14="http://schemas.microsoft.com/office/powerpoint/2010/main" val="1374898649"/>
+      </p:ext>
+    </p:extLst>
+  </p:cSld>
+  <p:clrMapOvr>
+    <a:masterClrMapping/>
+  </p:clrMapOvr>
+</p:sld>
+</file>
+
+<file path=ppt/slides/slide14.xml><?xml version="1.0" encoding="utf-8"?>
+<p:sld xmlns:a="http://schemas.openxmlformats.org/drawingml/2006/main" xmlns:r="http://schemas.openxmlformats.org/officeDocument/2006/relationships" xmlns:p="http://schemas.openxmlformats.org/presentationml/2006/main">
+  <p:cSld>
+    <p:spTree>
+      <p:nvGrpSpPr>
+        <p:cNvPr id="1" name=""/>
+        <p:cNvGrpSpPr/>
+        <p:nvPr/>
+      </p:nvGrpSpPr>
+      <p:grpSpPr>
+        <a:xfrm>
+          <a:off x="0" y="0"/>
+          <a:ext cx="0" cy="0"/>
+          <a:chOff x="0" y="0"/>
+          <a:chExt cx="0" cy="0"/>
+        </a:xfrm>
+      </p:grpSpPr>
+      <p:sp>
+        <p:nvSpPr>
+          <p:cNvPr id="2" name="Title 1">
+            <a:extLst>
+              <a:ext uri="{FF2B5EF4-FFF2-40B4-BE49-F238E27FC236}">
+                <a16:creationId xmlns:a16="http://schemas.microsoft.com/office/drawing/2014/main" id="{CD6CE427-B182-DC7A-1009-37213BDF8E64}"/>
+              </a:ext>
+            </a:extLst>
+          </p:cNvPr>
+          <p:cNvSpPr>
+            <a:spLocks noGrp="1"/>
+          </p:cNvSpPr>
+          <p:nvPr>
+            <p:ph type="title"/>
+          </p:nvPr>
+        </p:nvSpPr>
+        <p:spPr/>
+        <p:txBody>
+          <a:bodyPr/>
+          <a:lstStyle/>
+          <a:p>
+            <a:r>
+              <a:rPr lang="en-US" dirty="0"/>
+              <a:t>Other common HTML Elements</a:t>
+            </a:r>
+          </a:p>
+        </p:txBody>
+      </p:sp>
+      <p:pic>
+        <p:nvPicPr>
+          <p:cNvPr id="5" name="Picture 4">
+            <a:extLst>
+              <a:ext uri="{FF2B5EF4-FFF2-40B4-BE49-F238E27FC236}">
+                <a16:creationId xmlns:a16="http://schemas.microsoft.com/office/drawing/2014/main" id="{74C5E21C-3D0F-0D37-5072-9CE8B72E3FB9}"/>
+              </a:ext>
+            </a:extLst>
+          </p:cNvPr>
+          <p:cNvPicPr>
+            <a:picLocks noChangeAspect="1"/>
+          </p:cNvPicPr>
+          <p:nvPr/>
+        </p:nvPicPr>
+        <p:blipFill>
+          <a:blip r:embed="rId2"/>
+          <a:stretch>
+            <a:fillRect/>
+          </a:stretch>
+        </p:blipFill>
+        <p:spPr>
+          <a:xfrm>
+            <a:off x="2005785" y="2670873"/>
+            <a:ext cx="2889079" cy="758127"/>
+          </a:xfrm>
+          <a:prstGeom prst="rect">
+            <a:avLst/>
+          </a:prstGeom>
+        </p:spPr>
+      </p:pic>
+      <p:pic>
+        <p:nvPicPr>
+          <p:cNvPr id="7" name="Picture 6">
+            <a:extLst>
+              <a:ext uri="{FF2B5EF4-FFF2-40B4-BE49-F238E27FC236}">
+                <a16:creationId xmlns:a16="http://schemas.microsoft.com/office/drawing/2014/main" id="{7F813745-BBFB-DB06-E7A9-0EF62CFBEABF}"/>
+              </a:ext>
+            </a:extLst>
+          </p:cNvPr>
+          <p:cNvPicPr>
+            <a:picLocks noChangeAspect="1"/>
+          </p:cNvPicPr>
+          <p:nvPr/>
+        </p:nvPicPr>
+        <p:blipFill>
+          <a:blip r:embed="rId3"/>
+          <a:stretch>
+            <a:fillRect/>
+          </a:stretch>
+        </p:blipFill>
+        <p:spPr>
+          <a:xfrm>
+            <a:off x="6845385" y="2502668"/>
+            <a:ext cx="2380618" cy="1094536"/>
+          </a:xfrm>
+          <a:prstGeom prst="rect">
+            <a:avLst/>
+          </a:prstGeom>
+        </p:spPr>
+      </p:pic>
+      <p:pic>
+        <p:nvPicPr>
+          <p:cNvPr id="9" name="Picture 8">
+            <a:extLst>
+              <a:ext uri="{FF2B5EF4-FFF2-40B4-BE49-F238E27FC236}">
+                <a16:creationId xmlns:a16="http://schemas.microsoft.com/office/drawing/2014/main" id="{174932D6-5476-D151-8A78-19410375C0F2}"/>
+              </a:ext>
+            </a:extLst>
+          </p:cNvPr>
+          <p:cNvPicPr>
+            <a:picLocks noChangeAspect="1"/>
+          </p:cNvPicPr>
+          <p:nvPr/>
+        </p:nvPicPr>
+        <p:blipFill>
+          <a:blip r:embed="rId4"/>
+          <a:stretch>
+            <a:fillRect/>
+          </a:stretch>
+        </p:blipFill>
+        <p:spPr>
+          <a:xfrm>
+            <a:off x="581192" y="4184322"/>
+            <a:ext cx="5229347" cy="399187"/>
+          </a:xfrm>
+          <a:prstGeom prst="rect">
+            <a:avLst/>
+          </a:prstGeom>
+        </p:spPr>
+      </p:pic>
+      <p:pic>
+        <p:nvPicPr>
+          <p:cNvPr id="11" name="Picture 10">
+            <a:extLst>
+              <a:ext uri="{FF2B5EF4-FFF2-40B4-BE49-F238E27FC236}">
+                <a16:creationId xmlns:a16="http://schemas.microsoft.com/office/drawing/2014/main" id="{2584FC2C-CE16-5783-13BF-7E658DCDA5AF}"/>
+              </a:ext>
+            </a:extLst>
+          </p:cNvPr>
+          <p:cNvPicPr>
+            <a:picLocks noChangeAspect="1"/>
+          </p:cNvPicPr>
+          <p:nvPr/>
+        </p:nvPicPr>
+        <p:blipFill>
+          <a:blip r:embed="rId5"/>
+          <a:stretch>
+            <a:fillRect/>
+          </a:stretch>
+        </p:blipFill>
+        <p:spPr>
+          <a:xfrm>
+            <a:off x="6525325" y="3922589"/>
+            <a:ext cx="4253204" cy="922654"/>
+          </a:xfrm>
+          <a:prstGeom prst="rect">
+            <a:avLst/>
+          </a:prstGeom>
+        </p:spPr>
+      </p:pic>
+    </p:spTree>
+    <p:extLst>
+      <p:ext uri="{BB962C8B-B14F-4D97-AF65-F5344CB8AC3E}">
+        <p14:creationId xmlns:p14="http://schemas.microsoft.com/office/powerpoint/2010/main" val="3494817461"/>
+      </p:ext>
+    </p:extLst>
+  </p:cSld>
+  <p:clrMapOvr>
+    <a:masterClrMapping/>
+  </p:clrMapOvr>
+</p:sld>
+</file>
+
+<file path=ppt/slides/slide15.xml><?xml version="1.0" encoding="utf-8"?>
+<p:sld xmlns:a="http://schemas.openxmlformats.org/drawingml/2006/main" xmlns:r="http://schemas.openxmlformats.org/officeDocument/2006/relationships" xmlns:p="http://schemas.openxmlformats.org/presentationml/2006/main">
+  <p:cSld>
+    <p:spTree>
+      <p:nvGrpSpPr>
+        <p:cNvPr id="1" name=""/>
+        <p:cNvGrpSpPr/>
+        <p:nvPr/>
+      </p:nvGrpSpPr>
+      <p:grpSpPr>
+        <a:xfrm>
+          <a:off x="0" y="0"/>
+          <a:ext cx="0" cy="0"/>
+          <a:chOff x="0" y="0"/>
+          <a:chExt cx="0" cy="0"/>
+        </a:xfrm>
+      </p:grpSpPr>
+      <p:sp>
+        <p:nvSpPr>
+          <p:cNvPr id="2" name="Title 1">
+            <a:extLst>
+              <a:ext uri="{FF2B5EF4-FFF2-40B4-BE49-F238E27FC236}">
+                <a16:creationId xmlns:a16="http://schemas.microsoft.com/office/drawing/2014/main" id="{366F321B-B993-66B5-A466-ACDEE96F0A66}"/>
+              </a:ext>
+            </a:extLst>
+          </p:cNvPr>
+          <p:cNvSpPr>
+            <a:spLocks noGrp="1"/>
+          </p:cNvSpPr>
+          <p:nvPr>
+            <p:ph type="title"/>
+          </p:nvPr>
+        </p:nvSpPr>
+        <p:spPr/>
+        <p:txBody>
+          <a:bodyPr/>
+          <a:lstStyle/>
+          <a:p>
+            <a:r>
+              <a:rPr lang="en-US" dirty="0"/>
+              <a:t>Code Comments</a:t>
+            </a:r>
+          </a:p>
+        </p:txBody>
+      </p:sp>
+      <p:pic>
+        <p:nvPicPr>
+          <p:cNvPr id="5" name="Content Placeholder 4">
+            <a:extLst>
+              <a:ext uri="{FF2B5EF4-FFF2-40B4-BE49-F238E27FC236}">
+                <a16:creationId xmlns:a16="http://schemas.microsoft.com/office/drawing/2014/main" id="{13B472CB-66A3-57D1-E9F8-055810D8F143}"/>
+              </a:ext>
+            </a:extLst>
+          </p:cNvPr>
+          <p:cNvPicPr>
+            <a:picLocks noGrp="1" noChangeAspect="1"/>
+          </p:cNvPicPr>
+          <p:nvPr>
+            <p:ph idx="1"/>
+          </p:nvPr>
+        </p:nvPicPr>
+        <p:blipFill>
+          <a:blip r:embed="rId2"/>
+          <a:stretch>
+            <a:fillRect/>
+          </a:stretch>
+        </p:blipFill>
+        <p:spPr>
+          <a:xfrm>
+            <a:off x="1833831" y="2290625"/>
+            <a:ext cx="8524338" cy="1335801"/>
+          </a:xfrm>
+          <a:prstGeom prst="rect">
+            <a:avLst/>
+          </a:prstGeom>
+        </p:spPr>
+      </p:pic>
+      <p:sp>
+        <p:nvSpPr>
+          <p:cNvPr id="6" name="TextBox 5">
+            <a:extLst>
+              <a:ext uri="{FF2B5EF4-FFF2-40B4-BE49-F238E27FC236}">
+                <a16:creationId xmlns:a16="http://schemas.microsoft.com/office/drawing/2014/main" id="{654BAE58-A9F0-6400-6656-0E3A4B8D0B53}"/>
+              </a:ext>
+            </a:extLst>
+          </p:cNvPr>
+          <p:cNvSpPr txBox="1"/>
+          <p:nvPr/>
+        </p:nvSpPr>
+        <p:spPr>
+          <a:xfrm>
+            <a:off x="3663314" y="4353791"/>
+            <a:ext cx="4865371" cy="1200329"/>
+          </a:xfrm>
+          <a:prstGeom prst="rect">
+            <a:avLst/>
+          </a:prstGeom>
+          <a:noFill/>
+        </p:spPr>
+        <p:txBody>
+          <a:bodyPr wrap="none" rtlCol="0">
+            <a:spAutoFit/>
+          </a:bodyPr>
+          <a:lstStyle/>
+          <a:p>
+            <a:pPr marL="285750" indent="-285750">
+              <a:buClr>
+                <a:schemeClr val="accent2"/>
+              </a:buClr>
+              <a:buFont typeface="Wingdings" panose="05000000000000000000" pitchFamily="2" charset="2"/>
+              <a:buChar char="§"/>
+            </a:pPr>
+            <a:r>
+              <a:rPr lang="en-US" dirty="0"/>
+              <a:t>Code comments help by:</a:t>
+            </a:r>
+          </a:p>
+          <a:p>
+            <a:pPr marL="742950" lvl="1" indent="-285750">
+              <a:buClr>
+                <a:schemeClr val="accent2"/>
+              </a:buClr>
+              <a:buFont typeface="Wingdings" panose="05000000000000000000" pitchFamily="2" charset="2"/>
+              <a:buChar char="§"/>
+            </a:pPr>
+            <a:r>
+              <a:rPr lang="en-US" dirty="0"/>
+              <a:t>Explaining functionality</a:t>
+            </a:r>
+          </a:p>
+          <a:p>
+            <a:pPr marL="742950" lvl="1" indent="-285750">
+              <a:buClr>
+                <a:schemeClr val="accent2"/>
+              </a:buClr>
+              <a:buFont typeface="Wingdings" panose="05000000000000000000" pitchFamily="2" charset="2"/>
+              <a:buChar char="§"/>
+            </a:pPr>
+            <a:r>
+              <a:rPr lang="en-US" dirty="0"/>
+              <a:t>Crediting an author</a:t>
+            </a:r>
+          </a:p>
+          <a:p>
+            <a:pPr marL="742950" lvl="1" indent="-285750">
+              <a:buClr>
+                <a:schemeClr val="accent2"/>
+              </a:buClr>
+              <a:buFont typeface="Wingdings" panose="05000000000000000000" pitchFamily="2" charset="2"/>
+              <a:buChar char="§"/>
+            </a:pPr>
+            <a:r>
+              <a:rPr lang="en-US" dirty="0"/>
+              <a:t>Helping other developers digest the code </a:t>
+            </a:r>
+          </a:p>
+        </p:txBody>
+      </p:sp>
+    </p:spTree>
+    <p:extLst>
+      <p:ext uri="{BB962C8B-B14F-4D97-AF65-F5344CB8AC3E}">
+        <p14:creationId xmlns:p14="http://schemas.microsoft.com/office/powerpoint/2010/main" val="718141104"/>
+      </p:ext>
+    </p:extLst>
+  </p:cSld>
+  <p:clrMapOvr>
+    <a:masterClrMapping/>
+  </p:clrMapOvr>
+</p:sld>
+</file>
+
+<file path=ppt/slides/slide16.xml><?xml version="1.0" encoding="utf-8"?>
+<p:sld xmlns:a="http://schemas.openxmlformats.org/drawingml/2006/main" xmlns:r="http://schemas.openxmlformats.org/officeDocument/2006/relationships" xmlns:p="http://schemas.openxmlformats.org/presentationml/2006/main">
+  <p:cSld>
+    <p:spTree>
+      <p:nvGrpSpPr>
+        <p:cNvPr id="1" name="">
+          <a:extLst>
+            <a:ext uri="{FF2B5EF4-FFF2-40B4-BE49-F238E27FC236}">
+              <a16:creationId xmlns:a16="http://schemas.microsoft.com/office/drawing/2014/main" id="{DF80E1C7-534E-DD5F-B99E-32851CE0A7D3}"/>
+            </a:ext>
+          </a:extLst>
+        </p:cNvPr>
+        <p:cNvGrpSpPr/>
+        <p:nvPr/>
+      </p:nvGrpSpPr>
+      <p:grpSpPr>
+        <a:xfrm>
+          <a:off x="0" y="0"/>
+          <a:ext cx="0" cy="0"/>
+          <a:chOff x="0" y="0"/>
+          <a:chExt cx="0" cy="0"/>
+        </a:xfrm>
+      </p:grpSpPr>
+      <p:sp>
+        <p:nvSpPr>
+          <p:cNvPr id="2" name="Title 1">
+            <a:extLst>
+              <a:ext uri="{FF2B5EF4-FFF2-40B4-BE49-F238E27FC236}">
+                <a16:creationId xmlns:a16="http://schemas.microsoft.com/office/drawing/2014/main" id="{E662EDFC-C0D0-0DC6-539A-C708C4FF42E1}"/>
+              </a:ext>
+            </a:extLst>
+          </p:cNvPr>
+          <p:cNvSpPr>
+            <a:spLocks noGrp="1"/>
+          </p:cNvSpPr>
+          <p:nvPr>
+            <p:ph type="title"/>
+          </p:nvPr>
+        </p:nvSpPr>
+        <p:spPr/>
+        <p:txBody>
+          <a:bodyPr/>
+          <a:lstStyle/>
+          <a:p>
+            <a:r>
+              <a:rPr lang="en-US" dirty="0"/>
+              <a:t>Challenge –  Create Marketing Content</a:t>
+            </a:r>
+          </a:p>
+        </p:txBody>
+      </p:sp>
+      <p:sp>
+        <p:nvSpPr>
+          <p:cNvPr id="3" name="Content Placeholder 2">
+            <a:extLst>
+              <a:ext uri="{FF2B5EF4-FFF2-40B4-BE49-F238E27FC236}">
+                <a16:creationId xmlns:a16="http://schemas.microsoft.com/office/drawing/2014/main" id="{D46BBB77-ACF9-262A-AF8F-BAB5B63FDEAA}"/>
+              </a:ext>
+            </a:extLst>
+          </p:cNvPr>
+          <p:cNvSpPr>
+            <a:spLocks noGrp="1"/>
+          </p:cNvSpPr>
+          <p:nvPr>
+            <p:ph idx="1"/>
+          </p:nvPr>
+        </p:nvSpPr>
+        <p:spPr>
+          <a:xfrm>
+            <a:off x="581192" y="2475925"/>
+            <a:ext cx="5317584" cy="1681246"/>
+          </a:xfrm>
+        </p:spPr>
+        <p:txBody>
+          <a:bodyPr/>
+          <a:lstStyle/>
+          <a:p>
+            <a:r>
+              <a:rPr lang="en-US" dirty="0"/>
+              <a:t>Create some marketing content for the HTML document</a:t>
+            </a:r>
+          </a:p>
+        </p:txBody>
+      </p:sp>
+      <p:sp>
+        <p:nvSpPr>
+          <p:cNvPr id="6" name="TextBox 5">
+            <a:extLst>
+              <a:ext uri="{FF2B5EF4-FFF2-40B4-BE49-F238E27FC236}">
+                <a16:creationId xmlns:a16="http://schemas.microsoft.com/office/drawing/2014/main" id="{1E6D09AE-0F2B-CF3E-8CBB-F6E02FDE8969}"/>
+              </a:ext>
+            </a:extLst>
+          </p:cNvPr>
+          <p:cNvSpPr txBox="1"/>
+          <p:nvPr/>
+        </p:nvSpPr>
+        <p:spPr>
+          <a:xfrm>
+            <a:off x="1228165" y="2402747"/>
+            <a:ext cx="756938" cy="369332"/>
+          </a:xfrm>
+          <a:prstGeom prst="rect">
+            <a:avLst/>
+          </a:prstGeom>
+          <a:noFill/>
+        </p:spPr>
+        <p:txBody>
+          <a:bodyPr wrap="none" rtlCol="0">
+            <a:spAutoFit/>
+          </a:bodyPr>
+          <a:lstStyle/>
+          <a:p>
+            <a:r>
+              <a:rPr lang="en-US" b="1" dirty="0"/>
+              <a:t>Goal:</a:t>
+            </a:r>
+          </a:p>
+        </p:txBody>
+      </p:sp>
+      <p:sp>
+        <p:nvSpPr>
+          <p:cNvPr id="7" name="TextBox 6">
+            <a:extLst>
+              <a:ext uri="{FF2B5EF4-FFF2-40B4-BE49-F238E27FC236}">
+                <a16:creationId xmlns:a16="http://schemas.microsoft.com/office/drawing/2014/main" id="{2C3B0B33-4F21-4D4C-6224-3AE5AD8F3327}"/>
+              </a:ext>
+            </a:extLst>
+          </p:cNvPr>
+          <p:cNvSpPr txBox="1"/>
+          <p:nvPr/>
+        </p:nvSpPr>
+        <p:spPr>
+          <a:xfrm>
+            <a:off x="6545749" y="2402747"/>
+            <a:ext cx="5065059" cy="369332"/>
+          </a:xfrm>
+          <a:prstGeom prst="rect">
+            <a:avLst/>
+          </a:prstGeom>
+          <a:noFill/>
+        </p:spPr>
+        <p:txBody>
+          <a:bodyPr wrap="square" rtlCol="0">
+            <a:spAutoFit/>
+          </a:bodyPr>
+          <a:lstStyle/>
+          <a:p>
+            <a:r>
+              <a:rPr lang="en-US" b="1" dirty="0"/>
+              <a:t>Scenario:  			   20 min</a:t>
+            </a:r>
+          </a:p>
+        </p:txBody>
+      </p:sp>
+      <p:sp>
+        <p:nvSpPr>
+          <p:cNvPr id="8" name="Content Placeholder 2">
+            <a:extLst>
+              <a:ext uri="{FF2B5EF4-FFF2-40B4-BE49-F238E27FC236}">
+                <a16:creationId xmlns:a16="http://schemas.microsoft.com/office/drawing/2014/main" id="{F0B09F6C-918C-81DB-A04A-0F99597B8456}"/>
+              </a:ext>
+            </a:extLst>
+          </p:cNvPr>
+          <p:cNvSpPr txBox="1">
+            <a:spLocks/>
+          </p:cNvSpPr>
+          <p:nvPr/>
+        </p:nvSpPr>
+        <p:spPr>
+          <a:xfrm>
+            <a:off x="6545749" y="2772078"/>
+            <a:ext cx="4661642" cy="3639113"/>
+          </a:xfrm>
+          <a:prstGeom prst="rect">
+            <a:avLst/>
+          </a:prstGeom>
+        </p:spPr>
+        <p:txBody>
+          <a:bodyPr vert="horz" lIns="91440" tIns="45720" rIns="91440" bIns="45720" rtlCol="0" anchor="ctr">
+            <a:normAutofit fontScale="92500" lnSpcReduction="20000"/>
+          </a:bodyPr>
+          <a:lstStyle>
+            <a:lvl1pPr marL="306000" indent="-306000" algn="l" defTabSz="457200" rtl="0" eaLnBrk="1" latinLnBrk="0" hangingPunct="1">
+              <a:spcBef>
+                <a:spcPct val="20000"/>
+              </a:spcBef>
+              <a:spcAft>
+                <a:spcPts val="600"/>
+              </a:spcAft>
+              <a:buClr>
+                <a:schemeClr val="accent2"/>
+              </a:buClr>
+              <a:buSzPct val="92000"/>
+              <a:buFont typeface="Wingdings 2" panose="05020102010507070707" pitchFamily="18" charset="2"/>
+              <a:buChar char=""/>
+              <a:defRPr sz="1800" kern="1200">
+                <a:solidFill>
+                  <a:schemeClr val="tx2"/>
+                </a:solidFill>
+                <a:latin typeface="+mn-lt"/>
+                <a:ea typeface="+mn-ea"/>
+                <a:cs typeface="+mn-cs"/>
+              </a:defRPr>
+            </a:lvl1pPr>
+            <a:lvl2pPr marL="630000" indent="-306000" algn="l" defTabSz="457200" rtl="0" eaLnBrk="1" latinLnBrk="0" hangingPunct="1">
+              <a:spcBef>
+                <a:spcPct val="20000"/>
+              </a:spcBef>
+              <a:spcAft>
+                <a:spcPts val="600"/>
+              </a:spcAft>
+              <a:buClr>
+                <a:schemeClr val="accent2"/>
+              </a:buClr>
+              <a:buSzPct val="92000"/>
+              <a:buFont typeface="Wingdings 2" panose="05020102010507070707" pitchFamily="18" charset="2"/>
+              <a:buChar char=""/>
+              <a:defRPr sz="1600" kern="1200">
+                <a:solidFill>
+                  <a:schemeClr val="tx2"/>
+                </a:solidFill>
+                <a:latin typeface="+mn-lt"/>
+                <a:ea typeface="+mn-ea"/>
+                <a:cs typeface="+mn-cs"/>
+              </a:defRPr>
+            </a:lvl2pPr>
+            <a:lvl3pPr marL="900000" indent="-270000" algn="l" defTabSz="457200" rtl="0" eaLnBrk="1" latinLnBrk="0" hangingPunct="1">
+              <a:spcBef>
+                <a:spcPct val="20000"/>
+              </a:spcBef>
+              <a:spcAft>
+                <a:spcPts val="600"/>
+              </a:spcAft>
+              <a:buClr>
+                <a:schemeClr val="accent2"/>
+              </a:buClr>
+              <a:buSzPct val="92000"/>
+              <a:buFont typeface="Wingdings 2" panose="05020102010507070707" pitchFamily="18" charset="2"/>
+              <a:buChar char=""/>
+              <a:defRPr sz="1400" kern="1200">
+                <a:solidFill>
+                  <a:schemeClr val="tx2"/>
+                </a:solidFill>
+                <a:latin typeface="+mn-lt"/>
+                <a:ea typeface="+mn-ea"/>
+                <a:cs typeface="+mn-cs"/>
+              </a:defRPr>
+            </a:lvl3pPr>
+            <a:lvl4pPr marL="1242000" indent="-234000" algn="l" defTabSz="457200" rtl="0" eaLnBrk="1" latinLnBrk="0" hangingPunct="1">
+              <a:spcBef>
+                <a:spcPct val="20000"/>
+              </a:spcBef>
+              <a:spcAft>
+                <a:spcPts val="600"/>
+              </a:spcAft>
+              <a:buClr>
+                <a:schemeClr val="accent2"/>
+              </a:buClr>
+              <a:buSzPct val="92000"/>
+              <a:buFont typeface="Wingdings 2" panose="05020102010507070707" pitchFamily="18" charset="2"/>
+              <a:buChar char=""/>
+              <a:defRPr sz="1200" kern="1200">
+                <a:solidFill>
+                  <a:schemeClr val="tx2"/>
+                </a:solidFill>
+                <a:latin typeface="+mn-lt"/>
+                <a:ea typeface="+mn-ea"/>
+                <a:cs typeface="+mn-cs"/>
+              </a:defRPr>
+            </a:lvl4pPr>
+            <a:lvl5pPr marL="1602000" indent="-234000" algn="l" defTabSz="457200" rtl="0" eaLnBrk="1" latinLnBrk="0" hangingPunct="1">
+              <a:spcBef>
+                <a:spcPct val="20000"/>
+              </a:spcBef>
+              <a:spcAft>
+                <a:spcPts val="600"/>
+              </a:spcAft>
+              <a:buClr>
+                <a:schemeClr val="accent2"/>
+              </a:buClr>
+              <a:buSzPct val="92000"/>
+              <a:buFont typeface="Wingdings 2" panose="05020102010507070707" pitchFamily="18" charset="2"/>
+              <a:buChar char=""/>
+              <a:defRPr sz="1200" kern="1200">
+                <a:solidFill>
+                  <a:schemeClr val="tx2"/>
+                </a:solidFill>
+                <a:latin typeface="+mn-lt"/>
+                <a:ea typeface="+mn-ea"/>
+                <a:cs typeface="+mn-cs"/>
+              </a:defRPr>
+            </a:lvl5pPr>
+            <a:lvl6pPr marL="1900000" indent="-228600" algn="l" defTabSz="457200" rtl="0" eaLnBrk="1" latinLnBrk="0" hangingPunct="1">
+              <a:spcBef>
+                <a:spcPct val="20000"/>
+              </a:spcBef>
+              <a:spcAft>
+                <a:spcPts val="600"/>
+              </a:spcAft>
+              <a:buClr>
+                <a:schemeClr val="accent2"/>
+              </a:buClr>
+              <a:buSzPct val="92000"/>
+              <a:buFont typeface="Wingdings 2" panose="05020102010507070707" pitchFamily="18" charset="2"/>
+              <a:buChar char=""/>
+              <a:defRPr sz="1200" kern="1200">
+                <a:solidFill>
+                  <a:schemeClr val="tx2"/>
+                </a:solidFill>
+                <a:latin typeface="+mn-lt"/>
+                <a:ea typeface="+mn-ea"/>
+                <a:cs typeface="+mn-cs"/>
+              </a:defRPr>
+            </a:lvl6pPr>
+            <a:lvl7pPr marL="2200000" indent="-228600" algn="l" defTabSz="457200" rtl="0" eaLnBrk="1" latinLnBrk="0" hangingPunct="1">
+              <a:spcBef>
+                <a:spcPct val="20000"/>
+              </a:spcBef>
+              <a:spcAft>
+                <a:spcPts val="600"/>
+              </a:spcAft>
+              <a:buClr>
+                <a:schemeClr val="accent2"/>
+              </a:buClr>
+              <a:buSzPct val="92000"/>
+              <a:buFont typeface="Wingdings 2" panose="05020102010507070707" pitchFamily="18" charset="2"/>
+              <a:buChar char=""/>
+              <a:defRPr sz="1200" kern="1200">
+                <a:solidFill>
+                  <a:schemeClr val="tx2"/>
+                </a:solidFill>
+                <a:latin typeface="+mn-lt"/>
+                <a:ea typeface="+mn-ea"/>
+                <a:cs typeface="+mn-cs"/>
+              </a:defRPr>
+            </a:lvl7pPr>
+            <a:lvl8pPr marL="2500000" indent="-228600" algn="l" defTabSz="457200" rtl="0" eaLnBrk="1" latinLnBrk="0" hangingPunct="1">
+              <a:spcBef>
+                <a:spcPct val="20000"/>
+              </a:spcBef>
+              <a:spcAft>
+                <a:spcPts val="600"/>
+              </a:spcAft>
+              <a:buClr>
+                <a:schemeClr val="accent2"/>
+              </a:buClr>
+              <a:buSzPct val="92000"/>
+              <a:buFont typeface="Wingdings 2" panose="05020102010507070707" pitchFamily="18" charset="2"/>
+              <a:buChar char=""/>
+              <a:defRPr sz="1200" kern="1200">
+                <a:solidFill>
+                  <a:schemeClr val="tx2"/>
+                </a:solidFill>
+                <a:latin typeface="+mn-lt"/>
+                <a:ea typeface="+mn-ea"/>
+                <a:cs typeface="+mn-cs"/>
+              </a:defRPr>
+            </a:lvl8pPr>
+            <a:lvl9pPr marL="2800000" indent="-228600" algn="l" defTabSz="457200" rtl="0" eaLnBrk="1" latinLnBrk="0" hangingPunct="1">
+              <a:spcBef>
+                <a:spcPct val="20000"/>
+              </a:spcBef>
+              <a:spcAft>
+                <a:spcPts val="600"/>
+              </a:spcAft>
+              <a:buClr>
+                <a:schemeClr val="accent2"/>
+              </a:buClr>
+              <a:buSzPct val="92000"/>
+              <a:buFont typeface="Wingdings 2" panose="05020102010507070707" pitchFamily="18" charset="2"/>
+              <a:buChar char=""/>
+              <a:defRPr sz="1200" kern="1200">
+                <a:solidFill>
+                  <a:schemeClr val="tx2"/>
+                </a:solidFill>
+                <a:latin typeface="+mn-lt"/>
+                <a:ea typeface="+mn-ea"/>
+                <a:cs typeface="+mn-cs"/>
+              </a:defRPr>
+            </a:lvl9pPr>
+          </a:lstStyle>
+          <a:p>
+            <a:r>
+              <a:rPr lang="en-US" dirty="0"/>
+              <a:t>Your organization needs a static site to advertise their new product. </a:t>
+            </a:r>
+          </a:p>
+          <a:p>
+            <a:r>
+              <a:rPr lang="en-US" dirty="0"/>
+              <a:t>Further develop the site by creating a header that captures the attention of the viewer and sells to product (think of a tagline)</a:t>
+            </a:r>
+          </a:p>
+          <a:p>
+            <a:r>
+              <a:rPr lang="en-US" dirty="0"/>
+              <a:t>Create a short paragraph that further describes what the product offers. </a:t>
+            </a:r>
+          </a:p>
+          <a:p>
+            <a:r>
+              <a:rPr lang="en-US" dirty="0"/>
+              <a:t>Create a list that highlights key features</a:t>
+            </a:r>
+          </a:p>
+          <a:p>
+            <a:r>
+              <a:rPr lang="en-US" dirty="0"/>
+              <a:t>Create a table that showcases key data points</a:t>
+            </a:r>
+          </a:p>
+          <a:p>
+            <a:r>
+              <a:rPr lang="en-US" dirty="0"/>
+              <a:t>Create a footer that links to a separate HTML document – the company profile page (which contains a short paragraph about the company’s history and values)</a:t>
+            </a:r>
+          </a:p>
+        </p:txBody>
+      </p:sp>
+    </p:spTree>
+    <p:extLst>
+      <p:ext uri="{BB962C8B-B14F-4D97-AF65-F5344CB8AC3E}">
+        <p14:creationId xmlns:p14="http://schemas.microsoft.com/office/powerpoint/2010/main" val="2272081180"/>
+      </p:ext>
+    </p:extLst>
+  </p:cSld>
+  <p:clrMapOvr>
+    <a:masterClrMapping/>
+  </p:clrMapOvr>
+</p:sld>
+</file>
+
+<file path=ppt/slides/slide17.xml><?xml version="1.0" encoding="utf-8"?>
+<p:sld xmlns:a="http://schemas.openxmlformats.org/drawingml/2006/main" xmlns:r="http://schemas.openxmlformats.org/officeDocument/2006/relationships" xmlns:p="http://schemas.openxmlformats.org/presentationml/2006/main">
+  <p:cSld>
+    <p:spTree>
+      <p:nvGrpSpPr>
+        <p:cNvPr id="1" name=""/>
+        <p:cNvGrpSpPr/>
+        <p:nvPr/>
+      </p:nvGrpSpPr>
+      <p:grpSpPr>
+        <a:xfrm>
+          <a:off x="0" y="0"/>
+          <a:ext cx="0" cy="0"/>
+          <a:chOff x="0" y="0"/>
+          <a:chExt cx="0" cy="0"/>
+        </a:xfrm>
+      </p:grpSpPr>
+      <p:sp>
+        <p:nvSpPr>
+          <p:cNvPr id="2" name="Title 1">
+            <a:extLst>
+              <a:ext uri="{FF2B5EF4-FFF2-40B4-BE49-F238E27FC236}">
+                <a16:creationId xmlns:a16="http://schemas.microsoft.com/office/drawing/2014/main" id="{45337806-9F14-4532-9247-76540D6EA57F}"/>
+              </a:ext>
+            </a:extLst>
+          </p:cNvPr>
+          <p:cNvSpPr>
+            <a:spLocks noGrp="1"/>
+          </p:cNvSpPr>
+          <p:nvPr>
+            <p:ph type="title"/>
+          </p:nvPr>
+        </p:nvSpPr>
+        <p:spPr/>
+        <p:txBody>
+          <a:bodyPr/>
+          <a:lstStyle/>
+          <a:p>
+            <a:r>
+              <a:rPr lang="en-US" dirty="0"/>
+              <a:t>Forms</a:t>
+            </a:r>
+          </a:p>
+        </p:txBody>
+      </p:sp>
+      <p:sp>
+        <p:nvSpPr>
+          <p:cNvPr id="8" name="TextBox 7">
+            <a:extLst>
+              <a:ext uri="{FF2B5EF4-FFF2-40B4-BE49-F238E27FC236}">
+                <a16:creationId xmlns:a16="http://schemas.microsoft.com/office/drawing/2014/main" id="{D3CFFAA8-2B58-FE9E-9A94-4B20E9051D60}"/>
+              </a:ext>
+            </a:extLst>
+          </p:cNvPr>
+          <p:cNvSpPr txBox="1"/>
+          <p:nvPr/>
+        </p:nvSpPr>
+        <p:spPr>
+          <a:xfrm>
+            <a:off x="700303" y="2565979"/>
+            <a:ext cx="6328027" cy="1200329"/>
+          </a:xfrm>
+          <a:prstGeom prst="rect">
+            <a:avLst/>
+          </a:prstGeom>
+          <a:noFill/>
+        </p:spPr>
+        <p:txBody>
+          <a:bodyPr wrap="square" rtlCol="0">
+            <a:spAutoFit/>
+          </a:bodyPr>
+          <a:lstStyle/>
+          <a:p>
+            <a:pPr marL="285750" indent="-285750">
+              <a:buClr>
+                <a:schemeClr val="accent2"/>
+              </a:buClr>
+              <a:buFont typeface="Wingdings" panose="05000000000000000000" pitchFamily="2" charset="2"/>
+              <a:buChar char="§"/>
+            </a:pPr>
+            <a:r>
+              <a:rPr lang="en-US" dirty="0"/>
+              <a:t>Action – where the form data goes</a:t>
+            </a:r>
+          </a:p>
+          <a:p>
+            <a:pPr marL="285750" indent="-285750">
+              <a:buClr>
+                <a:schemeClr val="accent2"/>
+              </a:buClr>
+              <a:buFont typeface="Wingdings" panose="05000000000000000000" pitchFamily="2" charset="2"/>
+              <a:buChar char="§"/>
+            </a:pPr>
+            <a:r>
+              <a:rPr lang="en-US" dirty="0"/>
+              <a:t>Method – how data is sent (get, post)</a:t>
+            </a:r>
+          </a:p>
+          <a:p>
+            <a:pPr marL="285750" indent="-285750">
+              <a:buClr>
+                <a:schemeClr val="accent2"/>
+              </a:buClr>
+              <a:buFont typeface="Wingdings" panose="05000000000000000000" pitchFamily="2" charset="2"/>
+              <a:buChar char="§"/>
+            </a:pPr>
+            <a:r>
+              <a:rPr lang="en-US" dirty="0"/>
+              <a:t>Input element – different types of input elements may be used to collect different types of data</a:t>
+            </a:r>
+          </a:p>
+        </p:txBody>
+      </p:sp>
+      <p:pic>
+        <p:nvPicPr>
+          <p:cNvPr id="12" name="Picture 11">
+            <a:extLst>
+              <a:ext uri="{FF2B5EF4-FFF2-40B4-BE49-F238E27FC236}">
+                <a16:creationId xmlns:a16="http://schemas.microsoft.com/office/drawing/2014/main" id="{16468B2B-4038-8C3E-1505-EA7D77718125}"/>
+              </a:ext>
+            </a:extLst>
+          </p:cNvPr>
+          <p:cNvPicPr>
+            <a:picLocks noChangeAspect="1"/>
+          </p:cNvPicPr>
+          <p:nvPr/>
+        </p:nvPicPr>
+        <p:blipFill>
+          <a:blip r:embed="rId2"/>
+          <a:stretch>
+            <a:fillRect/>
+          </a:stretch>
+        </p:blipFill>
+        <p:spPr>
+          <a:xfrm>
+            <a:off x="7328691" y="2565979"/>
+            <a:ext cx="4163006" cy="1143160"/>
+          </a:xfrm>
+          <a:prstGeom prst="rect">
+            <a:avLst/>
+          </a:prstGeom>
+        </p:spPr>
+      </p:pic>
+      <p:pic>
+        <p:nvPicPr>
+          <p:cNvPr id="14" name="Picture 13">
+            <a:extLst>
+              <a:ext uri="{FF2B5EF4-FFF2-40B4-BE49-F238E27FC236}">
+                <a16:creationId xmlns:a16="http://schemas.microsoft.com/office/drawing/2014/main" id="{8CFFE603-5012-5673-72F7-F6729218517D}"/>
+              </a:ext>
+            </a:extLst>
+          </p:cNvPr>
+          <p:cNvPicPr>
+            <a:picLocks noChangeAspect="1"/>
+          </p:cNvPicPr>
+          <p:nvPr/>
+        </p:nvPicPr>
+        <p:blipFill>
+          <a:blip r:embed="rId3"/>
+          <a:stretch>
+            <a:fillRect/>
+          </a:stretch>
+        </p:blipFill>
+        <p:spPr>
+          <a:xfrm>
+            <a:off x="2276726" y="4431098"/>
+            <a:ext cx="7638545" cy="710947"/>
+          </a:xfrm>
+          <a:prstGeom prst="rect">
+            <a:avLst/>
+          </a:prstGeom>
+        </p:spPr>
+      </p:pic>
+      <p:pic>
+        <p:nvPicPr>
+          <p:cNvPr id="16" name="Picture 15">
+            <a:extLst>
+              <a:ext uri="{FF2B5EF4-FFF2-40B4-BE49-F238E27FC236}">
+                <a16:creationId xmlns:a16="http://schemas.microsoft.com/office/drawing/2014/main" id="{309C51A6-E7AA-A6EB-518C-5078D8DC7C82}"/>
+              </a:ext>
+            </a:extLst>
+          </p:cNvPr>
+          <p:cNvPicPr>
+            <a:picLocks noChangeAspect="1"/>
+          </p:cNvPicPr>
+          <p:nvPr/>
+        </p:nvPicPr>
+        <p:blipFill>
+          <a:blip r:embed="rId4"/>
+          <a:stretch>
+            <a:fillRect/>
+          </a:stretch>
+        </p:blipFill>
+        <p:spPr>
+          <a:xfrm>
+            <a:off x="3152363" y="5611719"/>
+            <a:ext cx="5887272" cy="685896"/>
+          </a:xfrm>
+          <a:prstGeom prst="rect">
+            <a:avLst/>
+          </a:prstGeom>
+        </p:spPr>
+      </p:pic>
+      <p:sp>
+        <p:nvSpPr>
+          <p:cNvPr id="21" name="TextBox 20">
+            <a:extLst>
+              <a:ext uri="{FF2B5EF4-FFF2-40B4-BE49-F238E27FC236}">
+                <a16:creationId xmlns:a16="http://schemas.microsoft.com/office/drawing/2014/main" id="{7211CF23-BD50-BEB9-290B-4C3A82B90FF2}"/>
+              </a:ext>
+            </a:extLst>
+          </p:cNvPr>
+          <p:cNvSpPr txBox="1"/>
+          <p:nvPr/>
+        </p:nvSpPr>
+        <p:spPr>
+          <a:xfrm>
+            <a:off x="2205318" y="4061766"/>
+            <a:ext cx="2259593" cy="369332"/>
+          </a:xfrm>
+          <a:prstGeom prst="rect">
+            <a:avLst/>
+          </a:prstGeom>
+          <a:noFill/>
+        </p:spPr>
+        <p:txBody>
+          <a:bodyPr wrap="none" rtlCol="0">
+            <a:spAutoFit/>
+          </a:bodyPr>
+          <a:lstStyle/>
+          <a:p>
+            <a:r>
+              <a:rPr lang="en-US" dirty="0"/>
+              <a:t>Text Input (single line)</a:t>
+            </a:r>
+          </a:p>
+        </p:txBody>
+      </p:sp>
+      <p:sp>
+        <p:nvSpPr>
+          <p:cNvPr id="22" name="TextBox 21">
+            <a:extLst>
+              <a:ext uri="{FF2B5EF4-FFF2-40B4-BE49-F238E27FC236}">
+                <a16:creationId xmlns:a16="http://schemas.microsoft.com/office/drawing/2014/main" id="{D62F710B-9DED-5914-243D-545D80279176}"/>
+              </a:ext>
+            </a:extLst>
+          </p:cNvPr>
+          <p:cNvSpPr txBox="1"/>
+          <p:nvPr/>
+        </p:nvSpPr>
+        <p:spPr>
+          <a:xfrm>
+            <a:off x="3071681" y="5242387"/>
+            <a:ext cx="2451569" cy="369332"/>
+          </a:xfrm>
+          <a:prstGeom prst="rect">
+            <a:avLst/>
+          </a:prstGeom>
+          <a:noFill/>
+        </p:spPr>
+        <p:txBody>
+          <a:bodyPr wrap="none" rtlCol="0">
+            <a:spAutoFit/>
+          </a:bodyPr>
+          <a:lstStyle/>
+          <a:p>
+            <a:r>
+              <a:rPr lang="en-US" dirty="0"/>
+              <a:t>Password Input (hidden)</a:t>
+            </a:r>
+          </a:p>
+        </p:txBody>
+      </p:sp>
+    </p:spTree>
+    <p:extLst>
+      <p:ext uri="{BB962C8B-B14F-4D97-AF65-F5344CB8AC3E}">
+        <p14:creationId xmlns:p14="http://schemas.microsoft.com/office/powerpoint/2010/main" val="1102024595"/>
+      </p:ext>
+    </p:extLst>
+  </p:cSld>
+  <p:clrMapOvr>
+    <a:masterClrMapping/>
+  </p:clrMapOvr>
+</p:sld>
+</file>
+
+<file path=ppt/slides/slide18.xml><?xml version="1.0" encoding="utf-8"?>
+<p:sld xmlns:a="http://schemas.openxmlformats.org/drawingml/2006/main" xmlns:r="http://schemas.openxmlformats.org/officeDocument/2006/relationships" xmlns:p="http://schemas.openxmlformats.org/presentationml/2006/main">
+  <p:cSld>
+    <p:spTree>
+      <p:nvGrpSpPr>
+        <p:cNvPr id="1" name="">
+          <a:extLst>
+            <a:ext uri="{FF2B5EF4-FFF2-40B4-BE49-F238E27FC236}">
+              <a16:creationId xmlns:a16="http://schemas.microsoft.com/office/drawing/2014/main" id="{80D11574-1541-60C6-A8FA-675FF1BA1DD8}"/>
+            </a:ext>
+          </a:extLst>
+        </p:cNvPr>
+        <p:cNvGrpSpPr/>
+        <p:nvPr/>
+      </p:nvGrpSpPr>
+      <p:grpSpPr>
+        <a:xfrm>
+          <a:off x="0" y="0"/>
+          <a:ext cx="0" cy="0"/>
+          <a:chOff x="0" y="0"/>
+          <a:chExt cx="0" cy="0"/>
+        </a:xfrm>
+      </p:grpSpPr>
+      <p:sp>
+        <p:nvSpPr>
+          <p:cNvPr id="2" name="Title 1">
+            <a:extLst>
+              <a:ext uri="{FF2B5EF4-FFF2-40B4-BE49-F238E27FC236}">
+                <a16:creationId xmlns:a16="http://schemas.microsoft.com/office/drawing/2014/main" id="{3E776F0B-C131-2BFF-7151-01E624DD649F}"/>
+              </a:ext>
+            </a:extLst>
+          </p:cNvPr>
+          <p:cNvSpPr>
+            <a:spLocks noGrp="1"/>
+          </p:cNvSpPr>
+          <p:nvPr>
+            <p:ph type="title"/>
+          </p:nvPr>
+        </p:nvSpPr>
+        <p:spPr/>
+        <p:txBody>
+          <a:bodyPr/>
+          <a:lstStyle/>
+          <a:p>
+            <a:r>
+              <a:rPr lang="en-US" dirty="0"/>
+              <a:t>Forms Continued</a:t>
+            </a:r>
+          </a:p>
+        </p:txBody>
+      </p:sp>
+      <p:pic>
+        <p:nvPicPr>
+          <p:cNvPr id="4" name="Picture 3">
+            <a:extLst>
+              <a:ext uri="{FF2B5EF4-FFF2-40B4-BE49-F238E27FC236}">
+                <a16:creationId xmlns:a16="http://schemas.microsoft.com/office/drawing/2014/main" id="{80A031BF-9990-C178-81AA-986CE3A0D044}"/>
+              </a:ext>
+            </a:extLst>
+          </p:cNvPr>
+          <p:cNvPicPr>
+            <a:picLocks noChangeAspect="1"/>
+          </p:cNvPicPr>
+          <p:nvPr/>
+        </p:nvPicPr>
+        <p:blipFill>
+          <a:blip r:embed="rId2"/>
+          <a:stretch>
+            <a:fillRect/>
+          </a:stretch>
+        </p:blipFill>
+        <p:spPr>
+          <a:xfrm>
+            <a:off x="2571258" y="2237658"/>
+            <a:ext cx="7049484" cy="2010056"/>
+          </a:xfrm>
+          <a:prstGeom prst="rect">
+            <a:avLst/>
+          </a:prstGeom>
+        </p:spPr>
+      </p:pic>
+      <p:pic>
+        <p:nvPicPr>
+          <p:cNvPr id="6" name="Picture 5">
+            <a:extLst>
+              <a:ext uri="{FF2B5EF4-FFF2-40B4-BE49-F238E27FC236}">
+                <a16:creationId xmlns:a16="http://schemas.microsoft.com/office/drawing/2014/main" id="{6965A5D7-3304-4986-72EA-D19D1C5EE7C5}"/>
+              </a:ext>
+            </a:extLst>
+          </p:cNvPr>
+          <p:cNvPicPr>
+            <a:picLocks noChangeAspect="1"/>
+          </p:cNvPicPr>
+          <p:nvPr/>
+        </p:nvPicPr>
+        <p:blipFill>
+          <a:blip r:embed="rId3"/>
+          <a:stretch>
+            <a:fillRect/>
+          </a:stretch>
+        </p:blipFill>
+        <p:spPr>
+          <a:xfrm>
+            <a:off x="2476826" y="4617046"/>
+            <a:ext cx="7363853" cy="2057687"/>
+          </a:xfrm>
+          <a:prstGeom prst="rect">
+            <a:avLst/>
+          </a:prstGeom>
+        </p:spPr>
+      </p:pic>
+      <p:sp>
+        <p:nvSpPr>
+          <p:cNvPr id="7" name="TextBox 6">
+            <a:extLst>
+              <a:ext uri="{FF2B5EF4-FFF2-40B4-BE49-F238E27FC236}">
+                <a16:creationId xmlns:a16="http://schemas.microsoft.com/office/drawing/2014/main" id="{45902AA1-D4B3-1D46-F133-5FC5840D6576}"/>
+              </a:ext>
+            </a:extLst>
+          </p:cNvPr>
+          <p:cNvSpPr txBox="1"/>
+          <p:nvPr/>
+        </p:nvSpPr>
+        <p:spPr>
+          <a:xfrm>
+            <a:off x="2571258" y="1871623"/>
+            <a:ext cx="1630575" cy="369332"/>
+          </a:xfrm>
+          <a:prstGeom prst="rect">
+            <a:avLst/>
+          </a:prstGeom>
+          <a:noFill/>
+        </p:spPr>
+        <p:txBody>
+          <a:bodyPr wrap="none" rtlCol="0">
+            <a:spAutoFit/>
+          </a:bodyPr>
+          <a:lstStyle/>
+          <a:p>
+            <a:r>
+              <a:rPr lang="en-US" dirty="0"/>
+              <a:t>Radio Selection</a:t>
+            </a:r>
+          </a:p>
+        </p:txBody>
+      </p:sp>
+      <p:sp>
+        <p:nvSpPr>
+          <p:cNvPr id="9" name="TextBox 8">
+            <a:extLst>
+              <a:ext uri="{FF2B5EF4-FFF2-40B4-BE49-F238E27FC236}">
+                <a16:creationId xmlns:a16="http://schemas.microsoft.com/office/drawing/2014/main" id="{0F943DA3-CA19-E30C-5C8A-07F83040F686}"/>
+              </a:ext>
+            </a:extLst>
+          </p:cNvPr>
+          <p:cNvSpPr txBox="1"/>
+          <p:nvPr/>
+        </p:nvSpPr>
+        <p:spPr>
+          <a:xfrm>
+            <a:off x="2456783" y="4247714"/>
+            <a:ext cx="1331711" cy="369332"/>
+          </a:xfrm>
+          <a:prstGeom prst="rect">
+            <a:avLst/>
+          </a:prstGeom>
+          <a:noFill/>
+        </p:spPr>
+        <p:txBody>
+          <a:bodyPr wrap="none" rtlCol="0">
+            <a:spAutoFit/>
+          </a:bodyPr>
+          <a:lstStyle/>
+          <a:p>
+            <a:r>
+              <a:rPr lang="en-US" dirty="0"/>
+              <a:t>Checkboxes</a:t>
+            </a:r>
+          </a:p>
+        </p:txBody>
+      </p:sp>
+    </p:spTree>
+    <p:extLst>
+      <p:ext uri="{BB962C8B-B14F-4D97-AF65-F5344CB8AC3E}">
+        <p14:creationId xmlns:p14="http://schemas.microsoft.com/office/powerpoint/2010/main" val="559820515"/>
+      </p:ext>
+    </p:extLst>
+  </p:cSld>
+  <p:clrMapOvr>
+    <a:masterClrMapping/>
+  </p:clrMapOvr>
+</p:sld>
+</file>
+
+<file path=ppt/slides/slide19.xml><?xml version="1.0" encoding="utf-8"?>
+<p:sld xmlns:a="http://schemas.openxmlformats.org/drawingml/2006/main" xmlns:r="http://schemas.openxmlformats.org/officeDocument/2006/relationships" xmlns:p="http://schemas.openxmlformats.org/presentationml/2006/main">
+  <p:cSld>
+    <p:spTree>
+      <p:nvGrpSpPr>
+        <p:cNvPr id="1" name="">
+          <a:extLst>
+            <a:ext uri="{FF2B5EF4-FFF2-40B4-BE49-F238E27FC236}">
+              <a16:creationId xmlns:a16="http://schemas.microsoft.com/office/drawing/2014/main" id="{43C2641D-1EAD-A91E-7D0D-F638471FACC1}"/>
+            </a:ext>
+          </a:extLst>
+        </p:cNvPr>
+        <p:cNvGrpSpPr/>
+        <p:nvPr/>
+      </p:nvGrpSpPr>
+      <p:grpSpPr>
+        <a:xfrm>
+          <a:off x="0" y="0"/>
+          <a:ext cx="0" cy="0"/>
+          <a:chOff x="0" y="0"/>
+          <a:chExt cx="0" cy="0"/>
+        </a:xfrm>
+      </p:grpSpPr>
+      <p:sp>
+        <p:nvSpPr>
+          <p:cNvPr id="2" name="Title 1">
+            <a:extLst>
+              <a:ext uri="{FF2B5EF4-FFF2-40B4-BE49-F238E27FC236}">
+                <a16:creationId xmlns:a16="http://schemas.microsoft.com/office/drawing/2014/main" id="{BE019E9F-795E-79D3-5DBE-E879C557E408}"/>
+              </a:ext>
+            </a:extLst>
+          </p:cNvPr>
+          <p:cNvSpPr>
+            <a:spLocks noGrp="1"/>
+          </p:cNvSpPr>
+          <p:nvPr>
+            <p:ph type="title"/>
+          </p:nvPr>
+        </p:nvSpPr>
+        <p:spPr/>
+        <p:txBody>
+          <a:bodyPr/>
+          <a:lstStyle/>
+          <a:p>
+            <a:r>
+              <a:rPr lang="en-US" dirty="0"/>
+              <a:t>Forms Continued</a:t>
+            </a:r>
+          </a:p>
+        </p:txBody>
+      </p:sp>
+      <p:pic>
+        <p:nvPicPr>
+          <p:cNvPr id="5" name="Picture 4">
+            <a:extLst>
+              <a:ext uri="{FF2B5EF4-FFF2-40B4-BE49-F238E27FC236}">
+                <a16:creationId xmlns:a16="http://schemas.microsoft.com/office/drawing/2014/main" id="{0C29CEA3-1E83-3003-9D2B-EE13CE20C773}"/>
+              </a:ext>
+            </a:extLst>
+          </p:cNvPr>
+          <p:cNvPicPr>
+            <a:picLocks noChangeAspect="1"/>
+          </p:cNvPicPr>
+          <p:nvPr/>
+        </p:nvPicPr>
+        <p:blipFill>
+          <a:blip r:embed="rId2"/>
+          <a:stretch>
+            <a:fillRect/>
+          </a:stretch>
+        </p:blipFill>
+        <p:spPr>
+          <a:xfrm>
+            <a:off x="3609628" y="2614186"/>
+            <a:ext cx="4972744" cy="2095792"/>
+          </a:xfrm>
+          <a:prstGeom prst="rect">
+            <a:avLst/>
+          </a:prstGeom>
+        </p:spPr>
+      </p:pic>
+      <p:pic>
+        <p:nvPicPr>
+          <p:cNvPr id="8" name="Picture 7">
+            <a:extLst>
+              <a:ext uri="{FF2B5EF4-FFF2-40B4-BE49-F238E27FC236}">
+                <a16:creationId xmlns:a16="http://schemas.microsoft.com/office/drawing/2014/main" id="{C9865904-47F5-BD71-B9AF-EC7CA7CB31F5}"/>
+              </a:ext>
+            </a:extLst>
+          </p:cNvPr>
+          <p:cNvPicPr>
+            <a:picLocks noChangeAspect="1"/>
+          </p:cNvPicPr>
+          <p:nvPr/>
+        </p:nvPicPr>
+        <p:blipFill>
+          <a:blip r:embed="rId3"/>
+          <a:stretch>
+            <a:fillRect/>
+          </a:stretch>
+        </p:blipFill>
+        <p:spPr>
+          <a:xfrm>
+            <a:off x="2294994" y="5317527"/>
+            <a:ext cx="7602011" cy="838317"/>
+          </a:xfrm>
+          <a:prstGeom prst="rect">
+            <a:avLst/>
+          </a:prstGeom>
+        </p:spPr>
+      </p:pic>
+      <p:sp>
+        <p:nvSpPr>
+          <p:cNvPr id="9" name="TextBox 8">
+            <a:extLst>
+              <a:ext uri="{FF2B5EF4-FFF2-40B4-BE49-F238E27FC236}">
+                <a16:creationId xmlns:a16="http://schemas.microsoft.com/office/drawing/2014/main" id="{431C8225-6618-ED26-EBA8-B9AD598CB2CB}"/>
+              </a:ext>
+            </a:extLst>
+          </p:cNvPr>
+          <p:cNvSpPr txBox="1"/>
+          <p:nvPr/>
+        </p:nvSpPr>
+        <p:spPr>
+          <a:xfrm>
+            <a:off x="3546875" y="2244854"/>
+            <a:ext cx="1791837" cy="369332"/>
+          </a:xfrm>
+          <a:prstGeom prst="rect">
+            <a:avLst/>
+          </a:prstGeom>
+          <a:noFill/>
+        </p:spPr>
+        <p:txBody>
+          <a:bodyPr wrap="none" rtlCol="0">
+            <a:spAutoFit/>
+          </a:bodyPr>
+          <a:lstStyle/>
+          <a:p>
+            <a:r>
+              <a:rPr lang="en-US" dirty="0"/>
+              <a:t>Dropdown Menu</a:t>
+            </a:r>
+          </a:p>
+        </p:txBody>
+      </p:sp>
+      <p:sp>
+        <p:nvSpPr>
+          <p:cNvPr id="10" name="TextBox 9">
+            <a:extLst>
+              <a:ext uri="{FF2B5EF4-FFF2-40B4-BE49-F238E27FC236}">
+                <a16:creationId xmlns:a16="http://schemas.microsoft.com/office/drawing/2014/main" id="{1352B977-BB42-D55D-2DFF-4EDDC5C9E944}"/>
+              </a:ext>
+            </a:extLst>
+          </p:cNvPr>
+          <p:cNvSpPr txBox="1"/>
+          <p:nvPr/>
+        </p:nvSpPr>
+        <p:spPr>
+          <a:xfrm>
+            <a:off x="2294994" y="4948195"/>
+            <a:ext cx="2226892" cy="369332"/>
+          </a:xfrm>
+          <a:prstGeom prst="rect">
+            <a:avLst/>
+          </a:prstGeom>
+          <a:noFill/>
+        </p:spPr>
+        <p:txBody>
+          <a:bodyPr wrap="none" rtlCol="0">
+            <a:spAutoFit/>
+          </a:bodyPr>
+          <a:lstStyle/>
+          <a:p>
+            <a:r>
+              <a:rPr lang="en-US" dirty="0"/>
+              <a:t>Text Input (multi-line)</a:t>
+            </a:r>
+          </a:p>
+        </p:txBody>
+      </p:sp>
+    </p:spTree>
+    <p:extLst>
+      <p:ext uri="{BB962C8B-B14F-4D97-AF65-F5344CB8AC3E}">
+        <p14:creationId xmlns:p14="http://schemas.microsoft.com/office/powerpoint/2010/main" val="423666372"/>
       </p:ext>
     </p:extLst>
   </p:cSld>
@@ -4052,6 +6477,650 @@
     <p:extLst>
       <p:ext uri="{BB962C8B-B14F-4D97-AF65-F5344CB8AC3E}">
         <p14:creationId xmlns:p14="http://schemas.microsoft.com/office/powerpoint/2010/main" val="3451514112"/>
+      </p:ext>
+    </p:extLst>
+  </p:cSld>
+  <p:clrMapOvr>
+    <a:masterClrMapping/>
+  </p:clrMapOvr>
+</p:sld>
+</file>
+
+<file path=ppt/slides/slide20.xml><?xml version="1.0" encoding="utf-8"?>
+<p:sld xmlns:a="http://schemas.openxmlformats.org/drawingml/2006/main" xmlns:r="http://schemas.openxmlformats.org/officeDocument/2006/relationships" xmlns:p="http://schemas.openxmlformats.org/presentationml/2006/main">
+  <p:cSld>
+    <p:spTree>
+      <p:nvGrpSpPr>
+        <p:cNvPr id="1" name=""/>
+        <p:cNvGrpSpPr/>
+        <p:nvPr/>
+      </p:nvGrpSpPr>
+      <p:grpSpPr>
+        <a:xfrm>
+          <a:off x="0" y="0"/>
+          <a:ext cx="0" cy="0"/>
+          <a:chOff x="0" y="0"/>
+          <a:chExt cx="0" cy="0"/>
+        </a:xfrm>
+      </p:grpSpPr>
+      <p:sp>
+        <p:nvSpPr>
+          <p:cNvPr id="2" name="Title 1">
+            <a:extLst>
+              <a:ext uri="{FF2B5EF4-FFF2-40B4-BE49-F238E27FC236}">
+                <a16:creationId xmlns:a16="http://schemas.microsoft.com/office/drawing/2014/main" id="{B66EDDEC-318C-73FB-8F4E-E9F7B66A0234}"/>
+              </a:ext>
+            </a:extLst>
+          </p:cNvPr>
+          <p:cNvSpPr>
+            <a:spLocks noGrp="1"/>
+          </p:cNvSpPr>
+          <p:nvPr>
+            <p:ph type="title"/>
+          </p:nvPr>
+        </p:nvSpPr>
+        <p:spPr/>
+        <p:txBody>
+          <a:bodyPr/>
+          <a:lstStyle/>
+          <a:p>
+            <a:r>
+              <a:rPr lang="en-US" dirty="0"/>
+              <a:t>Forms Continued</a:t>
+            </a:r>
+          </a:p>
+        </p:txBody>
+      </p:sp>
+      <p:sp>
+        <p:nvSpPr>
+          <p:cNvPr id="3" name="Content Placeholder 2">
+            <a:extLst>
+              <a:ext uri="{FF2B5EF4-FFF2-40B4-BE49-F238E27FC236}">
+                <a16:creationId xmlns:a16="http://schemas.microsoft.com/office/drawing/2014/main" id="{23BA38AB-3AEC-3EE6-E260-BAB3C4B6FDDC}"/>
+              </a:ext>
+            </a:extLst>
+          </p:cNvPr>
+          <p:cNvSpPr>
+            <a:spLocks noGrp="1"/>
+          </p:cNvSpPr>
+          <p:nvPr>
+            <p:ph idx="1"/>
+          </p:nvPr>
+        </p:nvSpPr>
+        <p:spPr>
+          <a:xfrm>
+            <a:off x="581193" y="2180497"/>
+            <a:ext cx="10866736" cy="2006022"/>
+          </a:xfrm>
+        </p:spPr>
+        <p:txBody>
+          <a:bodyPr/>
+          <a:lstStyle/>
+          <a:p>
+            <a:r>
+              <a:rPr lang="en-US" dirty="0"/>
+              <a:t>A button of type ‘submit’ is required for the form</a:t>
+            </a:r>
+          </a:p>
+          <a:p>
+            <a:r>
+              <a:rPr lang="en-US" dirty="0"/>
+              <a:t>The ‘name’ attribute on our inputs correlate to string query parameters within the request URL:</a:t>
+            </a:r>
+          </a:p>
+          <a:p>
+            <a:pPr marL="0" indent="0">
+              <a:buNone/>
+            </a:pPr>
+            <a:r>
+              <a:rPr lang="en-US" dirty="0"/>
+              <a:t>								</a:t>
+            </a:r>
+          </a:p>
+          <a:p>
+            <a:pPr marL="0" indent="0">
+              <a:buNone/>
+            </a:pPr>
+            <a:r>
+              <a:rPr lang="en-US" dirty="0"/>
+              <a:t>							https://pokeapi.co/api/v2/?pokemon=pikachu</a:t>
+            </a:r>
+          </a:p>
+        </p:txBody>
+      </p:sp>
+      <p:pic>
+        <p:nvPicPr>
+          <p:cNvPr id="5" name="Picture 4">
+            <a:extLst>
+              <a:ext uri="{FF2B5EF4-FFF2-40B4-BE49-F238E27FC236}">
+                <a16:creationId xmlns:a16="http://schemas.microsoft.com/office/drawing/2014/main" id="{3624A011-BECF-5793-1012-6AF04C811D27}"/>
+              </a:ext>
+            </a:extLst>
+          </p:cNvPr>
+          <p:cNvPicPr>
+            <a:picLocks noChangeAspect="1"/>
+          </p:cNvPicPr>
+          <p:nvPr/>
+        </p:nvPicPr>
+        <p:blipFill>
+          <a:blip r:embed="rId2"/>
+          <a:stretch>
+            <a:fillRect/>
+          </a:stretch>
+        </p:blipFill>
+        <p:spPr>
+          <a:xfrm>
+            <a:off x="1830458" y="4385912"/>
+            <a:ext cx="8531083" cy="1306675"/>
+          </a:xfrm>
+          <a:prstGeom prst="rect">
+            <a:avLst/>
+          </a:prstGeom>
+        </p:spPr>
+      </p:pic>
+    </p:spTree>
+    <p:extLst>
+      <p:ext uri="{BB962C8B-B14F-4D97-AF65-F5344CB8AC3E}">
+        <p14:creationId xmlns:p14="http://schemas.microsoft.com/office/powerpoint/2010/main" val="3249195096"/>
+      </p:ext>
+    </p:extLst>
+  </p:cSld>
+  <p:clrMapOvr>
+    <a:masterClrMapping/>
+  </p:clrMapOvr>
+</p:sld>
+</file>
+
+<file path=ppt/slides/slide21.xml><?xml version="1.0" encoding="utf-8"?>
+<p:sld xmlns:a="http://schemas.openxmlformats.org/drawingml/2006/main" xmlns:r="http://schemas.openxmlformats.org/officeDocument/2006/relationships" xmlns:p="http://schemas.openxmlformats.org/presentationml/2006/main">
+  <p:cSld>
+    <p:spTree>
+      <p:nvGrpSpPr>
+        <p:cNvPr id="1" name="">
+          <a:extLst>
+            <a:ext uri="{FF2B5EF4-FFF2-40B4-BE49-F238E27FC236}">
+              <a16:creationId xmlns:a16="http://schemas.microsoft.com/office/drawing/2014/main" id="{0D8A837E-99CB-93DD-5B52-223544FF5478}"/>
+            </a:ext>
+          </a:extLst>
+        </p:cNvPr>
+        <p:cNvGrpSpPr/>
+        <p:nvPr/>
+      </p:nvGrpSpPr>
+      <p:grpSpPr>
+        <a:xfrm>
+          <a:off x="0" y="0"/>
+          <a:ext cx="0" cy="0"/>
+          <a:chOff x="0" y="0"/>
+          <a:chExt cx="0" cy="0"/>
+        </a:xfrm>
+      </p:grpSpPr>
+      <p:sp>
+        <p:nvSpPr>
+          <p:cNvPr id="2" name="Title 1">
+            <a:extLst>
+              <a:ext uri="{FF2B5EF4-FFF2-40B4-BE49-F238E27FC236}">
+                <a16:creationId xmlns:a16="http://schemas.microsoft.com/office/drawing/2014/main" id="{F33DB2FB-D865-2F03-BD03-DE670BE4604B}"/>
+              </a:ext>
+            </a:extLst>
+          </p:cNvPr>
+          <p:cNvSpPr>
+            <a:spLocks noGrp="1"/>
+          </p:cNvSpPr>
+          <p:nvPr>
+            <p:ph type="title"/>
+          </p:nvPr>
+        </p:nvSpPr>
+        <p:spPr/>
+        <p:txBody>
+          <a:bodyPr/>
+          <a:lstStyle/>
+          <a:p>
+            <a:r>
+              <a:rPr lang="en-US" dirty="0"/>
+              <a:t>Challenge – Create a form</a:t>
+            </a:r>
+          </a:p>
+        </p:txBody>
+      </p:sp>
+      <p:sp>
+        <p:nvSpPr>
+          <p:cNvPr id="3" name="Content Placeholder 2">
+            <a:extLst>
+              <a:ext uri="{FF2B5EF4-FFF2-40B4-BE49-F238E27FC236}">
+                <a16:creationId xmlns:a16="http://schemas.microsoft.com/office/drawing/2014/main" id="{4949F719-4333-E474-FD14-2765391AEDE5}"/>
+              </a:ext>
+            </a:extLst>
+          </p:cNvPr>
+          <p:cNvSpPr>
+            <a:spLocks noGrp="1"/>
+          </p:cNvSpPr>
+          <p:nvPr>
+            <p:ph idx="1"/>
+          </p:nvPr>
+        </p:nvSpPr>
+        <p:spPr>
+          <a:xfrm>
+            <a:off x="581192" y="2475925"/>
+            <a:ext cx="5317584" cy="1681246"/>
+          </a:xfrm>
+        </p:spPr>
+        <p:txBody>
+          <a:bodyPr/>
+          <a:lstStyle/>
+          <a:p>
+            <a:r>
+              <a:rPr lang="en-US" dirty="0"/>
+              <a:t>Create a form to take in a user’s contact information</a:t>
+            </a:r>
+          </a:p>
+        </p:txBody>
+      </p:sp>
+      <p:sp>
+        <p:nvSpPr>
+          <p:cNvPr id="6" name="TextBox 5">
+            <a:extLst>
+              <a:ext uri="{FF2B5EF4-FFF2-40B4-BE49-F238E27FC236}">
+                <a16:creationId xmlns:a16="http://schemas.microsoft.com/office/drawing/2014/main" id="{2E1CD85B-7C3F-2D32-E899-ABA9C279CE4D}"/>
+              </a:ext>
+            </a:extLst>
+          </p:cNvPr>
+          <p:cNvSpPr txBox="1"/>
+          <p:nvPr/>
+        </p:nvSpPr>
+        <p:spPr>
+          <a:xfrm>
+            <a:off x="1228165" y="2402747"/>
+            <a:ext cx="756938" cy="369332"/>
+          </a:xfrm>
+          <a:prstGeom prst="rect">
+            <a:avLst/>
+          </a:prstGeom>
+          <a:noFill/>
+        </p:spPr>
+        <p:txBody>
+          <a:bodyPr wrap="none" rtlCol="0">
+            <a:spAutoFit/>
+          </a:bodyPr>
+          <a:lstStyle/>
+          <a:p>
+            <a:r>
+              <a:rPr lang="en-US" b="1" dirty="0"/>
+              <a:t>Goal:</a:t>
+            </a:r>
+          </a:p>
+        </p:txBody>
+      </p:sp>
+      <p:sp>
+        <p:nvSpPr>
+          <p:cNvPr id="7" name="TextBox 6">
+            <a:extLst>
+              <a:ext uri="{FF2B5EF4-FFF2-40B4-BE49-F238E27FC236}">
+                <a16:creationId xmlns:a16="http://schemas.microsoft.com/office/drawing/2014/main" id="{BB6ADE9B-1CA9-32BE-AD10-B7CDD82CC3AD}"/>
+              </a:ext>
+            </a:extLst>
+          </p:cNvPr>
+          <p:cNvSpPr txBox="1"/>
+          <p:nvPr/>
+        </p:nvSpPr>
+        <p:spPr>
+          <a:xfrm>
+            <a:off x="6545749" y="2402747"/>
+            <a:ext cx="5065059" cy="369332"/>
+          </a:xfrm>
+          <a:prstGeom prst="rect">
+            <a:avLst/>
+          </a:prstGeom>
+          <a:noFill/>
+        </p:spPr>
+        <p:txBody>
+          <a:bodyPr wrap="square" rtlCol="0">
+            <a:spAutoFit/>
+          </a:bodyPr>
+          <a:lstStyle/>
+          <a:p>
+            <a:r>
+              <a:rPr lang="en-US" b="1" dirty="0"/>
+              <a:t>Scenario:  			   10 min</a:t>
+            </a:r>
+          </a:p>
+        </p:txBody>
+      </p:sp>
+      <p:sp>
+        <p:nvSpPr>
+          <p:cNvPr id="8" name="Content Placeholder 2">
+            <a:extLst>
+              <a:ext uri="{FF2B5EF4-FFF2-40B4-BE49-F238E27FC236}">
+                <a16:creationId xmlns:a16="http://schemas.microsoft.com/office/drawing/2014/main" id="{125F4D0E-A57C-298F-329A-FB8969BB0686}"/>
+              </a:ext>
+            </a:extLst>
+          </p:cNvPr>
+          <p:cNvSpPr txBox="1">
+            <a:spLocks/>
+          </p:cNvSpPr>
+          <p:nvPr/>
+        </p:nvSpPr>
+        <p:spPr>
+          <a:xfrm>
+            <a:off x="6545749" y="2772078"/>
+            <a:ext cx="4661642" cy="3639113"/>
+          </a:xfrm>
+          <a:prstGeom prst="rect">
+            <a:avLst/>
+          </a:prstGeom>
+        </p:spPr>
+        <p:txBody>
+          <a:bodyPr vert="horz" lIns="91440" tIns="45720" rIns="91440" bIns="45720" rtlCol="0" anchor="ctr">
+            <a:normAutofit/>
+          </a:bodyPr>
+          <a:lstStyle>
+            <a:lvl1pPr marL="306000" indent="-306000" algn="l" defTabSz="457200" rtl="0" eaLnBrk="1" latinLnBrk="0" hangingPunct="1">
+              <a:spcBef>
+                <a:spcPct val="20000"/>
+              </a:spcBef>
+              <a:spcAft>
+                <a:spcPts val="600"/>
+              </a:spcAft>
+              <a:buClr>
+                <a:schemeClr val="accent2"/>
+              </a:buClr>
+              <a:buSzPct val="92000"/>
+              <a:buFont typeface="Wingdings 2" panose="05020102010507070707" pitchFamily="18" charset="2"/>
+              <a:buChar char=""/>
+              <a:defRPr sz="1800" kern="1200">
+                <a:solidFill>
+                  <a:schemeClr val="tx2"/>
+                </a:solidFill>
+                <a:latin typeface="+mn-lt"/>
+                <a:ea typeface="+mn-ea"/>
+                <a:cs typeface="+mn-cs"/>
+              </a:defRPr>
+            </a:lvl1pPr>
+            <a:lvl2pPr marL="630000" indent="-306000" algn="l" defTabSz="457200" rtl="0" eaLnBrk="1" latinLnBrk="0" hangingPunct="1">
+              <a:spcBef>
+                <a:spcPct val="20000"/>
+              </a:spcBef>
+              <a:spcAft>
+                <a:spcPts val="600"/>
+              </a:spcAft>
+              <a:buClr>
+                <a:schemeClr val="accent2"/>
+              </a:buClr>
+              <a:buSzPct val="92000"/>
+              <a:buFont typeface="Wingdings 2" panose="05020102010507070707" pitchFamily="18" charset="2"/>
+              <a:buChar char=""/>
+              <a:defRPr sz="1600" kern="1200">
+                <a:solidFill>
+                  <a:schemeClr val="tx2"/>
+                </a:solidFill>
+                <a:latin typeface="+mn-lt"/>
+                <a:ea typeface="+mn-ea"/>
+                <a:cs typeface="+mn-cs"/>
+              </a:defRPr>
+            </a:lvl2pPr>
+            <a:lvl3pPr marL="900000" indent="-270000" algn="l" defTabSz="457200" rtl="0" eaLnBrk="1" latinLnBrk="0" hangingPunct="1">
+              <a:spcBef>
+                <a:spcPct val="20000"/>
+              </a:spcBef>
+              <a:spcAft>
+                <a:spcPts val="600"/>
+              </a:spcAft>
+              <a:buClr>
+                <a:schemeClr val="accent2"/>
+              </a:buClr>
+              <a:buSzPct val="92000"/>
+              <a:buFont typeface="Wingdings 2" panose="05020102010507070707" pitchFamily="18" charset="2"/>
+              <a:buChar char=""/>
+              <a:defRPr sz="1400" kern="1200">
+                <a:solidFill>
+                  <a:schemeClr val="tx2"/>
+                </a:solidFill>
+                <a:latin typeface="+mn-lt"/>
+                <a:ea typeface="+mn-ea"/>
+                <a:cs typeface="+mn-cs"/>
+              </a:defRPr>
+            </a:lvl3pPr>
+            <a:lvl4pPr marL="1242000" indent="-234000" algn="l" defTabSz="457200" rtl="0" eaLnBrk="1" latinLnBrk="0" hangingPunct="1">
+              <a:spcBef>
+                <a:spcPct val="20000"/>
+              </a:spcBef>
+              <a:spcAft>
+                <a:spcPts val="600"/>
+              </a:spcAft>
+              <a:buClr>
+                <a:schemeClr val="accent2"/>
+              </a:buClr>
+              <a:buSzPct val="92000"/>
+              <a:buFont typeface="Wingdings 2" panose="05020102010507070707" pitchFamily="18" charset="2"/>
+              <a:buChar char=""/>
+              <a:defRPr sz="1200" kern="1200">
+                <a:solidFill>
+                  <a:schemeClr val="tx2"/>
+                </a:solidFill>
+                <a:latin typeface="+mn-lt"/>
+                <a:ea typeface="+mn-ea"/>
+                <a:cs typeface="+mn-cs"/>
+              </a:defRPr>
+            </a:lvl4pPr>
+            <a:lvl5pPr marL="1602000" indent="-234000" algn="l" defTabSz="457200" rtl="0" eaLnBrk="1" latinLnBrk="0" hangingPunct="1">
+              <a:spcBef>
+                <a:spcPct val="20000"/>
+              </a:spcBef>
+              <a:spcAft>
+                <a:spcPts val="600"/>
+              </a:spcAft>
+              <a:buClr>
+                <a:schemeClr val="accent2"/>
+              </a:buClr>
+              <a:buSzPct val="92000"/>
+              <a:buFont typeface="Wingdings 2" panose="05020102010507070707" pitchFamily="18" charset="2"/>
+              <a:buChar char=""/>
+              <a:defRPr sz="1200" kern="1200">
+                <a:solidFill>
+                  <a:schemeClr val="tx2"/>
+                </a:solidFill>
+                <a:latin typeface="+mn-lt"/>
+                <a:ea typeface="+mn-ea"/>
+                <a:cs typeface="+mn-cs"/>
+              </a:defRPr>
+            </a:lvl5pPr>
+            <a:lvl6pPr marL="1900000" indent="-228600" algn="l" defTabSz="457200" rtl="0" eaLnBrk="1" latinLnBrk="0" hangingPunct="1">
+              <a:spcBef>
+                <a:spcPct val="20000"/>
+              </a:spcBef>
+              <a:spcAft>
+                <a:spcPts val="600"/>
+              </a:spcAft>
+              <a:buClr>
+                <a:schemeClr val="accent2"/>
+              </a:buClr>
+              <a:buSzPct val="92000"/>
+              <a:buFont typeface="Wingdings 2" panose="05020102010507070707" pitchFamily="18" charset="2"/>
+              <a:buChar char=""/>
+              <a:defRPr sz="1200" kern="1200">
+                <a:solidFill>
+                  <a:schemeClr val="tx2"/>
+                </a:solidFill>
+                <a:latin typeface="+mn-lt"/>
+                <a:ea typeface="+mn-ea"/>
+                <a:cs typeface="+mn-cs"/>
+              </a:defRPr>
+            </a:lvl6pPr>
+            <a:lvl7pPr marL="2200000" indent="-228600" algn="l" defTabSz="457200" rtl="0" eaLnBrk="1" latinLnBrk="0" hangingPunct="1">
+              <a:spcBef>
+                <a:spcPct val="20000"/>
+              </a:spcBef>
+              <a:spcAft>
+                <a:spcPts val="600"/>
+              </a:spcAft>
+              <a:buClr>
+                <a:schemeClr val="accent2"/>
+              </a:buClr>
+              <a:buSzPct val="92000"/>
+              <a:buFont typeface="Wingdings 2" panose="05020102010507070707" pitchFamily="18" charset="2"/>
+              <a:buChar char=""/>
+              <a:defRPr sz="1200" kern="1200">
+                <a:solidFill>
+                  <a:schemeClr val="tx2"/>
+                </a:solidFill>
+                <a:latin typeface="+mn-lt"/>
+                <a:ea typeface="+mn-ea"/>
+                <a:cs typeface="+mn-cs"/>
+              </a:defRPr>
+            </a:lvl7pPr>
+            <a:lvl8pPr marL="2500000" indent="-228600" algn="l" defTabSz="457200" rtl="0" eaLnBrk="1" latinLnBrk="0" hangingPunct="1">
+              <a:spcBef>
+                <a:spcPct val="20000"/>
+              </a:spcBef>
+              <a:spcAft>
+                <a:spcPts val="600"/>
+              </a:spcAft>
+              <a:buClr>
+                <a:schemeClr val="accent2"/>
+              </a:buClr>
+              <a:buSzPct val="92000"/>
+              <a:buFont typeface="Wingdings 2" panose="05020102010507070707" pitchFamily="18" charset="2"/>
+              <a:buChar char=""/>
+              <a:defRPr sz="1200" kern="1200">
+                <a:solidFill>
+                  <a:schemeClr val="tx2"/>
+                </a:solidFill>
+                <a:latin typeface="+mn-lt"/>
+                <a:ea typeface="+mn-ea"/>
+                <a:cs typeface="+mn-cs"/>
+              </a:defRPr>
+            </a:lvl8pPr>
+            <a:lvl9pPr marL="2800000" indent="-228600" algn="l" defTabSz="457200" rtl="0" eaLnBrk="1" latinLnBrk="0" hangingPunct="1">
+              <a:spcBef>
+                <a:spcPct val="20000"/>
+              </a:spcBef>
+              <a:spcAft>
+                <a:spcPts val="600"/>
+              </a:spcAft>
+              <a:buClr>
+                <a:schemeClr val="accent2"/>
+              </a:buClr>
+              <a:buSzPct val="92000"/>
+              <a:buFont typeface="Wingdings 2" panose="05020102010507070707" pitchFamily="18" charset="2"/>
+              <a:buChar char=""/>
+              <a:defRPr sz="1200" kern="1200">
+                <a:solidFill>
+                  <a:schemeClr val="tx2"/>
+                </a:solidFill>
+                <a:latin typeface="+mn-lt"/>
+                <a:ea typeface="+mn-ea"/>
+                <a:cs typeface="+mn-cs"/>
+              </a:defRPr>
+            </a:lvl9pPr>
+          </a:lstStyle>
+          <a:p>
+            <a:r>
+              <a:rPr lang="en-US" dirty="0"/>
+              <a:t>Your organization needs a static site to advertise their new product. </a:t>
+            </a:r>
+          </a:p>
+          <a:p>
+            <a:r>
+              <a:rPr lang="en-US" dirty="0"/>
+              <a:t>Further develop the site by creating a form that can accept user input:</a:t>
+            </a:r>
+          </a:p>
+          <a:p>
+            <a:pPr lvl="1"/>
+            <a:r>
+              <a:rPr lang="en-US" dirty="0"/>
+              <a:t>A name</a:t>
+            </a:r>
+          </a:p>
+          <a:p>
+            <a:pPr lvl="1"/>
+            <a:r>
+              <a:rPr lang="en-US" dirty="0"/>
+              <a:t>Email</a:t>
+            </a:r>
+          </a:p>
+          <a:p>
+            <a:pPr lvl="1"/>
+            <a:r>
+              <a:rPr lang="en-US" dirty="0"/>
+              <a:t>Dropdown to select which product they are interested in</a:t>
+            </a:r>
+          </a:p>
+          <a:p>
+            <a:r>
+              <a:rPr lang="en-US" dirty="0"/>
+              <a:t>The form doesn’t need to submit to a backend </a:t>
+            </a:r>
+          </a:p>
+        </p:txBody>
+      </p:sp>
+    </p:spTree>
+    <p:extLst>
+      <p:ext uri="{BB962C8B-B14F-4D97-AF65-F5344CB8AC3E}">
+        <p14:creationId xmlns:p14="http://schemas.microsoft.com/office/powerpoint/2010/main" val="1265308203"/>
+      </p:ext>
+    </p:extLst>
+  </p:cSld>
+  <p:clrMapOvr>
+    <a:masterClrMapping/>
+  </p:clrMapOvr>
+</p:sld>
+</file>
+
+<file path=ppt/slides/slide22.xml><?xml version="1.0" encoding="utf-8"?>
+<p:sld xmlns:a="http://schemas.openxmlformats.org/drawingml/2006/main" xmlns:r="http://schemas.openxmlformats.org/officeDocument/2006/relationships" xmlns:p="http://schemas.openxmlformats.org/presentationml/2006/main">
+  <p:cSld>
+    <p:spTree>
+      <p:nvGrpSpPr>
+        <p:cNvPr id="1" name="">
+          <a:extLst>
+            <a:ext uri="{FF2B5EF4-FFF2-40B4-BE49-F238E27FC236}">
+              <a16:creationId xmlns:a16="http://schemas.microsoft.com/office/drawing/2014/main" id="{F209D22E-B4EF-BE14-98FC-797C7D81E5F0}"/>
+            </a:ext>
+          </a:extLst>
+        </p:cNvPr>
+        <p:cNvGrpSpPr/>
+        <p:nvPr/>
+      </p:nvGrpSpPr>
+      <p:grpSpPr>
+        <a:xfrm>
+          <a:off x="0" y="0"/>
+          <a:ext cx="0" cy="0"/>
+          <a:chOff x="0" y="0"/>
+          <a:chExt cx="0" cy="0"/>
+        </a:xfrm>
+      </p:grpSpPr>
+      <p:sp>
+        <p:nvSpPr>
+          <p:cNvPr id="2" name="Title 1">
+            <a:extLst>
+              <a:ext uri="{FF2B5EF4-FFF2-40B4-BE49-F238E27FC236}">
+                <a16:creationId xmlns:a16="http://schemas.microsoft.com/office/drawing/2014/main" id="{54B295F2-5B8E-CC15-1814-4A53A56E98E8}"/>
+              </a:ext>
+            </a:extLst>
+          </p:cNvPr>
+          <p:cNvSpPr>
+            <a:spLocks noGrp="1"/>
+          </p:cNvSpPr>
+          <p:nvPr>
+            <p:ph type="ctrTitle"/>
+          </p:nvPr>
+        </p:nvSpPr>
+        <p:spPr/>
+        <p:txBody>
+          <a:bodyPr/>
+          <a:lstStyle/>
+          <a:p>
+            <a:r>
+              <a:rPr lang="en-US" dirty="0"/>
+              <a:t>CSS</a:t>
+            </a:r>
+          </a:p>
+        </p:txBody>
+      </p:sp>
+    </p:spTree>
+    <p:extLst>
+      <p:ext uri="{BB962C8B-B14F-4D97-AF65-F5344CB8AC3E}">
+        <p14:creationId xmlns:p14="http://schemas.microsoft.com/office/powerpoint/2010/main" val="2976845187"/>
       </p:ext>
     </p:extLst>
   </p:cSld>
@@ -4432,6 +7501,189 @@
         <p:cNvPr id="1" name="">
           <a:extLst>
             <a:ext uri="{FF2B5EF4-FFF2-40B4-BE49-F238E27FC236}">
+              <a16:creationId xmlns:a16="http://schemas.microsoft.com/office/drawing/2014/main" id="{DE6220D5-C02E-3056-0F84-5A98B35F0A3D}"/>
+            </a:ext>
+          </a:extLst>
+        </p:cNvPr>
+        <p:cNvGrpSpPr/>
+        <p:nvPr/>
+      </p:nvGrpSpPr>
+      <p:grpSpPr>
+        <a:xfrm>
+          <a:off x="0" y="0"/>
+          <a:ext cx="0" cy="0"/>
+          <a:chOff x="0" y="0"/>
+          <a:chExt cx="0" cy="0"/>
+        </a:xfrm>
+      </p:grpSpPr>
+      <p:sp>
+        <p:nvSpPr>
+          <p:cNvPr id="2" name="Title 1">
+            <a:extLst>
+              <a:ext uri="{FF2B5EF4-FFF2-40B4-BE49-F238E27FC236}">
+                <a16:creationId xmlns:a16="http://schemas.microsoft.com/office/drawing/2014/main" id="{D44A9455-1722-F560-8E26-5E4FFDA0CCFA}"/>
+              </a:ext>
+            </a:extLst>
+          </p:cNvPr>
+          <p:cNvSpPr>
+            <a:spLocks noGrp="1"/>
+          </p:cNvSpPr>
+          <p:nvPr>
+            <p:ph type="title"/>
+          </p:nvPr>
+        </p:nvSpPr>
+        <p:spPr/>
+        <p:txBody>
+          <a:bodyPr/>
+          <a:lstStyle/>
+          <a:p>
+            <a:r>
+              <a:rPr lang="en-US" dirty="0"/>
+              <a:t>Common Elements</a:t>
+            </a:r>
+          </a:p>
+        </p:txBody>
+      </p:sp>
+      <p:pic>
+        <p:nvPicPr>
+          <p:cNvPr id="7" name="Picture 6">
+            <a:extLst>
+              <a:ext uri="{FF2B5EF4-FFF2-40B4-BE49-F238E27FC236}">
+                <a16:creationId xmlns:a16="http://schemas.microsoft.com/office/drawing/2014/main" id="{19FBF595-EB2F-0BF8-45EF-E00D2E092A92}"/>
+              </a:ext>
+            </a:extLst>
+          </p:cNvPr>
+          <p:cNvPicPr>
+            <a:picLocks noChangeAspect="1"/>
+          </p:cNvPicPr>
+          <p:nvPr/>
+        </p:nvPicPr>
+        <p:blipFill>
+          <a:blip r:embed="rId2"/>
+          <a:stretch>
+            <a:fillRect/>
+          </a:stretch>
+        </p:blipFill>
+        <p:spPr>
+          <a:xfrm>
+            <a:off x="674711" y="2303748"/>
+            <a:ext cx="5801535" cy="3810532"/>
+          </a:xfrm>
+          <a:prstGeom prst="rect">
+            <a:avLst/>
+          </a:prstGeom>
+        </p:spPr>
+      </p:pic>
+      <p:sp>
+        <p:nvSpPr>
+          <p:cNvPr id="8" name="TextBox 7">
+            <a:extLst>
+              <a:ext uri="{FF2B5EF4-FFF2-40B4-BE49-F238E27FC236}">
+                <a16:creationId xmlns:a16="http://schemas.microsoft.com/office/drawing/2014/main" id="{DBE62683-28B5-C0E6-8245-2757A0C690DF}"/>
+              </a:ext>
+            </a:extLst>
+          </p:cNvPr>
+          <p:cNvSpPr txBox="1"/>
+          <p:nvPr/>
+        </p:nvSpPr>
+        <p:spPr>
+          <a:xfrm>
+            <a:off x="7037293" y="3331851"/>
+            <a:ext cx="4096871" cy="1477328"/>
+          </a:xfrm>
+          <a:prstGeom prst="rect">
+            <a:avLst/>
+          </a:prstGeom>
+          <a:noFill/>
+        </p:spPr>
+        <p:txBody>
+          <a:bodyPr wrap="square" rtlCol="0">
+            <a:spAutoFit/>
+          </a:bodyPr>
+          <a:lstStyle/>
+          <a:p>
+            <a:pPr marL="285750" indent="-285750">
+              <a:buClr>
+                <a:schemeClr val="accent2"/>
+              </a:buClr>
+              <a:buFont typeface="Wingdings" panose="05000000000000000000" pitchFamily="2" charset="2"/>
+              <a:buChar char="§"/>
+            </a:pPr>
+            <a:r>
+              <a:rPr lang="en-US" dirty="0"/>
+              <a:t>&lt;title&gt; - sets the name in browser tab</a:t>
+            </a:r>
+          </a:p>
+          <a:p>
+            <a:pPr marL="285750" indent="-285750">
+              <a:buClr>
+                <a:schemeClr val="accent2"/>
+              </a:buClr>
+              <a:buFont typeface="Wingdings" panose="05000000000000000000" pitchFamily="2" charset="2"/>
+              <a:buChar char="§"/>
+            </a:pPr>
+            <a:r>
+              <a:rPr lang="en-US" dirty="0"/>
+              <a:t>&lt;h1&gt; - header 1 (largest) - 6 (smallest)</a:t>
+            </a:r>
+          </a:p>
+          <a:p>
+            <a:pPr marL="285750" indent="-285750">
+              <a:buClr>
+                <a:schemeClr val="accent2"/>
+              </a:buClr>
+              <a:buFont typeface="Wingdings" panose="05000000000000000000" pitchFamily="2" charset="2"/>
+              <a:buChar char="§"/>
+            </a:pPr>
+            <a:r>
+              <a:rPr lang="en-US" dirty="0"/>
+              <a:t>&lt;p&gt; - paragraph</a:t>
+            </a:r>
+          </a:p>
+          <a:p>
+            <a:pPr marL="285750" indent="-285750">
+              <a:buClr>
+                <a:schemeClr val="accent2"/>
+              </a:buClr>
+              <a:buFont typeface="Wingdings" panose="05000000000000000000" pitchFamily="2" charset="2"/>
+              <a:buChar char="§"/>
+            </a:pPr>
+            <a:r>
+              <a:rPr lang="en-US" dirty="0"/>
+              <a:t>&lt;a&gt; - anchor (links; notice the </a:t>
+            </a:r>
+            <a:r>
+              <a:rPr lang="en-US" dirty="0" err="1"/>
+              <a:t>href</a:t>
+            </a:r>
+            <a:r>
+              <a:rPr lang="en-US" dirty="0"/>
+              <a:t> attribute)</a:t>
+            </a:r>
+          </a:p>
+        </p:txBody>
+      </p:sp>
+    </p:spTree>
+    <p:extLst>
+      <p:ext uri="{BB962C8B-B14F-4D97-AF65-F5344CB8AC3E}">
+        <p14:creationId xmlns:p14="http://schemas.microsoft.com/office/powerpoint/2010/main" val="3906304139"/>
+      </p:ext>
+    </p:extLst>
+  </p:cSld>
+  <p:clrMapOvr>
+    <a:masterClrMapping/>
+  </p:clrMapOvr>
+</p:sld>
+</file>
+
+<file path=ppt/slides/slide6.xml><?xml version="1.0" encoding="utf-8"?>
+<p:sld xmlns:a="http://schemas.openxmlformats.org/drawingml/2006/main" xmlns:r="http://schemas.openxmlformats.org/officeDocument/2006/relationships" xmlns:p="http://schemas.openxmlformats.org/presentationml/2006/main">
+  <p:cSld>
+    <p:spTree>
+      <p:nvGrpSpPr>
+        <p:cNvPr id="1" name="">
+          <a:extLst>
+            <a:ext uri="{FF2B5EF4-FFF2-40B4-BE49-F238E27FC236}">
               <a16:creationId xmlns:a16="http://schemas.microsoft.com/office/drawing/2014/main" id="{E83D92F2-BD3F-5502-960E-3CFF3577844B}"/>
             </a:ext>
           </a:extLst>
@@ -4470,7 +7722,7 @@
           <a:p>
             <a:r>
               <a:rPr lang="en-US" dirty="0"/>
-              <a:t>Challenge Demo – How to Excel in this course</a:t>
+              <a:t>Challenge – Create A basic HTML page</a:t>
             </a:r>
           </a:p>
         </p:txBody>
@@ -4503,7 +7755,7 @@
           <a:p>
             <a:r>
               <a:rPr lang="en-US" dirty="0"/>
-              <a:t>Complete a hands-on challenge</a:t>
+              <a:t>Create a HTML page</a:t>
             </a:r>
           </a:p>
         </p:txBody>
@@ -4557,8 +7809,8 @@
         </p:nvSpPr>
         <p:spPr>
           <a:xfrm>
-            <a:off x="6949165" y="2402747"/>
-            <a:ext cx="4661643" cy="369332"/>
+            <a:off x="6670965" y="2402747"/>
+            <a:ext cx="4939844" cy="369332"/>
           </a:xfrm>
           <a:prstGeom prst="rect">
             <a:avLst/>
@@ -4573,7 +7825,7 @@
           <a:p>
             <a:r>
               <a:rPr lang="en-US" b="1" dirty="0"/>
-              <a:t>Scenario:  			   5 min</a:t>
+              <a:t>Scenario:  			   10 min</a:t>
             </a:r>
           </a:p>
         </p:txBody>
@@ -4808,7 +8060,7 @@
           <a:p>
             <a:r>
               <a:rPr lang="en-US" dirty="0"/>
-              <a:t>Your organization needs to relay technical concepts to you. Clients often need to do the same. Take a few moments to get some pen and paper ready to take notes. </a:t>
+              <a:t>Your organization needs a static site to advertise their new product. Get started by making your first HTML document. </a:t>
             </a:r>
           </a:p>
         </p:txBody>
@@ -4817,6 +8069,467 @@
     <p:extLst>
       <p:ext uri="{BB962C8B-B14F-4D97-AF65-F5344CB8AC3E}">
         <p14:creationId xmlns:p14="http://schemas.microsoft.com/office/powerpoint/2010/main" val="3587871389"/>
+      </p:ext>
+    </p:extLst>
+  </p:cSld>
+  <p:clrMapOvr>
+    <a:masterClrMapping/>
+  </p:clrMapOvr>
+</p:sld>
+</file>
+
+<file path=ppt/slides/slide7.xml><?xml version="1.0" encoding="utf-8"?>
+<p:sld xmlns:a="http://schemas.openxmlformats.org/drawingml/2006/main" xmlns:r="http://schemas.openxmlformats.org/officeDocument/2006/relationships" xmlns:p="http://schemas.openxmlformats.org/presentationml/2006/main">
+  <p:cSld>
+    <p:spTree>
+      <p:nvGrpSpPr>
+        <p:cNvPr id="1" name=""/>
+        <p:cNvGrpSpPr/>
+        <p:nvPr/>
+      </p:nvGrpSpPr>
+      <p:grpSpPr>
+        <a:xfrm>
+          <a:off x="0" y="0"/>
+          <a:ext cx="0" cy="0"/>
+          <a:chOff x="0" y="0"/>
+          <a:chExt cx="0" cy="0"/>
+        </a:xfrm>
+      </p:grpSpPr>
+      <p:sp>
+        <p:nvSpPr>
+          <p:cNvPr id="2" name="Title 1">
+            <a:extLst>
+              <a:ext uri="{FF2B5EF4-FFF2-40B4-BE49-F238E27FC236}">
+                <a16:creationId xmlns:a16="http://schemas.microsoft.com/office/drawing/2014/main" id="{C8A729C1-7785-9E7B-D8ED-56109887C7C9}"/>
+              </a:ext>
+            </a:extLst>
+          </p:cNvPr>
+          <p:cNvSpPr>
+            <a:spLocks noGrp="1"/>
+          </p:cNvSpPr>
+          <p:nvPr>
+            <p:ph type="title"/>
+          </p:nvPr>
+        </p:nvSpPr>
+        <p:spPr/>
+        <p:txBody>
+          <a:bodyPr/>
+          <a:lstStyle/>
+          <a:p>
+            <a:r>
+              <a:rPr lang="en-US" dirty="0"/>
+              <a:t>Setting the head</a:t>
+            </a:r>
+          </a:p>
+        </p:txBody>
+      </p:sp>
+      <p:sp>
+        <p:nvSpPr>
+          <p:cNvPr id="3" name="Content Placeholder 2">
+            <a:extLst>
+              <a:ext uri="{FF2B5EF4-FFF2-40B4-BE49-F238E27FC236}">
+                <a16:creationId xmlns:a16="http://schemas.microsoft.com/office/drawing/2014/main" id="{B7344593-A299-3B19-97F1-861ED6C07B31}"/>
+              </a:ext>
+            </a:extLst>
+          </p:cNvPr>
+          <p:cNvSpPr>
+            <a:spLocks noGrp="1"/>
+          </p:cNvSpPr>
+          <p:nvPr>
+            <p:ph idx="1"/>
+          </p:nvPr>
+        </p:nvSpPr>
+        <p:spPr>
+          <a:xfrm>
+            <a:off x="1953548" y="2046027"/>
+            <a:ext cx="8284902" cy="2011408"/>
+          </a:xfrm>
+        </p:spPr>
+        <p:txBody>
+          <a:bodyPr/>
+          <a:lstStyle/>
+          <a:p>
+            <a:r>
+              <a:rPr lang="en-US" dirty="0"/>
+              <a:t>meta elements describe the page and help search optimization</a:t>
+            </a:r>
+          </a:p>
+          <a:p>
+            <a:r>
+              <a:rPr lang="en-US" dirty="0"/>
+              <a:t>Setting the width of the content to the device viewport width is key to rendering content in a consistent way</a:t>
+            </a:r>
+          </a:p>
+        </p:txBody>
+      </p:sp>
+      <p:pic>
+        <p:nvPicPr>
+          <p:cNvPr id="7" name="Picture 6">
+            <a:extLst>
+              <a:ext uri="{FF2B5EF4-FFF2-40B4-BE49-F238E27FC236}">
+                <a16:creationId xmlns:a16="http://schemas.microsoft.com/office/drawing/2014/main" id="{E7BE8E49-4522-F398-210F-F4C0676B0154}"/>
+              </a:ext>
+            </a:extLst>
+          </p:cNvPr>
+          <p:cNvPicPr>
+            <a:picLocks noChangeAspect="1"/>
+          </p:cNvPicPr>
+          <p:nvPr/>
+        </p:nvPicPr>
+        <p:blipFill>
+          <a:blip r:embed="rId2"/>
+          <a:stretch>
+            <a:fillRect/>
+          </a:stretch>
+        </p:blipFill>
+        <p:spPr>
+          <a:xfrm>
+            <a:off x="2291527" y="3911962"/>
+            <a:ext cx="7608945" cy="2011408"/>
+          </a:xfrm>
+          <a:prstGeom prst="rect">
+            <a:avLst/>
+          </a:prstGeom>
+        </p:spPr>
+      </p:pic>
+    </p:spTree>
+    <p:extLst>
+      <p:ext uri="{BB962C8B-B14F-4D97-AF65-F5344CB8AC3E}">
+        <p14:creationId xmlns:p14="http://schemas.microsoft.com/office/powerpoint/2010/main" val="988575065"/>
+      </p:ext>
+    </p:extLst>
+  </p:cSld>
+  <p:clrMapOvr>
+    <a:masterClrMapping/>
+  </p:clrMapOvr>
+</p:sld>
+</file>
+
+<file path=ppt/slides/slide8.xml><?xml version="1.0" encoding="utf-8"?>
+<p:sld xmlns:a="http://schemas.openxmlformats.org/drawingml/2006/main" xmlns:r="http://schemas.openxmlformats.org/officeDocument/2006/relationships" xmlns:p="http://schemas.openxmlformats.org/presentationml/2006/main">
+  <p:cSld>
+    <p:spTree>
+      <p:nvGrpSpPr>
+        <p:cNvPr id="1" name=""/>
+        <p:cNvGrpSpPr/>
+        <p:nvPr/>
+      </p:nvGrpSpPr>
+      <p:grpSpPr>
+        <a:xfrm>
+          <a:off x="0" y="0"/>
+          <a:ext cx="0" cy="0"/>
+          <a:chOff x="0" y="0"/>
+          <a:chExt cx="0" cy="0"/>
+        </a:xfrm>
+      </p:grpSpPr>
+      <p:sp>
+        <p:nvSpPr>
+          <p:cNvPr id="2" name="Title 1">
+            <a:extLst>
+              <a:ext uri="{FF2B5EF4-FFF2-40B4-BE49-F238E27FC236}">
+                <a16:creationId xmlns:a16="http://schemas.microsoft.com/office/drawing/2014/main" id="{0EF20AA6-2666-9093-5D72-939153166A1B}"/>
+              </a:ext>
+            </a:extLst>
+          </p:cNvPr>
+          <p:cNvSpPr>
+            <a:spLocks noGrp="1"/>
+          </p:cNvSpPr>
+          <p:nvPr>
+            <p:ph type="title"/>
+          </p:nvPr>
+        </p:nvSpPr>
+        <p:spPr/>
+        <p:txBody>
+          <a:bodyPr/>
+          <a:lstStyle/>
+          <a:p>
+            <a:r>
+              <a:rPr lang="en-US" dirty="0"/>
+              <a:t>Semantic elements</a:t>
+            </a:r>
+          </a:p>
+        </p:txBody>
+      </p:sp>
+      <p:sp>
+        <p:nvSpPr>
+          <p:cNvPr id="3" name="Content Placeholder 2">
+            <a:extLst>
+              <a:ext uri="{FF2B5EF4-FFF2-40B4-BE49-F238E27FC236}">
+                <a16:creationId xmlns:a16="http://schemas.microsoft.com/office/drawing/2014/main" id="{42AA4435-7047-A036-BD7D-2AFC91394C9B}"/>
+              </a:ext>
+            </a:extLst>
+          </p:cNvPr>
+          <p:cNvSpPr>
+            <a:spLocks noGrp="1"/>
+          </p:cNvSpPr>
+          <p:nvPr>
+            <p:ph idx="1"/>
+          </p:nvPr>
+        </p:nvSpPr>
+        <p:spPr>
+          <a:xfrm>
+            <a:off x="581192" y="2180496"/>
+            <a:ext cx="11029615" cy="1799221"/>
+          </a:xfrm>
+        </p:spPr>
+        <p:txBody>
+          <a:bodyPr/>
+          <a:lstStyle/>
+          <a:p>
+            <a:r>
+              <a:rPr lang="en-US" dirty="0"/>
+              <a:t>Definition: </a:t>
+            </a:r>
+            <a:r>
+              <a:rPr lang="en-US" dirty="0">
+                <a:solidFill>
+                  <a:schemeClr val="accent2"/>
+                </a:solidFill>
+              </a:rPr>
+              <a:t>Semantic Elements </a:t>
+            </a:r>
+            <a:r>
+              <a:rPr lang="en-US" dirty="0"/>
+              <a:t>are elements that clearly describe their meaning and role in the structure of a webpage.</a:t>
+            </a:r>
+          </a:p>
+          <a:p>
+            <a:pPr lvl="1"/>
+            <a:r>
+              <a:rPr lang="en-US" dirty="0"/>
+              <a:t>Used by screen readers</a:t>
+            </a:r>
+          </a:p>
+          <a:p>
+            <a:pPr lvl="1"/>
+            <a:r>
+              <a:rPr lang="en-US" dirty="0"/>
+              <a:t>Examples: header, nav, main, section, article, aside, footer, figure, mark, time</a:t>
+            </a:r>
+          </a:p>
+        </p:txBody>
+      </p:sp>
+      <p:pic>
+        <p:nvPicPr>
+          <p:cNvPr id="7" name="Picture 6">
+            <a:extLst>
+              <a:ext uri="{FF2B5EF4-FFF2-40B4-BE49-F238E27FC236}">
+                <a16:creationId xmlns:a16="http://schemas.microsoft.com/office/drawing/2014/main" id="{4BDB7292-BA68-C325-0BCC-7B3908087F42}"/>
+              </a:ext>
+            </a:extLst>
+          </p:cNvPr>
+          <p:cNvPicPr>
+            <a:picLocks noChangeAspect="1"/>
+          </p:cNvPicPr>
+          <p:nvPr/>
+        </p:nvPicPr>
+        <p:blipFill>
+          <a:blip r:embed="rId2"/>
+          <a:stretch>
+            <a:fillRect/>
+          </a:stretch>
+        </p:blipFill>
+        <p:spPr>
+          <a:xfrm>
+            <a:off x="783644" y="4350645"/>
+            <a:ext cx="6239746" cy="1648055"/>
+          </a:xfrm>
+          <a:prstGeom prst="rect">
+            <a:avLst/>
+          </a:prstGeom>
+        </p:spPr>
+      </p:pic>
+      <p:pic>
+        <p:nvPicPr>
+          <p:cNvPr id="9" name="Picture 8">
+            <a:extLst>
+              <a:ext uri="{FF2B5EF4-FFF2-40B4-BE49-F238E27FC236}">
+                <a16:creationId xmlns:a16="http://schemas.microsoft.com/office/drawing/2014/main" id="{BC42C870-49CF-EBF1-45FC-18B3C0010FD4}"/>
+              </a:ext>
+            </a:extLst>
+          </p:cNvPr>
+          <p:cNvPicPr>
+            <a:picLocks noChangeAspect="1"/>
+          </p:cNvPicPr>
+          <p:nvPr/>
+        </p:nvPicPr>
+        <p:blipFill>
+          <a:blip r:embed="rId3"/>
+          <a:stretch>
+            <a:fillRect/>
+          </a:stretch>
+        </p:blipFill>
+        <p:spPr>
+          <a:xfrm>
+            <a:off x="8847203" y="3423238"/>
+            <a:ext cx="2291629" cy="2732606"/>
+          </a:xfrm>
+          <a:prstGeom prst="rect">
+            <a:avLst/>
+          </a:prstGeom>
+        </p:spPr>
+      </p:pic>
+    </p:spTree>
+    <p:extLst>
+      <p:ext uri="{BB962C8B-B14F-4D97-AF65-F5344CB8AC3E}">
+        <p14:creationId xmlns:p14="http://schemas.microsoft.com/office/powerpoint/2010/main" val="555524074"/>
+      </p:ext>
+    </p:extLst>
+  </p:cSld>
+  <p:clrMapOvr>
+    <a:masterClrMapping/>
+  </p:clrMapOvr>
+</p:sld>
+</file>
+
+<file path=ppt/slides/slide9.xml><?xml version="1.0" encoding="utf-8"?>
+<p:sld xmlns:a="http://schemas.openxmlformats.org/drawingml/2006/main" xmlns:r="http://schemas.openxmlformats.org/officeDocument/2006/relationships" xmlns:p="http://schemas.openxmlformats.org/presentationml/2006/main">
+  <p:cSld>
+    <p:spTree>
+      <p:nvGrpSpPr>
+        <p:cNvPr id="1" name=""/>
+        <p:cNvGrpSpPr/>
+        <p:nvPr/>
+      </p:nvGrpSpPr>
+      <p:grpSpPr>
+        <a:xfrm>
+          <a:off x="0" y="0"/>
+          <a:ext cx="0" cy="0"/>
+          <a:chOff x="0" y="0"/>
+          <a:chExt cx="0" cy="0"/>
+        </a:xfrm>
+      </p:grpSpPr>
+      <p:sp>
+        <p:nvSpPr>
+          <p:cNvPr id="2" name="Title 1">
+            <a:extLst>
+              <a:ext uri="{FF2B5EF4-FFF2-40B4-BE49-F238E27FC236}">
+                <a16:creationId xmlns:a16="http://schemas.microsoft.com/office/drawing/2014/main" id="{F7C8F51F-C4F6-51B7-0BE8-1360904C8ABC}"/>
+              </a:ext>
+            </a:extLst>
+          </p:cNvPr>
+          <p:cNvSpPr>
+            <a:spLocks noGrp="1"/>
+          </p:cNvSpPr>
+          <p:nvPr>
+            <p:ph type="title"/>
+          </p:nvPr>
+        </p:nvSpPr>
+        <p:spPr/>
+        <p:txBody>
+          <a:bodyPr/>
+          <a:lstStyle/>
+          <a:p>
+            <a:r>
+              <a:rPr lang="en-US" dirty="0" err="1"/>
+              <a:t>Img</a:t>
+            </a:r>
+            <a:r>
+              <a:rPr lang="en-US" dirty="0"/>
+              <a:t> &amp; Self-closing elements</a:t>
+            </a:r>
+          </a:p>
+        </p:txBody>
+      </p:sp>
+      <p:sp>
+        <p:nvSpPr>
+          <p:cNvPr id="3" name="Content Placeholder 2">
+            <a:extLst>
+              <a:ext uri="{FF2B5EF4-FFF2-40B4-BE49-F238E27FC236}">
+                <a16:creationId xmlns:a16="http://schemas.microsoft.com/office/drawing/2014/main" id="{BC1B041B-1DBB-556A-2A44-8408D55EF5AE}"/>
+              </a:ext>
+            </a:extLst>
+          </p:cNvPr>
+          <p:cNvSpPr>
+            <a:spLocks noGrp="1"/>
+          </p:cNvSpPr>
+          <p:nvPr>
+            <p:ph idx="1"/>
+          </p:nvPr>
+        </p:nvSpPr>
+        <p:spPr>
+          <a:xfrm>
+            <a:off x="1778659" y="2263624"/>
+            <a:ext cx="8634680" cy="1986259"/>
+          </a:xfrm>
+        </p:spPr>
+        <p:txBody>
+          <a:bodyPr/>
+          <a:lstStyle/>
+          <a:p>
+            <a:r>
+              <a:rPr lang="en-US" dirty="0"/>
+              <a:t>The </a:t>
+            </a:r>
+            <a:r>
+              <a:rPr lang="en-US" dirty="0" err="1"/>
+              <a:t>img</a:t>
+            </a:r>
+            <a:r>
+              <a:rPr lang="en-US" dirty="0"/>
+              <a:t> element renders images, using the </a:t>
+            </a:r>
+            <a:r>
+              <a:rPr lang="en-US" dirty="0" err="1"/>
+              <a:t>src</a:t>
+            </a:r>
+            <a:r>
+              <a:rPr lang="en-US" dirty="0"/>
+              <a:t> attribute to specify the path</a:t>
+            </a:r>
+          </a:p>
+          <a:p>
+            <a:r>
+              <a:rPr lang="en-US" dirty="0"/>
+              <a:t>The ‘alt’ attribute specifies the help text for the image, and is read by screen readers</a:t>
+            </a:r>
+          </a:p>
+          <a:p>
+            <a:r>
+              <a:rPr lang="en-US" dirty="0" err="1"/>
+              <a:t>img</a:t>
+            </a:r>
+            <a:r>
+              <a:rPr lang="en-US" dirty="0"/>
+              <a:t> is an example of a ‘self-closing element’, meaning it does not require an ending tag</a:t>
+            </a:r>
+          </a:p>
+        </p:txBody>
+      </p:sp>
+      <p:pic>
+        <p:nvPicPr>
+          <p:cNvPr id="5" name="Picture 4">
+            <a:extLst>
+              <a:ext uri="{FF2B5EF4-FFF2-40B4-BE49-F238E27FC236}">
+                <a16:creationId xmlns:a16="http://schemas.microsoft.com/office/drawing/2014/main" id="{3F74CB7A-0E42-6264-41B9-D87C8E3803CE}"/>
+              </a:ext>
+            </a:extLst>
+          </p:cNvPr>
+          <p:cNvPicPr>
+            <a:picLocks noChangeAspect="1"/>
+          </p:cNvPicPr>
+          <p:nvPr/>
+        </p:nvPicPr>
+        <p:blipFill>
+          <a:blip r:embed="rId2"/>
+          <a:stretch>
+            <a:fillRect/>
+          </a:stretch>
+        </p:blipFill>
+        <p:spPr>
+          <a:xfrm>
+            <a:off x="2976126" y="4507789"/>
+            <a:ext cx="6239746" cy="1648055"/>
+          </a:xfrm>
+          <a:prstGeom prst="rect">
+            <a:avLst/>
+          </a:prstGeom>
+        </p:spPr>
+      </p:pic>
+    </p:spTree>
+    <p:extLst>
+      <p:ext uri="{BB962C8B-B14F-4D97-AF65-F5344CB8AC3E}">
+        <p14:creationId xmlns:p14="http://schemas.microsoft.com/office/powerpoint/2010/main" val="3018525899"/>
       </p:ext>
     </p:extLst>
   </p:cSld>

--- a/Week_1/003-HTML_&_CSS/HTML-CSS.pptx
+++ b/Week_1/003-HTML_&_CSS/HTML-CSS.pptx
@@ -27,6 +27,27 @@
     <p:sldId id="281" r:id="rId21"/>
     <p:sldId id="282" r:id="rId22"/>
     <p:sldId id="277" r:id="rId23"/>
+    <p:sldId id="283" r:id="rId24"/>
+    <p:sldId id="284" r:id="rId25"/>
+    <p:sldId id="288" r:id="rId26"/>
+    <p:sldId id="287" r:id="rId27"/>
+    <p:sldId id="300" r:id="rId28"/>
+    <p:sldId id="301" r:id="rId29"/>
+    <p:sldId id="302" r:id="rId30"/>
+    <p:sldId id="286" r:id="rId31"/>
+    <p:sldId id="285" r:id="rId32"/>
+    <p:sldId id="289" r:id="rId33"/>
+    <p:sldId id="290" r:id="rId34"/>
+    <p:sldId id="291" r:id="rId35"/>
+    <p:sldId id="292" r:id="rId36"/>
+    <p:sldId id="293" r:id="rId37"/>
+    <p:sldId id="294" r:id="rId38"/>
+    <p:sldId id="295" r:id="rId39"/>
+    <p:sldId id="296" r:id="rId40"/>
+    <p:sldId id="297" r:id="rId41"/>
+    <p:sldId id="299" r:id="rId42"/>
+    <p:sldId id="298" r:id="rId43"/>
+    <p:sldId id="303" r:id="rId44"/>
   </p:sldIdLst>
   <p:sldSz cx="12192000" cy="6858000"/>
   <p:notesSz cx="6858000" cy="9144000"/>
@@ -140,6 +161,2388 @@
     <p1510:client id="{DEF17522-F9FC-8578-697D-16CF15692E13}" v="5" dt="2025-06-03T14:51:56.486"/>
   </p1510:revLst>
 </p1510:revInfo>
+</file>
+
+<file path=ppt/diagrams/colors1.xml><?xml version="1.0" encoding="utf-8"?>
+<dgm:colorsDef xmlns:dgm="http://schemas.openxmlformats.org/drawingml/2006/diagram" xmlns:a="http://schemas.openxmlformats.org/drawingml/2006/main" uniqueId="urn:microsoft.com/office/officeart/2005/8/colors/accent1_2">
+  <dgm:title val=""/>
+  <dgm:desc val=""/>
+  <dgm:catLst>
+    <dgm:cat type="accent1" pri="11200"/>
+  </dgm:catLst>
+  <dgm:styleLbl name="node0">
+    <dgm:fillClrLst meth="repeat">
+      <a:schemeClr val="accent1"/>
+    </dgm:fillClrLst>
+    <dgm:linClrLst meth="repeat">
+      <a:schemeClr val="lt1"/>
+    </dgm:linClrLst>
+    <dgm:effectClrLst/>
+    <dgm:txLinClrLst/>
+    <dgm:txFillClrLst/>
+    <dgm:txEffectClrLst/>
+  </dgm:styleLbl>
+  <dgm:styleLbl name="alignNode1">
+    <dgm:fillClrLst meth="repeat">
+      <a:schemeClr val="accent1"/>
+    </dgm:fillClrLst>
+    <dgm:linClrLst meth="repeat">
+      <a:schemeClr val="accent1"/>
+    </dgm:linClrLst>
+    <dgm:effectClrLst/>
+    <dgm:txLinClrLst/>
+    <dgm:txFillClrLst/>
+    <dgm:txEffectClrLst/>
+  </dgm:styleLbl>
+  <dgm:styleLbl name="node1">
+    <dgm:fillClrLst meth="repeat">
+      <a:schemeClr val="accent1"/>
+    </dgm:fillClrLst>
+    <dgm:linClrLst meth="repeat">
+      <a:schemeClr val="lt1"/>
+    </dgm:linClrLst>
+    <dgm:effectClrLst/>
+    <dgm:txLinClrLst/>
+    <dgm:txFillClrLst/>
+    <dgm:txEffectClrLst/>
+  </dgm:styleLbl>
+  <dgm:styleLbl name="lnNode1">
+    <dgm:fillClrLst meth="repeat">
+      <a:schemeClr val="accent1"/>
+    </dgm:fillClrLst>
+    <dgm:linClrLst meth="repeat">
+      <a:schemeClr val="lt1"/>
+    </dgm:linClrLst>
+    <dgm:effectClrLst/>
+    <dgm:txLinClrLst/>
+    <dgm:txFillClrLst/>
+    <dgm:txEffectClrLst/>
+  </dgm:styleLbl>
+  <dgm:styleLbl name="vennNode1">
+    <dgm:fillClrLst meth="repeat">
+      <a:schemeClr val="accent1">
+        <a:alpha val="50000"/>
+      </a:schemeClr>
+    </dgm:fillClrLst>
+    <dgm:linClrLst meth="repeat">
+      <a:schemeClr val="lt1"/>
+    </dgm:linClrLst>
+    <dgm:effectClrLst/>
+    <dgm:txLinClrLst/>
+    <dgm:txFillClrLst/>
+    <dgm:txEffectClrLst/>
+  </dgm:styleLbl>
+  <dgm:styleLbl name="node2">
+    <dgm:fillClrLst meth="repeat">
+      <a:schemeClr val="accent1"/>
+    </dgm:fillClrLst>
+    <dgm:linClrLst meth="repeat">
+      <a:schemeClr val="lt1"/>
+    </dgm:linClrLst>
+    <dgm:effectClrLst/>
+    <dgm:txLinClrLst/>
+    <dgm:txFillClrLst/>
+    <dgm:txEffectClrLst/>
+  </dgm:styleLbl>
+  <dgm:styleLbl name="node3">
+    <dgm:fillClrLst meth="repeat">
+      <a:schemeClr val="accent1"/>
+    </dgm:fillClrLst>
+    <dgm:linClrLst meth="repeat">
+      <a:schemeClr val="lt1"/>
+    </dgm:linClrLst>
+    <dgm:effectClrLst/>
+    <dgm:txLinClrLst/>
+    <dgm:txFillClrLst/>
+    <dgm:txEffectClrLst/>
+  </dgm:styleLbl>
+  <dgm:styleLbl name="node4">
+    <dgm:fillClrLst meth="repeat">
+      <a:schemeClr val="accent1"/>
+    </dgm:fillClrLst>
+    <dgm:linClrLst meth="repeat">
+      <a:schemeClr val="lt1"/>
+    </dgm:linClrLst>
+    <dgm:effectClrLst/>
+    <dgm:txLinClrLst/>
+    <dgm:txFillClrLst/>
+    <dgm:txEffectClrLst/>
+  </dgm:styleLbl>
+  <dgm:styleLbl name="fgImgPlace1">
+    <dgm:fillClrLst meth="repeat">
+      <a:schemeClr val="accent1">
+        <a:tint val="50000"/>
+      </a:schemeClr>
+    </dgm:fillClrLst>
+    <dgm:linClrLst meth="repeat">
+      <a:schemeClr val="lt1"/>
+    </dgm:linClrLst>
+    <dgm:effectClrLst/>
+    <dgm:txLinClrLst/>
+    <dgm:txFillClrLst meth="repeat">
+      <a:schemeClr val="lt1"/>
+    </dgm:txFillClrLst>
+    <dgm:txEffectClrLst/>
+  </dgm:styleLbl>
+  <dgm:styleLbl name="alignImgPlace1">
+    <dgm:fillClrLst meth="repeat">
+      <a:schemeClr val="accent1">
+        <a:tint val="50000"/>
+      </a:schemeClr>
+    </dgm:fillClrLst>
+    <dgm:linClrLst meth="repeat">
+      <a:schemeClr val="lt1"/>
+    </dgm:linClrLst>
+    <dgm:effectClrLst/>
+    <dgm:txLinClrLst/>
+    <dgm:txFillClrLst meth="repeat">
+      <a:schemeClr val="lt1"/>
+    </dgm:txFillClrLst>
+    <dgm:txEffectClrLst/>
+  </dgm:styleLbl>
+  <dgm:styleLbl name="bgImgPlace1">
+    <dgm:fillClrLst meth="repeat">
+      <a:schemeClr val="accent1">
+        <a:tint val="50000"/>
+      </a:schemeClr>
+    </dgm:fillClrLst>
+    <dgm:linClrLst meth="repeat">
+      <a:schemeClr val="lt1"/>
+    </dgm:linClrLst>
+    <dgm:effectClrLst/>
+    <dgm:txLinClrLst/>
+    <dgm:txFillClrLst meth="repeat">
+      <a:schemeClr val="lt1"/>
+    </dgm:txFillClrLst>
+    <dgm:txEffectClrLst/>
+  </dgm:styleLbl>
+  <dgm:styleLbl name="sibTrans2D1">
+    <dgm:fillClrLst meth="repeat">
+      <a:schemeClr val="accent1">
+        <a:tint val="60000"/>
+      </a:schemeClr>
+    </dgm:fillClrLst>
+    <dgm:linClrLst meth="repeat">
+      <a:schemeClr val="accent1">
+        <a:tint val="60000"/>
+      </a:schemeClr>
+    </dgm:linClrLst>
+    <dgm:effectClrLst/>
+    <dgm:txLinClrLst/>
+    <dgm:txFillClrLst/>
+    <dgm:txEffectClrLst/>
+  </dgm:styleLbl>
+  <dgm:styleLbl name="fgSibTrans2D1">
+    <dgm:fillClrLst meth="repeat">
+      <a:schemeClr val="accent1">
+        <a:tint val="60000"/>
+      </a:schemeClr>
+    </dgm:fillClrLst>
+    <dgm:linClrLst meth="repeat">
+      <a:schemeClr val="accent1">
+        <a:tint val="60000"/>
+      </a:schemeClr>
+    </dgm:linClrLst>
+    <dgm:effectClrLst/>
+    <dgm:txLinClrLst/>
+    <dgm:txFillClrLst/>
+    <dgm:txEffectClrLst/>
+  </dgm:styleLbl>
+  <dgm:styleLbl name="bgSibTrans2D1">
+    <dgm:fillClrLst meth="repeat">
+      <a:schemeClr val="accent1">
+        <a:tint val="60000"/>
+      </a:schemeClr>
+    </dgm:fillClrLst>
+    <dgm:linClrLst meth="repeat">
+      <a:schemeClr val="accent1">
+        <a:tint val="60000"/>
+      </a:schemeClr>
+    </dgm:linClrLst>
+    <dgm:effectClrLst/>
+    <dgm:txLinClrLst/>
+    <dgm:txFillClrLst/>
+    <dgm:txEffectClrLst/>
+  </dgm:styleLbl>
+  <dgm:styleLbl name="sibTrans1D1">
+    <dgm:fillClrLst meth="repeat">
+      <a:schemeClr val="accent1"/>
+    </dgm:fillClrLst>
+    <dgm:linClrLst meth="repeat">
+      <a:schemeClr val="accent1"/>
+    </dgm:linClrLst>
+    <dgm:effectClrLst/>
+    <dgm:txLinClrLst/>
+    <dgm:txFillClrLst meth="repeat">
+      <a:schemeClr val="tx1"/>
+    </dgm:txFillClrLst>
+    <dgm:txEffectClrLst/>
+  </dgm:styleLbl>
+  <dgm:styleLbl name="callout">
+    <dgm:fillClrLst meth="repeat">
+      <a:schemeClr val="accent1"/>
+    </dgm:fillClrLst>
+    <dgm:linClrLst meth="repeat">
+      <a:schemeClr val="accent1">
+        <a:tint val="50000"/>
+      </a:schemeClr>
+    </dgm:linClrLst>
+    <dgm:effectClrLst/>
+    <dgm:txLinClrLst/>
+    <dgm:txFillClrLst meth="repeat">
+      <a:schemeClr val="tx1"/>
+    </dgm:txFillClrLst>
+    <dgm:txEffectClrLst/>
+  </dgm:styleLbl>
+  <dgm:styleLbl name="asst0">
+    <dgm:fillClrLst meth="repeat">
+      <a:schemeClr val="accent1"/>
+    </dgm:fillClrLst>
+    <dgm:linClrLst meth="repeat">
+      <a:schemeClr val="lt1"/>
+    </dgm:linClrLst>
+    <dgm:effectClrLst/>
+    <dgm:txLinClrLst/>
+    <dgm:txFillClrLst/>
+    <dgm:txEffectClrLst/>
+  </dgm:styleLbl>
+  <dgm:styleLbl name="asst1">
+    <dgm:fillClrLst meth="repeat">
+      <a:schemeClr val="accent1"/>
+    </dgm:fillClrLst>
+    <dgm:linClrLst meth="repeat">
+      <a:schemeClr val="lt1"/>
+    </dgm:linClrLst>
+    <dgm:effectClrLst/>
+    <dgm:txLinClrLst/>
+    <dgm:txFillClrLst/>
+    <dgm:txEffectClrLst/>
+  </dgm:styleLbl>
+  <dgm:styleLbl name="asst2">
+    <dgm:fillClrLst meth="repeat">
+      <a:schemeClr val="accent1"/>
+    </dgm:fillClrLst>
+    <dgm:linClrLst meth="repeat">
+      <a:schemeClr val="lt1"/>
+    </dgm:linClrLst>
+    <dgm:effectClrLst/>
+    <dgm:txLinClrLst/>
+    <dgm:txFillClrLst/>
+    <dgm:txEffectClrLst/>
+  </dgm:styleLbl>
+  <dgm:styleLbl name="asst3">
+    <dgm:fillClrLst meth="repeat">
+      <a:schemeClr val="accent1"/>
+    </dgm:fillClrLst>
+    <dgm:linClrLst meth="repeat">
+      <a:schemeClr val="lt1"/>
+    </dgm:linClrLst>
+    <dgm:effectClrLst/>
+    <dgm:txLinClrLst/>
+    <dgm:txFillClrLst/>
+    <dgm:txEffectClrLst/>
+  </dgm:styleLbl>
+  <dgm:styleLbl name="asst4">
+    <dgm:fillClrLst meth="repeat">
+      <a:schemeClr val="accent1"/>
+    </dgm:fillClrLst>
+    <dgm:linClrLst meth="repeat">
+      <a:schemeClr val="lt1"/>
+    </dgm:linClrLst>
+    <dgm:effectClrLst/>
+    <dgm:txLinClrLst/>
+    <dgm:txFillClrLst/>
+    <dgm:txEffectClrLst/>
+  </dgm:styleLbl>
+  <dgm:styleLbl name="parChTrans2D1">
+    <dgm:fillClrLst meth="repeat">
+      <a:schemeClr val="accent1">
+        <a:tint val="60000"/>
+      </a:schemeClr>
+    </dgm:fillClrLst>
+    <dgm:linClrLst meth="repeat">
+      <a:schemeClr val="accent1">
+        <a:tint val="60000"/>
+      </a:schemeClr>
+    </dgm:linClrLst>
+    <dgm:effectClrLst/>
+    <dgm:txLinClrLst/>
+    <dgm:txFillClrLst meth="repeat">
+      <a:schemeClr val="lt1"/>
+    </dgm:txFillClrLst>
+    <dgm:txEffectClrLst/>
+  </dgm:styleLbl>
+  <dgm:styleLbl name="parChTrans2D2">
+    <dgm:fillClrLst meth="repeat">
+      <a:schemeClr val="accent1"/>
+    </dgm:fillClrLst>
+    <dgm:linClrLst meth="repeat">
+      <a:schemeClr val="accent1"/>
+    </dgm:linClrLst>
+    <dgm:effectClrLst/>
+    <dgm:txLinClrLst/>
+    <dgm:txFillClrLst meth="repeat">
+      <a:schemeClr val="lt1"/>
+    </dgm:txFillClrLst>
+    <dgm:txEffectClrLst/>
+  </dgm:styleLbl>
+  <dgm:styleLbl name="parChTrans2D3">
+    <dgm:fillClrLst meth="repeat">
+      <a:schemeClr val="accent1"/>
+    </dgm:fillClrLst>
+    <dgm:linClrLst meth="repeat">
+      <a:schemeClr val="accent1"/>
+    </dgm:linClrLst>
+    <dgm:effectClrLst/>
+    <dgm:txLinClrLst/>
+    <dgm:txFillClrLst meth="repeat">
+      <a:schemeClr val="lt1"/>
+    </dgm:txFillClrLst>
+    <dgm:txEffectClrLst/>
+  </dgm:styleLbl>
+  <dgm:styleLbl name="parChTrans2D4">
+    <dgm:fillClrLst meth="repeat">
+      <a:schemeClr val="accent1"/>
+    </dgm:fillClrLst>
+    <dgm:linClrLst meth="repeat">
+      <a:schemeClr val="accent1"/>
+    </dgm:linClrLst>
+    <dgm:effectClrLst/>
+    <dgm:txLinClrLst/>
+    <dgm:txFillClrLst meth="repeat">
+      <a:schemeClr val="lt1"/>
+    </dgm:txFillClrLst>
+    <dgm:txEffectClrLst/>
+  </dgm:styleLbl>
+  <dgm:styleLbl name="parChTrans1D1">
+    <dgm:fillClrLst meth="repeat">
+      <a:schemeClr val="accent1"/>
+    </dgm:fillClrLst>
+    <dgm:linClrLst meth="repeat">
+      <a:schemeClr val="accent1">
+        <a:shade val="60000"/>
+      </a:schemeClr>
+    </dgm:linClrLst>
+    <dgm:effectClrLst/>
+    <dgm:txLinClrLst/>
+    <dgm:txFillClrLst meth="repeat">
+      <a:schemeClr val="tx1"/>
+    </dgm:txFillClrLst>
+    <dgm:txEffectClrLst/>
+  </dgm:styleLbl>
+  <dgm:styleLbl name="parChTrans1D2">
+    <dgm:fillClrLst meth="repeat">
+      <a:schemeClr val="accent1"/>
+    </dgm:fillClrLst>
+    <dgm:linClrLst meth="repeat">
+      <a:schemeClr val="accent1">
+        <a:shade val="60000"/>
+      </a:schemeClr>
+    </dgm:linClrLst>
+    <dgm:effectClrLst/>
+    <dgm:txLinClrLst/>
+    <dgm:txFillClrLst meth="repeat">
+      <a:schemeClr val="tx1"/>
+    </dgm:txFillClrLst>
+    <dgm:txEffectClrLst/>
+  </dgm:styleLbl>
+  <dgm:styleLbl name="parChTrans1D3">
+    <dgm:fillClrLst meth="repeat">
+      <a:schemeClr val="accent1"/>
+    </dgm:fillClrLst>
+    <dgm:linClrLst meth="repeat">
+      <a:schemeClr val="accent1">
+        <a:shade val="80000"/>
+      </a:schemeClr>
+    </dgm:linClrLst>
+    <dgm:effectClrLst/>
+    <dgm:txLinClrLst/>
+    <dgm:txFillClrLst meth="repeat">
+      <a:schemeClr val="tx1"/>
+    </dgm:txFillClrLst>
+    <dgm:txEffectClrLst/>
+  </dgm:styleLbl>
+  <dgm:styleLbl name="parChTrans1D4">
+    <dgm:fillClrLst meth="repeat">
+      <a:schemeClr val="accent1"/>
+    </dgm:fillClrLst>
+    <dgm:linClrLst meth="repeat">
+      <a:schemeClr val="accent1">
+        <a:shade val="80000"/>
+      </a:schemeClr>
+    </dgm:linClrLst>
+    <dgm:effectClrLst/>
+    <dgm:txLinClrLst/>
+    <dgm:txFillClrLst meth="repeat">
+      <a:schemeClr val="tx1"/>
+    </dgm:txFillClrLst>
+    <dgm:txEffectClrLst/>
+  </dgm:styleLbl>
+  <dgm:styleLbl name="fgAcc1">
+    <dgm:fillClrLst meth="repeat">
+      <a:schemeClr val="lt1">
+        <a:alpha val="90000"/>
+      </a:schemeClr>
+    </dgm:fillClrLst>
+    <dgm:linClrLst meth="repeat">
+      <a:schemeClr val="accent1"/>
+    </dgm:linClrLst>
+    <dgm:effectClrLst/>
+    <dgm:txLinClrLst/>
+    <dgm:txFillClrLst meth="repeat">
+      <a:schemeClr val="dk1"/>
+    </dgm:txFillClrLst>
+    <dgm:txEffectClrLst/>
+  </dgm:styleLbl>
+  <dgm:styleLbl name="conFgAcc1">
+    <dgm:fillClrLst meth="repeat">
+      <a:schemeClr val="lt1">
+        <a:alpha val="90000"/>
+      </a:schemeClr>
+    </dgm:fillClrLst>
+    <dgm:linClrLst meth="repeat">
+      <a:schemeClr val="accent1"/>
+    </dgm:linClrLst>
+    <dgm:effectClrLst/>
+    <dgm:txLinClrLst/>
+    <dgm:txFillClrLst meth="repeat">
+      <a:schemeClr val="dk1"/>
+    </dgm:txFillClrLst>
+    <dgm:txEffectClrLst/>
+  </dgm:styleLbl>
+  <dgm:styleLbl name="alignAcc1">
+    <dgm:fillClrLst meth="repeat">
+      <a:schemeClr val="lt1">
+        <a:alpha val="90000"/>
+      </a:schemeClr>
+    </dgm:fillClrLst>
+    <dgm:linClrLst meth="repeat">
+      <a:schemeClr val="accent1"/>
+    </dgm:linClrLst>
+    <dgm:effectClrLst/>
+    <dgm:txLinClrLst/>
+    <dgm:txFillClrLst meth="repeat">
+      <a:schemeClr val="dk1"/>
+    </dgm:txFillClrLst>
+    <dgm:txEffectClrLst/>
+  </dgm:styleLbl>
+  <dgm:styleLbl name="trAlignAcc1">
+    <dgm:fillClrLst meth="repeat">
+      <a:schemeClr val="lt1">
+        <a:alpha val="40000"/>
+      </a:schemeClr>
+    </dgm:fillClrLst>
+    <dgm:linClrLst meth="repeat">
+      <a:schemeClr val="accent1"/>
+    </dgm:linClrLst>
+    <dgm:effectClrLst/>
+    <dgm:txLinClrLst/>
+    <dgm:txFillClrLst meth="repeat">
+      <a:schemeClr val="dk1"/>
+    </dgm:txFillClrLst>
+    <dgm:txEffectClrLst/>
+  </dgm:styleLbl>
+  <dgm:styleLbl name="bgAcc1">
+    <dgm:fillClrLst meth="repeat">
+      <a:schemeClr val="lt1">
+        <a:alpha val="90000"/>
+      </a:schemeClr>
+    </dgm:fillClrLst>
+    <dgm:linClrLst meth="repeat">
+      <a:schemeClr val="accent1"/>
+    </dgm:linClrLst>
+    <dgm:effectClrLst/>
+    <dgm:txLinClrLst/>
+    <dgm:txFillClrLst meth="repeat">
+      <a:schemeClr val="dk1"/>
+    </dgm:txFillClrLst>
+    <dgm:txEffectClrLst/>
+  </dgm:styleLbl>
+  <dgm:styleLbl name="solidFgAcc1">
+    <dgm:fillClrLst meth="repeat">
+      <a:schemeClr val="lt1"/>
+    </dgm:fillClrLst>
+    <dgm:linClrLst meth="repeat">
+      <a:schemeClr val="accent1"/>
+    </dgm:linClrLst>
+    <dgm:effectClrLst/>
+    <dgm:txLinClrLst/>
+    <dgm:txFillClrLst meth="repeat">
+      <a:schemeClr val="dk1"/>
+    </dgm:txFillClrLst>
+    <dgm:txEffectClrLst/>
+  </dgm:styleLbl>
+  <dgm:styleLbl name="solidAlignAcc1">
+    <dgm:fillClrLst meth="repeat">
+      <a:schemeClr val="lt1"/>
+    </dgm:fillClrLst>
+    <dgm:linClrLst meth="repeat">
+      <a:schemeClr val="accent1"/>
+    </dgm:linClrLst>
+    <dgm:effectClrLst/>
+    <dgm:txLinClrLst/>
+    <dgm:txFillClrLst meth="repeat">
+      <a:schemeClr val="dk1"/>
+    </dgm:txFillClrLst>
+    <dgm:txEffectClrLst/>
+  </dgm:styleLbl>
+  <dgm:styleLbl name="solidBgAcc1">
+    <dgm:fillClrLst meth="repeat">
+      <a:schemeClr val="lt1"/>
+    </dgm:fillClrLst>
+    <dgm:linClrLst meth="repeat">
+      <a:schemeClr val="accent1"/>
+    </dgm:linClrLst>
+    <dgm:effectClrLst/>
+    <dgm:txLinClrLst/>
+    <dgm:txFillClrLst meth="repeat">
+      <a:schemeClr val="dk1"/>
+    </dgm:txFillClrLst>
+    <dgm:txEffectClrLst/>
+  </dgm:styleLbl>
+  <dgm:styleLbl name="fgAccFollowNode1">
+    <dgm:fillClrLst meth="repeat">
+      <a:schemeClr val="accent1">
+        <a:alpha val="90000"/>
+        <a:tint val="40000"/>
+      </a:schemeClr>
+    </dgm:fillClrLst>
+    <dgm:linClrLst meth="repeat">
+      <a:schemeClr val="accent1">
+        <a:alpha val="90000"/>
+        <a:tint val="40000"/>
+      </a:schemeClr>
+    </dgm:linClrLst>
+    <dgm:effectClrLst/>
+    <dgm:txLinClrLst/>
+    <dgm:txFillClrLst meth="repeat">
+      <a:schemeClr val="dk1"/>
+    </dgm:txFillClrLst>
+    <dgm:txEffectClrLst/>
+  </dgm:styleLbl>
+  <dgm:styleLbl name="alignAccFollowNode1">
+    <dgm:fillClrLst meth="repeat">
+      <a:schemeClr val="accent1">
+        <a:alpha val="90000"/>
+        <a:tint val="40000"/>
+      </a:schemeClr>
+    </dgm:fillClrLst>
+    <dgm:linClrLst meth="repeat">
+      <a:schemeClr val="accent1">
+        <a:alpha val="90000"/>
+        <a:tint val="40000"/>
+      </a:schemeClr>
+    </dgm:linClrLst>
+    <dgm:effectClrLst/>
+    <dgm:txLinClrLst/>
+    <dgm:txFillClrLst meth="repeat">
+      <a:schemeClr val="dk1"/>
+    </dgm:txFillClrLst>
+    <dgm:txEffectClrLst/>
+  </dgm:styleLbl>
+  <dgm:styleLbl name="bgAccFollowNode1">
+    <dgm:fillClrLst meth="repeat">
+      <a:schemeClr val="accent1">
+        <a:alpha val="90000"/>
+        <a:tint val="40000"/>
+      </a:schemeClr>
+    </dgm:fillClrLst>
+    <dgm:linClrLst meth="repeat">
+      <a:schemeClr val="accent1">
+        <a:alpha val="90000"/>
+        <a:tint val="40000"/>
+      </a:schemeClr>
+    </dgm:linClrLst>
+    <dgm:effectClrLst/>
+    <dgm:txLinClrLst/>
+    <dgm:txFillClrLst meth="repeat">
+      <a:schemeClr val="dk1"/>
+    </dgm:txFillClrLst>
+    <dgm:txEffectClrLst/>
+  </dgm:styleLbl>
+  <dgm:styleLbl name="fgAcc0">
+    <dgm:fillClrLst meth="repeat">
+      <a:schemeClr val="lt1">
+        <a:alpha val="90000"/>
+      </a:schemeClr>
+    </dgm:fillClrLst>
+    <dgm:linClrLst meth="repeat">
+      <a:schemeClr val="accent1"/>
+    </dgm:linClrLst>
+    <dgm:effectClrLst/>
+    <dgm:txLinClrLst/>
+    <dgm:txFillClrLst meth="repeat">
+      <a:schemeClr val="dk1"/>
+    </dgm:txFillClrLst>
+    <dgm:txEffectClrLst/>
+  </dgm:styleLbl>
+  <dgm:styleLbl name="fgAcc2">
+    <dgm:fillClrLst meth="repeat">
+      <a:schemeClr val="lt1">
+        <a:alpha val="90000"/>
+      </a:schemeClr>
+    </dgm:fillClrLst>
+    <dgm:linClrLst meth="repeat">
+      <a:schemeClr val="accent1"/>
+    </dgm:linClrLst>
+    <dgm:effectClrLst/>
+    <dgm:txLinClrLst/>
+    <dgm:txFillClrLst meth="repeat">
+      <a:schemeClr val="dk1"/>
+    </dgm:txFillClrLst>
+    <dgm:txEffectClrLst/>
+  </dgm:styleLbl>
+  <dgm:styleLbl name="fgAcc3">
+    <dgm:fillClrLst meth="repeat">
+      <a:schemeClr val="lt1">
+        <a:alpha val="90000"/>
+      </a:schemeClr>
+    </dgm:fillClrLst>
+    <dgm:linClrLst meth="repeat">
+      <a:schemeClr val="accent1"/>
+    </dgm:linClrLst>
+    <dgm:effectClrLst/>
+    <dgm:txLinClrLst/>
+    <dgm:txFillClrLst meth="repeat">
+      <a:schemeClr val="dk1"/>
+    </dgm:txFillClrLst>
+    <dgm:txEffectClrLst/>
+  </dgm:styleLbl>
+  <dgm:styleLbl name="fgAcc4">
+    <dgm:fillClrLst meth="repeat">
+      <a:schemeClr val="lt1">
+        <a:alpha val="90000"/>
+      </a:schemeClr>
+    </dgm:fillClrLst>
+    <dgm:linClrLst meth="repeat">
+      <a:schemeClr val="accent1"/>
+    </dgm:linClrLst>
+    <dgm:effectClrLst/>
+    <dgm:txLinClrLst/>
+    <dgm:txFillClrLst meth="repeat">
+      <a:schemeClr val="dk1"/>
+    </dgm:txFillClrLst>
+    <dgm:txEffectClrLst/>
+  </dgm:styleLbl>
+  <dgm:styleLbl name="bgShp">
+    <dgm:fillClrLst meth="repeat">
+      <a:schemeClr val="accent1">
+        <a:tint val="40000"/>
+      </a:schemeClr>
+    </dgm:fillClrLst>
+    <dgm:linClrLst meth="repeat">
+      <a:schemeClr val="accent1"/>
+    </dgm:linClrLst>
+    <dgm:effectClrLst/>
+    <dgm:txLinClrLst/>
+    <dgm:txFillClrLst meth="repeat">
+      <a:schemeClr val="dk1"/>
+    </dgm:txFillClrLst>
+    <dgm:txEffectClrLst/>
+  </dgm:styleLbl>
+  <dgm:styleLbl name="dkBgShp">
+    <dgm:fillClrLst meth="repeat">
+      <a:schemeClr val="accent1">
+        <a:shade val="80000"/>
+      </a:schemeClr>
+    </dgm:fillClrLst>
+    <dgm:linClrLst meth="repeat">
+      <a:schemeClr val="accent1"/>
+    </dgm:linClrLst>
+    <dgm:effectClrLst/>
+    <dgm:txLinClrLst/>
+    <dgm:txFillClrLst meth="repeat">
+      <a:schemeClr val="lt1"/>
+    </dgm:txFillClrLst>
+    <dgm:txEffectClrLst/>
+  </dgm:styleLbl>
+  <dgm:styleLbl name="trBgShp">
+    <dgm:fillClrLst meth="repeat">
+      <a:schemeClr val="accent1">
+        <a:tint val="50000"/>
+        <a:alpha val="40000"/>
+      </a:schemeClr>
+    </dgm:fillClrLst>
+    <dgm:linClrLst meth="repeat">
+      <a:schemeClr val="accent1"/>
+    </dgm:linClrLst>
+    <dgm:effectClrLst/>
+    <dgm:txLinClrLst/>
+    <dgm:txFillClrLst meth="repeat">
+      <a:schemeClr val="lt1"/>
+    </dgm:txFillClrLst>
+    <dgm:txEffectClrLst/>
+  </dgm:styleLbl>
+  <dgm:styleLbl name="fgShp">
+    <dgm:fillClrLst meth="repeat">
+      <a:schemeClr val="accent1">
+        <a:tint val="60000"/>
+      </a:schemeClr>
+    </dgm:fillClrLst>
+    <dgm:linClrLst meth="repeat">
+      <a:schemeClr val="lt1"/>
+    </dgm:linClrLst>
+    <dgm:effectClrLst/>
+    <dgm:txLinClrLst/>
+    <dgm:txFillClrLst meth="repeat">
+      <a:schemeClr val="dk1"/>
+    </dgm:txFillClrLst>
+    <dgm:txEffectClrLst/>
+  </dgm:styleLbl>
+  <dgm:styleLbl name="revTx">
+    <dgm:fillClrLst meth="repeat">
+      <a:schemeClr val="lt1">
+        <a:alpha val="0"/>
+      </a:schemeClr>
+    </dgm:fillClrLst>
+    <dgm:linClrLst meth="repeat">
+      <a:schemeClr val="dk1">
+        <a:alpha val="0"/>
+      </a:schemeClr>
+    </dgm:linClrLst>
+    <dgm:effectClrLst/>
+    <dgm:txLinClrLst/>
+    <dgm:txFillClrLst meth="repeat">
+      <a:schemeClr val="tx1"/>
+    </dgm:txFillClrLst>
+    <dgm:txEffectClrLst/>
+  </dgm:styleLbl>
+</dgm:colorsDef>
+</file>
+
+<file path=ppt/diagrams/data1.xml><?xml version="1.0" encoding="utf-8"?>
+<dgm:dataModel xmlns:dgm="http://schemas.openxmlformats.org/drawingml/2006/diagram" xmlns:a="http://schemas.openxmlformats.org/drawingml/2006/main">
+  <dgm:ptLst>
+    <dgm:pt modelId="{3F1B3C52-4094-497A-A3ED-E2BC2E29F747}" type="doc">
+      <dgm:prSet loTypeId="urn:microsoft.com/office/officeart/2005/8/layout/vList2" loCatId="list" qsTypeId="urn:microsoft.com/office/officeart/2005/8/quickstyle/simple1" qsCatId="simple" csTypeId="urn:microsoft.com/office/officeart/2005/8/colors/accent1_2" csCatId="accent1"/>
+      <dgm:spPr/>
+      <dgm:t>
+        <a:bodyPr/>
+        <a:lstStyle/>
+        <a:p>
+          <a:endParaRPr lang="en-US"/>
+        </a:p>
+      </dgm:t>
+    </dgm:pt>
+    <dgm:pt modelId="{D466A6C2-86BD-4627-8480-B57D5AD9D30B}">
+      <dgm:prSet/>
+      <dgm:spPr/>
+      <dgm:t>
+        <a:bodyPr/>
+        <a:lstStyle/>
+        <a:p>
+          <a:r>
+            <a:rPr lang="en-US"/>
+            <a:t>Inline – directly on an element</a:t>
+          </a:r>
+        </a:p>
+      </dgm:t>
+    </dgm:pt>
+    <dgm:pt modelId="{22D704AB-8E98-4260-A12A-BD0E1E2C1B22}" type="parTrans" cxnId="{8AE08A0B-5732-40EE-8E39-83629B0671B7}">
+      <dgm:prSet/>
+      <dgm:spPr/>
+      <dgm:t>
+        <a:bodyPr/>
+        <a:lstStyle/>
+        <a:p>
+          <a:endParaRPr lang="en-US"/>
+        </a:p>
+      </dgm:t>
+    </dgm:pt>
+    <dgm:pt modelId="{61671DFD-4D4B-4859-B303-747DABEE7DB0}" type="sibTrans" cxnId="{8AE08A0B-5732-40EE-8E39-83629B0671B7}">
+      <dgm:prSet/>
+      <dgm:spPr/>
+      <dgm:t>
+        <a:bodyPr/>
+        <a:lstStyle/>
+        <a:p>
+          <a:endParaRPr lang="en-US"/>
+        </a:p>
+      </dgm:t>
+    </dgm:pt>
+    <dgm:pt modelId="{8DDB741B-E01A-4461-9CCB-62B7E0EEBD06}">
+      <dgm:prSet/>
+      <dgm:spPr/>
+      <dgm:t>
+        <a:bodyPr/>
+        <a:lstStyle/>
+        <a:p>
+          <a:r>
+            <a:rPr lang="en-US"/>
+            <a:t>Internal – inside a &lt;style&gt; tag in HTML</a:t>
+          </a:r>
+        </a:p>
+      </dgm:t>
+    </dgm:pt>
+    <dgm:pt modelId="{70D29CF4-1492-4BCA-9A92-4CB6E2CBDA45}" type="parTrans" cxnId="{938A70E6-54A3-4D2E-9271-1A88D895E9FB}">
+      <dgm:prSet/>
+      <dgm:spPr/>
+      <dgm:t>
+        <a:bodyPr/>
+        <a:lstStyle/>
+        <a:p>
+          <a:endParaRPr lang="en-US"/>
+        </a:p>
+      </dgm:t>
+    </dgm:pt>
+    <dgm:pt modelId="{417C2BE5-0A98-4BFB-9C0E-767751AA0FA3}" type="sibTrans" cxnId="{938A70E6-54A3-4D2E-9271-1A88D895E9FB}">
+      <dgm:prSet/>
+      <dgm:spPr/>
+      <dgm:t>
+        <a:bodyPr/>
+        <a:lstStyle/>
+        <a:p>
+          <a:endParaRPr lang="en-US"/>
+        </a:p>
+      </dgm:t>
+    </dgm:pt>
+    <dgm:pt modelId="{060E1E0D-33E0-4EDB-8547-9A81225DC9B6}">
+      <dgm:prSet/>
+      <dgm:spPr/>
+      <dgm:t>
+        <a:bodyPr/>
+        <a:lstStyle/>
+        <a:p>
+          <a:r>
+            <a:rPr lang="en-US"/>
+            <a:t>External – separate .css file using &lt;link&gt;</a:t>
+          </a:r>
+        </a:p>
+      </dgm:t>
+    </dgm:pt>
+    <dgm:pt modelId="{969C73A0-A8DB-4AAD-A092-17964C04196E}" type="parTrans" cxnId="{FDC9085B-EE3B-4BE6-846B-6939CAD4D4C6}">
+      <dgm:prSet/>
+      <dgm:spPr/>
+      <dgm:t>
+        <a:bodyPr/>
+        <a:lstStyle/>
+        <a:p>
+          <a:endParaRPr lang="en-US"/>
+        </a:p>
+      </dgm:t>
+    </dgm:pt>
+    <dgm:pt modelId="{022E4B92-8C17-4FA6-A50E-ED6BFE3C0304}" type="sibTrans" cxnId="{FDC9085B-EE3B-4BE6-846B-6939CAD4D4C6}">
+      <dgm:prSet/>
+      <dgm:spPr/>
+      <dgm:t>
+        <a:bodyPr/>
+        <a:lstStyle/>
+        <a:p>
+          <a:endParaRPr lang="en-US"/>
+        </a:p>
+      </dgm:t>
+    </dgm:pt>
+    <dgm:pt modelId="{7F6D053C-C51E-455F-AE0E-302FF7DB6F8D}" type="pres">
+      <dgm:prSet presAssocID="{3F1B3C52-4094-497A-A3ED-E2BC2E29F747}" presName="linear" presStyleCnt="0">
+        <dgm:presLayoutVars>
+          <dgm:animLvl val="lvl"/>
+          <dgm:resizeHandles val="exact"/>
+        </dgm:presLayoutVars>
+      </dgm:prSet>
+      <dgm:spPr/>
+    </dgm:pt>
+    <dgm:pt modelId="{8C5E5CF6-4225-4AFE-BE67-DE45449D63D3}" type="pres">
+      <dgm:prSet presAssocID="{D466A6C2-86BD-4627-8480-B57D5AD9D30B}" presName="parentText" presStyleLbl="node1" presStyleIdx="0" presStyleCnt="3">
+        <dgm:presLayoutVars>
+          <dgm:chMax val="0"/>
+          <dgm:bulletEnabled val="1"/>
+        </dgm:presLayoutVars>
+      </dgm:prSet>
+      <dgm:spPr/>
+    </dgm:pt>
+    <dgm:pt modelId="{3BFC34F7-50BE-45D5-9928-A6B26B6B0786}" type="pres">
+      <dgm:prSet presAssocID="{61671DFD-4D4B-4859-B303-747DABEE7DB0}" presName="spacer" presStyleCnt="0"/>
+      <dgm:spPr/>
+    </dgm:pt>
+    <dgm:pt modelId="{2B23BD19-C792-4D85-86A0-255F89E86FEF}" type="pres">
+      <dgm:prSet presAssocID="{8DDB741B-E01A-4461-9CCB-62B7E0EEBD06}" presName="parentText" presStyleLbl="node1" presStyleIdx="1" presStyleCnt="3">
+        <dgm:presLayoutVars>
+          <dgm:chMax val="0"/>
+          <dgm:bulletEnabled val="1"/>
+        </dgm:presLayoutVars>
+      </dgm:prSet>
+      <dgm:spPr/>
+    </dgm:pt>
+    <dgm:pt modelId="{320B7E5A-35EC-4116-ABE3-F778AC36CB16}" type="pres">
+      <dgm:prSet presAssocID="{417C2BE5-0A98-4BFB-9C0E-767751AA0FA3}" presName="spacer" presStyleCnt="0"/>
+      <dgm:spPr/>
+    </dgm:pt>
+    <dgm:pt modelId="{288EB044-8AB6-4C98-BCB4-1A3A17830BA6}" type="pres">
+      <dgm:prSet presAssocID="{060E1E0D-33E0-4EDB-8547-9A81225DC9B6}" presName="parentText" presStyleLbl="node1" presStyleIdx="2" presStyleCnt="3">
+        <dgm:presLayoutVars>
+          <dgm:chMax val="0"/>
+          <dgm:bulletEnabled val="1"/>
+        </dgm:presLayoutVars>
+      </dgm:prSet>
+      <dgm:spPr/>
+    </dgm:pt>
+  </dgm:ptLst>
+  <dgm:cxnLst>
+    <dgm:cxn modelId="{8AE08A0B-5732-40EE-8E39-83629B0671B7}" srcId="{3F1B3C52-4094-497A-A3ED-E2BC2E29F747}" destId="{D466A6C2-86BD-4627-8480-B57D5AD9D30B}" srcOrd="0" destOrd="0" parTransId="{22D704AB-8E98-4260-A12A-BD0E1E2C1B22}" sibTransId="{61671DFD-4D4B-4859-B303-747DABEE7DB0}"/>
+    <dgm:cxn modelId="{FDC9085B-EE3B-4BE6-846B-6939CAD4D4C6}" srcId="{3F1B3C52-4094-497A-A3ED-E2BC2E29F747}" destId="{060E1E0D-33E0-4EDB-8547-9A81225DC9B6}" srcOrd="2" destOrd="0" parTransId="{969C73A0-A8DB-4AAD-A092-17964C04196E}" sibTransId="{022E4B92-8C17-4FA6-A50E-ED6BFE3C0304}"/>
+    <dgm:cxn modelId="{DC0EE476-D418-4E63-81FD-4DB168F540E7}" type="presOf" srcId="{D466A6C2-86BD-4627-8480-B57D5AD9D30B}" destId="{8C5E5CF6-4225-4AFE-BE67-DE45449D63D3}" srcOrd="0" destOrd="0" presId="urn:microsoft.com/office/officeart/2005/8/layout/vList2"/>
+    <dgm:cxn modelId="{EB5FC29B-5261-476A-BD51-AE42110DF64D}" type="presOf" srcId="{060E1E0D-33E0-4EDB-8547-9A81225DC9B6}" destId="{288EB044-8AB6-4C98-BCB4-1A3A17830BA6}" srcOrd="0" destOrd="0" presId="urn:microsoft.com/office/officeart/2005/8/layout/vList2"/>
+    <dgm:cxn modelId="{1963679E-E5BF-45A0-86DA-B05F363B1262}" type="presOf" srcId="{8DDB741B-E01A-4461-9CCB-62B7E0EEBD06}" destId="{2B23BD19-C792-4D85-86A0-255F89E86FEF}" srcOrd="0" destOrd="0" presId="urn:microsoft.com/office/officeart/2005/8/layout/vList2"/>
+    <dgm:cxn modelId="{B0B561A9-F32C-4E5C-8A06-74C7C6B1D3F7}" type="presOf" srcId="{3F1B3C52-4094-497A-A3ED-E2BC2E29F747}" destId="{7F6D053C-C51E-455F-AE0E-302FF7DB6F8D}" srcOrd="0" destOrd="0" presId="urn:microsoft.com/office/officeart/2005/8/layout/vList2"/>
+    <dgm:cxn modelId="{938A70E6-54A3-4D2E-9271-1A88D895E9FB}" srcId="{3F1B3C52-4094-497A-A3ED-E2BC2E29F747}" destId="{8DDB741B-E01A-4461-9CCB-62B7E0EEBD06}" srcOrd="1" destOrd="0" parTransId="{70D29CF4-1492-4BCA-9A92-4CB6E2CBDA45}" sibTransId="{417C2BE5-0A98-4BFB-9C0E-767751AA0FA3}"/>
+    <dgm:cxn modelId="{1CECB9FD-5C54-4519-8040-EC41690B83CB}" type="presParOf" srcId="{7F6D053C-C51E-455F-AE0E-302FF7DB6F8D}" destId="{8C5E5CF6-4225-4AFE-BE67-DE45449D63D3}" srcOrd="0" destOrd="0" presId="urn:microsoft.com/office/officeart/2005/8/layout/vList2"/>
+    <dgm:cxn modelId="{4D86A44D-71D8-440D-959A-EE267603D5D4}" type="presParOf" srcId="{7F6D053C-C51E-455F-AE0E-302FF7DB6F8D}" destId="{3BFC34F7-50BE-45D5-9928-A6B26B6B0786}" srcOrd="1" destOrd="0" presId="urn:microsoft.com/office/officeart/2005/8/layout/vList2"/>
+    <dgm:cxn modelId="{C10918F5-93D1-480E-991E-A28680817347}" type="presParOf" srcId="{7F6D053C-C51E-455F-AE0E-302FF7DB6F8D}" destId="{2B23BD19-C792-4D85-86A0-255F89E86FEF}" srcOrd="2" destOrd="0" presId="urn:microsoft.com/office/officeart/2005/8/layout/vList2"/>
+    <dgm:cxn modelId="{0DF743AB-24EF-4B3F-94E9-1A87D0FC175F}" type="presParOf" srcId="{7F6D053C-C51E-455F-AE0E-302FF7DB6F8D}" destId="{320B7E5A-35EC-4116-ABE3-F778AC36CB16}" srcOrd="3" destOrd="0" presId="urn:microsoft.com/office/officeart/2005/8/layout/vList2"/>
+    <dgm:cxn modelId="{09C648E1-A44C-4E47-A287-0A6D5B635617}" type="presParOf" srcId="{7F6D053C-C51E-455F-AE0E-302FF7DB6F8D}" destId="{288EB044-8AB6-4C98-BCB4-1A3A17830BA6}" srcOrd="4" destOrd="0" presId="urn:microsoft.com/office/officeart/2005/8/layout/vList2"/>
+  </dgm:cxnLst>
+  <dgm:bg/>
+  <dgm:whole/>
+  <dgm:extLst>
+    <a:ext uri="http://schemas.microsoft.com/office/drawing/2008/diagram">
+      <dsp:dataModelExt xmlns:dsp="http://schemas.microsoft.com/office/drawing/2008/diagram" relId="rId6" minVer="http://schemas.openxmlformats.org/drawingml/2006/diagram"/>
+    </a:ext>
+  </dgm:extLst>
+</dgm:dataModel>
+</file>
+
+<file path=ppt/diagrams/drawing1.xml><?xml version="1.0" encoding="utf-8"?>
+<dsp:drawing xmlns:dgm="http://schemas.openxmlformats.org/drawingml/2006/diagram" xmlns:dsp="http://schemas.microsoft.com/office/drawing/2008/diagram" xmlns:a="http://schemas.openxmlformats.org/drawingml/2006/main">
+  <dsp:spTree>
+    <dsp:nvGrpSpPr>
+      <dsp:cNvPr id="0" name=""/>
+      <dsp:cNvGrpSpPr/>
+    </dsp:nvGrpSpPr>
+    <dsp:grpSpPr/>
+    <dsp:sp modelId="{8C5E5CF6-4225-4AFE-BE67-DE45449D63D3}">
+      <dsp:nvSpPr>
+        <dsp:cNvPr id="0" name=""/>
+        <dsp:cNvSpPr/>
+      </dsp:nvSpPr>
+      <dsp:spPr>
+        <a:xfrm>
+          <a:off x="0" y="41626"/>
+          <a:ext cx="5029899" cy="1140750"/>
+        </a:xfrm>
+        <a:prstGeom prst="roundRect">
+          <a:avLst/>
+        </a:prstGeom>
+        <a:solidFill>
+          <a:schemeClr val="accent1">
+            <a:hueOff val="0"/>
+            <a:satOff val="0"/>
+            <a:lumOff val="0"/>
+            <a:alphaOff val="0"/>
+          </a:schemeClr>
+        </a:solidFill>
+        <a:ln w="22225" cap="rnd" cmpd="sng" algn="ctr">
+          <a:solidFill>
+            <a:schemeClr val="lt1">
+              <a:hueOff val="0"/>
+              <a:satOff val="0"/>
+              <a:lumOff val="0"/>
+              <a:alphaOff val="0"/>
+            </a:schemeClr>
+          </a:solidFill>
+          <a:prstDash val="solid"/>
+        </a:ln>
+        <a:effectLst/>
+      </dsp:spPr>
+      <dsp:style>
+        <a:lnRef idx="2">
+          <a:scrgbClr r="0" g="0" b="0"/>
+        </a:lnRef>
+        <a:fillRef idx="1">
+          <a:scrgbClr r="0" g="0" b="0"/>
+        </a:fillRef>
+        <a:effectRef idx="0">
+          <a:scrgbClr r="0" g="0" b="0"/>
+        </a:effectRef>
+        <a:fontRef idx="minor">
+          <a:schemeClr val="lt1"/>
+        </a:fontRef>
+      </dsp:style>
+      <dsp:txBody>
+        <a:bodyPr spcFirstLastPara="0" vert="horz" wrap="square" lIns="114300" tIns="114300" rIns="114300" bIns="114300" numCol="1" spcCol="1270" anchor="ctr" anchorCtr="0">
+          <a:noAutofit/>
+        </a:bodyPr>
+        <a:lstStyle/>
+        <a:p>
+          <a:pPr marL="0" lvl="0" indent="0" algn="l" defTabSz="1333500">
+            <a:lnSpc>
+              <a:spcPct val="90000"/>
+            </a:lnSpc>
+            <a:spcBef>
+              <a:spcPct val="0"/>
+            </a:spcBef>
+            <a:spcAft>
+              <a:spcPct val="35000"/>
+            </a:spcAft>
+            <a:buNone/>
+          </a:pPr>
+          <a:r>
+            <a:rPr lang="en-US" sz="3000" kern="1200"/>
+            <a:t>Inline – directly on an element</a:t>
+          </a:r>
+        </a:p>
+      </dsp:txBody>
+      <dsp:txXfrm>
+        <a:off x="55687" y="97313"/>
+        <a:ext cx="4918525" cy="1029376"/>
+      </dsp:txXfrm>
+    </dsp:sp>
+    <dsp:sp modelId="{2B23BD19-C792-4D85-86A0-255F89E86FEF}">
+      <dsp:nvSpPr>
+        <dsp:cNvPr id="0" name=""/>
+        <dsp:cNvSpPr/>
+      </dsp:nvSpPr>
+      <dsp:spPr>
+        <a:xfrm>
+          <a:off x="0" y="1268776"/>
+          <a:ext cx="5029899" cy="1140750"/>
+        </a:xfrm>
+        <a:prstGeom prst="roundRect">
+          <a:avLst/>
+        </a:prstGeom>
+        <a:solidFill>
+          <a:schemeClr val="accent1">
+            <a:hueOff val="0"/>
+            <a:satOff val="0"/>
+            <a:lumOff val="0"/>
+            <a:alphaOff val="0"/>
+          </a:schemeClr>
+        </a:solidFill>
+        <a:ln w="22225" cap="rnd" cmpd="sng" algn="ctr">
+          <a:solidFill>
+            <a:schemeClr val="lt1">
+              <a:hueOff val="0"/>
+              <a:satOff val="0"/>
+              <a:lumOff val="0"/>
+              <a:alphaOff val="0"/>
+            </a:schemeClr>
+          </a:solidFill>
+          <a:prstDash val="solid"/>
+        </a:ln>
+        <a:effectLst/>
+      </dsp:spPr>
+      <dsp:style>
+        <a:lnRef idx="2">
+          <a:scrgbClr r="0" g="0" b="0"/>
+        </a:lnRef>
+        <a:fillRef idx="1">
+          <a:scrgbClr r="0" g="0" b="0"/>
+        </a:fillRef>
+        <a:effectRef idx="0">
+          <a:scrgbClr r="0" g="0" b="0"/>
+        </a:effectRef>
+        <a:fontRef idx="minor">
+          <a:schemeClr val="lt1"/>
+        </a:fontRef>
+      </dsp:style>
+      <dsp:txBody>
+        <a:bodyPr spcFirstLastPara="0" vert="horz" wrap="square" lIns="114300" tIns="114300" rIns="114300" bIns="114300" numCol="1" spcCol="1270" anchor="ctr" anchorCtr="0">
+          <a:noAutofit/>
+        </a:bodyPr>
+        <a:lstStyle/>
+        <a:p>
+          <a:pPr marL="0" lvl="0" indent="0" algn="l" defTabSz="1333500">
+            <a:lnSpc>
+              <a:spcPct val="90000"/>
+            </a:lnSpc>
+            <a:spcBef>
+              <a:spcPct val="0"/>
+            </a:spcBef>
+            <a:spcAft>
+              <a:spcPct val="35000"/>
+            </a:spcAft>
+            <a:buNone/>
+          </a:pPr>
+          <a:r>
+            <a:rPr lang="en-US" sz="3000" kern="1200"/>
+            <a:t>Internal – inside a &lt;style&gt; tag in HTML</a:t>
+          </a:r>
+        </a:p>
+      </dsp:txBody>
+      <dsp:txXfrm>
+        <a:off x="55687" y="1324463"/>
+        <a:ext cx="4918525" cy="1029376"/>
+      </dsp:txXfrm>
+    </dsp:sp>
+    <dsp:sp modelId="{288EB044-8AB6-4C98-BCB4-1A3A17830BA6}">
+      <dsp:nvSpPr>
+        <dsp:cNvPr id="0" name=""/>
+        <dsp:cNvSpPr/>
+      </dsp:nvSpPr>
+      <dsp:spPr>
+        <a:xfrm>
+          <a:off x="0" y="2495926"/>
+          <a:ext cx="5029899" cy="1140750"/>
+        </a:xfrm>
+        <a:prstGeom prst="roundRect">
+          <a:avLst/>
+        </a:prstGeom>
+        <a:solidFill>
+          <a:schemeClr val="accent1">
+            <a:hueOff val="0"/>
+            <a:satOff val="0"/>
+            <a:lumOff val="0"/>
+            <a:alphaOff val="0"/>
+          </a:schemeClr>
+        </a:solidFill>
+        <a:ln w="22225" cap="rnd" cmpd="sng" algn="ctr">
+          <a:solidFill>
+            <a:schemeClr val="lt1">
+              <a:hueOff val="0"/>
+              <a:satOff val="0"/>
+              <a:lumOff val="0"/>
+              <a:alphaOff val="0"/>
+            </a:schemeClr>
+          </a:solidFill>
+          <a:prstDash val="solid"/>
+        </a:ln>
+        <a:effectLst/>
+      </dsp:spPr>
+      <dsp:style>
+        <a:lnRef idx="2">
+          <a:scrgbClr r="0" g="0" b="0"/>
+        </a:lnRef>
+        <a:fillRef idx="1">
+          <a:scrgbClr r="0" g="0" b="0"/>
+        </a:fillRef>
+        <a:effectRef idx="0">
+          <a:scrgbClr r="0" g="0" b="0"/>
+        </a:effectRef>
+        <a:fontRef idx="minor">
+          <a:schemeClr val="lt1"/>
+        </a:fontRef>
+      </dsp:style>
+      <dsp:txBody>
+        <a:bodyPr spcFirstLastPara="0" vert="horz" wrap="square" lIns="114300" tIns="114300" rIns="114300" bIns="114300" numCol="1" spcCol="1270" anchor="ctr" anchorCtr="0">
+          <a:noAutofit/>
+        </a:bodyPr>
+        <a:lstStyle/>
+        <a:p>
+          <a:pPr marL="0" lvl="0" indent="0" algn="l" defTabSz="1333500">
+            <a:lnSpc>
+              <a:spcPct val="90000"/>
+            </a:lnSpc>
+            <a:spcBef>
+              <a:spcPct val="0"/>
+            </a:spcBef>
+            <a:spcAft>
+              <a:spcPct val="35000"/>
+            </a:spcAft>
+            <a:buNone/>
+          </a:pPr>
+          <a:r>
+            <a:rPr lang="en-US" sz="3000" kern="1200"/>
+            <a:t>External – separate .css file using &lt;link&gt;</a:t>
+          </a:r>
+        </a:p>
+      </dsp:txBody>
+      <dsp:txXfrm>
+        <a:off x="55687" y="2551613"/>
+        <a:ext cx="4918525" cy="1029376"/>
+      </dsp:txXfrm>
+    </dsp:sp>
+  </dsp:spTree>
+</dsp:drawing>
+</file>
+
+<file path=ppt/diagrams/layout1.xml><?xml version="1.0" encoding="utf-8"?>
+<dgm:layoutDef xmlns:dgm="http://schemas.openxmlformats.org/drawingml/2006/diagram" xmlns:a="http://schemas.openxmlformats.org/drawingml/2006/main" uniqueId="urn:microsoft.com/office/officeart/2005/8/layout/vList2">
+  <dgm:title val=""/>
+  <dgm:desc val=""/>
+  <dgm:catLst>
+    <dgm:cat type="list" pri="3000"/>
+    <dgm:cat type="convert" pri="1000"/>
+  </dgm:catLst>
+  <dgm:sampData>
+    <dgm:dataModel>
+      <dgm:ptLst>
+        <dgm:pt modelId="0" type="doc"/>
+        <dgm:pt modelId="1">
+          <dgm:prSet phldr="1"/>
+        </dgm:pt>
+        <dgm:pt modelId="11">
+          <dgm:prSet phldr="1"/>
+        </dgm:pt>
+        <dgm:pt modelId="2">
+          <dgm:prSet phldr="1"/>
+        </dgm:pt>
+        <dgm:pt modelId="21">
+          <dgm:prSet phldr="1"/>
+        </dgm:pt>
+      </dgm:ptLst>
+      <dgm:cxnLst>
+        <dgm:cxn modelId="4" srcId="0" destId="1" srcOrd="0" destOrd="0"/>
+        <dgm:cxn modelId="5" srcId="0" destId="2" srcOrd="1" destOrd="0"/>
+        <dgm:cxn modelId="12" srcId="1" destId="11" srcOrd="0" destOrd="0"/>
+        <dgm:cxn modelId="23" srcId="2" destId="21" srcOrd="0" destOrd="0"/>
+      </dgm:cxnLst>
+      <dgm:bg/>
+      <dgm:whole/>
+    </dgm:dataModel>
+  </dgm:sampData>
+  <dgm:styleData>
+    <dgm:dataModel>
+      <dgm:ptLst>
+        <dgm:pt modelId="0" type="doc"/>
+        <dgm:pt modelId="1"/>
+        <dgm:pt modelId="2"/>
+      </dgm:ptLst>
+      <dgm:cxnLst>
+        <dgm:cxn modelId="3" srcId="0" destId="1" srcOrd="0" destOrd="0"/>
+        <dgm:cxn modelId="4" srcId="0" destId="2" srcOrd="1" destOrd="0"/>
+      </dgm:cxnLst>
+      <dgm:bg/>
+      <dgm:whole/>
+    </dgm:dataModel>
+  </dgm:styleData>
+  <dgm:clrData>
+    <dgm:dataModel>
+      <dgm:ptLst>
+        <dgm:pt modelId="0" type="doc"/>
+        <dgm:pt modelId="1"/>
+        <dgm:pt modelId="2"/>
+        <dgm:pt modelId="3"/>
+        <dgm:pt modelId="4"/>
+      </dgm:ptLst>
+      <dgm:cxnLst>
+        <dgm:cxn modelId="5" srcId="0" destId="1" srcOrd="0" destOrd="0"/>
+        <dgm:cxn modelId="6" srcId="0" destId="2" srcOrd="1" destOrd="0"/>
+        <dgm:cxn modelId="7" srcId="0" destId="3" srcOrd="2" destOrd="0"/>
+        <dgm:cxn modelId="8" srcId="0" destId="4" srcOrd="3" destOrd="0"/>
+      </dgm:cxnLst>
+      <dgm:bg/>
+      <dgm:whole/>
+    </dgm:dataModel>
+  </dgm:clrData>
+  <dgm:layoutNode name="linear">
+    <dgm:varLst>
+      <dgm:animLvl val="lvl"/>
+      <dgm:resizeHandles val="exact"/>
+    </dgm:varLst>
+    <dgm:alg type="lin">
+      <dgm:param type="linDir" val="fromT"/>
+      <dgm:param type="vertAlign" val="mid"/>
+    </dgm:alg>
+    <dgm:shape xmlns:r="http://schemas.openxmlformats.org/officeDocument/2006/relationships" r:blip="">
+      <dgm:adjLst/>
+    </dgm:shape>
+    <dgm:presOf/>
+    <dgm:constrLst>
+      <dgm:constr type="w" for="ch" forName="parentText" refType="w"/>
+      <dgm:constr type="h" for="ch" forName="parentText" refType="primFontSz" refFor="ch" refForName="parentText" fact="0.52"/>
+      <dgm:constr type="w" for="ch" forName="childText" refType="w"/>
+      <dgm:constr type="h" for="ch" forName="childText" refType="primFontSz" refFor="ch" refForName="parentText" fact="0.46"/>
+      <dgm:constr type="h" for="ch" forName="parentText" op="equ"/>
+      <dgm:constr type="primFontSz" for="ch" forName="parentText" op="equ" val="65"/>
+      <dgm:constr type="primFontSz" for="ch" forName="childText" refType="primFontSz" refFor="ch" refForName="parentText" op="equ"/>
+      <dgm:constr type="h" for="ch" forName="spacer" refType="primFontSz" refFor="ch" refForName="parentText" fact="0.08"/>
+    </dgm:constrLst>
+    <dgm:ruleLst>
+      <dgm:rule type="primFontSz" for="ch" forName="parentText" val="5" fact="NaN" max="NaN"/>
+    </dgm:ruleLst>
+    <dgm:forEach name="Name0" axis="ch" ptType="node">
+      <dgm:layoutNode name="parentText" styleLbl="node1">
+        <dgm:varLst>
+          <dgm:chMax val="0"/>
+          <dgm:bulletEnabled val="1"/>
+        </dgm:varLst>
+        <dgm:alg type="tx">
+          <dgm:param type="parTxLTRAlign" val="l"/>
+          <dgm:param type="parTxRTLAlign" val="r"/>
+        </dgm:alg>
+        <dgm:shape xmlns:r="http://schemas.openxmlformats.org/officeDocument/2006/relationships" type="roundRect" r:blip="">
+          <dgm:adjLst/>
+        </dgm:shape>
+        <dgm:presOf axis="self"/>
+        <dgm:constrLst>
+          <dgm:constr type="tMarg" refType="primFontSz" fact="0.3"/>
+          <dgm:constr type="bMarg" refType="primFontSz" fact="0.3"/>
+          <dgm:constr type="lMarg" refType="primFontSz" fact="0.3"/>
+          <dgm:constr type="rMarg" refType="primFontSz" fact="0.3"/>
+        </dgm:constrLst>
+        <dgm:ruleLst>
+          <dgm:rule type="h" val="INF" fact="NaN" max="NaN"/>
+        </dgm:ruleLst>
+      </dgm:layoutNode>
+      <dgm:choose name="Name1">
+        <dgm:if name="Name2" axis="ch" ptType="node" func="cnt" op="gte" val="1">
+          <dgm:layoutNode name="childText" styleLbl="revTx">
+            <dgm:varLst>
+              <dgm:bulletEnabled val="1"/>
+            </dgm:varLst>
+            <dgm:alg type="tx">
+              <dgm:param type="stBulletLvl" val="1"/>
+              <dgm:param type="lnSpAfChP" val="20"/>
+            </dgm:alg>
+            <dgm:shape xmlns:r="http://schemas.openxmlformats.org/officeDocument/2006/relationships" type="rect" r:blip="">
+              <dgm:adjLst/>
+            </dgm:shape>
+            <dgm:presOf axis="des" ptType="node"/>
+            <dgm:constrLst>
+              <dgm:constr type="tMarg" refType="primFontSz" fact="0.1"/>
+              <dgm:constr type="bMarg" refType="primFontSz" fact="0.1"/>
+              <dgm:constr type="lMarg" refType="w" fact="0.09"/>
+            </dgm:constrLst>
+            <dgm:ruleLst>
+              <dgm:rule type="h" val="INF" fact="NaN" max="NaN"/>
+            </dgm:ruleLst>
+          </dgm:layoutNode>
+        </dgm:if>
+        <dgm:else name="Name3">
+          <dgm:choose name="Name4">
+            <dgm:if name="Name5" axis="par ch" ptType="doc node" func="cnt" op="gte" val="2">
+              <dgm:forEach name="Name6" axis="followSib" ptType="sibTrans" cnt="1">
+                <dgm:layoutNode name="spacer">
+                  <dgm:alg type="sp"/>
+                  <dgm:shape xmlns:r="http://schemas.openxmlformats.org/officeDocument/2006/relationships" r:blip="">
+                    <dgm:adjLst/>
+                  </dgm:shape>
+                  <dgm:presOf/>
+                  <dgm:constrLst/>
+                  <dgm:ruleLst/>
+                </dgm:layoutNode>
+              </dgm:forEach>
+            </dgm:if>
+            <dgm:else name="Name7"/>
+          </dgm:choose>
+        </dgm:else>
+      </dgm:choose>
+    </dgm:forEach>
+  </dgm:layoutNode>
+</dgm:layoutDef>
+</file>
+
+<file path=ppt/diagrams/quickStyle1.xml><?xml version="1.0" encoding="utf-8"?>
+<dgm:styleDef xmlns:dgm="http://schemas.openxmlformats.org/drawingml/2006/diagram" xmlns:a="http://schemas.openxmlformats.org/drawingml/2006/main" uniqueId="urn:microsoft.com/office/officeart/2005/8/quickstyle/simple1">
+  <dgm:title val=""/>
+  <dgm:desc val=""/>
+  <dgm:catLst>
+    <dgm:cat type="simple" pri="10100"/>
+  </dgm:catLst>
+  <dgm:scene3d>
+    <a:camera prst="orthographicFront"/>
+    <a:lightRig rig="threePt" dir="t"/>
+  </dgm:scene3d>
+  <dgm:styleLbl name="node0">
+    <dgm:scene3d>
+      <a:camera prst="orthographicFront"/>
+      <a:lightRig rig="threePt" dir="t"/>
+    </dgm:scene3d>
+    <dgm:sp3d/>
+    <dgm:txPr/>
+    <dgm:style>
+      <a:lnRef idx="2">
+        <a:scrgbClr r="0" g="0" b="0"/>
+      </a:lnRef>
+      <a:fillRef idx="1">
+        <a:scrgbClr r="0" g="0" b="0"/>
+      </a:fillRef>
+      <a:effectRef idx="0">
+        <a:scrgbClr r="0" g="0" b="0"/>
+      </a:effectRef>
+      <a:fontRef idx="minor">
+        <a:schemeClr val="lt1"/>
+      </a:fontRef>
+    </dgm:style>
+  </dgm:styleLbl>
+  <dgm:styleLbl name="lnNode1">
+    <dgm:scene3d>
+      <a:camera prst="orthographicFront"/>
+      <a:lightRig rig="threePt" dir="t"/>
+    </dgm:scene3d>
+    <dgm:sp3d/>
+    <dgm:txPr/>
+    <dgm:style>
+      <a:lnRef idx="2">
+        <a:scrgbClr r="0" g="0" b="0"/>
+      </a:lnRef>
+      <a:fillRef idx="1">
+        <a:scrgbClr r="0" g="0" b="0"/>
+      </a:fillRef>
+      <a:effectRef idx="0">
+        <a:scrgbClr r="0" g="0" b="0"/>
+      </a:effectRef>
+      <a:fontRef idx="minor">
+        <a:schemeClr val="lt1"/>
+      </a:fontRef>
+    </dgm:style>
+  </dgm:styleLbl>
+  <dgm:styleLbl name="vennNode1">
+    <dgm:scene3d>
+      <a:camera prst="orthographicFront"/>
+      <a:lightRig rig="threePt" dir="t"/>
+    </dgm:scene3d>
+    <dgm:sp3d/>
+    <dgm:txPr/>
+    <dgm:style>
+      <a:lnRef idx="2">
+        <a:scrgbClr r="0" g="0" b="0"/>
+      </a:lnRef>
+      <a:fillRef idx="1">
+        <a:scrgbClr r="0" g="0" b="0"/>
+      </a:fillRef>
+      <a:effectRef idx="0">
+        <a:scrgbClr r="0" g="0" b="0"/>
+      </a:effectRef>
+      <a:fontRef idx="minor">
+        <a:schemeClr val="tx1"/>
+      </a:fontRef>
+    </dgm:style>
+  </dgm:styleLbl>
+  <dgm:styleLbl name="alignNode1">
+    <dgm:scene3d>
+      <a:camera prst="orthographicFront"/>
+      <a:lightRig rig="threePt" dir="t"/>
+    </dgm:scene3d>
+    <dgm:sp3d/>
+    <dgm:txPr/>
+    <dgm:style>
+      <a:lnRef idx="2">
+        <a:scrgbClr r="0" g="0" b="0"/>
+      </a:lnRef>
+      <a:fillRef idx="1">
+        <a:scrgbClr r="0" g="0" b="0"/>
+      </a:fillRef>
+      <a:effectRef idx="0">
+        <a:scrgbClr r="0" g="0" b="0"/>
+      </a:effectRef>
+      <a:fontRef idx="minor">
+        <a:schemeClr val="lt1"/>
+      </a:fontRef>
+    </dgm:style>
+  </dgm:styleLbl>
+  <dgm:styleLbl name="node1">
+    <dgm:scene3d>
+      <a:camera prst="orthographicFront"/>
+      <a:lightRig rig="threePt" dir="t"/>
+    </dgm:scene3d>
+    <dgm:sp3d/>
+    <dgm:txPr/>
+    <dgm:style>
+      <a:lnRef idx="2">
+        <a:scrgbClr r="0" g="0" b="0"/>
+      </a:lnRef>
+      <a:fillRef idx="1">
+        <a:scrgbClr r="0" g="0" b="0"/>
+      </a:fillRef>
+      <a:effectRef idx="0">
+        <a:scrgbClr r="0" g="0" b="0"/>
+      </a:effectRef>
+      <a:fontRef idx="minor">
+        <a:schemeClr val="lt1"/>
+      </a:fontRef>
+    </dgm:style>
+  </dgm:styleLbl>
+  <dgm:styleLbl name="node2">
+    <dgm:scene3d>
+      <a:camera prst="orthographicFront"/>
+      <a:lightRig rig="threePt" dir="t"/>
+    </dgm:scene3d>
+    <dgm:sp3d/>
+    <dgm:txPr/>
+    <dgm:style>
+      <a:lnRef idx="2">
+        <a:scrgbClr r="0" g="0" b="0"/>
+      </a:lnRef>
+      <a:fillRef idx="1">
+        <a:scrgbClr r="0" g="0" b="0"/>
+      </a:fillRef>
+      <a:effectRef idx="0">
+        <a:scrgbClr r="0" g="0" b="0"/>
+      </a:effectRef>
+      <a:fontRef idx="minor">
+        <a:schemeClr val="lt1"/>
+      </a:fontRef>
+    </dgm:style>
+  </dgm:styleLbl>
+  <dgm:styleLbl name="node3">
+    <dgm:scene3d>
+      <a:camera prst="orthographicFront"/>
+      <a:lightRig rig="threePt" dir="t"/>
+    </dgm:scene3d>
+    <dgm:sp3d/>
+    <dgm:txPr/>
+    <dgm:style>
+      <a:lnRef idx="2">
+        <a:scrgbClr r="0" g="0" b="0"/>
+      </a:lnRef>
+      <a:fillRef idx="1">
+        <a:scrgbClr r="0" g="0" b="0"/>
+      </a:fillRef>
+      <a:effectRef idx="0">
+        <a:scrgbClr r="0" g="0" b="0"/>
+      </a:effectRef>
+      <a:fontRef idx="minor">
+        <a:schemeClr val="lt1"/>
+      </a:fontRef>
+    </dgm:style>
+  </dgm:styleLbl>
+  <dgm:styleLbl name="node4">
+    <dgm:scene3d>
+      <a:camera prst="orthographicFront"/>
+      <a:lightRig rig="threePt" dir="t"/>
+    </dgm:scene3d>
+    <dgm:sp3d/>
+    <dgm:txPr/>
+    <dgm:style>
+      <a:lnRef idx="2">
+        <a:scrgbClr r="0" g="0" b="0"/>
+      </a:lnRef>
+      <a:fillRef idx="1">
+        <a:scrgbClr r="0" g="0" b="0"/>
+      </a:fillRef>
+      <a:effectRef idx="0">
+        <a:scrgbClr r="0" g="0" b="0"/>
+      </a:effectRef>
+      <a:fontRef idx="minor">
+        <a:schemeClr val="lt1"/>
+      </a:fontRef>
+    </dgm:style>
+  </dgm:styleLbl>
+  <dgm:styleLbl name="fgImgPlace1">
+    <dgm:scene3d>
+      <a:camera prst="orthographicFront"/>
+      <a:lightRig rig="threePt" dir="t"/>
+    </dgm:scene3d>
+    <dgm:sp3d/>
+    <dgm:txPr/>
+    <dgm:style>
+      <a:lnRef idx="2">
+        <a:scrgbClr r="0" g="0" b="0"/>
+      </a:lnRef>
+      <a:fillRef idx="1">
+        <a:scrgbClr r="0" g="0" b="0"/>
+      </a:fillRef>
+      <a:effectRef idx="0">
+        <a:scrgbClr r="0" g="0" b="0"/>
+      </a:effectRef>
+      <a:fontRef idx="minor"/>
+    </dgm:style>
+  </dgm:styleLbl>
+  <dgm:styleLbl name="alignImgPlace1">
+    <dgm:scene3d>
+      <a:camera prst="orthographicFront"/>
+      <a:lightRig rig="threePt" dir="t"/>
+    </dgm:scene3d>
+    <dgm:sp3d/>
+    <dgm:txPr/>
+    <dgm:style>
+      <a:lnRef idx="2">
+        <a:scrgbClr r="0" g="0" b="0"/>
+      </a:lnRef>
+      <a:fillRef idx="1">
+        <a:scrgbClr r="0" g="0" b="0"/>
+      </a:fillRef>
+      <a:effectRef idx="0">
+        <a:scrgbClr r="0" g="0" b="0"/>
+      </a:effectRef>
+      <a:fontRef idx="minor"/>
+    </dgm:style>
+  </dgm:styleLbl>
+  <dgm:styleLbl name="bgImgPlace1">
+    <dgm:scene3d>
+      <a:camera prst="orthographicFront"/>
+      <a:lightRig rig="threePt" dir="t"/>
+    </dgm:scene3d>
+    <dgm:sp3d/>
+    <dgm:txPr/>
+    <dgm:style>
+      <a:lnRef idx="2">
+        <a:scrgbClr r="0" g="0" b="0"/>
+      </a:lnRef>
+      <a:fillRef idx="1">
+        <a:scrgbClr r="0" g="0" b="0"/>
+      </a:fillRef>
+      <a:effectRef idx="0">
+        <a:scrgbClr r="0" g="0" b="0"/>
+      </a:effectRef>
+      <a:fontRef idx="minor"/>
+    </dgm:style>
+  </dgm:styleLbl>
+  <dgm:styleLbl name="sibTrans2D1">
+    <dgm:scene3d>
+      <a:camera prst="orthographicFront"/>
+      <a:lightRig rig="threePt" dir="t"/>
+    </dgm:scene3d>
+    <dgm:sp3d/>
+    <dgm:txPr/>
+    <dgm:style>
+      <a:lnRef idx="0">
+        <a:scrgbClr r="0" g="0" b="0"/>
+      </a:lnRef>
+      <a:fillRef idx="1">
+        <a:scrgbClr r="0" g="0" b="0"/>
+      </a:fillRef>
+      <a:effectRef idx="0">
+        <a:scrgbClr r="0" g="0" b="0"/>
+      </a:effectRef>
+      <a:fontRef idx="minor">
+        <a:schemeClr val="lt1"/>
+      </a:fontRef>
+    </dgm:style>
+  </dgm:styleLbl>
+  <dgm:styleLbl name="fgSibTrans2D1">
+    <dgm:scene3d>
+      <a:camera prst="orthographicFront"/>
+      <a:lightRig rig="threePt" dir="t"/>
+    </dgm:scene3d>
+    <dgm:sp3d/>
+    <dgm:txPr/>
+    <dgm:style>
+      <a:lnRef idx="0">
+        <a:scrgbClr r="0" g="0" b="0"/>
+      </a:lnRef>
+      <a:fillRef idx="1">
+        <a:scrgbClr r="0" g="0" b="0"/>
+      </a:fillRef>
+      <a:effectRef idx="0">
+        <a:scrgbClr r="0" g="0" b="0"/>
+      </a:effectRef>
+      <a:fontRef idx="minor">
+        <a:schemeClr val="lt1"/>
+      </a:fontRef>
+    </dgm:style>
+  </dgm:styleLbl>
+  <dgm:styleLbl name="bgSibTrans2D1">
+    <dgm:scene3d>
+      <a:camera prst="orthographicFront"/>
+      <a:lightRig rig="threePt" dir="t"/>
+    </dgm:scene3d>
+    <dgm:sp3d/>
+    <dgm:txPr/>
+    <dgm:style>
+      <a:lnRef idx="0">
+        <a:scrgbClr r="0" g="0" b="0"/>
+      </a:lnRef>
+      <a:fillRef idx="1">
+        <a:scrgbClr r="0" g="0" b="0"/>
+      </a:fillRef>
+      <a:effectRef idx="0">
+        <a:scrgbClr r="0" g="0" b="0"/>
+      </a:effectRef>
+      <a:fontRef idx="minor">
+        <a:schemeClr val="lt1"/>
+      </a:fontRef>
+    </dgm:style>
+  </dgm:styleLbl>
+  <dgm:styleLbl name="sibTrans1D1">
+    <dgm:scene3d>
+      <a:camera prst="orthographicFront"/>
+      <a:lightRig rig="threePt" dir="t"/>
+    </dgm:scene3d>
+    <dgm:sp3d/>
+    <dgm:txPr/>
+    <dgm:style>
+      <a:lnRef idx="1">
+        <a:scrgbClr r="0" g="0" b="0"/>
+      </a:lnRef>
+      <a:fillRef idx="0">
+        <a:scrgbClr r="0" g="0" b="0"/>
+      </a:fillRef>
+      <a:effectRef idx="0">
+        <a:scrgbClr r="0" g="0" b="0"/>
+      </a:effectRef>
+      <a:fontRef idx="minor"/>
+    </dgm:style>
+  </dgm:styleLbl>
+  <dgm:styleLbl name="callout">
+    <dgm:scene3d>
+      <a:camera prst="orthographicFront"/>
+      <a:lightRig rig="threePt" dir="t"/>
+    </dgm:scene3d>
+    <dgm:sp3d/>
+    <dgm:txPr/>
+    <dgm:style>
+      <a:lnRef idx="2">
+        <a:scrgbClr r="0" g="0" b="0"/>
+      </a:lnRef>
+      <a:fillRef idx="1">
+        <a:scrgbClr r="0" g="0" b="0"/>
+      </a:fillRef>
+      <a:effectRef idx="0">
+        <a:scrgbClr r="0" g="0" b="0"/>
+      </a:effectRef>
+      <a:fontRef idx="minor"/>
+    </dgm:style>
+  </dgm:styleLbl>
+  <dgm:styleLbl name="asst0">
+    <dgm:scene3d>
+      <a:camera prst="orthographicFront"/>
+      <a:lightRig rig="threePt" dir="t"/>
+    </dgm:scene3d>
+    <dgm:sp3d/>
+    <dgm:txPr/>
+    <dgm:style>
+      <a:lnRef idx="2">
+        <a:scrgbClr r="0" g="0" b="0"/>
+      </a:lnRef>
+      <a:fillRef idx="1">
+        <a:scrgbClr r="0" g="0" b="0"/>
+      </a:fillRef>
+      <a:effectRef idx="0">
+        <a:scrgbClr r="0" g="0" b="0"/>
+      </a:effectRef>
+      <a:fontRef idx="minor">
+        <a:schemeClr val="lt1"/>
+      </a:fontRef>
+    </dgm:style>
+  </dgm:styleLbl>
+  <dgm:styleLbl name="asst1">
+    <dgm:scene3d>
+      <a:camera prst="orthographicFront"/>
+      <a:lightRig rig="threePt" dir="t"/>
+    </dgm:scene3d>
+    <dgm:sp3d/>
+    <dgm:txPr/>
+    <dgm:style>
+      <a:lnRef idx="2">
+        <a:scrgbClr r="0" g="0" b="0"/>
+      </a:lnRef>
+      <a:fillRef idx="1">
+        <a:scrgbClr r="0" g="0" b="0"/>
+      </a:fillRef>
+      <a:effectRef idx="0">
+        <a:scrgbClr r="0" g="0" b="0"/>
+      </a:effectRef>
+      <a:fontRef idx="minor">
+        <a:schemeClr val="lt1"/>
+      </a:fontRef>
+    </dgm:style>
+  </dgm:styleLbl>
+  <dgm:styleLbl name="asst2">
+    <dgm:scene3d>
+      <a:camera prst="orthographicFront"/>
+      <a:lightRig rig="threePt" dir="t"/>
+    </dgm:scene3d>
+    <dgm:sp3d/>
+    <dgm:txPr/>
+    <dgm:style>
+      <a:lnRef idx="2">
+        <a:scrgbClr r="0" g="0" b="0"/>
+      </a:lnRef>
+      <a:fillRef idx="1">
+        <a:scrgbClr r="0" g="0" b="0"/>
+      </a:fillRef>
+      <a:effectRef idx="0">
+        <a:scrgbClr r="0" g="0" b="0"/>
+      </a:effectRef>
+      <a:fontRef idx="minor">
+        <a:schemeClr val="lt1"/>
+      </a:fontRef>
+    </dgm:style>
+  </dgm:styleLbl>
+  <dgm:styleLbl name="asst3">
+    <dgm:scene3d>
+      <a:camera prst="orthographicFront"/>
+      <a:lightRig rig="threePt" dir="t"/>
+    </dgm:scene3d>
+    <dgm:sp3d/>
+    <dgm:txPr/>
+    <dgm:style>
+      <a:lnRef idx="2">
+        <a:scrgbClr r="0" g="0" b="0"/>
+      </a:lnRef>
+      <a:fillRef idx="1">
+        <a:scrgbClr r="0" g="0" b="0"/>
+      </a:fillRef>
+      <a:effectRef idx="0">
+        <a:scrgbClr r="0" g="0" b="0"/>
+      </a:effectRef>
+      <a:fontRef idx="minor">
+        <a:schemeClr val="lt1"/>
+      </a:fontRef>
+    </dgm:style>
+  </dgm:styleLbl>
+  <dgm:styleLbl name="asst4">
+    <dgm:scene3d>
+      <a:camera prst="orthographicFront"/>
+      <a:lightRig rig="threePt" dir="t"/>
+    </dgm:scene3d>
+    <dgm:sp3d/>
+    <dgm:txPr/>
+    <dgm:style>
+      <a:lnRef idx="2">
+        <a:scrgbClr r="0" g="0" b="0"/>
+      </a:lnRef>
+      <a:fillRef idx="1">
+        <a:scrgbClr r="0" g="0" b="0"/>
+      </a:fillRef>
+      <a:effectRef idx="0">
+        <a:scrgbClr r="0" g="0" b="0"/>
+      </a:effectRef>
+      <a:fontRef idx="minor">
+        <a:schemeClr val="lt1"/>
+      </a:fontRef>
+    </dgm:style>
+  </dgm:styleLbl>
+  <dgm:styleLbl name="parChTrans2D1">
+    <dgm:scene3d>
+      <a:camera prst="orthographicFront"/>
+      <a:lightRig rig="threePt" dir="t"/>
+    </dgm:scene3d>
+    <dgm:sp3d/>
+    <dgm:txPr/>
+    <dgm:style>
+      <a:lnRef idx="2">
+        <a:scrgbClr r="0" g="0" b="0"/>
+      </a:lnRef>
+      <a:fillRef idx="1">
+        <a:scrgbClr r="0" g="0" b="0"/>
+      </a:fillRef>
+      <a:effectRef idx="0">
+        <a:scrgbClr r="0" g="0" b="0"/>
+      </a:effectRef>
+      <a:fontRef idx="minor">
+        <a:schemeClr val="lt1"/>
+      </a:fontRef>
+    </dgm:style>
+  </dgm:styleLbl>
+  <dgm:styleLbl name="parChTrans2D2">
+    <dgm:scene3d>
+      <a:camera prst="orthographicFront"/>
+      <a:lightRig rig="threePt" dir="t"/>
+    </dgm:scene3d>
+    <dgm:sp3d/>
+    <dgm:txPr/>
+    <dgm:style>
+      <a:lnRef idx="2">
+        <a:scrgbClr r="0" g="0" b="0"/>
+      </a:lnRef>
+      <a:fillRef idx="1">
+        <a:scrgbClr r="0" g="0" b="0"/>
+      </a:fillRef>
+      <a:effectRef idx="0">
+        <a:scrgbClr r="0" g="0" b="0"/>
+      </a:effectRef>
+      <a:fontRef idx="minor">
+        <a:schemeClr val="lt1"/>
+      </a:fontRef>
+    </dgm:style>
+  </dgm:styleLbl>
+  <dgm:styleLbl name="parChTrans2D3">
+    <dgm:scene3d>
+      <a:camera prst="orthographicFront"/>
+      <a:lightRig rig="threePt" dir="t"/>
+    </dgm:scene3d>
+    <dgm:sp3d/>
+    <dgm:txPr/>
+    <dgm:style>
+      <a:lnRef idx="2">
+        <a:scrgbClr r="0" g="0" b="0"/>
+      </a:lnRef>
+      <a:fillRef idx="1">
+        <a:scrgbClr r="0" g="0" b="0"/>
+      </a:fillRef>
+      <a:effectRef idx="0">
+        <a:scrgbClr r="0" g="0" b="0"/>
+      </a:effectRef>
+      <a:fontRef idx="minor">
+        <a:schemeClr val="lt1"/>
+      </a:fontRef>
+    </dgm:style>
+  </dgm:styleLbl>
+  <dgm:styleLbl name="parChTrans2D4">
+    <dgm:scene3d>
+      <a:camera prst="orthographicFront"/>
+      <a:lightRig rig="threePt" dir="t"/>
+    </dgm:scene3d>
+    <dgm:sp3d/>
+    <dgm:txPr/>
+    <dgm:style>
+      <a:lnRef idx="2">
+        <a:scrgbClr r="0" g="0" b="0"/>
+      </a:lnRef>
+      <a:fillRef idx="1">
+        <a:scrgbClr r="0" g="0" b="0"/>
+      </a:fillRef>
+      <a:effectRef idx="0">
+        <a:scrgbClr r="0" g="0" b="0"/>
+      </a:effectRef>
+      <a:fontRef idx="minor">
+        <a:schemeClr val="lt1"/>
+      </a:fontRef>
+    </dgm:style>
+  </dgm:styleLbl>
+  <dgm:styleLbl name="parChTrans1D1">
+    <dgm:scene3d>
+      <a:camera prst="orthographicFront"/>
+      <a:lightRig rig="threePt" dir="t"/>
+    </dgm:scene3d>
+    <dgm:sp3d/>
+    <dgm:txPr/>
+    <dgm:style>
+      <a:lnRef idx="2">
+        <a:scrgbClr r="0" g="0" b="0"/>
+      </a:lnRef>
+      <a:fillRef idx="0">
+        <a:scrgbClr r="0" g="0" b="0"/>
+      </a:fillRef>
+      <a:effectRef idx="0">
+        <a:scrgbClr r="0" g="0" b="0"/>
+      </a:effectRef>
+      <a:fontRef idx="minor"/>
+    </dgm:style>
+  </dgm:styleLbl>
+  <dgm:styleLbl name="parChTrans1D2">
+    <dgm:scene3d>
+      <a:camera prst="orthographicFront"/>
+      <a:lightRig rig="threePt" dir="t"/>
+    </dgm:scene3d>
+    <dgm:sp3d/>
+    <dgm:txPr/>
+    <dgm:style>
+      <a:lnRef idx="2">
+        <a:scrgbClr r="0" g="0" b="0"/>
+      </a:lnRef>
+      <a:fillRef idx="0">
+        <a:scrgbClr r="0" g="0" b="0"/>
+      </a:fillRef>
+      <a:effectRef idx="0">
+        <a:scrgbClr r="0" g="0" b="0"/>
+      </a:effectRef>
+      <a:fontRef idx="minor"/>
+    </dgm:style>
+  </dgm:styleLbl>
+  <dgm:styleLbl name="parChTrans1D3">
+    <dgm:scene3d>
+      <a:camera prst="orthographicFront"/>
+      <a:lightRig rig="threePt" dir="t"/>
+    </dgm:scene3d>
+    <dgm:sp3d/>
+    <dgm:txPr/>
+    <dgm:style>
+      <a:lnRef idx="2">
+        <a:scrgbClr r="0" g="0" b="0"/>
+      </a:lnRef>
+      <a:fillRef idx="0">
+        <a:scrgbClr r="0" g="0" b="0"/>
+      </a:fillRef>
+      <a:effectRef idx="0">
+        <a:scrgbClr r="0" g="0" b="0"/>
+      </a:effectRef>
+      <a:fontRef idx="minor"/>
+    </dgm:style>
+  </dgm:styleLbl>
+  <dgm:styleLbl name="parChTrans1D4">
+    <dgm:scene3d>
+      <a:camera prst="orthographicFront"/>
+      <a:lightRig rig="threePt" dir="t"/>
+    </dgm:scene3d>
+    <dgm:sp3d/>
+    <dgm:txPr/>
+    <dgm:style>
+      <a:lnRef idx="2">
+        <a:scrgbClr r="0" g="0" b="0"/>
+      </a:lnRef>
+      <a:fillRef idx="0">
+        <a:scrgbClr r="0" g="0" b="0"/>
+      </a:fillRef>
+      <a:effectRef idx="0">
+        <a:scrgbClr r="0" g="0" b="0"/>
+      </a:effectRef>
+      <a:fontRef idx="minor"/>
+    </dgm:style>
+  </dgm:styleLbl>
+  <dgm:styleLbl name="fgAcc1">
+    <dgm:scene3d>
+      <a:camera prst="orthographicFront"/>
+      <a:lightRig rig="threePt" dir="t"/>
+    </dgm:scene3d>
+    <dgm:sp3d/>
+    <dgm:txPr/>
+    <dgm:style>
+      <a:lnRef idx="2">
+        <a:scrgbClr r="0" g="0" b="0"/>
+      </a:lnRef>
+      <a:fillRef idx="1">
+        <a:scrgbClr r="0" g="0" b="0"/>
+      </a:fillRef>
+      <a:effectRef idx="0">
+        <a:scrgbClr r="0" g="0" b="0"/>
+      </a:effectRef>
+      <a:fontRef idx="minor"/>
+    </dgm:style>
+  </dgm:styleLbl>
+  <dgm:styleLbl name="conFgAcc1">
+    <dgm:scene3d>
+      <a:camera prst="orthographicFront"/>
+      <a:lightRig rig="threePt" dir="t"/>
+    </dgm:scene3d>
+    <dgm:sp3d/>
+    <dgm:txPr/>
+    <dgm:style>
+      <a:lnRef idx="2">
+        <a:scrgbClr r="0" g="0" b="0"/>
+      </a:lnRef>
+      <a:fillRef idx="1">
+        <a:scrgbClr r="0" g="0" b="0"/>
+      </a:fillRef>
+      <a:effectRef idx="0">
+        <a:scrgbClr r="0" g="0" b="0"/>
+      </a:effectRef>
+      <a:fontRef idx="minor"/>
+    </dgm:style>
+  </dgm:styleLbl>
+  <dgm:styleLbl name="alignAcc1">
+    <dgm:scene3d>
+      <a:camera prst="orthographicFront"/>
+      <a:lightRig rig="threePt" dir="t"/>
+    </dgm:scene3d>
+    <dgm:sp3d/>
+    <dgm:txPr/>
+    <dgm:style>
+      <a:lnRef idx="2">
+        <a:scrgbClr r="0" g="0" b="0"/>
+      </a:lnRef>
+      <a:fillRef idx="1">
+        <a:scrgbClr r="0" g="0" b="0"/>
+      </a:fillRef>
+      <a:effectRef idx="0">
+        <a:scrgbClr r="0" g="0" b="0"/>
+      </a:effectRef>
+      <a:fontRef idx="minor"/>
+    </dgm:style>
+  </dgm:styleLbl>
+  <dgm:styleLbl name="trAlignAcc1">
+    <dgm:scene3d>
+      <a:camera prst="orthographicFront"/>
+      <a:lightRig rig="threePt" dir="t"/>
+    </dgm:scene3d>
+    <dgm:sp3d/>
+    <dgm:txPr/>
+    <dgm:style>
+      <a:lnRef idx="1">
+        <a:scrgbClr r="0" g="0" b="0"/>
+      </a:lnRef>
+      <a:fillRef idx="1">
+        <a:scrgbClr r="0" g="0" b="0"/>
+      </a:fillRef>
+      <a:effectRef idx="0">
+        <a:scrgbClr r="0" g="0" b="0"/>
+      </a:effectRef>
+      <a:fontRef idx="minor"/>
+    </dgm:style>
+  </dgm:styleLbl>
+  <dgm:styleLbl name="bgAcc1">
+    <dgm:scene3d>
+      <a:camera prst="orthographicFront"/>
+      <a:lightRig rig="threePt" dir="t"/>
+    </dgm:scene3d>
+    <dgm:sp3d/>
+    <dgm:txPr/>
+    <dgm:style>
+      <a:lnRef idx="2">
+        <a:scrgbClr r="0" g="0" b="0"/>
+      </a:lnRef>
+      <a:fillRef idx="1">
+        <a:scrgbClr r="0" g="0" b="0"/>
+      </a:fillRef>
+      <a:effectRef idx="0">
+        <a:scrgbClr r="0" g="0" b="0"/>
+      </a:effectRef>
+      <a:fontRef idx="minor"/>
+    </dgm:style>
+  </dgm:styleLbl>
+  <dgm:styleLbl name="solidFgAcc1">
+    <dgm:scene3d>
+      <a:camera prst="orthographicFront"/>
+      <a:lightRig rig="threePt" dir="t"/>
+    </dgm:scene3d>
+    <dgm:sp3d/>
+    <dgm:txPr/>
+    <dgm:style>
+      <a:lnRef idx="2">
+        <a:scrgbClr r="0" g="0" b="0"/>
+      </a:lnRef>
+      <a:fillRef idx="1">
+        <a:scrgbClr r="0" g="0" b="0"/>
+      </a:fillRef>
+      <a:effectRef idx="0">
+        <a:scrgbClr r="0" g="0" b="0"/>
+      </a:effectRef>
+      <a:fontRef idx="minor"/>
+    </dgm:style>
+  </dgm:styleLbl>
+  <dgm:styleLbl name="solidAlignAcc1">
+    <dgm:scene3d>
+      <a:camera prst="orthographicFront"/>
+      <a:lightRig rig="threePt" dir="t"/>
+    </dgm:scene3d>
+    <dgm:sp3d/>
+    <dgm:txPr/>
+    <dgm:style>
+      <a:lnRef idx="2">
+        <a:scrgbClr r="0" g="0" b="0"/>
+      </a:lnRef>
+      <a:fillRef idx="1">
+        <a:scrgbClr r="0" g="0" b="0"/>
+      </a:fillRef>
+      <a:effectRef idx="0">
+        <a:scrgbClr r="0" g="0" b="0"/>
+      </a:effectRef>
+      <a:fontRef idx="minor"/>
+    </dgm:style>
+  </dgm:styleLbl>
+  <dgm:styleLbl name="solidBgAcc1">
+    <dgm:scene3d>
+      <a:camera prst="orthographicFront"/>
+      <a:lightRig rig="threePt" dir="t"/>
+    </dgm:scene3d>
+    <dgm:sp3d/>
+    <dgm:txPr/>
+    <dgm:style>
+      <a:lnRef idx="2">
+        <a:scrgbClr r="0" g="0" b="0"/>
+      </a:lnRef>
+      <a:fillRef idx="1">
+        <a:scrgbClr r="0" g="0" b="0"/>
+      </a:fillRef>
+      <a:effectRef idx="0">
+        <a:scrgbClr r="0" g="0" b="0"/>
+      </a:effectRef>
+      <a:fontRef idx="minor"/>
+    </dgm:style>
+  </dgm:styleLbl>
+  <dgm:styleLbl name="fgAccFollowNode1">
+    <dgm:scene3d>
+      <a:camera prst="orthographicFront"/>
+      <a:lightRig rig="threePt" dir="t"/>
+    </dgm:scene3d>
+    <dgm:sp3d/>
+    <dgm:txPr/>
+    <dgm:style>
+      <a:lnRef idx="2">
+        <a:scrgbClr r="0" g="0" b="0"/>
+      </a:lnRef>
+      <a:fillRef idx="1">
+        <a:scrgbClr r="0" g="0" b="0"/>
+      </a:fillRef>
+      <a:effectRef idx="0">
+        <a:scrgbClr r="0" g="0" b="0"/>
+      </a:effectRef>
+      <a:fontRef idx="minor"/>
+    </dgm:style>
+  </dgm:styleLbl>
+  <dgm:styleLbl name="alignAccFollowNode1">
+    <dgm:scene3d>
+      <a:camera prst="orthographicFront"/>
+      <a:lightRig rig="threePt" dir="t"/>
+    </dgm:scene3d>
+    <dgm:sp3d/>
+    <dgm:txPr/>
+    <dgm:style>
+      <a:lnRef idx="2">
+        <a:scrgbClr r="0" g="0" b="0"/>
+      </a:lnRef>
+      <a:fillRef idx="1">
+        <a:scrgbClr r="0" g="0" b="0"/>
+      </a:fillRef>
+      <a:effectRef idx="0">
+        <a:scrgbClr r="0" g="0" b="0"/>
+      </a:effectRef>
+      <a:fontRef idx="minor"/>
+    </dgm:style>
+  </dgm:styleLbl>
+  <dgm:styleLbl name="bgAccFollowNode1">
+    <dgm:scene3d>
+      <a:camera prst="orthographicFront"/>
+      <a:lightRig rig="threePt" dir="t"/>
+    </dgm:scene3d>
+    <dgm:sp3d/>
+    <dgm:txPr/>
+    <dgm:style>
+      <a:lnRef idx="2">
+        <a:scrgbClr r="0" g="0" b="0"/>
+      </a:lnRef>
+      <a:fillRef idx="1">
+        <a:scrgbClr r="0" g="0" b="0"/>
+      </a:fillRef>
+      <a:effectRef idx="0">
+        <a:scrgbClr r="0" g="0" b="0"/>
+      </a:effectRef>
+      <a:fontRef idx="minor"/>
+    </dgm:style>
+  </dgm:styleLbl>
+  <dgm:styleLbl name="fgAcc0">
+    <dgm:scene3d>
+      <a:camera prst="orthographicFront"/>
+      <a:lightRig rig="threePt" dir="t"/>
+    </dgm:scene3d>
+    <dgm:sp3d/>
+    <dgm:txPr/>
+    <dgm:style>
+      <a:lnRef idx="2">
+        <a:scrgbClr r="0" g="0" b="0"/>
+      </a:lnRef>
+      <a:fillRef idx="1">
+        <a:scrgbClr r="0" g="0" b="0"/>
+      </a:fillRef>
+      <a:effectRef idx="0">
+        <a:scrgbClr r="0" g="0" b="0"/>
+      </a:effectRef>
+      <a:fontRef idx="minor"/>
+    </dgm:style>
+  </dgm:styleLbl>
+  <dgm:styleLbl name="fgAcc2">
+    <dgm:scene3d>
+      <a:camera prst="orthographicFront"/>
+      <a:lightRig rig="threePt" dir="t"/>
+    </dgm:scene3d>
+    <dgm:sp3d/>
+    <dgm:txPr/>
+    <dgm:style>
+      <a:lnRef idx="2">
+        <a:scrgbClr r="0" g="0" b="0"/>
+      </a:lnRef>
+      <a:fillRef idx="1">
+        <a:scrgbClr r="0" g="0" b="0"/>
+      </a:fillRef>
+      <a:effectRef idx="0">
+        <a:scrgbClr r="0" g="0" b="0"/>
+      </a:effectRef>
+      <a:fontRef idx="minor"/>
+    </dgm:style>
+  </dgm:styleLbl>
+  <dgm:styleLbl name="fgAcc3">
+    <dgm:scene3d>
+      <a:camera prst="orthographicFront"/>
+      <a:lightRig rig="threePt" dir="t"/>
+    </dgm:scene3d>
+    <dgm:sp3d/>
+    <dgm:txPr/>
+    <dgm:style>
+      <a:lnRef idx="2">
+        <a:scrgbClr r="0" g="0" b="0"/>
+      </a:lnRef>
+      <a:fillRef idx="1">
+        <a:scrgbClr r="0" g="0" b="0"/>
+      </a:fillRef>
+      <a:effectRef idx="0">
+        <a:scrgbClr r="0" g="0" b="0"/>
+      </a:effectRef>
+      <a:fontRef idx="minor"/>
+    </dgm:style>
+  </dgm:styleLbl>
+  <dgm:styleLbl name="fgAcc4">
+    <dgm:scene3d>
+      <a:camera prst="orthographicFront"/>
+      <a:lightRig rig="threePt" dir="t"/>
+    </dgm:scene3d>
+    <dgm:sp3d/>
+    <dgm:txPr/>
+    <dgm:style>
+      <a:lnRef idx="2">
+        <a:scrgbClr r="0" g="0" b="0"/>
+      </a:lnRef>
+      <a:fillRef idx="1">
+        <a:scrgbClr r="0" g="0" b="0"/>
+      </a:fillRef>
+      <a:effectRef idx="0">
+        <a:scrgbClr r="0" g="0" b="0"/>
+      </a:effectRef>
+      <a:fontRef idx="minor"/>
+    </dgm:style>
+  </dgm:styleLbl>
+  <dgm:styleLbl name="bgShp">
+    <dgm:scene3d>
+      <a:camera prst="orthographicFront"/>
+      <a:lightRig rig="threePt" dir="t"/>
+    </dgm:scene3d>
+    <dgm:sp3d/>
+    <dgm:txPr/>
+    <dgm:style>
+      <a:lnRef idx="0">
+        <a:scrgbClr r="0" g="0" b="0"/>
+      </a:lnRef>
+      <a:fillRef idx="1">
+        <a:scrgbClr r="0" g="0" b="0"/>
+      </a:fillRef>
+      <a:effectRef idx="0">
+        <a:scrgbClr r="0" g="0" b="0"/>
+      </a:effectRef>
+      <a:fontRef idx="minor"/>
+    </dgm:style>
+  </dgm:styleLbl>
+  <dgm:styleLbl name="dkBgShp">
+    <dgm:scene3d>
+      <a:camera prst="orthographicFront"/>
+      <a:lightRig rig="threePt" dir="t"/>
+    </dgm:scene3d>
+    <dgm:sp3d/>
+    <dgm:txPr/>
+    <dgm:style>
+      <a:lnRef idx="0">
+        <a:scrgbClr r="0" g="0" b="0"/>
+      </a:lnRef>
+      <a:fillRef idx="1">
+        <a:scrgbClr r="0" g="0" b="0"/>
+      </a:fillRef>
+      <a:effectRef idx="0">
+        <a:scrgbClr r="0" g="0" b="0"/>
+      </a:effectRef>
+      <a:fontRef idx="minor"/>
+    </dgm:style>
+  </dgm:styleLbl>
+  <dgm:styleLbl name="trBgShp">
+    <dgm:scene3d>
+      <a:camera prst="orthographicFront"/>
+      <a:lightRig rig="threePt" dir="t"/>
+    </dgm:scene3d>
+    <dgm:sp3d/>
+    <dgm:txPr/>
+    <dgm:style>
+      <a:lnRef idx="0">
+        <a:scrgbClr r="0" g="0" b="0"/>
+      </a:lnRef>
+      <a:fillRef idx="1">
+        <a:scrgbClr r="0" g="0" b="0"/>
+      </a:fillRef>
+      <a:effectRef idx="0">
+        <a:scrgbClr r="0" g="0" b="0"/>
+      </a:effectRef>
+      <a:fontRef idx="minor"/>
+    </dgm:style>
+  </dgm:styleLbl>
+  <dgm:styleLbl name="fgShp">
+    <dgm:scene3d>
+      <a:camera prst="orthographicFront"/>
+      <a:lightRig rig="threePt" dir="t"/>
+    </dgm:scene3d>
+    <dgm:sp3d/>
+    <dgm:txPr/>
+    <dgm:style>
+      <a:lnRef idx="2">
+        <a:scrgbClr r="0" g="0" b="0"/>
+      </a:lnRef>
+      <a:fillRef idx="1">
+        <a:scrgbClr r="0" g="0" b="0"/>
+      </a:fillRef>
+      <a:effectRef idx="0">
+        <a:scrgbClr r="0" g="0" b="0"/>
+      </a:effectRef>
+      <a:fontRef idx="minor"/>
+    </dgm:style>
+  </dgm:styleLbl>
+  <dgm:styleLbl name="revTx">
+    <dgm:scene3d>
+      <a:camera prst="orthographicFront"/>
+      <a:lightRig rig="threePt" dir="t"/>
+    </dgm:scene3d>
+    <dgm:sp3d/>
+    <dgm:txPr/>
+    <dgm:style>
+      <a:lnRef idx="0">
+        <a:scrgbClr r="0" g="0" b="0"/>
+      </a:lnRef>
+      <a:fillRef idx="0">
+        <a:scrgbClr r="0" g="0" b="0"/>
+      </a:fillRef>
+      <a:effectRef idx="0">
+        <a:scrgbClr r="0" g="0" b="0"/>
+      </a:effectRef>
+      <a:fontRef idx="minor"/>
+    </dgm:style>
+  </dgm:styleLbl>
+</dgm:styleDef>
 </file>
 
 <file path=ppt/slideLayouts/slideLayout1.xml><?xml version="1.0" encoding="utf-8"?>
@@ -7130,6 +9533,1121 @@
 </p:sld>
 </file>
 
+<file path=ppt/slides/slide23.xml><?xml version="1.0" encoding="utf-8"?>
+<p:sld xmlns:a="http://schemas.openxmlformats.org/drawingml/2006/main" xmlns:r="http://schemas.openxmlformats.org/officeDocument/2006/relationships" xmlns:p="http://schemas.openxmlformats.org/presentationml/2006/main">
+  <p:cSld>
+    <p:spTree>
+      <p:nvGrpSpPr>
+        <p:cNvPr id="1" name=""/>
+        <p:cNvGrpSpPr/>
+        <p:nvPr/>
+      </p:nvGrpSpPr>
+      <p:grpSpPr>
+        <a:xfrm>
+          <a:off x="0" y="0"/>
+          <a:ext cx="0" cy="0"/>
+          <a:chOff x="0" y="0"/>
+          <a:chExt cx="0" cy="0"/>
+        </a:xfrm>
+      </p:grpSpPr>
+      <p:sp>
+        <p:nvSpPr>
+          <p:cNvPr id="2" name="Title 1">
+            <a:extLst>
+              <a:ext uri="{FF2B5EF4-FFF2-40B4-BE49-F238E27FC236}">
+                <a16:creationId xmlns:a16="http://schemas.microsoft.com/office/drawing/2014/main" id="{D49E78C4-F3CA-311E-DA95-C891EA42045D}"/>
+              </a:ext>
+            </a:extLst>
+          </p:cNvPr>
+          <p:cNvSpPr>
+            <a:spLocks noGrp="1"/>
+          </p:cNvSpPr>
+          <p:nvPr>
+            <p:ph type="title"/>
+          </p:nvPr>
+        </p:nvSpPr>
+        <p:spPr/>
+        <p:txBody>
+          <a:bodyPr/>
+          <a:lstStyle/>
+          <a:p>
+            <a:r>
+              <a:rPr lang="en-US" dirty="0"/>
+              <a:t>What is CSS?</a:t>
+            </a:r>
+          </a:p>
+        </p:txBody>
+      </p:sp>
+      <p:sp>
+        <p:nvSpPr>
+          <p:cNvPr id="3" name="Content Placeholder 2">
+            <a:extLst>
+              <a:ext uri="{FF2B5EF4-FFF2-40B4-BE49-F238E27FC236}">
+                <a16:creationId xmlns:a16="http://schemas.microsoft.com/office/drawing/2014/main" id="{FB3609F4-2990-E46B-6990-7FFB2319C366}"/>
+              </a:ext>
+            </a:extLst>
+          </p:cNvPr>
+          <p:cNvSpPr>
+            <a:spLocks noGrp="1"/>
+          </p:cNvSpPr>
+          <p:nvPr>
+            <p:ph idx="1"/>
+          </p:nvPr>
+        </p:nvSpPr>
+        <p:spPr/>
+        <p:txBody>
+          <a:bodyPr/>
+          <a:lstStyle/>
+          <a:p>
+            <a:r>
+              <a:rPr lang="en-US" dirty="0"/>
+              <a:t>Definition: </a:t>
+            </a:r>
+            <a:r>
+              <a:rPr lang="en-US" dirty="0">
+                <a:solidFill>
+                  <a:schemeClr val="accent2"/>
+                </a:solidFill>
+              </a:rPr>
+              <a:t>CSS</a:t>
+            </a:r>
+            <a:r>
+              <a:rPr lang="en-US" dirty="0"/>
+              <a:t> – Cascading Style Sheets (CSS) is used to describe the presentation of HTML elements on a web page. </a:t>
+            </a:r>
+          </a:p>
+          <a:p>
+            <a:pPr lvl="1"/>
+            <a:r>
+              <a:rPr lang="en-US" dirty="0"/>
+              <a:t>Controls how things look – layout, colors, fonts, spacing, and more </a:t>
+            </a:r>
+          </a:p>
+          <a:p>
+            <a:r>
+              <a:rPr lang="en-US" dirty="0"/>
+              <a:t>This provides separation of concerns. i.e. HTML for structure and CSS for styling</a:t>
+            </a:r>
+          </a:p>
+        </p:txBody>
+      </p:sp>
+    </p:spTree>
+    <p:extLst>
+      <p:ext uri="{BB962C8B-B14F-4D97-AF65-F5344CB8AC3E}">
+        <p14:creationId xmlns:p14="http://schemas.microsoft.com/office/powerpoint/2010/main" val="2063216946"/>
+      </p:ext>
+    </p:extLst>
+  </p:cSld>
+  <p:clrMapOvr>
+    <a:masterClrMapping/>
+  </p:clrMapOvr>
+</p:sld>
+</file>
+
+<file path=ppt/slides/slide24.xml><?xml version="1.0" encoding="utf-8"?>
+<p:sld xmlns:a="http://schemas.openxmlformats.org/drawingml/2006/main" xmlns:r="http://schemas.openxmlformats.org/officeDocument/2006/relationships" xmlns:p="http://schemas.openxmlformats.org/presentationml/2006/main">
+  <p:cSld>
+    <p:spTree>
+      <p:nvGrpSpPr>
+        <p:cNvPr id="1" name=""/>
+        <p:cNvGrpSpPr/>
+        <p:nvPr/>
+      </p:nvGrpSpPr>
+      <p:grpSpPr>
+        <a:xfrm>
+          <a:off x="0" y="0"/>
+          <a:ext cx="0" cy="0"/>
+          <a:chOff x="0" y="0"/>
+          <a:chExt cx="0" cy="0"/>
+        </a:xfrm>
+      </p:grpSpPr>
+      <p:sp>
+        <p:nvSpPr>
+          <p:cNvPr id="2" name="Title 1">
+            <a:extLst>
+              <a:ext uri="{FF2B5EF4-FFF2-40B4-BE49-F238E27FC236}">
+                <a16:creationId xmlns:a16="http://schemas.microsoft.com/office/drawing/2014/main" id="{A928EA86-AA77-3145-917F-0ABEB2543F31}"/>
+              </a:ext>
+            </a:extLst>
+          </p:cNvPr>
+          <p:cNvSpPr>
+            <a:spLocks noGrp="1"/>
+          </p:cNvSpPr>
+          <p:nvPr>
+            <p:ph type="title"/>
+          </p:nvPr>
+        </p:nvSpPr>
+        <p:spPr/>
+        <p:txBody>
+          <a:bodyPr/>
+          <a:lstStyle/>
+          <a:p>
+            <a:r>
+              <a:rPr lang="en-US" dirty="0"/>
+              <a:t>How is CSS Applied?</a:t>
+            </a:r>
+          </a:p>
+        </p:txBody>
+      </p:sp>
+      <p:sp>
+        <p:nvSpPr>
+          <p:cNvPr id="3" name="Content Placeholder 2">
+            <a:extLst>
+              <a:ext uri="{FF2B5EF4-FFF2-40B4-BE49-F238E27FC236}">
+                <a16:creationId xmlns:a16="http://schemas.microsoft.com/office/drawing/2014/main" id="{E9F1FD53-7EF4-94F6-2CC0-F17E349D2185}"/>
+              </a:ext>
+            </a:extLst>
+          </p:cNvPr>
+          <p:cNvSpPr>
+            <a:spLocks noGrp="1"/>
+          </p:cNvSpPr>
+          <p:nvPr>
+            <p:ph idx="1"/>
+          </p:nvPr>
+        </p:nvSpPr>
+        <p:spPr>
+          <a:xfrm>
+            <a:off x="536369" y="1715956"/>
+            <a:ext cx="5864431" cy="4586232"/>
+          </a:xfrm>
+        </p:spPr>
+        <p:txBody>
+          <a:bodyPr/>
+          <a:lstStyle/>
+          <a:p>
+            <a:r>
+              <a:rPr lang="en-US" dirty="0"/>
+              <a:t>When the browser loads a page, it first looks to HTML to render the structure of the page, and a DOM is created</a:t>
+            </a:r>
+          </a:p>
+          <a:p>
+            <a:r>
+              <a:rPr lang="en-US" dirty="0"/>
+              <a:t>Definition: </a:t>
+            </a:r>
+            <a:r>
+              <a:rPr lang="en-US" dirty="0">
+                <a:solidFill>
+                  <a:schemeClr val="accent2"/>
+                </a:solidFill>
+              </a:rPr>
+              <a:t>The Document Object Model (DOM) </a:t>
+            </a:r>
+            <a:r>
+              <a:rPr lang="en-US" dirty="0"/>
+              <a:t>– represents a web page as a tree of objects, allowing CSS &amp; JavaScript to access, manipulate, and modify the content and styling </a:t>
+            </a:r>
+          </a:p>
+          <a:p>
+            <a:r>
+              <a:rPr lang="en-US" dirty="0"/>
+              <a:t>CSS rules are applied to nodes within the DOM </a:t>
+            </a:r>
+          </a:p>
+        </p:txBody>
+      </p:sp>
+      <p:pic>
+        <p:nvPicPr>
+          <p:cNvPr id="5" name="Picture 4">
+            <a:extLst>
+              <a:ext uri="{FF2B5EF4-FFF2-40B4-BE49-F238E27FC236}">
+                <a16:creationId xmlns:a16="http://schemas.microsoft.com/office/drawing/2014/main" id="{6C6A1A57-D89F-7D14-6B85-E1465BF247F2}"/>
+              </a:ext>
+            </a:extLst>
+          </p:cNvPr>
+          <p:cNvPicPr>
+            <a:picLocks noChangeAspect="1"/>
+          </p:cNvPicPr>
+          <p:nvPr/>
+        </p:nvPicPr>
+        <p:blipFill>
+          <a:blip r:embed="rId2"/>
+          <a:stretch>
+            <a:fillRect/>
+          </a:stretch>
+        </p:blipFill>
+        <p:spPr>
+          <a:xfrm>
+            <a:off x="6503078" y="2301739"/>
+            <a:ext cx="4551464" cy="3854105"/>
+          </a:xfrm>
+          <a:prstGeom prst="rect">
+            <a:avLst/>
+          </a:prstGeom>
+        </p:spPr>
+      </p:pic>
+    </p:spTree>
+    <p:extLst>
+      <p:ext uri="{BB962C8B-B14F-4D97-AF65-F5344CB8AC3E}">
+        <p14:creationId xmlns:p14="http://schemas.microsoft.com/office/powerpoint/2010/main" val="1556768495"/>
+      </p:ext>
+    </p:extLst>
+  </p:cSld>
+  <p:clrMapOvr>
+    <a:masterClrMapping/>
+  </p:clrMapOvr>
+</p:sld>
+</file>
+
+<file path=ppt/slides/slide25.xml><?xml version="1.0" encoding="utf-8"?>
+<p:sld xmlns:a="http://schemas.openxmlformats.org/drawingml/2006/main" xmlns:r="http://schemas.openxmlformats.org/officeDocument/2006/relationships" xmlns:p="http://schemas.openxmlformats.org/presentationml/2006/main">
+  <p:cSld>
+    <p:spTree>
+      <p:nvGrpSpPr>
+        <p:cNvPr id="1" name=""/>
+        <p:cNvGrpSpPr/>
+        <p:nvPr/>
+      </p:nvGrpSpPr>
+      <p:grpSpPr>
+        <a:xfrm>
+          <a:off x="0" y="0"/>
+          <a:ext cx="0" cy="0"/>
+          <a:chOff x="0" y="0"/>
+          <a:chExt cx="0" cy="0"/>
+        </a:xfrm>
+      </p:grpSpPr>
+      <p:sp>
+        <p:nvSpPr>
+          <p:cNvPr id="2" name="Title 1">
+            <a:extLst>
+              <a:ext uri="{FF2B5EF4-FFF2-40B4-BE49-F238E27FC236}">
+                <a16:creationId xmlns:a16="http://schemas.microsoft.com/office/drawing/2014/main" id="{3E2D9649-718D-5DE3-BB42-863BA85C875D}"/>
+              </a:ext>
+            </a:extLst>
+          </p:cNvPr>
+          <p:cNvSpPr>
+            <a:spLocks noGrp="1"/>
+          </p:cNvSpPr>
+          <p:nvPr>
+            <p:ph type="title"/>
+          </p:nvPr>
+        </p:nvSpPr>
+        <p:spPr/>
+        <p:txBody>
+          <a:bodyPr/>
+          <a:lstStyle/>
+          <a:p>
+            <a:r>
+              <a:rPr lang="en-US" dirty="0"/>
+              <a:t>CSS Rules</a:t>
+            </a:r>
+          </a:p>
+        </p:txBody>
+      </p:sp>
+      <p:pic>
+        <p:nvPicPr>
+          <p:cNvPr id="5" name="Picture 4">
+            <a:extLst>
+              <a:ext uri="{FF2B5EF4-FFF2-40B4-BE49-F238E27FC236}">
+                <a16:creationId xmlns:a16="http://schemas.microsoft.com/office/drawing/2014/main" id="{BDC7B50D-9F51-81B9-74A0-FD6625701C41}"/>
+              </a:ext>
+            </a:extLst>
+          </p:cNvPr>
+          <p:cNvPicPr>
+            <a:picLocks noChangeAspect="1"/>
+          </p:cNvPicPr>
+          <p:nvPr/>
+        </p:nvPicPr>
+        <p:blipFill>
+          <a:blip r:embed="rId2"/>
+          <a:stretch>
+            <a:fillRect/>
+          </a:stretch>
+        </p:blipFill>
+        <p:spPr>
+          <a:xfrm>
+            <a:off x="2710307" y="2187815"/>
+            <a:ext cx="6771386" cy="3803015"/>
+          </a:xfrm>
+          <a:prstGeom prst="rect">
+            <a:avLst/>
+          </a:prstGeom>
+        </p:spPr>
+      </p:pic>
+    </p:spTree>
+    <p:extLst>
+      <p:ext uri="{BB962C8B-B14F-4D97-AF65-F5344CB8AC3E}">
+        <p14:creationId xmlns:p14="http://schemas.microsoft.com/office/powerpoint/2010/main" val="4161823572"/>
+      </p:ext>
+    </p:extLst>
+  </p:cSld>
+  <p:clrMapOvr>
+    <a:masterClrMapping/>
+  </p:clrMapOvr>
+</p:sld>
+</file>
+
+<file path=ppt/slides/slide26.xml><?xml version="1.0" encoding="utf-8"?>
+<p:sld xmlns:a="http://schemas.openxmlformats.org/drawingml/2006/main" xmlns:r="http://schemas.openxmlformats.org/officeDocument/2006/relationships" xmlns:p="http://schemas.openxmlformats.org/presentationml/2006/main">
+  <p:cSld>
+    <p:spTree>
+      <p:nvGrpSpPr>
+        <p:cNvPr id="1" name=""/>
+        <p:cNvGrpSpPr/>
+        <p:nvPr/>
+      </p:nvGrpSpPr>
+      <p:grpSpPr>
+        <a:xfrm>
+          <a:off x="0" y="0"/>
+          <a:ext cx="0" cy="0"/>
+          <a:chOff x="0" y="0"/>
+          <a:chExt cx="0" cy="0"/>
+        </a:xfrm>
+      </p:grpSpPr>
+      <p:sp>
+        <p:nvSpPr>
+          <p:cNvPr id="2" name="Title 1">
+            <a:extLst>
+              <a:ext uri="{FF2B5EF4-FFF2-40B4-BE49-F238E27FC236}">
+                <a16:creationId xmlns:a16="http://schemas.microsoft.com/office/drawing/2014/main" id="{5B9AF972-5A45-389E-6D6E-F0BC54F87B37}"/>
+              </a:ext>
+            </a:extLst>
+          </p:cNvPr>
+          <p:cNvSpPr>
+            <a:spLocks noGrp="1"/>
+          </p:cNvSpPr>
+          <p:nvPr>
+            <p:ph type="title"/>
+          </p:nvPr>
+        </p:nvSpPr>
+        <p:spPr/>
+        <p:txBody>
+          <a:bodyPr/>
+          <a:lstStyle/>
+          <a:p>
+            <a:r>
+              <a:rPr lang="en-US" dirty="0"/>
+              <a:t>Where is CSS Applied?</a:t>
+            </a:r>
+          </a:p>
+        </p:txBody>
+      </p:sp>
+      <p:graphicFrame>
+        <p:nvGraphicFramePr>
+          <p:cNvPr id="11" name="Content Placeholder 2">
+            <a:extLst>
+              <a:ext uri="{FF2B5EF4-FFF2-40B4-BE49-F238E27FC236}">
+                <a16:creationId xmlns:a16="http://schemas.microsoft.com/office/drawing/2014/main" id="{ADB5BA6A-4C6B-BD38-9138-9821F89D902A}"/>
+              </a:ext>
+            </a:extLst>
+          </p:cNvPr>
+          <p:cNvGraphicFramePr>
+            <a:graphicFrameLocks noGrp="1"/>
+          </p:cNvGraphicFramePr>
+          <p:nvPr>
+            <p:ph idx="1"/>
+          </p:nvPr>
+        </p:nvGraphicFramePr>
+        <p:xfrm>
+          <a:off x="581192" y="2180496"/>
+          <a:ext cx="5029899" cy="3678303"/>
+        </p:xfrm>
+        <a:graphic>
+          <a:graphicData uri="http://schemas.openxmlformats.org/drawingml/2006/diagram">
+            <dgm:relIds xmlns:dgm="http://schemas.openxmlformats.org/drawingml/2006/diagram" xmlns:r="http://schemas.openxmlformats.org/officeDocument/2006/relationships" r:dm="rId2" r:lo="rId3" r:qs="rId4" r:cs="rId5"/>
+          </a:graphicData>
+        </a:graphic>
+      </p:graphicFrame>
+      <p:pic>
+        <p:nvPicPr>
+          <p:cNvPr id="5" name="Picture 4">
+            <a:extLst>
+              <a:ext uri="{FF2B5EF4-FFF2-40B4-BE49-F238E27FC236}">
+                <a16:creationId xmlns:a16="http://schemas.microsoft.com/office/drawing/2014/main" id="{540C9972-F8D8-AD26-54D3-6D4F0B4241B1}"/>
+              </a:ext>
+            </a:extLst>
+          </p:cNvPr>
+          <p:cNvPicPr>
+            <a:picLocks noChangeAspect="1"/>
+          </p:cNvPicPr>
+          <p:nvPr/>
+        </p:nvPicPr>
+        <p:blipFill>
+          <a:blip r:embed="rId7"/>
+          <a:stretch>
+            <a:fillRect/>
+          </a:stretch>
+        </p:blipFill>
+        <p:spPr>
+          <a:xfrm>
+            <a:off x="6094274" y="2563477"/>
+            <a:ext cx="5516534" cy="677222"/>
+          </a:xfrm>
+          <a:prstGeom prst="rect">
+            <a:avLst/>
+          </a:prstGeom>
+        </p:spPr>
+      </p:pic>
+      <p:pic>
+        <p:nvPicPr>
+          <p:cNvPr id="7" name="Picture 6">
+            <a:extLst>
+              <a:ext uri="{FF2B5EF4-FFF2-40B4-BE49-F238E27FC236}">
+                <a16:creationId xmlns:a16="http://schemas.microsoft.com/office/drawing/2014/main" id="{46906C9B-C4D7-9A7F-0A26-0757C7F97905}"/>
+              </a:ext>
+            </a:extLst>
+          </p:cNvPr>
+          <p:cNvPicPr>
+            <a:picLocks noChangeAspect="1"/>
+          </p:cNvPicPr>
+          <p:nvPr/>
+        </p:nvPicPr>
+        <p:blipFill>
+          <a:blip r:embed="rId8"/>
+          <a:stretch>
+            <a:fillRect/>
+          </a:stretch>
+        </p:blipFill>
+        <p:spPr>
+          <a:xfrm>
+            <a:off x="7723671" y="3476991"/>
+            <a:ext cx="2257740" cy="1086002"/>
+          </a:xfrm>
+          <a:prstGeom prst="rect">
+            <a:avLst/>
+          </a:prstGeom>
+        </p:spPr>
+      </p:pic>
+      <p:pic>
+        <p:nvPicPr>
+          <p:cNvPr id="9" name="Picture 8">
+            <a:extLst>
+              <a:ext uri="{FF2B5EF4-FFF2-40B4-BE49-F238E27FC236}">
+                <a16:creationId xmlns:a16="http://schemas.microsoft.com/office/drawing/2014/main" id="{A71C1BA7-0351-084A-AFDD-4577737A4E2B}"/>
+              </a:ext>
+            </a:extLst>
+          </p:cNvPr>
+          <p:cNvPicPr>
+            <a:picLocks noChangeAspect="1"/>
+          </p:cNvPicPr>
+          <p:nvPr/>
+        </p:nvPicPr>
+        <p:blipFill>
+          <a:blip r:embed="rId9"/>
+          <a:stretch>
+            <a:fillRect/>
+          </a:stretch>
+        </p:blipFill>
+        <p:spPr>
+          <a:xfrm>
+            <a:off x="5887832" y="4972197"/>
+            <a:ext cx="5929418" cy="500219"/>
+          </a:xfrm>
+          <a:prstGeom prst="rect">
+            <a:avLst/>
+          </a:prstGeom>
+        </p:spPr>
+      </p:pic>
+    </p:spTree>
+    <p:extLst>
+      <p:ext uri="{BB962C8B-B14F-4D97-AF65-F5344CB8AC3E}">
+        <p14:creationId xmlns:p14="http://schemas.microsoft.com/office/powerpoint/2010/main" val="3367529898"/>
+      </p:ext>
+    </p:extLst>
+  </p:cSld>
+  <p:clrMapOvr>
+    <a:masterClrMapping/>
+  </p:clrMapOvr>
+</p:sld>
+</file>
+
+<file path=ppt/slides/slide27.xml><?xml version="1.0" encoding="utf-8"?>
+<p:sld xmlns:a="http://schemas.openxmlformats.org/drawingml/2006/main" xmlns:r="http://schemas.openxmlformats.org/officeDocument/2006/relationships" xmlns:p="http://schemas.openxmlformats.org/presentationml/2006/main">
+  <p:cSld>
+    <p:spTree>
+      <p:nvGrpSpPr>
+        <p:cNvPr id="1" name=""/>
+        <p:cNvGrpSpPr/>
+        <p:nvPr/>
+      </p:nvGrpSpPr>
+      <p:grpSpPr>
+        <a:xfrm>
+          <a:off x="0" y="0"/>
+          <a:ext cx="0" cy="0"/>
+          <a:chOff x="0" y="0"/>
+          <a:chExt cx="0" cy="0"/>
+        </a:xfrm>
+      </p:grpSpPr>
+      <p:sp>
+        <p:nvSpPr>
+          <p:cNvPr id="2" name="Title 1">
+            <a:extLst>
+              <a:ext uri="{FF2B5EF4-FFF2-40B4-BE49-F238E27FC236}">
+                <a16:creationId xmlns:a16="http://schemas.microsoft.com/office/drawing/2014/main" id="{AB2A8C66-1E90-B664-7F63-EBEFD4F09666}"/>
+              </a:ext>
+            </a:extLst>
+          </p:cNvPr>
+          <p:cNvSpPr>
+            <a:spLocks noGrp="1"/>
+          </p:cNvSpPr>
+          <p:nvPr>
+            <p:ph type="title"/>
+          </p:nvPr>
+        </p:nvSpPr>
+        <p:spPr/>
+        <p:txBody>
+          <a:bodyPr/>
+          <a:lstStyle/>
+          <a:p>
+            <a:r>
+              <a:rPr lang="en-US" dirty="0"/>
+              <a:t>Different Types of Selectors</a:t>
+            </a:r>
+          </a:p>
+        </p:txBody>
+      </p:sp>
+      <p:sp>
+        <p:nvSpPr>
+          <p:cNvPr id="3" name="Content Placeholder 2">
+            <a:extLst>
+              <a:ext uri="{FF2B5EF4-FFF2-40B4-BE49-F238E27FC236}">
+                <a16:creationId xmlns:a16="http://schemas.microsoft.com/office/drawing/2014/main" id="{47F2F67A-5451-6A5F-E827-25A526A67E26}"/>
+              </a:ext>
+            </a:extLst>
+          </p:cNvPr>
+          <p:cNvSpPr>
+            <a:spLocks noGrp="1"/>
+          </p:cNvSpPr>
+          <p:nvPr>
+            <p:ph idx="1"/>
+          </p:nvPr>
+        </p:nvSpPr>
+        <p:spPr>
+          <a:xfrm>
+            <a:off x="1583208" y="2797821"/>
+            <a:ext cx="5057608" cy="3678303"/>
+          </a:xfrm>
+        </p:spPr>
+        <p:txBody>
+          <a:bodyPr>
+            <a:normAutofit lnSpcReduction="10000"/>
+          </a:bodyPr>
+          <a:lstStyle/>
+          <a:p>
+            <a:r>
+              <a:rPr lang="en-US" dirty="0"/>
+              <a:t>Element Selector</a:t>
+            </a:r>
+          </a:p>
+          <a:p>
+            <a:endParaRPr lang="en-US" dirty="0"/>
+          </a:p>
+          <a:p>
+            <a:endParaRPr lang="en-US" dirty="0"/>
+          </a:p>
+          <a:p>
+            <a:endParaRPr lang="en-US" dirty="0"/>
+          </a:p>
+          <a:p>
+            <a:r>
+              <a:rPr lang="en-US" dirty="0"/>
+              <a:t>Class Selector</a:t>
+            </a:r>
+          </a:p>
+          <a:p>
+            <a:endParaRPr lang="en-US" dirty="0"/>
+          </a:p>
+          <a:p>
+            <a:endParaRPr lang="en-US" dirty="0"/>
+          </a:p>
+          <a:p>
+            <a:endParaRPr lang="en-US" dirty="0"/>
+          </a:p>
+          <a:p>
+            <a:r>
+              <a:rPr lang="en-US" dirty="0"/>
+              <a:t>Id Selector</a:t>
+            </a:r>
+          </a:p>
+          <a:p>
+            <a:endParaRPr lang="en-US" dirty="0"/>
+          </a:p>
+        </p:txBody>
+      </p:sp>
+      <p:pic>
+        <p:nvPicPr>
+          <p:cNvPr id="5" name="Picture 4">
+            <a:extLst>
+              <a:ext uri="{FF2B5EF4-FFF2-40B4-BE49-F238E27FC236}">
+                <a16:creationId xmlns:a16="http://schemas.microsoft.com/office/drawing/2014/main" id="{DDB92E0B-870F-6426-F2E4-70A84EA0893B}"/>
+              </a:ext>
+            </a:extLst>
+          </p:cNvPr>
+          <p:cNvPicPr>
+            <a:picLocks noChangeAspect="1"/>
+          </p:cNvPicPr>
+          <p:nvPr/>
+        </p:nvPicPr>
+        <p:blipFill>
+          <a:blip r:embed="rId2"/>
+          <a:stretch>
+            <a:fillRect/>
+          </a:stretch>
+        </p:blipFill>
+        <p:spPr>
+          <a:xfrm>
+            <a:off x="7231447" y="2675389"/>
+            <a:ext cx="1914792" cy="1066949"/>
+          </a:xfrm>
+          <a:prstGeom prst="rect">
+            <a:avLst/>
+          </a:prstGeom>
+        </p:spPr>
+      </p:pic>
+      <p:pic>
+        <p:nvPicPr>
+          <p:cNvPr id="7" name="Picture 6">
+            <a:extLst>
+              <a:ext uri="{FF2B5EF4-FFF2-40B4-BE49-F238E27FC236}">
+                <a16:creationId xmlns:a16="http://schemas.microsoft.com/office/drawing/2014/main" id="{786E6F82-596C-7C6B-5750-9F6801B0B897}"/>
+              </a:ext>
+            </a:extLst>
+          </p:cNvPr>
+          <p:cNvPicPr>
+            <a:picLocks noChangeAspect="1"/>
+          </p:cNvPicPr>
+          <p:nvPr/>
+        </p:nvPicPr>
+        <p:blipFill>
+          <a:blip r:embed="rId3"/>
+          <a:stretch>
+            <a:fillRect/>
+          </a:stretch>
+        </p:blipFill>
+        <p:spPr>
+          <a:xfrm>
+            <a:off x="6640816" y="3876627"/>
+            <a:ext cx="3096057" cy="1105054"/>
+          </a:xfrm>
+          <a:prstGeom prst="rect">
+            <a:avLst/>
+          </a:prstGeom>
+        </p:spPr>
+      </p:pic>
+      <p:pic>
+        <p:nvPicPr>
+          <p:cNvPr id="9" name="Picture 8">
+            <a:extLst>
+              <a:ext uri="{FF2B5EF4-FFF2-40B4-BE49-F238E27FC236}">
+                <a16:creationId xmlns:a16="http://schemas.microsoft.com/office/drawing/2014/main" id="{AD2AC021-C2F2-7B75-85B1-CD68399C66EF}"/>
+              </a:ext>
+            </a:extLst>
+          </p:cNvPr>
+          <p:cNvPicPr>
+            <a:picLocks noChangeAspect="1"/>
+          </p:cNvPicPr>
+          <p:nvPr/>
+        </p:nvPicPr>
+        <p:blipFill>
+          <a:blip r:embed="rId4"/>
+          <a:stretch>
+            <a:fillRect/>
+          </a:stretch>
+        </p:blipFill>
+        <p:spPr>
+          <a:xfrm>
+            <a:off x="7074263" y="5408116"/>
+            <a:ext cx="2229161" cy="1152686"/>
+          </a:xfrm>
+          <a:prstGeom prst="rect">
+            <a:avLst/>
+          </a:prstGeom>
+        </p:spPr>
+      </p:pic>
+      <p:pic>
+        <p:nvPicPr>
+          <p:cNvPr id="11" name="Picture 10">
+            <a:extLst>
+              <a:ext uri="{FF2B5EF4-FFF2-40B4-BE49-F238E27FC236}">
+                <a16:creationId xmlns:a16="http://schemas.microsoft.com/office/drawing/2014/main" id="{933F64AE-4093-5253-3B90-0AB042F030F5}"/>
+              </a:ext>
+            </a:extLst>
+          </p:cNvPr>
+          <p:cNvPicPr>
+            <a:picLocks noChangeAspect="1"/>
+          </p:cNvPicPr>
+          <p:nvPr/>
+        </p:nvPicPr>
+        <p:blipFill>
+          <a:blip r:embed="rId5"/>
+          <a:stretch>
+            <a:fillRect/>
+          </a:stretch>
+        </p:blipFill>
+        <p:spPr>
+          <a:xfrm>
+            <a:off x="5938116" y="1972677"/>
+            <a:ext cx="4439111" cy="568423"/>
+          </a:xfrm>
+          <a:prstGeom prst="rect">
+            <a:avLst/>
+          </a:prstGeom>
+        </p:spPr>
+      </p:pic>
+    </p:spTree>
+    <p:extLst>
+      <p:ext uri="{BB962C8B-B14F-4D97-AF65-F5344CB8AC3E}">
+        <p14:creationId xmlns:p14="http://schemas.microsoft.com/office/powerpoint/2010/main" val="3308386086"/>
+      </p:ext>
+    </p:extLst>
+  </p:cSld>
+  <p:clrMapOvr>
+    <a:masterClrMapping/>
+  </p:clrMapOvr>
+</p:sld>
+</file>
+
+<file path=ppt/slides/slide28.xml><?xml version="1.0" encoding="utf-8"?>
+<p:sld xmlns:a="http://schemas.openxmlformats.org/drawingml/2006/main" xmlns:r="http://schemas.openxmlformats.org/officeDocument/2006/relationships" xmlns:p="http://schemas.openxmlformats.org/presentationml/2006/main">
+  <p:cSld>
+    <p:spTree>
+      <p:nvGrpSpPr>
+        <p:cNvPr id="1" name="">
+          <a:extLst>
+            <a:ext uri="{FF2B5EF4-FFF2-40B4-BE49-F238E27FC236}">
+              <a16:creationId xmlns:a16="http://schemas.microsoft.com/office/drawing/2014/main" id="{02FB768F-1AF3-FAA1-CF2E-BA543B6E68BF}"/>
+            </a:ext>
+          </a:extLst>
+        </p:cNvPr>
+        <p:cNvGrpSpPr/>
+        <p:nvPr/>
+      </p:nvGrpSpPr>
+      <p:grpSpPr>
+        <a:xfrm>
+          <a:off x="0" y="0"/>
+          <a:ext cx="0" cy="0"/>
+          <a:chOff x="0" y="0"/>
+          <a:chExt cx="0" cy="0"/>
+        </a:xfrm>
+      </p:grpSpPr>
+      <p:sp>
+        <p:nvSpPr>
+          <p:cNvPr id="2" name="Title 1">
+            <a:extLst>
+              <a:ext uri="{FF2B5EF4-FFF2-40B4-BE49-F238E27FC236}">
+                <a16:creationId xmlns:a16="http://schemas.microsoft.com/office/drawing/2014/main" id="{0CA16B74-695C-FE85-D5DD-42B31F9C887B}"/>
+              </a:ext>
+            </a:extLst>
+          </p:cNvPr>
+          <p:cNvSpPr>
+            <a:spLocks noGrp="1"/>
+          </p:cNvSpPr>
+          <p:nvPr>
+            <p:ph type="title"/>
+          </p:nvPr>
+        </p:nvSpPr>
+        <p:spPr/>
+        <p:txBody>
+          <a:bodyPr/>
+          <a:lstStyle/>
+          <a:p>
+            <a:r>
+              <a:rPr lang="en-US" dirty="0"/>
+              <a:t>Different Types of Selectors</a:t>
+            </a:r>
+          </a:p>
+        </p:txBody>
+      </p:sp>
+      <p:sp>
+        <p:nvSpPr>
+          <p:cNvPr id="3" name="Content Placeholder 2">
+            <a:extLst>
+              <a:ext uri="{FF2B5EF4-FFF2-40B4-BE49-F238E27FC236}">
+                <a16:creationId xmlns:a16="http://schemas.microsoft.com/office/drawing/2014/main" id="{4D7B6677-2DF9-B61E-5BB1-7761FF479FDA}"/>
+              </a:ext>
+            </a:extLst>
+          </p:cNvPr>
+          <p:cNvSpPr>
+            <a:spLocks noGrp="1"/>
+          </p:cNvSpPr>
+          <p:nvPr>
+            <p:ph idx="1"/>
+          </p:nvPr>
+        </p:nvSpPr>
+        <p:spPr>
+          <a:xfrm>
+            <a:off x="1552035" y="2388314"/>
+            <a:ext cx="5057608" cy="3678303"/>
+          </a:xfrm>
+        </p:spPr>
+        <p:txBody>
+          <a:bodyPr>
+            <a:normAutofit lnSpcReduction="10000"/>
+          </a:bodyPr>
+          <a:lstStyle/>
+          <a:p>
+            <a:r>
+              <a:rPr lang="en-US" dirty="0"/>
+              <a:t>Attribute Selector</a:t>
+            </a:r>
+          </a:p>
+          <a:p>
+            <a:endParaRPr lang="en-US" dirty="0"/>
+          </a:p>
+          <a:p>
+            <a:endParaRPr lang="en-US" dirty="0"/>
+          </a:p>
+          <a:p>
+            <a:endParaRPr lang="en-US" dirty="0"/>
+          </a:p>
+          <a:p>
+            <a:r>
+              <a:rPr lang="en-US" dirty="0"/>
+              <a:t>Pseudo-class Selector</a:t>
+            </a:r>
+          </a:p>
+          <a:p>
+            <a:endParaRPr lang="en-US" dirty="0"/>
+          </a:p>
+          <a:p>
+            <a:endParaRPr lang="en-US" dirty="0"/>
+          </a:p>
+          <a:p>
+            <a:endParaRPr lang="en-US" dirty="0"/>
+          </a:p>
+          <a:p>
+            <a:r>
+              <a:rPr lang="en-US" dirty="0"/>
+              <a:t>Pseudo-element Selector</a:t>
+            </a:r>
+          </a:p>
+          <a:p>
+            <a:endParaRPr lang="en-US" dirty="0"/>
+          </a:p>
+        </p:txBody>
+      </p:sp>
+      <p:pic>
+        <p:nvPicPr>
+          <p:cNvPr id="6" name="Picture 5">
+            <a:extLst>
+              <a:ext uri="{FF2B5EF4-FFF2-40B4-BE49-F238E27FC236}">
+                <a16:creationId xmlns:a16="http://schemas.microsoft.com/office/drawing/2014/main" id="{A13E6C9C-B65E-97F2-23C9-8891B1A12CA3}"/>
+              </a:ext>
+            </a:extLst>
+          </p:cNvPr>
+          <p:cNvPicPr>
+            <a:picLocks noChangeAspect="1"/>
+          </p:cNvPicPr>
+          <p:nvPr/>
+        </p:nvPicPr>
+        <p:blipFill>
+          <a:blip r:embed="rId2"/>
+          <a:stretch>
+            <a:fillRect/>
+          </a:stretch>
+        </p:blipFill>
+        <p:spPr>
+          <a:xfrm>
+            <a:off x="7073843" y="2247735"/>
+            <a:ext cx="2886478" cy="1181265"/>
+          </a:xfrm>
+          <a:prstGeom prst="rect">
+            <a:avLst/>
+          </a:prstGeom>
+        </p:spPr>
+      </p:pic>
+      <p:pic>
+        <p:nvPicPr>
+          <p:cNvPr id="10" name="Picture 9">
+            <a:extLst>
+              <a:ext uri="{FF2B5EF4-FFF2-40B4-BE49-F238E27FC236}">
+                <a16:creationId xmlns:a16="http://schemas.microsoft.com/office/drawing/2014/main" id="{F3C209A1-57DE-6D0D-C83A-6851D3C90F52}"/>
+              </a:ext>
+            </a:extLst>
+          </p:cNvPr>
+          <p:cNvPicPr>
+            <a:picLocks noChangeAspect="1"/>
+          </p:cNvPicPr>
+          <p:nvPr/>
+        </p:nvPicPr>
+        <p:blipFill>
+          <a:blip r:embed="rId3"/>
+          <a:stretch>
+            <a:fillRect/>
+          </a:stretch>
+        </p:blipFill>
+        <p:spPr>
+          <a:xfrm>
+            <a:off x="7635896" y="3747139"/>
+            <a:ext cx="1762371" cy="1171739"/>
+          </a:xfrm>
+          <a:prstGeom prst="rect">
+            <a:avLst/>
+          </a:prstGeom>
+        </p:spPr>
+      </p:pic>
+      <p:pic>
+        <p:nvPicPr>
+          <p:cNvPr id="12" name="Picture 11">
+            <a:extLst>
+              <a:ext uri="{FF2B5EF4-FFF2-40B4-BE49-F238E27FC236}">
+                <a16:creationId xmlns:a16="http://schemas.microsoft.com/office/drawing/2014/main" id="{543BD113-DD8D-D2FB-6914-4A346E255283}"/>
+              </a:ext>
+            </a:extLst>
+          </p:cNvPr>
+          <p:cNvPicPr>
+            <a:picLocks noChangeAspect="1"/>
+          </p:cNvPicPr>
+          <p:nvPr/>
+        </p:nvPicPr>
+        <p:blipFill>
+          <a:blip r:embed="rId4"/>
+          <a:stretch>
+            <a:fillRect/>
+          </a:stretch>
+        </p:blipFill>
+        <p:spPr>
+          <a:xfrm>
+            <a:off x="7450132" y="5237017"/>
+            <a:ext cx="2133898" cy="1133633"/>
+          </a:xfrm>
+          <a:prstGeom prst="rect">
+            <a:avLst/>
+          </a:prstGeom>
+        </p:spPr>
+      </p:pic>
+    </p:spTree>
+    <p:extLst>
+      <p:ext uri="{BB962C8B-B14F-4D97-AF65-F5344CB8AC3E}">
+        <p14:creationId xmlns:p14="http://schemas.microsoft.com/office/powerpoint/2010/main" val="3513935288"/>
+      </p:ext>
+    </p:extLst>
+  </p:cSld>
+  <p:clrMapOvr>
+    <a:masterClrMapping/>
+  </p:clrMapOvr>
+</p:sld>
+</file>
+
+<file path=ppt/slides/slide29.xml><?xml version="1.0" encoding="utf-8"?>
+<p:sld xmlns:a="http://schemas.openxmlformats.org/drawingml/2006/main" xmlns:r="http://schemas.openxmlformats.org/officeDocument/2006/relationships" xmlns:p="http://schemas.openxmlformats.org/presentationml/2006/main">
+  <p:cSld>
+    <p:spTree>
+      <p:nvGrpSpPr>
+        <p:cNvPr id="1" name="">
+          <a:extLst>
+            <a:ext uri="{FF2B5EF4-FFF2-40B4-BE49-F238E27FC236}">
+              <a16:creationId xmlns:a16="http://schemas.microsoft.com/office/drawing/2014/main" id="{581B462C-D54E-701C-5B3D-237ED749A750}"/>
+            </a:ext>
+          </a:extLst>
+        </p:cNvPr>
+        <p:cNvGrpSpPr/>
+        <p:nvPr/>
+      </p:nvGrpSpPr>
+      <p:grpSpPr>
+        <a:xfrm>
+          <a:off x="0" y="0"/>
+          <a:ext cx="0" cy="0"/>
+          <a:chOff x="0" y="0"/>
+          <a:chExt cx="0" cy="0"/>
+        </a:xfrm>
+      </p:grpSpPr>
+      <p:sp>
+        <p:nvSpPr>
+          <p:cNvPr id="2" name="Title 1">
+            <a:extLst>
+              <a:ext uri="{FF2B5EF4-FFF2-40B4-BE49-F238E27FC236}">
+                <a16:creationId xmlns:a16="http://schemas.microsoft.com/office/drawing/2014/main" id="{770F7BCB-29AE-6454-5CAB-FE3CA31BB57C}"/>
+              </a:ext>
+            </a:extLst>
+          </p:cNvPr>
+          <p:cNvSpPr>
+            <a:spLocks noGrp="1"/>
+          </p:cNvSpPr>
+          <p:nvPr>
+            <p:ph type="title"/>
+          </p:nvPr>
+        </p:nvSpPr>
+        <p:spPr/>
+        <p:txBody>
+          <a:bodyPr/>
+          <a:lstStyle/>
+          <a:p>
+            <a:r>
+              <a:rPr lang="en-US" dirty="0"/>
+              <a:t>Different Types of Selectors</a:t>
+            </a:r>
+          </a:p>
+        </p:txBody>
+      </p:sp>
+      <p:sp>
+        <p:nvSpPr>
+          <p:cNvPr id="3" name="Content Placeholder 2">
+            <a:extLst>
+              <a:ext uri="{FF2B5EF4-FFF2-40B4-BE49-F238E27FC236}">
+                <a16:creationId xmlns:a16="http://schemas.microsoft.com/office/drawing/2014/main" id="{E9858C59-F55E-1C74-0EAC-5AD3199B9CD8}"/>
+              </a:ext>
+            </a:extLst>
+          </p:cNvPr>
+          <p:cNvSpPr>
+            <a:spLocks noGrp="1"/>
+          </p:cNvSpPr>
+          <p:nvPr>
+            <p:ph idx="1"/>
+          </p:nvPr>
+        </p:nvSpPr>
+        <p:spPr>
+          <a:xfrm>
+            <a:off x="2559790" y="2492916"/>
+            <a:ext cx="7072420" cy="1695313"/>
+          </a:xfrm>
+        </p:spPr>
+        <p:txBody>
+          <a:bodyPr>
+            <a:normAutofit/>
+          </a:bodyPr>
+          <a:lstStyle/>
+          <a:p>
+            <a:r>
+              <a:rPr lang="en-US" dirty="0"/>
+              <a:t>Combinator Selectors – targets elements based on their relationship</a:t>
+            </a:r>
+          </a:p>
+        </p:txBody>
+      </p:sp>
+      <p:pic>
+        <p:nvPicPr>
+          <p:cNvPr id="5" name="Picture 4">
+            <a:extLst>
+              <a:ext uri="{FF2B5EF4-FFF2-40B4-BE49-F238E27FC236}">
+                <a16:creationId xmlns:a16="http://schemas.microsoft.com/office/drawing/2014/main" id="{4A38FB4D-4164-FE4C-BFAA-F2C242291A98}"/>
+              </a:ext>
+            </a:extLst>
+          </p:cNvPr>
+          <p:cNvPicPr>
+            <a:picLocks noChangeAspect="1"/>
+          </p:cNvPicPr>
+          <p:nvPr/>
+        </p:nvPicPr>
+        <p:blipFill>
+          <a:blip r:embed="rId2"/>
+          <a:stretch>
+            <a:fillRect/>
+          </a:stretch>
+        </p:blipFill>
+        <p:spPr>
+          <a:xfrm>
+            <a:off x="2319291" y="4618072"/>
+            <a:ext cx="7553417" cy="861355"/>
+          </a:xfrm>
+          <a:prstGeom prst="rect">
+            <a:avLst/>
+          </a:prstGeom>
+        </p:spPr>
+      </p:pic>
+    </p:spTree>
+    <p:extLst>
+      <p:ext uri="{BB962C8B-B14F-4D97-AF65-F5344CB8AC3E}">
+        <p14:creationId xmlns:p14="http://schemas.microsoft.com/office/powerpoint/2010/main" val="2124246458"/>
+      </p:ext>
+    </p:extLst>
+  </p:cSld>
+  <p:clrMapOvr>
+    <a:masterClrMapping/>
+  </p:clrMapOvr>
+</p:sld>
+</file>
+
 <file path=ppt/slides/slide3.xml><?xml version="1.0" encoding="utf-8"?>
 <p:sld xmlns:a="http://schemas.openxmlformats.org/drawingml/2006/main" xmlns:r="http://schemas.openxmlformats.org/officeDocument/2006/relationships" xmlns:p="http://schemas.openxmlformats.org/presentationml/2006/main">
   <p:cSld>
@@ -7318,6 +10836,3046 @@
 </p:sld>
 </file>
 
+<file path=ppt/slides/slide30.xml><?xml version="1.0" encoding="utf-8"?>
+<p:sld xmlns:a="http://schemas.openxmlformats.org/drawingml/2006/main" xmlns:r="http://schemas.openxmlformats.org/officeDocument/2006/relationships" xmlns:p="http://schemas.openxmlformats.org/presentationml/2006/main">
+  <p:cSld>
+    <p:spTree>
+      <p:nvGrpSpPr>
+        <p:cNvPr id="1" name=""/>
+        <p:cNvGrpSpPr/>
+        <p:nvPr/>
+      </p:nvGrpSpPr>
+      <p:grpSpPr>
+        <a:xfrm>
+          <a:off x="0" y="0"/>
+          <a:ext cx="0" cy="0"/>
+          <a:chOff x="0" y="0"/>
+          <a:chExt cx="0" cy="0"/>
+        </a:xfrm>
+      </p:grpSpPr>
+      <p:sp>
+        <p:nvSpPr>
+          <p:cNvPr id="2" name="Title 1">
+            <a:extLst>
+              <a:ext uri="{FF2B5EF4-FFF2-40B4-BE49-F238E27FC236}">
+                <a16:creationId xmlns:a16="http://schemas.microsoft.com/office/drawing/2014/main" id="{4A791E0A-80A2-B316-C11B-E72555E6AFD5}"/>
+              </a:ext>
+            </a:extLst>
+          </p:cNvPr>
+          <p:cNvSpPr>
+            <a:spLocks noGrp="1"/>
+          </p:cNvSpPr>
+          <p:nvPr>
+            <p:ph type="title"/>
+          </p:nvPr>
+        </p:nvSpPr>
+        <p:spPr/>
+        <p:txBody>
+          <a:bodyPr/>
+          <a:lstStyle/>
+          <a:p>
+            <a:r>
+              <a:rPr lang="en-US" dirty="0"/>
+              <a:t>Specificity</a:t>
+            </a:r>
+          </a:p>
+        </p:txBody>
+      </p:sp>
+      <p:pic>
+        <p:nvPicPr>
+          <p:cNvPr id="5" name="Picture 4">
+            <a:extLst>
+              <a:ext uri="{FF2B5EF4-FFF2-40B4-BE49-F238E27FC236}">
+                <a16:creationId xmlns:a16="http://schemas.microsoft.com/office/drawing/2014/main" id="{4EA7CB9E-B75D-0633-960A-AB26D5177E72}"/>
+              </a:ext>
+            </a:extLst>
+          </p:cNvPr>
+          <p:cNvPicPr>
+            <a:picLocks noChangeAspect="1"/>
+          </p:cNvPicPr>
+          <p:nvPr/>
+        </p:nvPicPr>
+        <p:blipFill>
+          <a:blip r:embed="rId2"/>
+          <a:stretch>
+            <a:fillRect/>
+          </a:stretch>
+        </p:blipFill>
+        <p:spPr>
+          <a:xfrm>
+            <a:off x="1705611" y="3136831"/>
+            <a:ext cx="5390973" cy="1628823"/>
+          </a:xfrm>
+          <a:prstGeom prst="rect">
+            <a:avLst/>
+          </a:prstGeom>
+        </p:spPr>
+      </p:pic>
+      <p:pic>
+        <p:nvPicPr>
+          <p:cNvPr id="7" name="Picture 6">
+            <a:extLst>
+              <a:ext uri="{FF2B5EF4-FFF2-40B4-BE49-F238E27FC236}">
+                <a16:creationId xmlns:a16="http://schemas.microsoft.com/office/drawing/2014/main" id="{E011D7D5-E142-4FF9-5DF8-715EE708DD1C}"/>
+              </a:ext>
+            </a:extLst>
+          </p:cNvPr>
+          <p:cNvPicPr>
+            <a:picLocks noChangeAspect="1"/>
+          </p:cNvPicPr>
+          <p:nvPr/>
+        </p:nvPicPr>
+        <p:blipFill>
+          <a:blip r:embed="rId3"/>
+          <a:stretch>
+            <a:fillRect/>
+          </a:stretch>
+        </p:blipFill>
+        <p:spPr>
+          <a:xfrm>
+            <a:off x="8779941" y="3136831"/>
+            <a:ext cx="2431987" cy="2590164"/>
+          </a:xfrm>
+          <a:prstGeom prst="rect">
+            <a:avLst/>
+          </a:prstGeom>
+        </p:spPr>
+      </p:pic>
+      <p:pic>
+        <p:nvPicPr>
+          <p:cNvPr id="9" name="Picture 8">
+            <a:extLst>
+              <a:ext uri="{FF2B5EF4-FFF2-40B4-BE49-F238E27FC236}">
+                <a16:creationId xmlns:a16="http://schemas.microsoft.com/office/drawing/2014/main" id="{12901AF5-897B-F119-7322-CBF26D578326}"/>
+              </a:ext>
+            </a:extLst>
+          </p:cNvPr>
+          <p:cNvPicPr>
+            <a:picLocks noChangeAspect="1"/>
+          </p:cNvPicPr>
+          <p:nvPr/>
+        </p:nvPicPr>
+        <p:blipFill>
+          <a:blip r:embed="rId4"/>
+          <a:stretch>
+            <a:fillRect/>
+          </a:stretch>
+        </p:blipFill>
+        <p:spPr>
+          <a:xfrm>
+            <a:off x="740036" y="5320465"/>
+            <a:ext cx="7652954" cy="1013800"/>
+          </a:xfrm>
+          <a:prstGeom prst="rect">
+            <a:avLst/>
+          </a:prstGeom>
+        </p:spPr>
+      </p:pic>
+      <p:sp>
+        <p:nvSpPr>
+          <p:cNvPr id="12" name="TextBox 11">
+            <a:extLst>
+              <a:ext uri="{FF2B5EF4-FFF2-40B4-BE49-F238E27FC236}">
+                <a16:creationId xmlns:a16="http://schemas.microsoft.com/office/drawing/2014/main" id="{89083937-4AA4-E741-349A-6A1DED8BBF02}"/>
+              </a:ext>
+            </a:extLst>
+          </p:cNvPr>
+          <p:cNvSpPr txBox="1"/>
+          <p:nvPr/>
+        </p:nvSpPr>
+        <p:spPr>
+          <a:xfrm flipH="1">
+            <a:off x="740036" y="2129474"/>
+            <a:ext cx="10711928" cy="923330"/>
+          </a:xfrm>
+          <a:prstGeom prst="rect">
+            <a:avLst/>
+          </a:prstGeom>
+          <a:noFill/>
+        </p:spPr>
+        <p:txBody>
+          <a:bodyPr wrap="square" rtlCol="0">
+            <a:spAutoFit/>
+          </a:bodyPr>
+          <a:lstStyle/>
+          <a:p>
+            <a:pPr marL="285750" indent="-285750">
+              <a:buClr>
+                <a:schemeClr val="accent2"/>
+              </a:buClr>
+              <a:buFont typeface="Wingdings" panose="05000000000000000000" pitchFamily="2" charset="2"/>
+              <a:buChar char="§"/>
+            </a:pPr>
+            <a:r>
+              <a:rPr lang="en-US" dirty="0"/>
+              <a:t>Definition: </a:t>
+            </a:r>
+            <a:r>
+              <a:rPr lang="en-US" dirty="0">
+                <a:solidFill>
+                  <a:schemeClr val="accent2"/>
+                </a:solidFill>
+              </a:rPr>
+              <a:t>Specificity</a:t>
+            </a:r>
+            <a:r>
+              <a:rPr lang="en-US" dirty="0"/>
+              <a:t> - rules that determine which style to apply when an element has multiple conflicting styles</a:t>
+            </a:r>
+          </a:p>
+          <a:p>
+            <a:pPr marL="285750" indent="-285750">
+              <a:buClr>
+                <a:schemeClr val="accent2"/>
+              </a:buClr>
+              <a:buFont typeface="Wingdings" panose="05000000000000000000" pitchFamily="2" charset="2"/>
+              <a:buChar char="§"/>
+            </a:pPr>
+            <a:endParaRPr lang="en-US" dirty="0"/>
+          </a:p>
+        </p:txBody>
+      </p:sp>
+    </p:spTree>
+    <p:extLst>
+      <p:ext uri="{BB962C8B-B14F-4D97-AF65-F5344CB8AC3E}">
+        <p14:creationId xmlns:p14="http://schemas.microsoft.com/office/powerpoint/2010/main" val="3687306314"/>
+      </p:ext>
+    </p:extLst>
+  </p:cSld>
+  <p:clrMapOvr>
+    <a:masterClrMapping/>
+  </p:clrMapOvr>
+</p:sld>
+</file>
+
+<file path=ppt/slides/slide31.xml><?xml version="1.0" encoding="utf-8"?>
+<p:sld xmlns:a="http://schemas.openxmlformats.org/drawingml/2006/main" xmlns:r="http://schemas.openxmlformats.org/officeDocument/2006/relationships" xmlns:p="http://schemas.openxmlformats.org/presentationml/2006/main">
+  <p:cSld>
+    <p:spTree>
+      <p:nvGrpSpPr>
+        <p:cNvPr id="1" name=""/>
+        <p:cNvGrpSpPr/>
+        <p:nvPr/>
+      </p:nvGrpSpPr>
+      <p:grpSpPr>
+        <a:xfrm>
+          <a:off x="0" y="0"/>
+          <a:ext cx="0" cy="0"/>
+          <a:chOff x="0" y="0"/>
+          <a:chExt cx="0" cy="0"/>
+        </a:xfrm>
+      </p:grpSpPr>
+      <p:sp>
+        <p:nvSpPr>
+          <p:cNvPr id="2" name="Title 1">
+            <a:extLst>
+              <a:ext uri="{FF2B5EF4-FFF2-40B4-BE49-F238E27FC236}">
+                <a16:creationId xmlns:a16="http://schemas.microsoft.com/office/drawing/2014/main" id="{8BF82416-97B4-72E4-4A09-0FBF4E786269}"/>
+              </a:ext>
+            </a:extLst>
+          </p:cNvPr>
+          <p:cNvSpPr>
+            <a:spLocks noGrp="1"/>
+          </p:cNvSpPr>
+          <p:nvPr>
+            <p:ph type="title"/>
+          </p:nvPr>
+        </p:nvSpPr>
+        <p:spPr/>
+        <p:txBody>
+          <a:bodyPr/>
+          <a:lstStyle/>
+          <a:p>
+            <a:r>
+              <a:rPr lang="en-US" dirty="0"/>
+              <a:t>Specificity with multiple sources</a:t>
+            </a:r>
+          </a:p>
+        </p:txBody>
+      </p:sp>
+      <p:sp>
+        <p:nvSpPr>
+          <p:cNvPr id="3" name="Content Placeholder 2">
+            <a:extLst>
+              <a:ext uri="{FF2B5EF4-FFF2-40B4-BE49-F238E27FC236}">
+                <a16:creationId xmlns:a16="http://schemas.microsoft.com/office/drawing/2014/main" id="{A365076B-AA90-0200-E766-7E7A02003BBD}"/>
+              </a:ext>
+            </a:extLst>
+          </p:cNvPr>
+          <p:cNvSpPr>
+            <a:spLocks noGrp="1"/>
+          </p:cNvSpPr>
+          <p:nvPr>
+            <p:ph idx="1"/>
+          </p:nvPr>
+        </p:nvSpPr>
+        <p:spPr/>
+        <p:txBody>
+          <a:bodyPr/>
+          <a:lstStyle/>
+          <a:p>
+            <a:r>
+              <a:rPr lang="en-US" dirty="0"/>
+              <a:t>We could use inline, internal, and external CSS all on the same page</a:t>
+            </a:r>
+          </a:p>
+          <a:p>
+            <a:r>
+              <a:rPr lang="en-US" dirty="0"/>
+              <a:t>Specificity in this scenario looks like this:</a:t>
+            </a:r>
+          </a:p>
+          <a:p>
+            <a:pPr lvl="1"/>
+            <a:r>
+              <a:rPr lang="en-US" dirty="0"/>
+              <a:t>Inline &gt; Internal &gt; External</a:t>
+            </a:r>
+          </a:p>
+        </p:txBody>
+      </p:sp>
+    </p:spTree>
+    <p:extLst>
+      <p:ext uri="{BB962C8B-B14F-4D97-AF65-F5344CB8AC3E}">
+        <p14:creationId xmlns:p14="http://schemas.microsoft.com/office/powerpoint/2010/main" val="795105986"/>
+      </p:ext>
+    </p:extLst>
+  </p:cSld>
+  <p:clrMapOvr>
+    <a:masterClrMapping/>
+  </p:clrMapOvr>
+</p:sld>
+</file>
+
+<file path=ppt/slides/slide32.xml><?xml version="1.0" encoding="utf-8"?>
+<p:sld xmlns:a="http://schemas.openxmlformats.org/drawingml/2006/main" xmlns:r="http://schemas.openxmlformats.org/officeDocument/2006/relationships" xmlns:p="http://schemas.openxmlformats.org/presentationml/2006/main">
+  <p:cSld>
+    <p:spTree>
+      <p:nvGrpSpPr>
+        <p:cNvPr id="1" name="">
+          <a:extLst>
+            <a:ext uri="{FF2B5EF4-FFF2-40B4-BE49-F238E27FC236}">
+              <a16:creationId xmlns:a16="http://schemas.microsoft.com/office/drawing/2014/main" id="{4420BC0E-4C23-140E-B3A8-26CBC7CC3B6A}"/>
+            </a:ext>
+          </a:extLst>
+        </p:cNvPr>
+        <p:cNvGrpSpPr/>
+        <p:nvPr/>
+      </p:nvGrpSpPr>
+      <p:grpSpPr>
+        <a:xfrm>
+          <a:off x="0" y="0"/>
+          <a:ext cx="0" cy="0"/>
+          <a:chOff x="0" y="0"/>
+          <a:chExt cx="0" cy="0"/>
+        </a:xfrm>
+      </p:grpSpPr>
+      <p:sp>
+        <p:nvSpPr>
+          <p:cNvPr id="2" name="Title 1">
+            <a:extLst>
+              <a:ext uri="{FF2B5EF4-FFF2-40B4-BE49-F238E27FC236}">
+                <a16:creationId xmlns:a16="http://schemas.microsoft.com/office/drawing/2014/main" id="{2B005163-A75D-DA79-6950-E4F7A8F4E4A8}"/>
+              </a:ext>
+            </a:extLst>
+          </p:cNvPr>
+          <p:cNvSpPr>
+            <a:spLocks noGrp="1"/>
+          </p:cNvSpPr>
+          <p:nvPr>
+            <p:ph type="title"/>
+          </p:nvPr>
+        </p:nvSpPr>
+        <p:spPr/>
+        <p:txBody>
+          <a:bodyPr/>
+          <a:lstStyle/>
+          <a:p>
+            <a:r>
+              <a:rPr lang="en-US" dirty="0"/>
+              <a:t>Challenge – Create A </a:t>
+            </a:r>
+            <a:r>
+              <a:rPr lang="en-US" dirty="0" err="1"/>
+              <a:t>Css</a:t>
+            </a:r>
+            <a:r>
+              <a:rPr lang="en-US" dirty="0"/>
+              <a:t> file</a:t>
+            </a:r>
+          </a:p>
+        </p:txBody>
+      </p:sp>
+      <p:sp>
+        <p:nvSpPr>
+          <p:cNvPr id="3" name="Content Placeholder 2">
+            <a:extLst>
+              <a:ext uri="{FF2B5EF4-FFF2-40B4-BE49-F238E27FC236}">
+                <a16:creationId xmlns:a16="http://schemas.microsoft.com/office/drawing/2014/main" id="{1A5E28C0-FC02-E8A2-5B20-A8520F89C125}"/>
+              </a:ext>
+            </a:extLst>
+          </p:cNvPr>
+          <p:cNvSpPr>
+            <a:spLocks noGrp="1"/>
+          </p:cNvSpPr>
+          <p:nvPr>
+            <p:ph idx="1"/>
+          </p:nvPr>
+        </p:nvSpPr>
+        <p:spPr>
+          <a:xfrm>
+            <a:off x="581192" y="2475925"/>
+            <a:ext cx="5317584" cy="1681246"/>
+          </a:xfrm>
+        </p:spPr>
+        <p:txBody>
+          <a:bodyPr/>
+          <a:lstStyle/>
+          <a:p>
+            <a:r>
+              <a:rPr lang="en-US" dirty="0"/>
+              <a:t>Create a CSS file</a:t>
+            </a:r>
+          </a:p>
+        </p:txBody>
+      </p:sp>
+      <p:sp>
+        <p:nvSpPr>
+          <p:cNvPr id="6" name="TextBox 5">
+            <a:extLst>
+              <a:ext uri="{FF2B5EF4-FFF2-40B4-BE49-F238E27FC236}">
+                <a16:creationId xmlns:a16="http://schemas.microsoft.com/office/drawing/2014/main" id="{A7D0ED9D-376B-9E11-1377-BB6D58ED5BD9}"/>
+              </a:ext>
+            </a:extLst>
+          </p:cNvPr>
+          <p:cNvSpPr txBox="1"/>
+          <p:nvPr/>
+        </p:nvSpPr>
+        <p:spPr>
+          <a:xfrm>
+            <a:off x="1228165" y="2402747"/>
+            <a:ext cx="756938" cy="369332"/>
+          </a:xfrm>
+          <a:prstGeom prst="rect">
+            <a:avLst/>
+          </a:prstGeom>
+          <a:noFill/>
+        </p:spPr>
+        <p:txBody>
+          <a:bodyPr wrap="none" rtlCol="0">
+            <a:spAutoFit/>
+          </a:bodyPr>
+          <a:lstStyle/>
+          <a:p>
+            <a:r>
+              <a:rPr lang="en-US" b="1" dirty="0"/>
+              <a:t>Goal:</a:t>
+            </a:r>
+          </a:p>
+        </p:txBody>
+      </p:sp>
+      <p:sp>
+        <p:nvSpPr>
+          <p:cNvPr id="7" name="TextBox 6">
+            <a:extLst>
+              <a:ext uri="{FF2B5EF4-FFF2-40B4-BE49-F238E27FC236}">
+                <a16:creationId xmlns:a16="http://schemas.microsoft.com/office/drawing/2014/main" id="{30A68301-2EEA-D6F3-95B1-34D7806BA248}"/>
+              </a:ext>
+            </a:extLst>
+          </p:cNvPr>
+          <p:cNvSpPr txBox="1"/>
+          <p:nvPr/>
+        </p:nvSpPr>
+        <p:spPr>
+          <a:xfrm>
+            <a:off x="6545749" y="2402747"/>
+            <a:ext cx="5065059" cy="369332"/>
+          </a:xfrm>
+          <a:prstGeom prst="rect">
+            <a:avLst/>
+          </a:prstGeom>
+          <a:noFill/>
+        </p:spPr>
+        <p:txBody>
+          <a:bodyPr wrap="square" rtlCol="0">
+            <a:spAutoFit/>
+          </a:bodyPr>
+          <a:lstStyle/>
+          <a:p>
+            <a:r>
+              <a:rPr lang="en-US" b="1" dirty="0"/>
+              <a:t>Scenario:  			   10 min</a:t>
+            </a:r>
+          </a:p>
+        </p:txBody>
+      </p:sp>
+      <p:sp>
+        <p:nvSpPr>
+          <p:cNvPr id="8" name="Content Placeholder 2">
+            <a:extLst>
+              <a:ext uri="{FF2B5EF4-FFF2-40B4-BE49-F238E27FC236}">
+                <a16:creationId xmlns:a16="http://schemas.microsoft.com/office/drawing/2014/main" id="{D4D03009-B7F1-697B-6145-0A3D160502D4}"/>
+              </a:ext>
+            </a:extLst>
+          </p:cNvPr>
+          <p:cNvSpPr txBox="1">
+            <a:spLocks/>
+          </p:cNvSpPr>
+          <p:nvPr/>
+        </p:nvSpPr>
+        <p:spPr>
+          <a:xfrm>
+            <a:off x="6545749" y="2772078"/>
+            <a:ext cx="4661642" cy="3639113"/>
+          </a:xfrm>
+          <a:prstGeom prst="rect">
+            <a:avLst/>
+          </a:prstGeom>
+        </p:spPr>
+        <p:txBody>
+          <a:bodyPr vert="horz" lIns="91440" tIns="45720" rIns="91440" bIns="45720" rtlCol="0" anchor="ctr">
+            <a:normAutofit/>
+          </a:bodyPr>
+          <a:lstStyle>
+            <a:lvl1pPr marL="306000" indent="-306000" algn="l" defTabSz="457200" rtl="0" eaLnBrk="1" latinLnBrk="0" hangingPunct="1">
+              <a:spcBef>
+                <a:spcPct val="20000"/>
+              </a:spcBef>
+              <a:spcAft>
+                <a:spcPts val="600"/>
+              </a:spcAft>
+              <a:buClr>
+                <a:schemeClr val="accent2"/>
+              </a:buClr>
+              <a:buSzPct val="92000"/>
+              <a:buFont typeface="Wingdings 2" panose="05020102010507070707" pitchFamily="18" charset="2"/>
+              <a:buChar char=""/>
+              <a:defRPr sz="1800" kern="1200">
+                <a:solidFill>
+                  <a:schemeClr val="tx2"/>
+                </a:solidFill>
+                <a:latin typeface="+mn-lt"/>
+                <a:ea typeface="+mn-ea"/>
+                <a:cs typeface="+mn-cs"/>
+              </a:defRPr>
+            </a:lvl1pPr>
+            <a:lvl2pPr marL="630000" indent="-306000" algn="l" defTabSz="457200" rtl="0" eaLnBrk="1" latinLnBrk="0" hangingPunct="1">
+              <a:spcBef>
+                <a:spcPct val="20000"/>
+              </a:spcBef>
+              <a:spcAft>
+                <a:spcPts val="600"/>
+              </a:spcAft>
+              <a:buClr>
+                <a:schemeClr val="accent2"/>
+              </a:buClr>
+              <a:buSzPct val="92000"/>
+              <a:buFont typeface="Wingdings 2" panose="05020102010507070707" pitchFamily="18" charset="2"/>
+              <a:buChar char=""/>
+              <a:defRPr sz="1600" kern="1200">
+                <a:solidFill>
+                  <a:schemeClr val="tx2"/>
+                </a:solidFill>
+                <a:latin typeface="+mn-lt"/>
+                <a:ea typeface="+mn-ea"/>
+                <a:cs typeface="+mn-cs"/>
+              </a:defRPr>
+            </a:lvl2pPr>
+            <a:lvl3pPr marL="900000" indent="-270000" algn="l" defTabSz="457200" rtl="0" eaLnBrk="1" latinLnBrk="0" hangingPunct="1">
+              <a:spcBef>
+                <a:spcPct val="20000"/>
+              </a:spcBef>
+              <a:spcAft>
+                <a:spcPts val="600"/>
+              </a:spcAft>
+              <a:buClr>
+                <a:schemeClr val="accent2"/>
+              </a:buClr>
+              <a:buSzPct val="92000"/>
+              <a:buFont typeface="Wingdings 2" panose="05020102010507070707" pitchFamily="18" charset="2"/>
+              <a:buChar char=""/>
+              <a:defRPr sz="1400" kern="1200">
+                <a:solidFill>
+                  <a:schemeClr val="tx2"/>
+                </a:solidFill>
+                <a:latin typeface="+mn-lt"/>
+                <a:ea typeface="+mn-ea"/>
+                <a:cs typeface="+mn-cs"/>
+              </a:defRPr>
+            </a:lvl3pPr>
+            <a:lvl4pPr marL="1242000" indent="-234000" algn="l" defTabSz="457200" rtl="0" eaLnBrk="1" latinLnBrk="0" hangingPunct="1">
+              <a:spcBef>
+                <a:spcPct val="20000"/>
+              </a:spcBef>
+              <a:spcAft>
+                <a:spcPts val="600"/>
+              </a:spcAft>
+              <a:buClr>
+                <a:schemeClr val="accent2"/>
+              </a:buClr>
+              <a:buSzPct val="92000"/>
+              <a:buFont typeface="Wingdings 2" panose="05020102010507070707" pitchFamily="18" charset="2"/>
+              <a:buChar char=""/>
+              <a:defRPr sz="1200" kern="1200">
+                <a:solidFill>
+                  <a:schemeClr val="tx2"/>
+                </a:solidFill>
+                <a:latin typeface="+mn-lt"/>
+                <a:ea typeface="+mn-ea"/>
+                <a:cs typeface="+mn-cs"/>
+              </a:defRPr>
+            </a:lvl4pPr>
+            <a:lvl5pPr marL="1602000" indent="-234000" algn="l" defTabSz="457200" rtl="0" eaLnBrk="1" latinLnBrk="0" hangingPunct="1">
+              <a:spcBef>
+                <a:spcPct val="20000"/>
+              </a:spcBef>
+              <a:spcAft>
+                <a:spcPts val="600"/>
+              </a:spcAft>
+              <a:buClr>
+                <a:schemeClr val="accent2"/>
+              </a:buClr>
+              <a:buSzPct val="92000"/>
+              <a:buFont typeface="Wingdings 2" panose="05020102010507070707" pitchFamily="18" charset="2"/>
+              <a:buChar char=""/>
+              <a:defRPr sz="1200" kern="1200">
+                <a:solidFill>
+                  <a:schemeClr val="tx2"/>
+                </a:solidFill>
+                <a:latin typeface="+mn-lt"/>
+                <a:ea typeface="+mn-ea"/>
+                <a:cs typeface="+mn-cs"/>
+              </a:defRPr>
+            </a:lvl5pPr>
+            <a:lvl6pPr marL="1900000" indent="-228600" algn="l" defTabSz="457200" rtl="0" eaLnBrk="1" latinLnBrk="0" hangingPunct="1">
+              <a:spcBef>
+                <a:spcPct val="20000"/>
+              </a:spcBef>
+              <a:spcAft>
+                <a:spcPts val="600"/>
+              </a:spcAft>
+              <a:buClr>
+                <a:schemeClr val="accent2"/>
+              </a:buClr>
+              <a:buSzPct val="92000"/>
+              <a:buFont typeface="Wingdings 2" panose="05020102010507070707" pitchFamily="18" charset="2"/>
+              <a:buChar char=""/>
+              <a:defRPr sz="1200" kern="1200">
+                <a:solidFill>
+                  <a:schemeClr val="tx2"/>
+                </a:solidFill>
+                <a:latin typeface="+mn-lt"/>
+                <a:ea typeface="+mn-ea"/>
+                <a:cs typeface="+mn-cs"/>
+              </a:defRPr>
+            </a:lvl6pPr>
+            <a:lvl7pPr marL="2200000" indent="-228600" algn="l" defTabSz="457200" rtl="0" eaLnBrk="1" latinLnBrk="0" hangingPunct="1">
+              <a:spcBef>
+                <a:spcPct val="20000"/>
+              </a:spcBef>
+              <a:spcAft>
+                <a:spcPts val="600"/>
+              </a:spcAft>
+              <a:buClr>
+                <a:schemeClr val="accent2"/>
+              </a:buClr>
+              <a:buSzPct val="92000"/>
+              <a:buFont typeface="Wingdings 2" panose="05020102010507070707" pitchFamily="18" charset="2"/>
+              <a:buChar char=""/>
+              <a:defRPr sz="1200" kern="1200">
+                <a:solidFill>
+                  <a:schemeClr val="tx2"/>
+                </a:solidFill>
+                <a:latin typeface="+mn-lt"/>
+                <a:ea typeface="+mn-ea"/>
+                <a:cs typeface="+mn-cs"/>
+              </a:defRPr>
+            </a:lvl7pPr>
+            <a:lvl8pPr marL="2500000" indent="-228600" algn="l" defTabSz="457200" rtl="0" eaLnBrk="1" latinLnBrk="0" hangingPunct="1">
+              <a:spcBef>
+                <a:spcPct val="20000"/>
+              </a:spcBef>
+              <a:spcAft>
+                <a:spcPts val="600"/>
+              </a:spcAft>
+              <a:buClr>
+                <a:schemeClr val="accent2"/>
+              </a:buClr>
+              <a:buSzPct val="92000"/>
+              <a:buFont typeface="Wingdings 2" panose="05020102010507070707" pitchFamily="18" charset="2"/>
+              <a:buChar char=""/>
+              <a:defRPr sz="1200" kern="1200">
+                <a:solidFill>
+                  <a:schemeClr val="tx2"/>
+                </a:solidFill>
+                <a:latin typeface="+mn-lt"/>
+                <a:ea typeface="+mn-ea"/>
+                <a:cs typeface="+mn-cs"/>
+              </a:defRPr>
+            </a:lvl8pPr>
+            <a:lvl9pPr marL="2800000" indent="-228600" algn="l" defTabSz="457200" rtl="0" eaLnBrk="1" latinLnBrk="0" hangingPunct="1">
+              <a:spcBef>
+                <a:spcPct val="20000"/>
+              </a:spcBef>
+              <a:spcAft>
+                <a:spcPts val="600"/>
+              </a:spcAft>
+              <a:buClr>
+                <a:schemeClr val="accent2"/>
+              </a:buClr>
+              <a:buSzPct val="92000"/>
+              <a:buFont typeface="Wingdings 2" panose="05020102010507070707" pitchFamily="18" charset="2"/>
+              <a:buChar char=""/>
+              <a:defRPr sz="1200" kern="1200">
+                <a:solidFill>
+                  <a:schemeClr val="tx2"/>
+                </a:solidFill>
+                <a:latin typeface="+mn-lt"/>
+                <a:ea typeface="+mn-ea"/>
+                <a:cs typeface="+mn-cs"/>
+              </a:defRPr>
+            </a:lvl9pPr>
+          </a:lstStyle>
+          <a:p>
+            <a:r>
+              <a:rPr lang="en-US" dirty="0"/>
+              <a:t>Your organization needs a static site to advertise their new product. </a:t>
+            </a:r>
+          </a:p>
+          <a:p>
+            <a:r>
+              <a:rPr lang="en-US" dirty="0"/>
+              <a:t>Further develop the site by creating a CSS document to style your page</a:t>
+            </a:r>
+          </a:p>
+          <a:p>
+            <a:pPr lvl="1"/>
+            <a:r>
+              <a:rPr lang="en-US" dirty="0"/>
+              <a:t>Include a background color for your header, change the text color as necessary to match your header </a:t>
+            </a:r>
+          </a:p>
+        </p:txBody>
+      </p:sp>
+    </p:spTree>
+    <p:extLst>
+      <p:ext uri="{BB962C8B-B14F-4D97-AF65-F5344CB8AC3E}">
+        <p14:creationId xmlns:p14="http://schemas.microsoft.com/office/powerpoint/2010/main" val="1406196585"/>
+      </p:ext>
+    </p:extLst>
+  </p:cSld>
+  <p:clrMapOvr>
+    <a:masterClrMapping/>
+  </p:clrMapOvr>
+</p:sld>
+</file>
+
+<file path=ppt/slides/slide33.xml><?xml version="1.0" encoding="utf-8"?>
+<p:sld xmlns:a="http://schemas.openxmlformats.org/drawingml/2006/main" xmlns:r="http://schemas.openxmlformats.org/officeDocument/2006/relationships" xmlns:p="http://schemas.openxmlformats.org/presentationml/2006/main">
+  <p:cSld>
+    <p:spTree>
+      <p:nvGrpSpPr>
+        <p:cNvPr id="1" name=""/>
+        <p:cNvGrpSpPr/>
+        <p:nvPr/>
+      </p:nvGrpSpPr>
+      <p:grpSpPr>
+        <a:xfrm>
+          <a:off x="0" y="0"/>
+          <a:ext cx="0" cy="0"/>
+          <a:chOff x="0" y="0"/>
+          <a:chExt cx="0" cy="0"/>
+        </a:xfrm>
+      </p:grpSpPr>
+      <p:sp>
+        <p:nvSpPr>
+          <p:cNvPr id="2" name="Title 1">
+            <a:extLst>
+              <a:ext uri="{FF2B5EF4-FFF2-40B4-BE49-F238E27FC236}">
+                <a16:creationId xmlns:a16="http://schemas.microsoft.com/office/drawing/2014/main" id="{2C1727D6-417C-2E0F-D0B9-58AEE07F7220}"/>
+              </a:ext>
+            </a:extLst>
+          </p:cNvPr>
+          <p:cNvSpPr>
+            <a:spLocks noGrp="1"/>
+          </p:cNvSpPr>
+          <p:nvPr>
+            <p:ph type="title"/>
+          </p:nvPr>
+        </p:nvSpPr>
+        <p:spPr/>
+        <p:txBody>
+          <a:bodyPr/>
+          <a:lstStyle/>
+          <a:p>
+            <a:r>
+              <a:rPr lang="en-US" dirty="0"/>
+              <a:t>The Box Model</a:t>
+            </a:r>
+          </a:p>
+        </p:txBody>
+      </p:sp>
+      <p:sp>
+        <p:nvSpPr>
+          <p:cNvPr id="3" name="Content Placeholder 2">
+            <a:extLst>
+              <a:ext uri="{FF2B5EF4-FFF2-40B4-BE49-F238E27FC236}">
+                <a16:creationId xmlns:a16="http://schemas.microsoft.com/office/drawing/2014/main" id="{632E475E-24CF-BE80-68EF-BEA9FC6A2697}"/>
+              </a:ext>
+            </a:extLst>
+          </p:cNvPr>
+          <p:cNvSpPr>
+            <a:spLocks noGrp="1"/>
+          </p:cNvSpPr>
+          <p:nvPr>
+            <p:ph idx="1"/>
+          </p:nvPr>
+        </p:nvSpPr>
+        <p:spPr>
+          <a:xfrm>
+            <a:off x="581192" y="2180496"/>
+            <a:ext cx="5248275" cy="3975348"/>
+          </a:xfrm>
+        </p:spPr>
+        <p:txBody>
+          <a:bodyPr/>
+          <a:lstStyle/>
+          <a:p>
+            <a:r>
+              <a:rPr lang="en-US" dirty="0"/>
+              <a:t>Margin – the space between an element and other elements on the page</a:t>
+            </a:r>
+          </a:p>
+          <a:p>
+            <a:r>
+              <a:rPr lang="en-US" dirty="0"/>
+              <a:t>Border – a perimeter around content which can be customized </a:t>
+            </a:r>
+          </a:p>
+          <a:p>
+            <a:r>
+              <a:rPr lang="en-US" dirty="0"/>
+              <a:t>Padding – the space between the content of an element and the border </a:t>
+            </a:r>
+          </a:p>
+          <a:p>
+            <a:r>
+              <a:rPr lang="en-US" dirty="0"/>
+              <a:t>Content – The actual content of the element - could be text, another element, etc. </a:t>
+            </a:r>
+          </a:p>
+        </p:txBody>
+      </p:sp>
+      <p:pic>
+        <p:nvPicPr>
+          <p:cNvPr id="1026" name="Picture 2">
+            <a:extLst>
+              <a:ext uri="{FF2B5EF4-FFF2-40B4-BE49-F238E27FC236}">
+                <a16:creationId xmlns:a16="http://schemas.microsoft.com/office/drawing/2014/main" id="{7D6EC64F-D954-B980-B7B1-AB96333F2DC8}"/>
+              </a:ext>
+            </a:extLst>
+          </p:cNvPr>
+          <p:cNvPicPr>
+            <a:picLocks noChangeAspect="1" noChangeArrowheads="1"/>
+          </p:cNvPicPr>
+          <p:nvPr/>
+        </p:nvPicPr>
+        <p:blipFill>
+          <a:blip r:embed="rId2">
+            <a:extLst>
+              <a:ext uri="{28A0092B-C50C-407E-A947-70E740481C1C}">
+                <a14:useLocalDpi xmlns:a14="http://schemas.microsoft.com/office/drawing/2010/main" val="0"/>
+              </a:ext>
+            </a:extLst>
+          </a:blip>
+          <a:srcRect/>
+          <a:stretch>
+            <a:fillRect/>
+          </a:stretch>
+        </p:blipFill>
+        <p:spPr bwMode="auto">
+          <a:xfrm>
+            <a:off x="6096000" y="2538509"/>
+            <a:ext cx="5248275" cy="2962275"/>
+          </a:xfrm>
+          <a:prstGeom prst="rect">
+            <a:avLst/>
+          </a:prstGeom>
+          <a:noFill/>
+          <a:extLst>
+            <a:ext uri="{909E8E84-426E-40DD-AFC4-6F175D3DCCD1}">
+              <a14:hiddenFill xmlns:a14="http://schemas.microsoft.com/office/drawing/2010/main">
+                <a:solidFill>
+                  <a:srgbClr val="FFFFFF"/>
+                </a:solidFill>
+              </a14:hiddenFill>
+            </a:ext>
+          </a:extLst>
+        </p:spPr>
+      </p:pic>
+    </p:spTree>
+    <p:extLst>
+      <p:ext uri="{BB962C8B-B14F-4D97-AF65-F5344CB8AC3E}">
+        <p14:creationId xmlns:p14="http://schemas.microsoft.com/office/powerpoint/2010/main" val="200493078"/>
+      </p:ext>
+    </p:extLst>
+  </p:cSld>
+  <p:clrMapOvr>
+    <a:masterClrMapping/>
+  </p:clrMapOvr>
+</p:sld>
+</file>
+
+<file path=ppt/slides/slide34.xml><?xml version="1.0" encoding="utf-8"?>
+<p:sld xmlns:a="http://schemas.openxmlformats.org/drawingml/2006/main" xmlns:r="http://schemas.openxmlformats.org/officeDocument/2006/relationships" xmlns:p="http://schemas.openxmlformats.org/presentationml/2006/main">
+  <p:cSld>
+    <p:spTree>
+      <p:nvGrpSpPr>
+        <p:cNvPr id="1" name=""/>
+        <p:cNvGrpSpPr/>
+        <p:nvPr/>
+      </p:nvGrpSpPr>
+      <p:grpSpPr>
+        <a:xfrm>
+          <a:off x="0" y="0"/>
+          <a:ext cx="0" cy="0"/>
+          <a:chOff x="0" y="0"/>
+          <a:chExt cx="0" cy="0"/>
+        </a:xfrm>
+      </p:grpSpPr>
+      <p:sp>
+        <p:nvSpPr>
+          <p:cNvPr id="2" name="Title 1">
+            <a:extLst>
+              <a:ext uri="{FF2B5EF4-FFF2-40B4-BE49-F238E27FC236}">
+                <a16:creationId xmlns:a16="http://schemas.microsoft.com/office/drawing/2014/main" id="{BB4203DE-DF30-32CC-BE8A-89825EC46D3B}"/>
+              </a:ext>
+            </a:extLst>
+          </p:cNvPr>
+          <p:cNvSpPr>
+            <a:spLocks noGrp="1"/>
+          </p:cNvSpPr>
+          <p:nvPr>
+            <p:ph type="title"/>
+          </p:nvPr>
+        </p:nvSpPr>
+        <p:spPr/>
+        <p:txBody>
+          <a:bodyPr/>
+          <a:lstStyle/>
+          <a:p>
+            <a:r>
+              <a:rPr lang="en-US" dirty="0"/>
+              <a:t>The Box Model</a:t>
+            </a:r>
+          </a:p>
+        </p:txBody>
+      </p:sp>
+      <p:pic>
+        <p:nvPicPr>
+          <p:cNvPr id="5" name="Content Placeholder 4">
+            <a:extLst>
+              <a:ext uri="{FF2B5EF4-FFF2-40B4-BE49-F238E27FC236}">
+                <a16:creationId xmlns:a16="http://schemas.microsoft.com/office/drawing/2014/main" id="{8ADDC0B0-9472-9AE0-264A-62931613195A}"/>
+              </a:ext>
+            </a:extLst>
+          </p:cNvPr>
+          <p:cNvPicPr>
+            <a:picLocks noGrp="1" noChangeAspect="1"/>
+          </p:cNvPicPr>
+          <p:nvPr>
+            <p:ph idx="1"/>
+          </p:nvPr>
+        </p:nvPicPr>
+        <p:blipFill>
+          <a:blip r:embed="rId2"/>
+          <a:stretch>
+            <a:fillRect/>
+          </a:stretch>
+        </p:blipFill>
+        <p:spPr>
+          <a:xfrm>
+            <a:off x="3879257" y="2221022"/>
+            <a:ext cx="4189832" cy="1533637"/>
+          </a:xfrm>
+          <a:prstGeom prst="rect">
+            <a:avLst/>
+          </a:prstGeom>
+        </p:spPr>
+      </p:pic>
+      <p:pic>
+        <p:nvPicPr>
+          <p:cNvPr id="12" name="Picture 11">
+            <a:extLst>
+              <a:ext uri="{FF2B5EF4-FFF2-40B4-BE49-F238E27FC236}">
+                <a16:creationId xmlns:a16="http://schemas.microsoft.com/office/drawing/2014/main" id="{F9CEA5F4-51BD-084A-F7D0-87A533A390B8}"/>
+              </a:ext>
+            </a:extLst>
+          </p:cNvPr>
+          <p:cNvPicPr>
+            <a:picLocks noChangeAspect="1"/>
+          </p:cNvPicPr>
+          <p:nvPr/>
+        </p:nvPicPr>
+        <p:blipFill>
+          <a:blip r:embed="rId3"/>
+          <a:stretch>
+            <a:fillRect/>
+          </a:stretch>
+        </p:blipFill>
+        <p:spPr>
+          <a:xfrm>
+            <a:off x="1835332" y="4164840"/>
+            <a:ext cx="2372056" cy="1895740"/>
+          </a:xfrm>
+          <a:prstGeom prst="rect">
+            <a:avLst/>
+          </a:prstGeom>
+        </p:spPr>
+      </p:pic>
+      <p:pic>
+        <p:nvPicPr>
+          <p:cNvPr id="14" name="Picture 13">
+            <a:extLst>
+              <a:ext uri="{FF2B5EF4-FFF2-40B4-BE49-F238E27FC236}">
+                <a16:creationId xmlns:a16="http://schemas.microsoft.com/office/drawing/2014/main" id="{92F3E728-B211-5F9A-3E01-4B2F096604FE}"/>
+              </a:ext>
+            </a:extLst>
+          </p:cNvPr>
+          <p:cNvPicPr>
+            <a:picLocks noChangeAspect="1"/>
+          </p:cNvPicPr>
+          <p:nvPr/>
+        </p:nvPicPr>
+        <p:blipFill>
+          <a:blip r:embed="rId4"/>
+          <a:stretch>
+            <a:fillRect/>
+          </a:stretch>
+        </p:blipFill>
+        <p:spPr>
+          <a:xfrm>
+            <a:off x="5707819" y="4164840"/>
+            <a:ext cx="4648849" cy="1810003"/>
+          </a:xfrm>
+          <a:prstGeom prst="rect">
+            <a:avLst/>
+          </a:prstGeom>
+        </p:spPr>
+      </p:pic>
+    </p:spTree>
+    <p:extLst>
+      <p:ext uri="{BB962C8B-B14F-4D97-AF65-F5344CB8AC3E}">
+        <p14:creationId xmlns:p14="http://schemas.microsoft.com/office/powerpoint/2010/main" val="3985596531"/>
+      </p:ext>
+    </p:extLst>
+  </p:cSld>
+  <p:clrMapOvr>
+    <a:masterClrMapping/>
+  </p:clrMapOvr>
+</p:sld>
+</file>
+
+<file path=ppt/slides/slide35.xml><?xml version="1.0" encoding="utf-8"?>
+<p:sld xmlns:a="http://schemas.openxmlformats.org/drawingml/2006/main" xmlns:r="http://schemas.openxmlformats.org/officeDocument/2006/relationships" xmlns:p="http://schemas.openxmlformats.org/presentationml/2006/main">
+  <p:cSld>
+    <p:spTree>
+      <p:nvGrpSpPr>
+        <p:cNvPr id="1" name=""/>
+        <p:cNvGrpSpPr/>
+        <p:nvPr/>
+      </p:nvGrpSpPr>
+      <p:grpSpPr>
+        <a:xfrm>
+          <a:off x="0" y="0"/>
+          <a:ext cx="0" cy="0"/>
+          <a:chOff x="0" y="0"/>
+          <a:chExt cx="0" cy="0"/>
+        </a:xfrm>
+      </p:grpSpPr>
+      <p:sp>
+        <p:nvSpPr>
+          <p:cNvPr id="2" name="Title 1">
+            <a:extLst>
+              <a:ext uri="{FF2B5EF4-FFF2-40B4-BE49-F238E27FC236}">
+                <a16:creationId xmlns:a16="http://schemas.microsoft.com/office/drawing/2014/main" id="{0E478CF0-3738-E5FA-8F85-9287B0373C65}"/>
+              </a:ext>
+            </a:extLst>
+          </p:cNvPr>
+          <p:cNvSpPr>
+            <a:spLocks noGrp="1"/>
+          </p:cNvSpPr>
+          <p:nvPr>
+            <p:ph type="title"/>
+          </p:nvPr>
+        </p:nvSpPr>
+        <p:spPr/>
+        <p:txBody>
+          <a:bodyPr/>
+          <a:lstStyle/>
+          <a:p>
+            <a:r>
+              <a:rPr lang="en-US" dirty="0"/>
+              <a:t>The Box Model</a:t>
+            </a:r>
+          </a:p>
+        </p:txBody>
+      </p:sp>
+      <p:graphicFrame>
+        <p:nvGraphicFramePr>
+          <p:cNvPr id="10" name="Table 9">
+            <a:extLst>
+              <a:ext uri="{FF2B5EF4-FFF2-40B4-BE49-F238E27FC236}">
+                <a16:creationId xmlns:a16="http://schemas.microsoft.com/office/drawing/2014/main" id="{3F553FFC-534B-AE61-9A6F-0568CBA64B65}"/>
+              </a:ext>
+            </a:extLst>
+          </p:cNvPr>
+          <p:cNvGraphicFramePr>
+            <a:graphicFrameLocks noGrp="1"/>
+          </p:cNvGraphicFramePr>
+          <p:nvPr>
+            <p:extLst>
+              <p:ext uri="{D42A27DB-BD31-4B8C-83A1-F6EECF244321}">
+                <p14:modId xmlns:p14="http://schemas.microsoft.com/office/powerpoint/2010/main" val="1442698926"/>
+              </p:ext>
+            </p:extLst>
+          </p:nvPr>
+        </p:nvGraphicFramePr>
+        <p:xfrm>
+          <a:off x="580860" y="2020210"/>
+          <a:ext cx="11029948" cy="365760"/>
+        </p:xfrm>
+        <a:graphic>
+          <a:graphicData uri="http://schemas.openxmlformats.org/drawingml/2006/table">
+            <a:tbl>
+              <a:tblPr/>
+              <a:tblGrid>
+                <a:gridCol w="2757487">
+                  <a:extLst>
+                    <a:ext uri="{9D8B030D-6E8A-4147-A177-3AD203B41FA5}">
+                      <a16:colId xmlns:a16="http://schemas.microsoft.com/office/drawing/2014/main" val="1163776887"/>
+                    </a:ext>
+                  </a:extLst>
+                </a:gridCol>
+                <a:gridCol w="2757487">
+                  <a:extLst>
+                    <a:ext uri="{9D8B030D-6E8A-4147-A177-3AD203B41FA5}">
+                      <a16:colId xmlns:a16="http://schemas.microsoft.com/office/drawing/2014/main" val="1586036783"/>
+                    </a:ext>
+                  </a:extLst>
+                </a:gridCol>
+                <a:gridCol w="2757487">
+                  <a:extLst>
+                    <a:ext uri="{9D8B030D-6E8A-4147-A177-3AD203B41FA5}">
+                      <a16:colId xmlns:a16="http://schemas.microsoft.com/office/drawing/2014/main" val="1711772646"/>
+                    </a:ext>
+                  </a:extLst>
+                </a:gridCol>
+                <a:gridCol w="2757487">
+                  <a:extLst>
+                    <a:ext uri="{9D8B030D-6E8A-4147-A177-3AD203B41FA5}">
+                      <a16:colId xmlns:a16="http://schemas.microsoft.com/office/drawing/2014/main" val="2472603799"/>
+                    </a:ext>
+                  </a:extLst>
+                </a:gridCol>
+              </a:tblGrid>
+              <a:tr h="365760">
+                <a:tc>
+                  <a:txBody>
+                    <a:bodyPr/>
+                    <a:lstStyle/>
+                    <a:p>
+                      <a:pPr>
+                        <a:buNone/>
+                      </a:pPr>
+                      <a:r>
+                        <a:rPr lang="en-US" sz="1800" dirty="0"/>
+                        <a:t>Property</a:t>
+                      </a:r>
+                    </a:p>
+                  </a:txBody>
+                  <a:tcPr anchor="ctr">
+                    <a:lnL>
+                      <a:noFill/>
+                    </a:lnL>
+                    <a:lnR>
+                      <a:noFill/>
+                    </a:lnR>
+                    <a:lnT>
+                      <a:noFill/>
+                    </a:lnT>
+                    <a:lnB>
+                      <a:noFill/>
+                    </a:lnB>
+                    <a:noFill/>
+                  </a:tcPr>
+                </a:tc>
+                <a:tc>
+                  <a:txBody>
+                    <a:bodyPr/>
+                    <a:lstStyle/>
+                    <a:p>
+                      <a:pPr>
+                        <a:buNone/>
+                      </a:pPr>
+                      <a:r>
+                        <a:rPr lang="en-US" sz="1800"/>
+                        <a:t>Description</a:t>
+                      </a:r>
+                    </a:p>
+                  </a:txBody>
+                  <a:tcPr anchor="ctr">
+                    <a:lnL>
+                      <a:noFill/>
+                    </a:lnL>
+                    <a:lnR>
+                      <a:noFill/>
+                    </a:lnR>
+                    <a:lnT>
+                      <a:noFill/>
+                    </a:lnT>
+                    <a:lnB>
+                      <a:noFill/>
+                    </a:lnB>
+                    <a:noFill/>
+                  </a:tcPr>
+                </a:tc>
+                <a:tc>
+                  <a:txBody>
+                    <a:bodyPr/>
+                    <a:lstStyle/>
+                    <a:p>
+                      <a:pPr>
+                        <a:buNone/>
+                      </a:pPr>
+                      <a:r>
+                        <a:rPr lang="en-US" sz="1800"/>
+                        <a:t>Variants</a:t>
+                      </a:r>
+                    </a:p>
+                  </a:txBody>
+                  <a:tcPr anchor="ctr">
+                    <a:lnL>
+                      <a:noFill/>
+                    </a:lnL>
+                    <a:lnR>
+                      <a:noFill/>
+                    </a:lnR>
+                    <a:lnT>
+                      <a:noFill/>
+                    </a:lnT>
+                    <a:lnB>
+                      <a:noFill/>
+                    </a:lnB>
+                    <a:noFill/>
+                  </a:tcPr>
+                </a:tc>
+                <a:tc>
+                  <a:txBody>
+                    <a:bodyPr/>
+                    <a:lstStyle/>
+                    <a:p>
+                      <a:pPr>
+                        <a:buNone/>
+                      </a:pPr>
+                      <a:r>
+                        <a:rPr lang="en-US" sz="1800" dirty="0"/>
+                        <a:t>Shorthand</a:t>
+                      </a:r>
+                    </a:p>
+                  </a:txBody>
+                  <a:tcPr anchor="ctr">
+                    <a:lnL>
+                      <a:noFill/>
+                    </a:lnL>
+                    <a:lnR>
+                      <a:noFill/>
+                    </a:lnR>
+                    <a:lnT>
+                      <a:noFill/>
+                    </a:lnT>
+                    <a:lnB>
+                      <a:noFill/>
+                    </a:lnB>
+                    <a:noFill/>
+                  </a:tcPr>
+                </a:tc>
+                <a:extLst>
+                  <a:ext uri="{0D108BD9-81ED-4DB2-BD59-A6C34878D82A}">
+                    <a16:rowId xmlns:a16="http://schemas.microsoft.com/office/drawing/2014/main" val="2166792200"/>
+                  </a:ext>
+                </a:extLst>
+              </a:tr>
+            </a:tbl>
+          </a:graphicData>
+        </a:graphic>
+      </p:graphicFrame>
+      <p:graphicFrame>
+        <p:nvGraphicFramePr>
+          <p:cNvPr id="11" name="Table 10">
+            <a:extLst>
+              <a:ext uri="{FF2B5EF4-FFF2-40B4-BE49-F238E27FC236}">
+                <a16:creationId xmlns:a16="http://schemas.microsoft.com/office/drawing/2014/main" id="{846B0426-AD3E-CE7E-75D5-65E35C086099}"/>
+              </a:ext>
+            </a:extLst>
+          </p:cNvPr>
+          <p:cNvGraphicFramePr>
+            <a:graphicFrameLocks noGrp="1"/>
+          </p:cNvGraphicFramePr>
+          <p:nvPr>
+            <p:extLst>
+              <p:ext uri="{D42A27DB-BD31-4B8C-83A1-F6EECF244321}">
+                <p14:modId xmlns:p14="http://schemas.microsoft.com/office/powerpoint/2010/main" val="938974272"/>
+              </p:ext>
+            </p:extLst>
+          </p:nvPr>
+        </p:nvGraphicFramePr>
+        <p:xfrm>
+          <a:off x="580860" y="3544210"/>
+          <a:ext cx="11029948" cy="1744851"/>
+        </p:xfrm>
+        <a:graphic>
+          <a:graphicData uri="http://schemas.openxmlformats.org/drawingml/2006/table">
+            <a:tbl>
+              <a:tblPr/>
+              <a:tblGrid>
+                <a:gridCol w="2757487">
+                  <a:extLst>
+                    <a:ext uri="{9D8B030D-6E8A-4147-A177-3AD203B41FA5}">
+                      <a16:colId xmlns:a16="http://schemas.microsoft.com/office/drawing/2014/main" val="908272185"/>
+                    </a:ext>
+                  </a:extLst>
+                </a:gridCol>
+                <a:gridCol w="2757487">
+                  <a:extLst>
+                    <a:ext uri="{9D8B030D-6E8A-4147-A177-3AD203B41FA5}">
+                      <a16:colId xmlns:a16="http://schemas.microsoft.com/office/drawing/2014/main" val="156221707"/>
+                    </a:ext>
+                  </a:extLst>
+                </a:gridCol>
+                <a:gridCol w="2757487">
+                  <a:extLst>
+                    <a:ext uri="{9D8B030D-6E8A-4147-A177-3AD203B41FA5}">
+                      <a16:colId xmlns:a16="http://schemas.microsoft.com/office/drawing/2014/main" val="824991043"/>
+                    </a:ext>
+                  </a:extLst>
+                </a:gridCol>
+                <a:gridCol w="2757487">
+                  <a:extLst>
+                    <a:ext uri="{9D8B030D-6E8A-4147-A177-3AD203B41FA5}">
+                      <a16:colId xmlns:a16="http://schemas.microsoft.com/office/drawing/2014/main" val="3145958567"/>
+                    </a:ext>
+                  </a:extLst>
+                </a:gridCol>
+              </a:tblGrid>
+              <a:tr h="1744851">
+                <a:tc>
+                  <a:txBody>
+                    <a:bodyPr/>
+                    <a:lstStyle/>
+                    <a:p>
+                      <a:pPr>
+                        <a:buNone/>
+                      </a:pPr>
+                      <a:r>
+                        <a:rPr lang="en-US" sz="1400" b="1" dirty="0"/>
+                        <a:t>Margin</a:t>
+                      </a:r>
+                      <a:endParaRPr lang="en-US" sz="1400" dirty="0"/>
+                    </a:p>
+                  </a:txBody>
+                  <a:tcPr anchor="ctr">
+                    <a:lnL>
+                      <a:noFill/>
+                    </a:lnL>
+                    <a:lnR>
+                      <a:noFill/>
+                    </a:lnR>
+                    <a:lnT>
+                      <a:noFill/>
+                    </a:lnT>
+                    <a:lnB>
+                      <a:noFill/>
+                    </a:lnB>
+                    <a:noFill/>
+                  </a:tcPr>
+                </a:tc>
+                <a:tc>
+                  <a:txBody>
+                    <a:bodyPr/>
+                    <a:lstStyle/>
+                    <a:p>
+                      <a:pPr>
+                        <a:buNone/>
+                      </a:pPr>
+                      <a:r>
+                        <a:rPr lang="en-US" sz="1400" dirty="0"/>
+                        <a:t>Space </a:t>
+                      </a:r>
+                      <a:r>
+                        <a:rPr lang="en-US" sz="1400" b="1" dirty="0"/>
+                        <a:t>outside</a:t>
+                      </a:r>
+                      <a:r>
+                        <a:rPr lang="en-US" sz="1400" dirty="0"/>
+                        <a:t> the element, separating it from other elements</a:t>
+                      </a:r>
+                    </a:p>
+                  </a:txBody>
+                  <a:tcPr anchor="ctr">
+                    <a:lnL>
+                      <a:noFill/>
+                    </a:lnL>
+                    <a:lnR>
+                      <a:noFill/>
+                    </a:lnR>
+                    <a:lnT>
+                      <a:noFill/>
+                    </a:lnT>
+                    <a:lnB>
+                      <a:noFill/>
+                    </a:lnB>
+                    <a:noFill/>
+                  </a:tcPr>
+                </a:tc>
+                <a:tc>
+                  <a:txBody>
+                    <a:bodyPr/>
+                    <a:lstStyle/>
+                    <a:p>
+                      <a:pPr>
+                        <a:buNone/>
+                      </a:pPr>
+                      <a:r>
+                        <a:rPr lang="en-US" sz="1400">
+                          <a:latin typeface="Courier New" panose="02070309020205020404" pitchFamily="49" charset="0"/>
+                        </a:rPr>
+                        <a:t>margin-top</a:t>
+                      </a:r>
+                      <a:r>
+                        <a:rPr lang="en-US" sz="1400"/>
+                        <a:t>, </a:t>
+                      </a:r>
+                      <a:r>
+                        <a:rPr lang="en-US" sz="1400">
+                          <a:latin typeface="Courier New" panose="02070309020205020404" pitchFamily="49" charset="0"/>
+                        </a:rPr>
+                        <a:t>margin-right</a:t>
+                      </a:r>
+                      <a:r>
+                        <a:rPr lang="en-US" sz="1400"/>
+                        <a:t>, </a:t>
+                      </a:r>
+                      <a:r>
+                        <a:rPr lang="en-US" sz="1400">
+                          <a:latin typeface="Courier New" panose="02070309020205020404" pitchFamily="49" charset="0"/>
+                        </a:rPr>
+                        <a:t>margin-bottom</a:t>
+                      </a:r>
+                      <a:r>
+                        <a:rPr lang="en-US" sz="1400"/>
+                        <a:t>, </a:t>
+                      </a:r>
+                      <a:r>
+                        <a:rPr lang="en-US" sz="1400">
+                          <a:latin typeface="Courier New" panose="02070309020205020404" pitchFamily="49" charset="0"/>
+                        </a:rPr>
+                        <a:t>margin-left</a:t>
+                      </a:r>
+                      <a:endParaRPr lang="en-US" sz="1400"/>
+                    </a:p>
+                  </a:txBody>
+                  <a:tcPr anchor="ctr">
+                    <a:lnL>
+                      <a:noFill/>
+                    </a:lnL>
+                    <a:lnR>
+                      <a:noFill/>
+                    </a:lnR>
+                    <a:lnT>
+                      <a:noFill/>
+                    </a:lnT>
+                    <a:lnB>
+                      <a:noFill/>
+                    </a:lnB>
+                    <a:noFill/>
+                  </a:tcPr>
+                </a:tc>
+                <a:tc>
+                  <a:txBody>
+                    <a:bodyPr/>
+                    <a:lstStyle/>
+                    <a:p>
+                      <a:pPr>
+                        <a:buNone/>
+                      </a:pPr>
+                      <a:r>
+                        <a:rPr lang="en-US" sz="1400" dirty="0">
+                          <a:latin typeface="Courier New" panose="02070309020205020404" pitchFamily="49" charset="0"/>
+                        </a:rPr>
+                        <a:t>margin: top right bottom left;</a:t>
+                      </a:r>
+                      <a:r>
+                        <a:rPr lang="en-US" sz="1400" dirty="0"/>
+                        <a:t> </a:t>
+                      </a:r>
+                      <a:br>
+                        <a:rPr lang="en-US" sz="1400" dirty="0"/>
+                      </a:br>
+                      <a:r>
+                        <a:rPr lang="en-US" sz="1400" dirty="0"/>
+                        <a:t>Examples: </a:t>
+                      </a:r>
+                      <a:br>
+                        <a:rPr lang="en-US" sz="1400" dirty="0"/>
+                      </a:br>
+                      <a:r>
+                        <a:rPr lang="en-US" sz="1400" dirty="0">
+                          <a:latin typeface="Courier New" panose="02070309020205020404" pitchFamily="49" charset="0"/>
+                        </a:rPr>
+                        <a:t>margin: 10px;</a:t>
+                      </a:r>
+                      <a:r>
+                        <a:rPr lang="en-US" sz="1400" dirty="0"/>
+                        <a:t> (all sides) </a:t>
+                      </a:r>
+                      <a:br>
+                        <a:rPr lang="en-US" sz="1400" dirty="0"/>
+                      </a:br>
+                      <a:r>
+                        <a:rPr lang="en-US" sz="1400" dirty="0">
+                          <a:latin typeface="Courier New" panose="02070309020205020404" pitchFamily="49" charset="0"/>
+                        </a:rPr>
+                        <a:t>margin: 10px 20px;</a:t>
+                      </a:r>
+                      <a:r>
+                        <a:rPr lang="en-US" sz="1400" dirty="0"/>
+                        <a:t> (top/bottom 10px, left/right 20px)</a:t>
+                      </a:r>
+                    </a:p>
+                  </a:txBody>
+                  <a:tcPr anchor="ctr">
+                    <a:lnL>
+                      <a:noFill/>
+                    </a:lnL>
+                    <a:lnR>
+                      <a:noFill/>
+                    </a:lnR>
+                    <a:lnT>
+                      <a:noFill/>
+                    </a:lnT>
+                    <a:lnB>
+                      <a:noFill/>
+                    </a:lnB>
+                    <a:noFill/>
+                  </a:tcPr>
+                </a:tc>
+                <a:extLst>
+                  <a:ext uri="{0D108BD9-81ED-4DB2-BD59-A6C34878D82A}">
+                    <a16:rowId xmlns:a16="http://schemas.microsoft.com/office/drawing/2014/main" val="3535661373"/>
+                  </a:ext>
+                </a:extLst>
+              </a:tr>
+            </a:tbl>
+          </a:graphicData>
+        </a:graphic>
+      </p:graphicFrame>
+      <p:graphicFrame>
+        <p:nvGraphicFramePr>
+          <p:cNvPr id="12" name="Table 11">
+            <a:extLst>
+              <a:ext uri="{FF2B5EF4-FFF2-40B4-BE49-F238E27FC236}">
+                <a16:creationId xmlns:a16="http://schemas.microsoft.com/office/drawing/2014/main" id="{D9015B55-EE38-6052-0072-33D30B3ED2EF}"/>
+              </a:ext>
+            </a:extLst>
+          </p:cNvPr>
+          <p:cNvGraphicFramePr>
+            <a:graphicFrameLocks noGrp="1"/>
+          </p:cNvGraphicFramePr>
+          <p:nvPr>
+            <p:extLst>
+              <p:ext uri="{D42A27DB-BD31-4B8C-83A1-F6EECF244321}">
+                <p14:modId xmlns:p14="http://schemas.microsoft.com/office/powerpoint/2010/main" val="3949055021"/>
+              </p:ext>
+            </p:extLst>
+          </p:nvPr>
+        </p:nvGraphicFramePr>
+        <p:xfrm>
+          <a:off x="580860" y="5187446"/>
+          <a:ext cx="11029948" cy="1463040"/>
+        </p:xfrm>
+        <a:graphic>
+          <a:graphicData uri="http://schemas.openxmlformats.org/drawingml/2006/table">
+            <a:tbl>
+              <a:tblPr/>
+              <a:tblGrid>
+                <a:gridCol w="2757487">
+                  <a:extLst>
+                    <a:ext uri="{9D8B030D-6E8A-4147-A177-3AD203B41FA5}">
+                      <a16:colId xmlns:a16="http://schemas.microsoft.com/office/drawing/2014/main" val="2508775333"/>
+                    </a:ext>
+                  </a:extLst>
+                </a:gridCol>
+                <a:gridCol w="2757487">
+                  <a:extLst>
+                    <a:ext uri="{9D8B030D-6E8A-4147-A177-3AD203B41FA5}">
+                      <a16:colId xmlns:a16="http://schemas.microsoft.com/office/drawing/2014/main" val="1465640963"/>
+                    </a:ext>
+                  </a:extLst>
+                </a:gridCol>
+                <a:gridCol w="2757487">
+                  <a:extLst>
+                    <a:ext uri="{9D8B030D-6E8A-4147-A177-3AD203B41FA5}">
+                      <a16:colId xmlns:a16="http://schemas.microsoft.com/office/drawing/2014/main" val="4004706644"/>
+                    </a:ext>
+                  </a:extLst>
+                </a:gridCol>
+                <a:gridCol w="2757487">
+                  <a:extLst>
+                    <a:ext uri="{9D8B030D-6E8A-4147-A177-3AD203B41FA5}">
+                      <a16:colId xmlns:a16="http://schemas.microsoft.com/office/drawing/2014/main" val="3149724148"/>
+                    </a:ext>
+                  </a:extLst>
+                </a:gridCol>
+              </a:tblGrid>
+              <a:tr h="1463040">
+                <a:tc>
+                  <a:txBody>
+                    <a:bodyPr/>
+                    <a:lstStyle/>
+                    <a:p>
+                      <a:pPr>
+                        <a:buNone/>
+                      </a:pPr>
+                      <a:r>
+                        <a:rPr lang="en-US" sz="1400" b="1" dirty="0"/>
+                        <a:t>Padding</a:t>
+                      </a:r>
+                      <a:endParaRPr lang="en-US" sz="1400" dirty="0"/>
+                    </a:p>
+                  </a:txBody>
+                  <a:tcPr anchor="ctr">
+                    <a:lnL>
+                      <a:noFill/>
+                    </a:lnL>
+                    <a:lnR>
+                      <a:noFill/>
+                    </a:lnR>
+                    <a:lnT>
+                      <a:noFill/>
+                    </a:lnT>
+                    <a:lnB>
+                      <a:noFill/>
+                    </a:lnB>
+                    <a:noFill/>
+                  </a:tcPr>
+                </a:tc>
+                <a:tc>
+                  <a:txBody>
+                    <a:bodyPr/>
+                    <a:lstStyle/>
+                    <a:p>
+                      <a:pPr>
+                        <a:buNone/>
+                      </a:pPr>
+                      <a:r>
+                        <a:rPr lang="en-US" sz="1400" dirty="0"/>
+                        <a:t>Space </a:t>
+                      </a:r>
+                      <a:r>
+                        <a:rPr lang="en-US" sz="1400" b="1" dirty="0"/>
+                        <a:t>inside</a:t>
+                      </a:r>
+                      <a:r>
+                        <a:rPr lang="en-US" sz="1400" dirty="0"/>
+                        <a:t> the element, between the content and the border</a:t>
+                      </a:r>
+                    </a:p>
+                  </a:txBody>
+                  <a:tcPr anchor="ctr">
+                    <a:lnL>
+                      <a:noFill/>
+                    </a:lnL>
+                    <a:lnR>
+                      <a:noFill/>
+                    </a:lnR>
+                    <a:lnT>
+                      <a:noFill/>
+                    </a:lnT>
+                    <a:lnB>
+                      <a:noFill/>
+                    </a:lnB>
+                    <a:noFill/>
+                  </a:tcPr>
+                </a:tc>
+                <a:tc>
+                  <a:txBody>
+                    <a:bodyPr/>
+                    <a:lstStyle/>
+                    <a:p>
+                      <a:pPr>
+                        <a:buNone/>
+                      </a:pPr>
+                      <a:r>
+                        <a:rPr lang="en-US" sz="1400">
+                          <a:latin typeface="Courier New" panose="02070309020205020404" pitchFamily="49" charset="0"/>
+                        </a:rPr>
+                        <a:t>padding-top</a:t>
+                      </a:r>
+                      <a:r>
+                        <a:rPr lang="en-US" sz="1400"/>
+                        <a:t>, </a:t>
+                      </a:r>
+                      <a:r>
+                        <a:rPr lang="en-US" sz="1400">
+                          <a:latin typeface="Courier New" panose="02070309020205020404" pitchFamily="49" charset="0"/>
+                        </a:rPr>
+                        <a:t>padding-right</a:t>
+                      </a:r>
+                      <a:r>
+                        <a:rPr lang="en-US" sz="1400"/>
+                        <a:t>, </a:t>
+                      </a:r>
+                      <a:r>
+                        <a:rPr lang="en-US" sz="1400">
+                          <a:latin typeface="Courier New" panose="02070309020205020404" pitchFamily="49" charset="0"/>
+                        </a:rPr>
+                        <a:t>padding-bottom</a:t>
+                      </a:r>
+                      <a:r>
+                        <a:rPr lang="en-US" sz="1400"/>
+                        <a:t>, </a:t>
+                      </a:r>
+                      <a:r>
+                        <a:rPr lang="en-US" sz="1400">
+                          <a:latin typeface="Courier New" panose="02070309020205020404" pitchFamily="49" charset="0"/>
+                        </a:rPr>
+                        <a:t>padding-left</a:t>
+                      </a:r>
+                      <a:endParaRPr lang="en-US" sz="1400"/>
+                    </a:p>
+                  </a:txBody>
+                  <a:tcPr anchor="ctr">
+                    <a:lnL>
+                      <a:noFill/>
+                    </a:lnL>
+                    <a:lnR>
+                      <a:noFill/>
+                    </a:lnR>
+                    <a:lnT>
+                      <a:noFill/>
+                    </a:lnT>
+                    <a:lnB>
+                      <a:noFill/>
+                    </a:lnB>
+                    <a:noFill/>
+                  </a:tcPr>
+                </a:tc>
+                <a:tc>
+                  <a:txBody>
+                    <a:bodyPr/>
+                    <a:lstStyle/>
+                    <a:p>
+                      <a:pPr>
+                        <a:buNone/>
+                      </a:pPr>
+                      <a:r>
+                        <a:rPr lang="en-US" sz="1400" dirty="0">
+                          <a:latin typeface="Courier New" panose="02070309020205020404" pitchFamily="49" charset="0"/>
+                        </a:rPr>
+                        <a:t>padding: top right bottom left;</a:t>
+                      </a:r>
+                      <a:r>
+                        <a:rPr lang="en-US" sz="1400" dirty="0"/>
+                        <a:t> </a:t>
+                      </a:r>
+                      <a:br>
+                        <a:rPr lang="en-US" sz="1400" dirty="0"/>
+                      </a:br>
+                      <a:r>
+                        <a:rPr lang="en-US" sz="1400" dirty="0"/>
+                        <a:t>Examples: </a:t>
+                      </a:r>
+                      <a:br>
+                        <a:rPr lang="en-US" sz="1400" dirty="0"/>
+                      </a:br>
+                      <a:r>
+                        <a:rPr lang="en-US" sz="1400" dirty="0">
+                          <a:latin typeface="Courier New" panose="02070309020205020404" pitchFamily="49" charset="0"/>
+                        </a:rPr>
+                        <a:t>padding: 5px;</a:t>
+                      </a:r>
+                      <a:r>
+                        <a:rPr lang="en-US" sz="1400" dirty="0"/>
+                        <a:t> </a:t>
+                      </a:r>
+                      <a:br>
+                        <a:rPr lang="en-US" sz="1400" dirty="0"/>
+                      </a:br>
+                      <a:r>
+                        <a:rPr lang="en-US" sz="1400" dirty="0">
+                          <a:latin typeface="Courier New" panose="02070309020205020404" pitchFamily="49" charset="0"/>
+                        </a:rPr>
+                        <a:t>padding: 5px 10px;</a:t>
+                      </a:r>
+                    </a:p>
+                    <a:p>
+                      <a:pPr>
+                        <a:buNone/>
+                      </a:pPr>
+                      <a:r>
+                        <a:rPr lang="en-US" sz="1400" dirty="0"/>
+                        <a:t>(top/bottom 5px, left/right 10px)</a:t>
+                      </a:r>
+                    </a:p>
+                  </a:txBody>
+                  <a:tcPr anchor="ctr">
+                    <a:lnL>
+                      <a:noFill/>
+                    </a:lnL>
+                    <a:lnR>
+                      <a:noFill/>
+                    </a:lnR>
+                    <a:lnT>
+                      <a:noFill/>
+                    </a:lnT>
+                    <a:lnB>
+                      <a:noFill/>
+                    </a:lnB>
+                    <a:noFill/>
+                  </a:tcPr>
+                </a:tc>
+                <a:extLst>
+                  <a:ext uri="{0D108BD9-81ED-4DB2-BD59-A6C34878D82A}">
+                    <a16:rowId xmlns:a16="http://schemas.microsoft.com/office/drawing/2014/main" val="196593268"/>
+                  </a:ext>
+                </a:extLst>
+              </a:tr>
+            </a:tbl>
+          </a:graphicData>
+        </a:graphic>
+      </p:graphicFrame>
+      <p:graphicFrame>
+        <p:nvGraphicFramePr>
+          <p:cNvPr id="13" name="Table 12">
+            <a:extLst>
+              <a:ext uri="{FF2B5EF4-FFF2-40B4-BE49-F238E27FC236}">
+                <a16:creationId xmlns:a16="http://schemas.microsoft.com/office/drawing/2014/main" id="{AEE1253A-7C22-CEC4-CEA9-66FB6DFE7F0A}"/>
+              </a:ext>
+            </a:extLst>
+          </p:cNvPr>
+          <p:cNvGraphicFramePr>
+            <a:graphicFrameLocks noGrp="1"/>
+          </p:cNvGraphicFramePr>
+          <p:nvPr>
+            <p:extLst>
+              <p:ext uri="{D42A27DB-BD31-4B8C-83A1-F6EECF244321}">
+                <p14:modId xmlns:p14="http://schemas.microsoft.com/office/powerpoint/2010/main" val="223359050"/>
+              </p:ext>
+            </p:extLst>
+          </p:nvPr>
+        </p:nvGraphicFramePr>
+        <p:xfrm>
+          <a:off x="580860" y="2385970"/>
+          <a:ext cx="11029948" cy="1158240"/>
+        </p:xfrm>
+        <a:graphic>
+          <a:graphicData uri="http://schemas.openxmlformats.org/drawingml/2006/table">
+            <a:tbl>
+              <a:tblPr/>
+              <a:tblGrid>
+                <a:gridCol w="2757487">
+                  <a:extLst>
+                    <a:ext uri="{9D8B030D-6E8A-4147-A177-3AD203B41FA5}">
+                      <a16:colId xmlns:a16="http://schemas.microsoft.com/office/drawing/2014/main" val="2774344880"/>
+                    </a:ext>
+                  </a:extLst>
+                </a:gridCol>
+                <a:gridCol w="2757487">
+                  <a:extLst>
+                    <a:ext uri="{9D8B030D-6E8A-4147-A177-3AD203B41FA5}">
+                      <a16:colId xmlns:a16="http://schemas.microsoft.com/office/drawing/2014/main" val="3855239331"/>
+                    </a:ext>
+                  </a:extLst>
+                </a:gridCol>
+                <a:gridCol w="2757487">
+                  <a:extLst>
+                    <a:ext uri="{9D8B030D-6E8A-4147-A177-3AD203B41FA5}">
+                      <a16:colId xmlns:a16="http://schemas.microsoft.com/office/drawing/2014/main" val="152789516"/>
+                    </a:ext>
+                  </a:extLst>
+                </a:gridCol>
+                <a:gridCol w="2757487">
+                  <a:extLst>
+                    <a:ext uri="{9D8B030D-6E8A-4147-A177-3AD203B41FA5}">
+                      <a16:colId xmlns:a16="http://schemas.microsoft.com/office/drawing/2014/main" val="3985031510"/>
+                    </a:ext>
+                  </a:extLst>
+                </a:gridCol>
+              </a:tblGrid>
+              <a:tr h="1146531">
+                <a:tc>
+                  <a:txBody>
+                    <a:bodyPr/>
+                    <a:lstStyle/>
+                    <a:p>
+                      <a:pPr>
+                        <a:buNone/>
+                      </a:pPr>
+                      <a:r>
+                        <a:rPr lang="en-US" sz="1400" b="1" dirty="0"/>
+                        <a:t>Border</a:t>
+                      </a:r>
+                      <a:endParaRPr lang="en-US" sz="1400" dirty="0"/>
+                    </a:p>
+                  </a:txBody>
+                  <a:tcPr anchor="ctr">
+                    <a:lnL>
+                      <a:noFill/>
+                    </a:lnL>
+                    <a:lnR>
+                      <a:noFill/>
+                    </a:lnR>
+                    <a:lnT>
+                      <a:noFill/>
+                    </a:lnT>
+                    <a:lnB>
+                      <a:noFill/>
+                    </a:lnB>
+                    <a:noFill/>
+                  </a:tcPr>
+                </a:tc>
+                <a:tc>
+                  <a:txBody>
+                    <a:bodyPr/>
+                    <a:lstStyle/>
+                    <a:p>
+                      <a:pPr>
+                        <a:buNone/>
+                      </a:pPr>
+                      <a:r>
+                        <a:rPr lang="en-US" sz="1400"/>
+                        <a:t>Line surrounding the element’s padding (inside margin)</a:t>
+                      </a:r>
+                    </a:p>
+                  </a:txBody>
+                  <a:tcPr anchor="ctr">
+                    <a:lnL>
+                      <a:noFill/>
+                    </a:lnL>
+                    <a:lnR>
+                      <a:noFill/>
+                    </a:lnR>
+                    <a:lnT>
+                      <a:noFill/>
+                    </a:lnT>
+                    <a:lnB>
+                      <a:noFill/>
+                    </a:lnB>
+                    <a:noFill/>
+                  </a:tcPr>
+                </a:tc>
+                <a:tc>
+                  <a:txBody>
+                    <a:bodyPr/>
+                    <a:lstStyle/>
+                    <a:p>
+                      <a:pPr>
+                        <a:buNone/>
+                      </a:pPr>
+                      <a:r>
+                        <a:rPr lang="en-US" sz="1400">
+                          <a:latin typeface="Courier New" panose="02070309020205020404" pitchFamily="49" charset="0"/>
+                        </a:rPr>
+                        <a:t>border-width</a:t>
+                      </a:r>
+                      <a:r>
+                        <a:rPr lang="en-US" sz="1400"/>
+                        <a:t>, </a:t>
+                      </a:r>
+                      <a:r>
+                        <a:rPr lang="en-US" sz="1400">
+                          <a:latin typeface="Courier New" panose="02070309020205020404" pitchFamily="49" charset="0"/>
+                        </a:rPr>
+                        <a:t>border-style</a:t>
+                      </a:r>
+                      <a:r>
+                        <a:rPr lang="en-US" sz="1400"/>
+                        <a:t>, </a:t>
+                      </a:r>
+                      <a:r>
+                        <a:rPr lang="en-US" sz="1400">
+                          <a:latin typeface="Courier New" panose="02070309020205020404" pitchFamily="49" charset="0"/>
+                        </a:rPr>
+                        <a:t>border-color</a:t>
+                      </a:r>
+                      <a:r>
+                        <a:rPr lang="en-US" sz="1400"/>
+                        <a:t> </a:t>
+                      </a:r>
+                      <a:br>
+                        <a:rPr lang="en-US" sz="1400"/>
+                      </a:br>
+                      <a:r>
+                        <a:rPr lang="en-US" sz="1400">
+                          <a:latin typeface="Courier New" panose="02070309020205020404" pitchFamily="49" charset="0"/>
+                        </a:rPr>
+                        <a:t>border-top</a:t>
+                      </a:r>
+                      <a:r>
+                        <a:rPr lang="en-US" sz="1400"/>
+                        <a:t>, </a:t>
+                      </a:r>
+                      <a:r>
+                        <a:rPr lang="en-US" sz="1400">
+                          <a:latin typeface="Courier New" panose="02070309020205020404" pitchFamily="49" charset="0"/>
+                        </a:rPr>
+                        <a:t>border-right</a:t>
+                      </a:r>
+                      <a:r>
+                        <a:rPr lang="en-US" sz="1400"/>
+                        <a:t>, </a:t>
+                      </a:r>
+                      <a:r>
+                        <a:rPr lang="en-US" sz="1400">
+                          <a:latin typeface="Courier New" panose="02070309020205020404" pitchFamily="49" charset="0"/>
+                        </a:rPr>
+                        <a:t>border-bottom</a:t>
+                      </a:r>
+                      <a:r>
+                        <a:rPr lang="en-US" sz="1400"/>
+                        <a:t>, </a:t>
+                      </a:r>
+                      <a:r>
+                        <a:rPr lang="en-US" sz="1400">
+                          <a:latin typeface="Courier New" panose="02070309020205020404" pitchFamily="49" charset="0"/>
+                        </a:rPr>
+                        <a:t>border-left</a:t>
+                      </a:r>
+                      <a:endParaRPr lang="en-US" sz="1400"/>
+                    </a:p>
+                  </a:txBody>
+                  <a:tcPr anchor="ctr">
+                    <a:lnL>
+                      <a:noFill/>
+                    </a:lnL>
+                    <a:lnR>
+                      <a:noFill/>
+                    </a:lnR>
+                    <a:lnT>
+                      <a:noFill/>
+                    </a:lnT>
+                    <a:lnB>
+                      <a:noFill/>
+                    </a:lnB>
+                    <a:noFill/>
+                  </a:tcPr>
+                </a:tc>
+                <a:tc>
+                  <a:txBody>
+                    <a:bodyPr/>
+                    <a:lstStyle/>
+                    <a:p>
+                      <a:pPr>
+                        <a:buNone/>
+                      </a:pPr>
+                      <a:r>
+                        <a:rPr lang="en-US" sz="1400" dirty="0">
+                          <a:latin typeface="Courier New" panose="02070309020205020404" pitchFamily="49" charset="0"/>
+                        </a:rPr>
+                        <a:t>border: width style color;</a:t>
+                      </a:r>
+                      <a:r>
+                        <a:rPr lang="en-US" sz="1400" dirty="0"/>
+                        <a:t> </a:t>
+                      </a:r>
+                      <a:br>
+                        <a:rPr lang="en-US" sz="1400" dirty="0"/>
+                      </a:br>
+                      <a:r>
+                        <a:rPr lang="en-US" sz="1400" dirty="0"/>
+                        <a:t>Example: </a:t>
+                      </a:r>
+                      <a:r>
+                        <a:rPr lang="en-US" sz="1400" dirty="0">
+                          <a:latin typeface="Courier New" panose="02070309020205020404" pitchFamily="49" charset="0"/>
+                        </a:rPr>
+                        <a:t>border: 2px solid black;</a:t>
+                      </a:r>
+                      <a:endParaRPr lang="en-US" sz="1400" dirty="0"/>
+                    </a:p>
+                  </a:txBody>
+                  <a:tcPr anchor="ctr">
+                    <a:lnL>
+                      <a:noFill/>
+                    </a:lnL>
+                    <a:lnR>
+                      <a:noFill/>
+                    </a:lnR>
+                    <a:lnT>
+                      <a:noFill/>
+                    </a:lnT>
+                    <a:lnB>
+                      <a:noFill/>
+                    </a:lnB>
+                    <a:noFill/>
+                  </a:tcPr>
+                </a:tc>
+                <a:extLst>
+                  <a:ext uri="{0D108BD9-81ED-4DB2-BD59-A6C34878D82A}">
+                    <a16:rowId xmlns:a16="http://schemas.microsoft.com/office/drawing/2014/main" val="4135985548"/>
+                  </a:ext>
+                </a:extLst>
+              </a:tr>
+            </a:tbl>
+          </a:graphicData>
+        </a:graphic>
+      </p:graphicFrame>
+    </p:spTree>
+    <p:extLst>
+      <p:ext uri="{BB962C8B-B14F-4D97-AF65-F5344CB8AC3E}">
+        <p14:creationId xmlns:p14="http://schemas.microsoft.com/office/powerpoint/2010/main" val="4035722194"/>
+      </p:ext>
+    </p:extLst>
+  </p:cSld>
+  <p:clrMapOvr>
+    <a:masterClrMapping/>
+  </p:clrMapOvr>
+</p:sld>
+</file>
+
+<file path=ppt/slides/slide36.xml><?xml version="1.0" encoding="utf-8"?>
+<p:sld xmlns:a="http://schemas.openxmlformats.org/drawingml/2006/main" xmlns:r="http://schemas.openxmlformats.org/officeDocument/2006/relationships" xmlns:p="http://schemas.openxmlformats.org/presentationml/2006/main">
+  <p:cSld>
+    <p:spTree>
+      <p:nvGrpSpPr>
+        <p:cNvPr id="1" name="">
+          <a:extLst>
+            <a:ext uri="{FF2B5EF4-FFF2-40B4-BE49-F238E27FC236}">
+              <a16:creationId xmlns:a16="http://schemas.microsoft.com/office/drawing/2014/main" id="{3407863B-D547-B6E9-B48C-196755A50169}"/>
+            </a:ext>
+          </a:extLst>
+        </p:cNvPr>
+        <p:cNvGrpSpPr/>
+        <p:nvPr/>
+      </p:nvGrpSpPr>
+      <p:grpSpPr>
+        <a:xfrm>
+          <a:off x="0" y="0"/>
+          <a:ext cx="0" cy="0"/>
+          <a:chOff x="0" y="0"/>
+          <a:chExt cx="0" cy="0"/>
+        </a:xfrm>
+      </p:grpSpPr>
+      <p:sp>
+        <p:nvSpPr>
+          <p:cNvPr id="2" name="Title 1">
+            <a:extLst>
+              <a:ext uri="{FF2B5EF4-FFF2-40B4-BE49-F238E27FC236}">
+                <a16:creationId xmlns:a16="http://schemas.microsoft.com/office/drawing/2014/main" id="{34716E9E-D710-0C26-0550-FCFF35177DDF}"/>
+              </a:ext>
+            </a:extLst>
+          </p:cNvPr>
+          <p:cNvSpPr>
+            <a:spLocks noGrp="1"/>
+          </p:cNvSpPr>
+          <p:nvPr>
+            <p:ph type="title"/>
+          </p:nvPr>
+        </p:nvSpPr>
+        <p:spPr/>
+        <p:txBody>
+          <a:bodyPr/>
+          <a:lstStyle/>
+          <a:p>
+            <a:r>
+              <a:rPr lang="en-US" dirty="0"/>
+              <a:t>Challenge – Use the Box model</a:t>
+            </a:r>
+          </a:p>
+        </p:txBody>
+      </p:sp>
+      <p:sp>
+        <p:nvSpPr>
+          <p:cNvPr id="3" name="Content Placeholder 2">
+            <a:extLst>
+              <a:ext uri="{FF2B5EF4-FFF2-40B4-BE49-F238E27FC236}">
+                <a16:creationId xmlns:a16="http://schemas.microsoft.com/office/drawing/2014/main" id="{FF618DFF-139E-25E3-D673-3BBEC0C9350B}"/>
+              </a:ext>
+            </a:extLst>
+          </p:cNvPr>
+          <p:cNvSpPr>
+            <a:spLocks noGrp="1"/>
+          </p:cNvSpPr>
+          <p:nvPr>
+            <p:ph idx="1"/>
+          </p:nvPr>
+        </p:nvSpPr>
+        <p:spPr>
+          <a:xfrm>
+            <a:off x="581192" y="2475925"/>
+            <a:ext cx="5317584" cy="1681246"/>
+          </a:xfrm>
+        </p:spPr>
+        <p:txBody>
+          <a:bodyPr/>
+          <a:lstStyle/>
+          <a:p>
+            <a:r>
+              <a:rPr lang="en-US" dirty="0"/>
+              <a:t>Format our header and main content</a:t>
+            </a:r>
+          </a:p>
+        </p:txBody>
+      </p:sp>
+      <p:sp>
+        <p:nvSpPr>
+          <p:cNvPr id="6" name="TextBox 5">
+            <a:extLst>
+              <a:ext uri="{FF2B5EF4-FFF2-40B4-BE49-F238E27FC236}">
+                <a16:creationId xmlns:a16="http://schemas.microsoft.com/office/drawing/2014/main" id="{6E3502EA-B966-B1B1-8E96-6E3BD5FF6D4C}"/>
+              </a:ext>
+            </a:extLst>
+          </p:cNvPr>
+          <p:cNvSpPr txBox="1"/>
+          <p:nvPr/>
+        </p:nvSpPr>
+        <p:spPr>
+          <a:xfrm>
+            <a:off x="1228165" y="2402747"/>
+            <a:ext cx="756938" cy="369332"/>
+          </a:xfrm>
+          <a:prstGeom prst="rect">
+            <a:avLst/>
+          </a:prstGeom>
+          <a:noFill/>
+        </p:spPr>
+        <p:txBody>
+          <a:bodyPr wrap="none" rtlCol="0">
+            <a:spAutoFit/>
+          </a:bodyPr>
+          <a:lstStyle/>
+          <a:p>
+            <a:r>
+              <a:rPr lang="en-US" b="1" dirty="0"/>
+              <a:t>Goal:</a:t>
+            </a:r>
+          </a:p>
+        </p:txBody>
+      </p:sp>
+      <p:sp>
+        <p:nvSpPr>
+          <p:cNvPr id="7" name="TextBox 6">
+            <a:extLst>
+              <a:ext uri="{FF2B5EF4-FFF2-40B4-BE49-F238E27FC236}">
+                <a16:creationId xmlns:a16="http://schemas.microsoft.com/office/drawing/2014/main" id="{4CAB9BF4-D42B-7592-E884-426D49FF81F2}"/>
+              </a:ext>
+            </a:extLst>
+          </p:cNvPr>
+          <p:cNvSpPr txBox="1"/>
+          <p:nvPr/>
+        </p:nvSpPr>
+        <p:spPr>
+          <a:xfrm>
+            <a:off x="6545749" y="2402747"/>
+            <a:ext cx="5065059" cy="369332"/>
+          </a:xfrm>
+          <a:prstGeom prst="rect">
+            <a:avLst/>
+          </a:prstGeom>
+          <a:noFill/>
+        </p:spPr>
+        <p:txBody>
+          <a:bodyPr wrap="square" rtlCol="0">
+            <a:spAutoFit/>
+          </a:bodyPr>
+          <a:lstStyle/>
+          <a:p>
+            <a:r>
+              <a:rPr lang="en-US" b="1" dirty="0"/>
+              <a:t>Scenario:  			   10 min</a:t>
+            </a:r>
+          </a:p>
+        </p:txBody>
+      </p:sp>
+      <p:sp>
+        <p:nvSpPr>
+          <p:cNvPr id="8" name="Content Placeholder 2">
+            <a:extLst>
+              <a:ext uri="{FF2B5EF4-FFF2-40B4-BE49-F238E27FC236}">
+                <a16:creationId xmlns:a16="http://schemas.microsoft.com/office/drawing/2014/main" id="{66BC24F5-83F0-3E94-440B-4C8B925DFA05}"/>
+              </a:ext>
+            </a:extLst>
+          </p:cNvPr>
+          <p:cNvSpPr txBox="1">
+            <a:spLocks/>
+          </p:cNvSpPr>
+          <p:nvPr/>
+        </p:nvSpPr>
+        <p:spPr>
+          <a:xfrm>
+            <a:off x="6545749" y="2772078"/>
+            <a:ext cx="4661642" cy="3639113"/>
+          </a:xfrm>
+          <a:prstGeom prst="rect">
+            <a:avLst/>
+          </a:prstGeom>
+        </p:spPr>
+        <p:txBody>
+          <a:bodyPr vert="horz" lIns="91440" tIns="45720" rIns="91440" bIns="45720" rtlCol="0" anchor="ctr">
+            <a:normAutofit/>
+          </a:bodyPr>
+          <a:lstStyle>
+            <a:lvl1pPr marL="306000" indent="-306000" algn="l" defTabSz="457200" rtl="0" eaLnBrk="1" latinLnBrk="0" hangingPunct="1">
+              <a:spcBef>
+                <a:spcPct val="20000"/>
+              </a:spcBef>
+              <a:spcAft>
+                <a:spcPts val="600"/>
+              </a:spcAft>
+              <a:buClr>
+                <a:schemeClr val="accent2"/>
+              </a:buClr>
+              <a:buSzPct val="92000"/>
+              <a:buFont typeface="Wingdings 2" panose="05020102010507070707" pitchFamily="18" charset="2"/>
+              <a:buChar char=""/>
+              <a:defRPr sz="1800" kern="1200">
+                <a:solidFill>
+                  <a:schemeClr val="tx2"/>
+                </a:solidFill>
+                <a:latin typeface="+mn-lt"/>
+                <a:ea typeface="+mn-ea"/>
+                <a:cs typeface="+mn-cs"/>
+              </a:defRPr>
+            </a:lvl1pPr>
+            <a:lvl2pPr marL="630000" indent="-306000" algn="l" defTabSz="457200" rtl="0" eaLnBrk="1" latinLnBrk="0" hangingPunct="1">
+              <a:spcBef>
+                <a:spcPct val="20000"/>
+              </a:spcBef>
+              <a:spcAft>
+                <a:spcPts val="600"/>
+              </a:spcAft>
+              <a:buClr>
+                <a:schemeClr val="accent2"/>
+              </a:buClr>
+              <a:buSzPct val="92000"/>
+              <a:buFont typeface="Wingdings 2" panose="05020102010507070707" pitchFamily="18" charset="2"/>
+              <a:buChar char=""/>
+              <a:defRPr sz="1600" kern="1200">
+                <a:solidFill>
+                  <a:schemeClr val="tx2"/>
+                </a:solidFill>
+                <a:latin typeface="+mn-lt"/>
+                <a:ea typeface="+mn-ea"/>
+                <a:cs typeface="+mn-cs"/>
+              </a:defRPr>
+            </a:lvl2pPr>
+            <a:lvl3pPr marL="900000" indent="-270000" algn="l" defTabSz="457200" rtl="0" eaLnBrk="1" latinLnBrk="0" hangingPunct="1">
+              <a:spcBef>
+                <a:spcPct val="20000"/>
+              </a:spcBef>
+              <a:spcAft>
+                <a:spcPts val="600"/>
+              </a:spcAft>
+              <a:buClr>
+                <a:schemeClr val="accent2"/>
+              </a:buClr>
+              <a:buSzPct val="92000"/>
+              <a:buFont typeface="Wingdings 2" panose="05020102010507070707" pitchFamily="18" charset="2"/>
+              <a:buChar char=""/>
+              <a:defRPr sz="1400" kern="1200">
+                <a:solidFill>
+                  <a:schemeClr val="tx2"/>
+                </a:solidFill>
+                <a:latin typeface="+mn-lt"/>
+                <a:ea typeface="+mn-ea"/>
+                <a:cs typeface="+mn-cs"/>
+              </a:defRPr>
+            </a:lvl3pPr>
+            <a:lvl4pPr marL="1242000" indent="-234000" algn="l" defTabSz="457200" rtl="0" eaLnBrk="1" latinLnBrk="0" hangingPunct="1">
+              <a:spcBef>
+                <a:spcPct val="20000"/>
+              </a:spcBef>
+              <a:spcAft>
+                <a:spcPts val="600"/>
+              </a:spcAft>
+              <a:buClr>
+                <a:schemeClr val="accent2"/>
+              </a:buClr>
+              <a:buSzPct val="92000"/>
+              <a:buFont typeface="Wingdings 2" panose="05020102010507070707" pitchFamily="18" charset="2"/>
+              <a:buChar char=""/>
+              <a:defRPr sz="1200" kern="1200">
+                <a:solidFill>
+                  <a:schemeClr val="tx2"/>
+                </a:solidFill>
+                <a:latin typeface="+mn-lt"/>
+                <a:ea typeface="+mn-ea"/>
+                <a:cs typeface="+mn-cs"/>
+              </a:defRPr>
+            </a:lvl4pPr>
+            <a:lvl5pPr marL="1602000" indent="-234000" algn="l" defTabSz="457200" rtl="0" eaLnBrk="1" latinLnBrk="0" hangingPunct="1">
+              <a:spcBef>
+                <a:spcPct val="20000"/>
+              </a:spcBef>
+              <a:spcAft>
+                <a:spcPts val="600"/>
+              </a:spcAft>
+              <a:buClr>
+                <a:schemeClr val="accent2"/>
+              </a:buClr>
+              <a:buSzPct val="92000"/>
+              <a:buFont typeface="Wingdings 2" panose="05020102010507070707" pitchFamily="18" charset="2"/>
+              <a:buChar char=""/>
+              <a:defRPr sz="1200" kern="1200">
+                <a:solidFill>
+                  <a:schemeClr val="tx2"/>
+                </a:solidFill>
+                <a:latin typeface="+mn-lt"/>
+                <a:ea typeface="+mn-ea"/>
+                <a:cs typeface="+mn-cs"/>
+              </a:defRPr>
+            </a:lvl5pPr>
+            <a:lvl6pPr marL="1900000" indent="-228600" algn="l" defTabSz="457200" rtl="0" eaLnBrk="1" latinLnBrk="0" hangingPunct="1">
+              <a:spcBef>
+                <a:spcPct val="20000"/>
+              </a:spcBef>
+              <a:spcAft>
+                <a:spcPts val="600"/>
+              </a:spcAft>
+              <a:buClr>
+                <a:schemeClr val="accent2"/>
+              </a:buClr>
+              <a:buSzPct val="92000"/>
+              <a:buFont typeface="Wingdings 2" panose="05020102010507070707" pitchFamily="18" charset="2"/>
+              <a:buChar char=""/>
+              <a:defRPr sz="1200" kern="1200">
+                <a:solidFill>
+                  <a:schemeClr val="tx2"/>
+                </a:solidFill>
+                <a:latin typeface="+mn-lt"/>
+                <a:ea typeface="+mn-ea"/>
+                <a:cs typeface="+mn-cs"/>
+              </a:defRPr>
+            </a:lvl6pPr>
+            <a:lvl7pPr marL="2200000" indent="-228600" algn="l" defTabSz="457200" rtl="0" eaLnBrk="1" latinLnBrk="0" hangingPunct="1">
+              <a:spcBef>
+                <a:spcPct val="20000"/>
+              </a:spcBef>
+              <a:spcAft>
+                <a:spcPts val="600"/>
+              </a:spcAft>
+              <a:buClr>
+                <a:schemeClr val="accent2"/>
+              </a:buClr>
+              <a:buSzPct val="92000"/>
+              <a:buFont typeface="Wingdings 2" panose="05020102010507070707" pitchFamily="18" charset="2"/>
+              <a:buChar char=""/>
+              <a:defRPr sz="1200" kern="1200">
+                <a:solidFill>
+                  <a:schemeClr val="tx2"/>
+                </a:solidFill>
+                <a:latin typeface="+mn-lt"/>
+                <a:ea typeface="+mn-ea"/>
+                <a:cs typeface="+mn-cs"/>
+              </a:defRPr>
+            </a:lvl7pPr>
+            <a:lvl8pPr marL="2500000" indent="-228600" algn="l" defTabSz="457200" rtl="0" eaLnBrk="1" latinLnBrk="0" hangingPunct="1">
+              <a:spcBef>
+                <a:spcPct val="20000"/>
+              </a:spcBef>
+              <a:spcAft>
+                <a:spcPts val="600"/>
+              </a:spcAft>
+              <a:buClr>
+                <a:schemeClr val="accent2"/>
+              </a:buClr>
+              <a:buSzPct val="92000"/>
+              <a:buFont typeface="Wingdings 2" panose="05020102010507070707" pitchFamily="18" charset="2"/>
+              <a:buChar char=""/>
+              <a:defRPr sz="1200" kern="1200">
+                <a:solidFill>
+                  <a:schemeClr val="tx2"/>
+                </a:solidFill>
+                <a:latin typeface="+mn-lt"/>
+                <a:ea typeface="+mn-ea"/>
+                <a:cs typeface="+mn-cs"/>
+              </a:defRPr>
+            </a:lvl8pPr>
+            <a:lvl9pPr marL="2800000" indent="-228600" algn="l" defTabSz="457200" rtl="0" eaLnBrk="1" latinLnBrk="0" hangingPunct="1">
+              <a:spcBef>
+                <a:spcPct val="20000"/>
+              </a:spcBef>
+              <a:spcAft>
+                <a:spcPts val="600"/>
+              </a:spcAft>
+              <a:buClr>
+                <a:schemeClr val="accent2"/>
+              </a:buClr>
+              <a:buSzPct val="92000"/>
+              <a:buFont typeface="Wingdings 2" panose="05020102010507070707" pitchFamily="18" charset="2"/>
+              <a:buChar char=""/>
+              <a:defRPr sz="1200" kern="1200">
+                <a:solidFill>
+                  <a:schemeClr val="tx2"/>
+                </a:solidFill>
+                <a:latin typeface="+mn-lt"/>
+                <a:ea typeface="+mn-ea"/>
+                <a:cs typeface="+mn-cs"/>
+              </a:defRPr>
+            </a:lvl9pPr>
+          </a:lstStyle>
+          <a:p>
+            <a:r>
+              <a:rPr lang="en-US" dirty="0"/>
+              <a:t>Your organization needs a static site to advertise their new product. </a:t>
+            </a:r>
+          </a:p>
+          <a:p>
+            <a:r>
+              <a:rPr lang="en-US" dirty="0"/>
+              <a:t>Further develop the site by formatting your header so that it takes up all the available width of its container</a:t>
+            </a:r>
+          </a:p>
+          <a:p>
+            <a:r>
+              <a:rPr lang="en-US" dirty="0"/>
+              <a:t>Format all other content so that it is 80% the width of the viewport, and center it on the page</a:t>
+            </a:r>
+          </a:p>
+        </p:txBody>
+      </p:sp>
+    </p:spTree>
+    <p:extLst>
+      <p:ext uri="{BB962C8B-B14F-4D97-AF65-F5344CB8AC3E}">
+        <p14:creationId xmlns:p14="http://schemas.microsoft.com/office/powerpoint/2010/main" val="3033564200"/>
+      </p:ext>
+    </p:extLst>
+  </p:cSld>
+  <p:clrMapOvr>
+    <a:masterClrMapping/>
+  </p:clrMapOvr>
+</p:sld>
+</file>
+
+<file path=ppt/slides/slide37.xml><?xml version="1.0" encoding="utf-8"?>
+<p:sld xmlns:a="http://schemas.openxmlformats.org/drawingml/2006/main" xmlns:r="http://schemas.openxmlformats.org/officeDocument/2006/relationships" xmlns:p="http://schemas.openxmlformats.org/presentationml/2006/main">
+  <p:cSld>
+    <p:spTree>
+      <p:nvGrpSpPr>
+        <p:cNvPr id="1" name=""/>
+        <p:cNvGrpSpPr/>
+        <p:nvPr/>
+      </p:nvGrpSpPr>
+      <p:grpSpPr>
+        <a:xfrm>
+          <a:off x="0" y="0"/>
+          <a:ext cx="0" cy="0"/>
+          <a:chOff x="0" y="0"/>
+          <a:chExt cx="0" cy="0"/>
+        </a:xfrm>
+      </p:grpSpPr>
+      <p:sp>
+        <p:nvSpPr>
+          <p:cNvPr id="2" name="Title 1">
+            <a:extLst>
+              <a:ext uri="{FF2B5EF4-FFF2-40B4-BE49-F238E27FC236}">
+                <a16:creationId xmlns:a16="http://schemas.microsoft.com/office/drawing/2014/main" id="{645E77BA-65EA-EC9D-1535-26751654F1B7}"/>
+              </a:ext>
+            </a:extLst>
+          </p:cNvPr>
+          <p:cNvSpPr>
+            <a:spLocks noGrp="1"/>
+          </p:cNvSpPr>
+          <p:nvPr>
+            <p:ph type="title"/>
+          </p:nvPr>
+        </p:nvSpPr>
+        <p:spPr/>
+        <p:txBody>
+          <a:bodyPr/>
+          <a:lstStyle/>
+          <a:p>
+            <a:r>
+              <a:rPr lang="en-US" dirty="0"/>
+              <a:t>Position</a:t>
+            </a:r>
+          </a:p>
+        </p:txBody>
+      </p:sp>
+      <p:sp>
+        <p:nvSpPr>
+          <p:cNvPr id="3" name="Content Placeholder 2">
+            <a:extLst>
+              <a:ext uri="{FF2B5EF4-FFF2-40B4-BE49-F238E27FC236}">
+                <a16:creationId xmlns:a16="http://schemas.microsoft.com/office/drawing/2014/main" id="{70F9B334-36F2-6646-9250-8477881D045B}"/>
+              </a:ext>
+            </a:extLst>
+          </p:cNvPr>
+          <p:cNvSpPr>
+            <a:spLocks noGrp="1"/>
+          </p:cNvSpPr>
+          <p:nvPr>
+            <p:ph idx="1"/>
+          </p:nvPr>
+        </p:nvSpPr>
+        <p:spPr>
+          <a:xfrm>
+            <a:off x="581193" y="2180496"/>
+            <a:ext cx="6328762" cy="4305694"/>
+          </a:xfrm>
+        </p:spPr>
+        <p:txBody>
+          <a:bodyPr>
+            <a:normAutofit lnSpcReduction="10000"/>
+          </a:bodyPr>
+          <a:lstStyle/>
+          <a:p>
+            <a:r>
+              <a:rPr lang="en-US" dirty="0"/>
+              <a:t>The position property in CSS determines how an element is positioned in the document and how it behaves relative to other elements. </a:t>
+            </a:r>
+          </a:p>
+          <a:p>
+            <a:r>
+              <a:rPr lang="en-US" dirty="0"/>
+              <a:t>Static – default position for all elements; Elements flow naturally.</a:t>
+            </a:r>
+          </a:p>
+          <a:p>
+            <a:r>
+              <a:rPr lang="en-US" dirty="0"/>
+              <a:t>Relative – Element is shifted relative to normal position with the top, left, right, and bottom properties. </a:t>
+            </a:r>
+          </a:p>
+          <a:p>
+            <a:r>
+              <a:rPr lang="en-US" dirty="0"/>
+              <a:t>Absolute – Element is positioned relative to its parent with the top, left, right, and bottom properties.</a:t>
+            </a:r>
+          </a:p>
+          <a:p>
+            <a:r>
+              <a:rPr lang="en-US" dirty="0"/>
+              <a:t>Fixed – Element is positioned relative to the viewport; stays in place when scrolling.</a:t>
+            </a:r>
+          </a:p>
+          <a:p>
+            <a:r>
+              <a:rPr lang="en-US" dirty="0"/>
+              <a:t>Sticky – Element is relative until a scroll threshold, then it becomes fixed; requires a top, left, right, or bottom value to work. </a:t>
+            </a:r>
+          </a:p>
+        </p:txBody>
+      </p:sp>
+      <p:pic>
+        <p:nvPicPr>
+          <p:cNvPr id="7" name="Picture 6">
+            <a:extLst>
+              <a:ext uri="{FF2B5EF4-FFF2-40B4-BE49-F238E27FC236}">
+                <a16:creationId xmlns:a16="http://schemas.microsoft.com/office/drawing/2014/main" id="{42DB299D-B274-7522-90D9-CAFBF81098EA}"/>
+              </a:ext>
+            </a:extLst>
+          </p:cNvPr>
+          <p:cNvPicPr>
+            <a:picLocks noChangeAspect="1"/>
+          </p:cNvPicPr>
+          <p:nvPr/>
+        </p:nvPicPr>
+        <p:blipFill>
+          <a:blip r:embed="rId2"/>
+          <a:stretch>
+            <a:fillRect/>
+          </a:stretch>
+        </p:blipFill>
+        <p:spPr>
+          <a:xfrm>
+            <a:off x="7471063" y="1965438"/>
+            <a:ext cx="3360019" cy="4520752"/>
+          </a:xfrm>
+          <a:prstGeom prst="rect">
+            <a:avLst/>
+          </a:prstGeom>
+        </p:spPr>
+      </p:pic>
+    </p:spTree>
+    <p:extLst>
+      <p:ext uri="{BB962C8B-B14F-4D97-AF65-F5344CB8AC3E}">
+        <p14:creationId xmlns:p14="http://schemas.microsoft.com/office/powerpoint/2010/main" val="3603510520"/>
+      </p:ext>
+    </p:extLst>
+  </p:cSld>
+  <p:clrMapOvr>
+    <a:masterClrMapping/>
+  </p:clrMapOvr>
+</p:sld>
+</file>
+
+<file path=ppt/slides/slide38.xml><?xml version="1.0" encoding="utf-8"?>
+<p:sld xmlns:a="http://schemas.openxmlformats.org/drawingml/2006/main" xmlns:r="http://schemas.openxmlformats.org/officeDocument/2006/relationships" xmlns:p="http://schemas.openxmlformats.org/presentationml/2006/main">
+  <p:cSld>
+    <p:spTree>
+      <p:nvGrpSpPr>
+        <p:cNvPr id="1" name=""/>
+        <p:cNvGrpSpPr/>
+        <p:nvPr/>
+      </p:nvGrpSpPr>
+      <p:grpSpPr>
+        <a:xfrm>
+          <a:off x="0" y="0"/>
+          <a:ext cx="0" cy="0"/>
+          <a:chOff x="0" y="0"/>
+          <a:chExt cx="0" cy="0"/>
+        </a:xfrm>
+      </p:grpSpPr>
+      <p:sp>
+        <p:nvSpPr>
+          <p:cNvPr id="2" name="Title 1">
+            <a:extLst>
+              <a:ext uri="{FF2B5EF4-FFF2-40B4-BE49-F238E27FC236}">
+                <a16:creationId xmlns:a16="http://schemas.microsoft.com/office/drawing/2014/main" id="{283BA7DC-A2C2-A725-4979-F2BCBA8DB5F7}"/>
+              </a:ext>
+            </a:extLst>
+          </p:cNvPr>
+          <p:cNvSpPr>
+            <a:spLocks noGrp="1"/>
+          </p:cNvSpPr>
+          <p:nvPr>
+            <p:ph type="title"/>
+          </p:nvPr>
+        </p:nvSpPr>
+        <p:spPr/>
+        <p:txBody>
+          <a:bodyPr/>
+          <a:lstStyle/>
+          <a:p>
+            <a:r>
+              <a:rPr lang="en-US" dirty="0"/>
+              <a:t>Position</a:t>
+            </a:r>
+          </a:p>
+        </p:txBody>
+      </p:sp>
+      <p:pic>
+        <p:nvPicPr>
+          <p:cNvPr id="7" name="Content Placeholder 6">
+            <a:extLst>
+              <a:ext uri="{FF2B5EF4-FFF2-40B4-BE49-F238E27FC236}">
+                <a16:creationId xmlns:a16="http://schemas.microsoft.com/office/drawing/2014/main" id="{A1A63636-A629-0E9F-9D71-1EA5E10C6534}"/>
+              </a:ext>
+            </a:extLst>
+          </p:cNvPr>
+          <p:cNvPicPr>
+            <a:picLocks noGrp="1" noChangeAspect="1"/>
+          </p:cNvPicPr>
+          <p:nvPr>
+            <p:ph idx="1"/>
+          </p:nvPr>
+        </p:nvPicPr>
+        <p:blipFill>
+          <a:blip r:embed="rId2"/>
+          <a:stretch>
+            <a:fillRect/>
+          </a:stretch>
+        </p:blipFill>
+        <p:spPr>
+          <a:xfrm>
+            <a:off x="7626927" y="4797960"/>
+            <a:ext cx="1854875" cy="1366090"/>
+          </a:xfrm>
+          <a:prstGeom prst="rect">
+            <a:avLst/>
+          </a:prstGeom>
+        </p:spPr>
+      </p:pic>
+      <p:pic>
+        <p:nvPicPr>
+          <p:cNvPr id="5" name="Picture 4">
+            <a:extLst>
+              <a:ext uri="{FF2B5EF4-FFF2-40B4-BE49-F238E27FC236}">
+                <a16:creationId xmlns:a16="http://schemas.microsoft.com/office/drawing/2014/main" id="{8D9D7785-F037-50C1-C1A7-61B6537D4586}"/>
+              </a:ext>
+            </a:extLst>
+          </p:cNvPr>
+          <p:cNvPicPr>
+            <a:picLocks noChangeAspect="1"/>
+          </p:cNvPicPr>
+          <p:nvPr/>
+        </p:nvPicPr>
+        <p:blipFill>
+          <a:blip r:embed="rId3"/>
+          <a:stretch>
+            <a:fillRect/>
+          </a:stretch>
+        </p:blipFill>
+        <p:spPr>
+          <a:xfrm>
+            <a:off x="7391720" y="2578832"/>
+            <a:ext cx="2577980" cy="2039297"/>
+          </a:xfrm>
+          <a:prstGeom prst="rect">
+            <a:avLst/>
+          </a:prstGeom>
+        </p:spPr>
+      </p:pic>
+      <p:sp>
+        <p:nvSpPr>
+          <p:cNvPr id="8" name="TextBox 7">
+            <a:extLst>
+              <a:ext uri="{FF2B5EF4-FFF2-40B4-BE49-F238E27FC236}">
+                <a16:creationId xmlns:a16="http://schemas.microsoft.com/office/drawing/2014/main" id="{A041EB7A-37CB-F722-0A97-D67AD119690C}"/>
+              </a:ext>
+            </a:extLst>
+          </p:cNvPr>
+          <p:cNvSpPr txBox="1"/>
+          <p:nvPr/>
+        </p:nvSpPr>
+        <p:spPr>
+          <a:xfrm>
+            <a:off x="722267" y="2431473"/>
+            <a:ext cx="5782441" cy="3416320"/>
+          </a:xfrm>
+          <a:prstGeom prst="rect">
+            <a:avLst/>
+          </a:prstGeom>
+          <a:noFill/>
+        </p:spPr>
+        <p:txBody>
+          <a:bodyPr wrap="square" rtlCol="0">
+            <a:spAutoFit/>
+          </a:bodyPr>
+          <a:lstStyle/>
+          <a:p>
+            <a:r>
+              <a:rPr lang="en-US" dirty="0"/>
+              <a:t>Static – we see that it follows normal flow</a:t>
+            </a:r>
+          </a:p>
+          <a:p>
+            <a:endParaRPr lang="en-US" dirty="0"/>
+          </a:p>
+          <a:p>
+            <a:r>
+              <a:rPr lang="en-US" dirty="0"/>
+              <a:t>Relative – we see that it is shifted 20 </a:t>
+            </a:r>
+            <a:r>
+              <a:rPr lang="en-US" dirty="0" err="1"/>
+              <a:t>px</a:t>
+            </a:r>
+            <a:r>
+              <a:rPr lang="en-US" dirty="0"/>
+              <a:t> to the right and 10 </a:t>
+            </a:r>
+            <a:r>
+              <a:rPr lang="en-US" dirty="0" err="1"/>
+              <a:t>px</a:t>
+            </a:r>
+            <a:r>
+              <a:rPr lang="en-US" dirty="0"/>
+              <a:t> down from its normal position</a:t>
+            </a:r>
+          </a:p>
+          <a:p>
+            <a:endParaRPr lang="en-US" dirty="0"/>
+          </a:p>
+          <a:p>
+            <a:r>
+              <a:rPr lang="en-US" dirty="0"/>
+              <a:t>Absolute – shifted not from its original position but that of its parent</a:t>
+            </a:r>
+          </a:p>
+          <a:p>
+            <a:endParaRPr lang="en-US" dirty="0"/>
+          </a:p>
+          <a:p>
+            <a:r>
+              <a:rPr lang="en-US" dirty="0"/>
+              <a:t>Fixed – stuck to the bottom right at all times</a:t>
+            </a:r>
+          </a:p>
+          <a:p>
+            <a:endParaRPr lang="en-US" dirty="0"/>
+          </a:p>
+          <a:p>
+            <a:r>
+              <a:rPr lang="en-US" dirty="0"/>
+              <a:t>Sticky – acts as relative until you scroll past it, then it will be stuck to the top of the page</a:t>
+            </a:r>
+          </a:p>
+        </p:txBody>
+      </p:sp>
+    </p:spTree>
+    <p:extLst>
+      <p:ext uri="{BB962C8B-B14F-4D97-AF65-F5344CB8AC3E}">
+        <p14:creationId xmlns:p14="http://schemas.microsoft.com/office/powerpoint/2010/main" val="2148855914"/>
+      </p:ext>
+    </p:extLst>
+  </p:cSld>
+  <p:clrMapOvr>
+    <a:masterClrMapping/>
+  </p:clrMapOvr>
+</p:sld>
+</file>
+
+<file path=ppt/slides/slide39.xml><?xml version="1.0" encoding="utf-8"?>
+<p:sld xmlns:a="http://schemas.openxmlformats.org/drawingml/2006/main" xmlns:r="http://schemas.openxmlformats.org/officeDocument/2006/relationships" xmlns:p="http://schemas.openxmlformats.org/presentationml/2006/main">
+  <p:cSld>
+    <p:spTree>
+      <p:nvGrpSpPr>
+        <p:cNvPr id="1" name=""/>
+        <p:cNvGrpSpPr/>
+        <p:nvPr/>
+      </p:nvGrpSpPr>
+      <p:grpSpPr>
+        <a:xfrm>
+          <a:off x="0" y="0"/>
+          <a:ext cx="0" cy="0"/>
+          <a:chOff x="0" y="0"/>
+          <a:chExt cx="0" cy="0"/>
+        </a:xfrm>
+      </p:grpSpPr>
+      <p:sp>
+        <p:nvSpPr>
+          <p:cNvPr id="2" name="Title 1">
+            <a:extLst>
+              <a:ext uri="{FF2B5EF4-FFF2-40B4-BE49-F238E27FC236}">
+                <a16:creationId xmlns:a16="http://schemas.microsoft.com/office/drawing/2014/main" id="{EE4FD9AC-A5E2-4F5B-C132-6E19DC23F53F}"/>
+              </a:ext>
+            </a:extLst>
+          </p:cNvPr>
+          <p:cNvSpPr>
+            <a:spLocks noGrp="1"/>
+          </p:cNvSpPr>
+          <p:nvPr>
+            <p:ph type="title"/>
+          </p:nvPr>
+        </p:nvSpPr>
+        <p:spPr/>
+        <p:txBody>
+          <a:bodyPr/>
+          <a:lstStyle/>
+          <a:p>
+            <a:r>
+              <a:rPr lang="en-US" dirty="0"/>
+              <a:t>Flexbox</a:t>
+            </a:r>
+          </a:p>
+        </p:txBody>
+      </p:sp>
+      <p:sp>
+        <p:nvSpPr>
+          <p:cNvPr id="3" name="Content Placeholder 2">
+            <a:extLst>
+              <a:ext uri="{FF2B5EF4-FFF2-40B4-BE49-F238E27FC236}">
+                <a16:creationId xmlns:a16="http://schemas.microsoft.com/office/drawing/2014/main" id="{7D253199-4E0D-8313-FEDB-77558476940A}"/>
+              </a:ext>
+            </a:extLst>
+          </p:cNvPr>
+          <p:cNvSpPr>
+            <a:spLocks noGrp="1"/>
+          </p:cNvSpPr>
+          <p:nvPr>
+            <p:ph idx="1"/>
+          </p:nvPr>
+        </p:nvSpPr>
+        <p:spPr>
+          <a:xfrm>
+            <a:off x="581192" y="2180497"/>
+            <a:ext cx="11029615" cy="1248504"/>
+          </a:xfrm>
+        </p:spPr>
+        <p:txBody>
+          <a:bodyPr/>
+          <a:lstStyle/>
+          <a:p>
+            <a:r>
+              <a:rPr lang="en-US" dirty="0"/>
+              <a:t>Definition: Flexbox – is a CSS layout system designed to make it easier to arrange and align elements inside a container. </a:t>
+            </a:r>
+          </a:p>
+          <a:p>
+            <a:pPr lvl="1"/>
+            <a:r>
+              <a:rPr lang="en-US" dirty="0"/>
+              <a:t>Let's us control how items grow, shrink, and align within a parent container. </a:t>
+            </a:r>
+          </a:p>
+        </p:txBody>
+      </p:sp>
+      <p:pic>
+        <p:nvPicPr>
+          <p:cNvPr id="5" name="Picture 4">
+            <a:extLst>
+              <a:ext uri="{FF2B5EF4-FFF2-40B4-BE49-F238E27FC236}">
+                <a16:creationId xmlns:a16="http://schemas.microsoft.com/office/drawing/2014/main" id="{D96C2A2D-9151-E177-C6E1-CF6199791402}"/>
+              </a:ext>
+            </a:extLst>
+          </p:cNvPr>
+          <p:cNvPicPr>
+            <a:picLocks noChangeAspect="1"/>
+          </p:cNvPicPr>
+          <p:nvPr/>
+        </p:nvPicPr>
+        <p:blipFill>
+          <a:blip r:embed="rId2"/>
+          <a:stretch>
+            <a:fillRect/>
+          </a:stretch>
+        </p:blipFill>
+        <p:spPr>
+          <a:xfrm>
+            <a:off x="1931221" y="3760727"/>
+            <a:ext cx="2676899" cy="2762636"/>
+          </a:xfrm>
+          <a:prstGeom prst="rect">
+            <a:avLst/>
+          </a:prstGeom>
+        </p:spPr>
+      </p:pic>
+      <p:pic>
+        <p:nvPicPr>
+          <p:cNvPr id="7" name="Picture 6">
+            <a:extLst>
+              <a:ext uri="{FF2B5EF4-FFF2-40B4-BE49-F238E27FC236}">
+                <a16:creationId xmlns:a16="http://schemas.microsoft.com/office/drawing/2014/main" id="{625FD1BC-25A6-93CF-72D8-3D3B007655B6}"/>
+              </a:ext>
+            </a:extLst>
+          </p:cNvPr>
+          <p:cNvPicPr>
+            <a:picLocks noChangeAspect="1"/>
+          </p:cNvPicPr>
+          <p:nvPr/>
+        </p:nvPicPr>
+        <p:blipFill>
+          <a:blip r:embed="rId3"/>
+          <a:stretch>
+            <a:fillRect/>
+          </a:stretch>
+        </p:blipFill>
+        <p:spPr>
+          <a:xfrm>
+            <a:off x="4943620" y="3760727"/>
+            <a:ext cx="5992061" cy="2133898"/>
+          </a:xfrm>
+          <a:prstGeom prst="rect">
+            <a:avLst/>
+          </a:prstGeom>
+        </p:spPr>
+      </p:pic>
+    </p:spTree>
+    <p:extLst>
+      <p:ext uri="{BB962C8B-B14F-4D97-AF65-F5344CB8AC3E}">
+        <p14:creationId xmlns:p14="http://schemas.microsoft.com/office/powerpoint/2010/main" val="4083649825"/>
+      </p:ext>
+    </p:extLst>
+  </p:cSld>
+  <p:clrMapOvr>
+    <a:masterClrMapping/>
+  </p:clrMapOvr>
+</p:sld>
+</file>
+
 <file path=ppt/slides/slide4.xml><?xml version="1.0" encoding="utf-8"?>
 <p:sld xmlns:a="http://schemas.openxmlformats.org/drawingml/2006/main" xmlns:r="http://schemas.openxmlformats.org/officeDocument/2006/relationships" xmlns:p="http://schemas.openxmlformats.org/presentationml/2006/main">
   <p:cSld>
@@ -7484,6 +14042,2272 @@
     <p:extLst>
       <p:ext uri="{BB962C8B-B14F-4D97-AF65-F5344CB8AC3E}">
         <p14:creationId xmlns:p14="http://schemas.microsoft.com/office/powerpoint/2010/main" val="3937583421"/>
+      </p:ext>
+    </p:extLst>
+  </p:cSld>
+  <p:clrMapOvr>
+    <a:masterClrMapping/>
+  </p:clrMapOvr>
+</p:sld>
+</file>
+
+<file path=ppt/slides/slide40.xml><?xml version="1.0" encoding="utf-8"?>
+<p:sld xmlns:a="http://schemas.openxmlformats.org/drawingml/2006/main" xmlns:r="http://schemas.openxmlformats.org/officeDocument/2006/relationships" xmlns:p="http://schemas.openxmlformats.org/presentationml/2006/main">
+  <p:cSld>
+    <p:spTree>
+      <p:nvGrpSpPr>
+        <p:cNvPr id="1" name=""/>
+        <p:cNvGrpSpPr/>
+        <p:nvPr/>
+      </p:nvGrpSpPr>
+      <p:grpSpPr>
+        <a:xfrm>
+          <a:off x="0" y="0"/>
+          <a:ext cx="0" cy="0"/>
+          <a:chOff x="0" y="0"/>
+          <a:chExt cx="0" cy="0"/>
+        </a:xfrm>
+      </p:grpSpPr>
+      <p:sp>
+        <p:nvSpPr>
+          <p:cNvPr id="2" name="Title 1">
+            <a:extLst>
+              <a:ext uri="{FF2B5EF4-FFF2-40B4-BE49-F238E27FC236}">
+                <a16:creationId xmlns:a16="http://schemas.microsoft.com/office/drawing/2014/main" id="{F5D0C84F-F1FA-D849-E447-A85E34D4E536}"/>
+              </a:ext>
+            </a:extLst>
+          </p:cNvPr>
+          <p:cNvSpPr>
+            <a:spLocks noGrp="1"/>
+          </p:cNvSpPr>
+          <p:nvPr>
+            <p:ph type="title"/>
+          </p:nvPr>
+        </p:nvSpPr>
+        <p:spPr/>
+        <p:txBody>
+          <a:bodyPr/>
+          <a:lstStyle/>
+          <a:p>
+            <a:r>
+              <a:rPr lang="en-US" dirty="0"/>
+              <a:t>Flexbox</a:t>
+            </a:r>
+          </a:p>
+        </p:txBody>
+      </p:sp>
+      <p:sp>
+        <p:nvSpPr>
+          <p:cNvPr id="3" name="Content Placeholder 2">
+            <a:extLst>
+              <a:ext uri="{FF2B5EF4-FFF2-40B4-BE49-F238E27FC236}">
+                <a16:creationId xmlns:a16="http://schemas.microsoft.com/office/drawing/2014/main" id="{28E37F0E-1E67-B660-D669-AA50DA26F8BA}"/>
+              </a:ext>
+            </a:extLst>
+          </p:cNvPr>
+          <p:cNvSpPr>
+            <a:spLocks noGrp="1"/>
+          </p:cNvSpPr>
+          <p:nvPr>
+            <p:ph idx="1"/>
+          </p:nvPr>
+        </p:nvSpPr>
+        <p:spPr>
+          <a:xfrm>
+            <a:off x="2126323" y="2211668"/>
+            <a:ext cx="7939353" cy="3678303"/>
+          </a:xfrm>
+        </p:spPr>
+        <p:txBody>
+          <a:bodyPr/>
+          <a:lstStyle/>
+          <a:p>
+            <a:r>
+              <a:rPr lang="en-US" dirty="0"/>
+              <a:t>Flex Container – where we apply { display: flex; }</a:t>
+            </a:r>
+          </a:p>
+          <a:p>
+            <a:r>
+              <a:rPr lang="en-US" dirty="0"/>
+              <a:t>Flex Items – The child elements inside the flex container</a:t>
+            </a:r>
+          </a:p>
+          <a:p>
+            <a:r>
+              <a:rPr lang="en-US" dirty="0"/>
+              <a:t>Items in a container are either in a row or column layout</a:t>
+            </a:r>
+          </a:p>
+          <a:p>
+            <a:r>
+              <a:rPr lang="en-US" dirty="0"/>
+              <a:t>Justify-content property is used to align items on the X-axis when set to row, it will align items on the Y-axis when set to column.</a:t>
+            </a:r>
+          </a:p>
+          <a:p>
+            <a:r>
+              <a:rPr lang="en-US" dirty="0"/>
+              <a:t>Align-items is used to align items on the opposite axis of the justify-content property. </a:t>
+            </a:r>
+          </a:p>
+        </p:txBody>
+      </p:sp>
+    </p:spTree>
+    <p:extLst>
+      <p:ext uri="{BB962C8B-B14F-4D97-AF65-F5344CB8AC3E}">
+        <p14:creationId xmlns:p14="http://schemas.microsoft.com/office/powerpoint/2010/main" val="1415579934"/>
+      </p:ext>
+    </p:extLst>
+  </p:cSld>
+  <p:clrMapOvr>
+    <a:masterClrMapping/>
+  </p:clrMapOvr>
+</p:sld>
+</file>
+
+<file path=ppt/slides/slide41.xml><?xml version="1.0" encoding="utf-8"?>
+<p:sld xmlns:a="http://schemas.openxmlformats.org/drawingml/2006/main" xmlns:r="http://schemas.openxmlformats.org/officeDocument/2006/relationships" xmlns:p="http://schemas.openxmlformats.org/presentationml/2006/main">
+  <p:cSld>
+    <p:spTree>
+      <p:nvGrpSpPr>
+        <p:cNvPr id="1" name="">
+          <a:extLst>
+            <a:ext uri="{FF2B5EF4-FFF2-40B4-BE49-F238E27FC236}">
+              <a16:creationId xmlns:a16="http://schemas.microsoft.com/office/drawing/2014/main" id="{7DB5EBD3-02F8-156D-77E6-AF1FF4B2BF3D}"/>
+            </a:ext>
+          </a:extLst>
+        </p:cNvPr>
+        <p:cNvGrpSpPr/>
+        <p:nvPr/>
+      </p:nvGrpSpPr>
+      <p:grpSpPr>
+        <a:xfrm>
+          <a:off x="0" y="0"/>
+          <a:ext cx="0" cy="0"/>
+          <a:chOff x="0" y="0"/>
+          <a:chExt cx="0" cy="0"/>
+        </a:xfrm>
+      </p:grpSpPr>
+      <p:sp>
+        <p:nvSpPr>
+          <p:cNvPr id="2" name="Title 1">
+            <a:extLst>
+              <a:ext uri="{FF2B5EF4-FFF2-40B4-BE49-F238E27FC236}">
+                <a16:creationId xmlns:a16="http://schemas.microsoft.com/office/drawing/2014/main" id="{0FD32C93-BEAC-65A3-EED9-BEAF5D54C3BC}"/>
+              </a:ext>
+            </a:extLst>
+          </p:cNvPr>
+          <p:cNvSpPr>
+            <a:spLocks noGrp="1"/>
+          </p:cNvSpPr>
+          <p:nvPr>
+            <p:ph type="title"/>
+          </p:nvPr>
+        </p:nvSpPr>
+        <p:spPr/>
+        <p:txBody>
+          <a:bodyPr/>
+          <a:lstStyle/>
+          <a:p>
+            <a:r>
+              <a:rPr lang="en-US" dirty="0"/>
+              <a:t>Challenge – Use Flexbox</a:t>
+            </a:r>
+          </a:p>
+        </p:txBody>
+      </p:sp>
+      <p:sp>
+        <p:nvSpPr>
+          <p:cNvPr id="3" name="Content Placeholder 2">
+            <a:extLst>
+              <a:ext uri="{FF2B5EF4-FFF2-40B4-BE49-F238E27FC236}">
+                <a16:creationId xmlns:a16="http://schemas.microsoft.com/office/drawing/2014/main" id="{C5EC0A0A-43B2-F691-E85E-BEB9B396C06F}"/>
+              </a:ext>
+            </a:extLst>
+          </p:cNvPr>
+          <p:cNvSpPr>
+            <a:spLocks noGrp="1"/>
+          </p:cNvSpPr>
+          <p:nvPr>
+            <p:ph idx="1"/>
+          </p:nvPr>
+        </p:nvSpPr>
+        <p:spPr>
+          <a:xfrm>
+            <a:off x="581192" y="2475925"/>
+            <a:ext cx="5317584" cy="1681246"/>
+          </a:xfrm>
+        </p:spPr>
+        <p:txBody>
+          <a:bodyPr/>
+          <a:lstStyle/>
+          <a:p>
+            <a:r>
+              <a:rPr lang="en-US" dirty="0"/>
+              <a:t>Fix our header</a:t>
+            </a:r>
+          </a:p>
+        </p:txBody>
+      </p:sp>
+      <p:sp>
+        <p:nvSpPr>
+          <p:cNvPr id="6" name="TextBox 5">
+            <a:extLst>
+              <a:ext uri="{FF2B5EF4-FFF2-40B4-BE49-F238E27FC236}">
+                <a16:creationId xmlns:a16="http://schemas.microsoft.com/office/drawing/2014/main" id="{619C66B5-4CA1-DA59-40E7-604A0E277288}"/>
+              </a:ext>
+            </a:extLst>
+          </p:cNvPr>
+          <p:cNvSpPr txBox="1"/>
+          <p:nvPr/>
+        </p:nvSpPr>
+        <p:spPr>
+          <a:xfrm>
+            <a:off x="1228165" y="2402747"/>
+            <a:ext cx="756938" cy="369332"/>
+          </a:xfrm>
+          <a:prstGeom prst="rect">
+            <a:avLst/>
+          </a:prstGeom>
+          <a:noFill/>
+        </p:spPr>
+        <p:txBody>
+          <a:bodyPr wrap="none" rtlCol="0">
+            <a:spAutoFit/>
+          </a:bodyPr>
+          <a:lstStyle/>
+          <a:p>
+            <a:r>
+              <a:rPr lang="en-US" b="1" dirty="0"/>
+              <a:t>Goal:</a:t>
+            </a:r>
+          </a:p>
+        </p:txBody>
+      </p:sp>
+      <p:sp>
+        <p:nvSpPr>
+          <p:cNvPr id="7" name="TextBox 6">
+            <a:extLst>
+              <a:ext uri="{FF2B5EF4-FFF2-40B4-BE49-F238E27FC236}">
+                <a16:creationId xmlns:a16="http://schemas.microsoft.com/office/drawing/2014/main" id="{FF05E58F-52AA-E09F-FEBD-9DA0F0BE9229}"/>
+              </a:ext>
+            </a:extLst>
+          </p:cNvPr>
+          <p:cNvSpPr txBox="1"/>
+          <p:nvPr/>
+        </p:nvSpPr>
+        <p:spPr>
+          <a:xfrm>
+            <a:off x="6545749" y="2402747"/>
+            <a:ext cx="5065059" cy="369332"/>
+          </a:xfrm>
+          <a:prstGeom prst="rect">
+            <a:avLst/>
+          </a:prstGeom>
+          <a:noFill/>
+        </p:spPr>
+        <p:txBody>
+          <a:bodyPr wrap="square" rtlCol="0">
+            <a:spAutoFit/>
+          </a:bodyPr>
+          <a:lstStyle/>
+          <a:p>
+            <a:r>
+              <a:rPr lang="en-US" b="1" dirty="0"/>
+              <a:t>Scenario:  			   10 min</a:t>
+            </a:r>
+          </a:p>
+        </p:txBody>
+      </p:sp>
+      <p:sp>
+        <p:nvSpPr>
+          <p:cNvPr id="8" name="Content Placeholder 2">
+            <a:extLst>
+              <a:ext uri="{FF2B5EF4-FFF2-40B4-BE49-F238E27FC236}">
+                <a16:creationId xmlns:a16="http://schemas.microsoft.com/office/drawing/2014/main" id="{A3936247-3625-1719-7D6C-31DED9E7D6F2}"/>
+              </a:ext>
+            </a:extLst>
+          </p:cNvPr>
+          <p:cNvSpPr txBox="1">
+            <a:spLocks/>
+          </p:cNvSpPr>
+          <p:nvPr/>
+        </p:nvSpPr>
+        <p:spPr>
+          <a:xfrm>
+            <a:off x="6545749" y="2772078"/>
+            <a:ext cx="4661642" cy="3639113"/>
+          </a:xfrm>
+          <a:prstGeom prst="rect">
+            <a:avLst/>
+          </a:prstGeom>
+        </p:spPr>
+        <p:txBody>
+          <a:bodyPr vert="horz" lIns="91440" tIns="45720" rIns="91440" bIns="45720" rtlCol="0" anchor="ctr">
+            <a:normAutofit/>
+          </a:bodyPr>
+          <a:lstStyle>
+            <a:lvl1pPr marL="306000" indent="-306000" algn="l" defTabSz="457200" rtl="0" eaLnBrk="1" latinLnBrk="0" hangingPunct="1">
+              <a:spcBef>
+                <a:spcPct val="20000"/>
+              </a:spcBef>
+              <a:spcAft>
+                <a:spcPts val="600"/>
+              </a:spcAft>
+              <a:buClr>
+                <a:schemeClr val="accent2"/>
+              </a:buClr>
+              <a:buSzPct val="92000"/>
+              <a:buFont typeface="Wingdings 2" panose="05020102010507070707" pitchFamily="18" charset="2"/>
+              <a:buChar char=""/>
+              <a:defRPr sz="1800" kern="1200">
+                <a:solidFill>
+                  <a:schemeClr val="tx2"/>
+                </a:solidFill>
+                <a:latin typeface="+mn-lt"/>
+                <a:ea typeface="+mn-ea"/>
+                <a:cs typeface="+mn-cs"/>
+              </a:defRPr>
+            </a:lvl1pPr>
+            <a:lvl2pPr marL="630000" indent="-306000" algn="l" defTabSz="457200" rtl="0" eaLnBrk="1" latinLnBrk="0" hangingPunct="1">
+              <a:spcBef>
+                <a:spcPct val="20000"/>
+              </a:spcBef>
+              <a:spcAft>
+                <a:spcPts val="600"/>
+              </a:spcAft>
+              <a:buClr>
+                <a:schemeClr val="accent2"/>
+              </a:buClr>
+              <a:buSzPct val="92000"/>
+              <a:buFont typeface="Wingdings 2" panose="05020102010507070707" pitchFamily="18" charset="2"/>
+              <a:buChar char=""/>
+              <a:defRPr sz="1600" kern="1200">
+                <a:solidFill>
+                  <a:schemeClr val="tx2"/>
+                </a:solidFill>
+                <a:latin typeface="+mn-lt"/>
+                <a:ea typeface="+mn-ea"/>
+                <a:cs typeface="+mn-cs"/>
+              </a:defRPr>
+            </a:lvl2pPr>
+            <a:lvl3pPr marL="900000" indent="-270000" algn="l" defTabSz="457200" rtl="0" eaLnBrk="1" latinLnBrk="0" hangingPunct="1">
+              <a:spcBef>
+                <a:spcPct val="20000"/>
+              </a:spcBef>
+              <a:spcAft>
+                <a:spcPts val="600"/>
+              </a:spcAft>
+              <a:buClr>
+                <a:schemeClr val="accent2"/>
+              </a:buClr>
+              <a:buSzPct val="92000"/>
+              <a:buFont typeface="Wingdings 2" panose="05020102010507070707" pitchFamily="18" charset="2"/>
+              <a:buChar char=""/>
+              <a:defRPr sz="1400" kern="1200">
+                <a:solidFill>
+                  <a:schemeClr val="tx2"/>
+                </a:solidFill>
+                <a:latin typeface="+mn-lt"/>
+                <a:ea typeface="+mn-ea"/>
+                <a:cs typeface="+mn-cs"/>
+              </a:defRPr>
+            </a:lvl3pPr>
+            <a:lvl4pPr marL="1242000" indent="-234000" algn="l" defTabSz="457200" rtl="0" eaLnBrk="1" latinLnBrk="0" hangingPunct="1">
+              <a:spcBef>
+                <a:spcPct val="20000"/>
+              </a:spcBef>
+              <a:spcAft>
+                <a:spcPts val="600"/>
+              </a:spcAft>
+              <a:buClr>
+                <a:schemeClr val="accent2"/>
+              </a:buClr>
+              <a:buSzPct val="92000"/>
+              <a:buFont typeface="Wingdings 2" panose="05020102010507070707" pitchFamily="18" charset="2"/>
+              <a:buChar char=""/>
+              <a:defRPr sz="1200" kern="1200">
+                <a:solidFill>
+                  <a:schemeClr val="tx2"/>
+                </a:solidFill>
+                <a:latin typeface="+mn-lt"/>
+                <a:ea typeface="+mn-ea"/>
+                <a:cs typeface="+mn-cs"/>
+              </a:defRPr>
+            </a:lvl4pPr>
+            <a:lvl5pPr marL="1602000" indent="-234000" algn="l" defTabSz="457200" rtl="0" eaLnBrk="1" latinLnBrk="0" hangingPunct="1">
+              <a:spcBef>
+                <a:spcPct val="20000"/>
+              </a:spcBef>
+              <a:spcAft>
+                <a:spcPts val="600"/>
+              </a:spcAft>
+              <a:buClr>
+                <a:schemeClr val="accent2"/>
+              </a:buClr>
+              <a:buSzPct val="92000"/>
+              <a:buFont typeface="Wingdings 2" panose="05020102010507070707" pitchFamily="18" charset="2"/>
+              <a:buChar char=""/>
+              <a:defRPr sz="1200" kern="1200">
+                <a:solidFill>
+                  <a:schemeClr val="tx2"/>
+                </a:solidFill>
+                <a:latin typeface="+mn-lt"/>
+                <a:ea typeface="+mn-ea"/>
+                <a:cs typeface="+mn-cs"/>
+              </a:defRPr>
+            </a:lvl5pPr>
+            <a:lvl6pPr marL="1900000" indent="-228600" algn="l" defTabSz="457200" rtl="0" eaLnBrk="1" latinLnBrk="0" hangingPunct="1">
+              <a:spcBef>
+                <a:spcPct val="20000"/>
+              </a:spcBef>
+              <a:spcAft>
+                <a:spcPts val="600"/>
+              </a:spcAft>
+              <a:buClr>
+                <a:schemeClr val="accent2"/>
+              </a:buClr>
+              <a:buSzPct val="92000"/>
+              <a:buFont typeface="Wingdings 2" panose="05020102010507070707" pitchFamily="18" charset="2"/>
+              <a:buChar char=""/>
+              <a:defRPr sz="1200" kern="1200">
+                <a:solidFill>
+                  <a:schemeClr val="tx2"/>
+                </a:solidFill>
+                <a:latin typeface="+mn-lt"/>
+                <a:ea typeface="+mn-ea"/>
+                <a:cs typeface="+mn-cs"/>
+              </a:defRPr>
+            </a:lvl6pPr>
+            <a:lvl7pPr marL="2200000" indent="-228600" algn="l" defTabSz="457200" rtl="0" eaLnBrk="1" latinLnBrk="0" hangingPunct="1">
+              <a:spcBef>
+                <a:spcPct val="20000"/>
+              </a:spcBef>
+              <a:spcAft>
+                <a:spcPts val="600"/>
+              </a:spcAft>
+              <a:buClr>
+                <a:schemeClr val="accent2"/>
+              </a:buClr>
+              <a:buSzPct val="92000"/>
+              <a:buFont typeface="Wingdings 2" panose="05020102010507070707" pitchFamily="18" charset="2"/>
+              <a:buChar char=""/>
+              <a:defRPr sz="1200" kern="1200">
+                <a:solidFill>
+                  <a:schemeClr val="tx2"/>
+                </a:solidFill>
+                <a:latin typeface="+mn-lt"/>
+                <a:ea typeface="+mn-ea"/>
+                <a:cs typeface="+mn-cs"/>
+              </a:defRPr>
+            </a:lvl7pPr>
+            <a:lvl8pPr marL="2500000" indent="-228600" algn="l" defTabSz="457200" rtl="0" eaLnBrk="1" latinLnBrk="0" hangingPunct="1">
+              <a:spcBef>
+                <a:spcPct val="20000"/>
+              </a:spcBef>
+              <a:spcAft>
+                <a:spcPts val="600"/>
+              </a:spcAft>
+              <a:buClr>
+                <a:schemeClr val="accent2"/>
+              </a:buClr>
+              <a:buSzPct val="92000"/>
+              <a:buFont typeface="Wingdings 2" panose="05020102010507070707" pitchFamily="18" charset="2"/>
+              <a:buChar char=""/>
+              <a:defRPr sz="1200" kern="1200">
+                <a:solidFill>
+                  <a:schemeClr val="tx2"/>
+                </a:solidFill>
+                <a:latin typeface="+mn-lt"/>
+                <a:ea typeface="+mn-ea"/>
+                <a:cs typeface="+mn-cs"/>
+              </a:defRPr>
+            </a:lvl8pPr>
+            <a:lvl9pPr marL="2800000" indent="-228600" algn="l" defTabSz="457200" rtl="0" eaLnBrk="1" latinLnBrk="0" hangingPunct="1">
+              <a:spcBef>
+                <a:spcPct val="20000"/>
+              </a:spcBef>
+              <a:spcAft>
+                <a:spcPts val="600"/>
+              </a:spcAft>
+              <a:buClr>
+                <a:schemeClr val="accent2"/>
+              </a:buClr>
+              <a:buSzPct val="92000"/>
+              <a:buFont typeface="Wingdings 2" panose="05020102010507070707" pitchFamily="18" charset="2"/>
+              <a:buChar char=""/>
+              <a:defRPr sz="1200" kern="1200">
+                <a:solidFill>
+                  <a:schemeClr val="tx2"/>
+                </a:solidFill>
+                <a:latin typeface="+mn-lt"/>
+                <a:ea typeface="+mn-ea"/>
+                <a:cs typeface="+mn-cs"/>
+              </a:defRPr>
+            </a:lvl9pPr>
+          </a:lstStyle>
+          <a:p>
+            <a:r>
+              <a:rPr lang="en-US" dirty="0"/>
+              <a:t>Your organization needs a static site to advertise their new product. </a:t>
+            </a:r>
+          </a:p>
+          <a:p>
+            <a:r>
+              <a:rPr lang="en-US" dirty="0"/>
+              <a:t>Further develop the site by formatting your header so that the logo is positioned on the left and the company name on the right. </a:t>
+            </a:r>
+          </a:p>
+        </p:txBody>
+      </p:sp>
+    </p:spTree>
+    <p:extLst>
+      <p:ext uri="{BB962C8B-B14F-4D97-AF65-F5344CB8AC3E}">
+        <p14:creationId xmlns:p14="http://schemas.microsoft.com/office/powerpoint/2010/main" val="2925082679"/>
+      </p:ext>
+    </p:extLst>
+  </p:cSld>
+  <p:clrMapOvr>
+    <a:masterClrMapping/>
+  </p:clrMapOvr>
+</p:sld>
+</file>
+
+<file path=ppt/slides/slide42.xml><?xml version="1.0" encoding="utf-8"?>
+<p:sld xmlns:a="http://schemas.openxmlformats.org/drawingml/2006/main" xmlns:r="http://schemas.openxmlformats.org/officeDocument/2006/relationships" xmlns:p="http://schemas.openxmlformats.org/presentationml/2006/main">
+  <p:cSld>
+    <p:spTree>
+      <p:nvGrpSpPr>
+        <p:cNvPr id="1" name=""/>
+        <p:cNvGrpSpPr/>
+        <p:nvPr/>
+      </p:nvGrpSpPr>
+      <p:grpSpPr>
+        <a:xfrm>
+          <a:off x="0" y="0"/>
+          <a:ext cx="0" cy="0"/>
+          <a:chOff x="0" y="0"/>
+          <a:chExt cx="0" cy="0"/>
+        </a:xfrm>
+      </p:grpSpPr>
+      <p:sp>
+        <p:nvSpPr>
+          <p:cNvPr id="2" name="Title 1">
+            <a:extLst>
+              <a:ext uri="{FF2B5EF4-FFF2-40B4-BE49-F238E27FC236}">
+                <a16:creationId xmlns:a16="http://schemas.microsoft.com/office/drawing/2014/main" id="{36CA66F2-D21A-3BA9-9E7B-940782FFAD50}"/>
+              </a:ext>
+            </a:extLst>
+          </p:cNvPr>
+          <p:cNvSpPr>
+            <a:spLocks noGrp="1"/>
+          </p:cNvSpPr>
+          <p:nvPr>
+            <p:ph type="title"/>
+          </p:nvPr>
+        </p:nvSpPr>
+        <p:spPr/>
+        <p:txBody>
+          <a:bodyPr/>
+          <a:lstStyle/>
+          <a:p>
+            <a:r>
+              <a:rPr lang="en-US" dirty="0"/>
+              <a:t>Other Common CSS Properties</a:t>
+            </a:r>
+          </a:p>
+        </p:txBody>
+      </p:sp>
+      <p:graphicFrame>
+        <p:nvGraphicFramePr>
+          <p:cNvPr id="6" name="Table 5">
+            <a:extLst>
+              <a:ext uri="{FF2B5EF4-FFF2-40B4-BE49-F238E27FC236}">
+                <a16:creationId xmlns:a16="http://schemas.microsoft.com/office/drawing/2014/main" id="{5C38CB26-B2BE-F4F4-A844-CD9A7BDD32FB}"/>
+              </a:ext>
+            </a:extLst>
+          </p:cNvPr>
+          <p:cNvGraphicFramePr>
+            <a:graphicFrameLocks noGrp="1"/>
+          </p:cNvGraphicFramePr>
+          <p:nvPr>
+            <p:extLst>
+              <p:ext uri="{D42A27DB-BD31-4B8C-83A1-F6EECF244321}">
+                <p14:modId xmlns:p14="http://schemas.microsoft.com/office/powerpoint/2010/main" val="2934727464"/>
+              </p:ext>
+            </p:extLst>
+          </p:nvPr>
+        </p:nvGraphicFramePr>
+        <p:xfrm>
+          <a:off x="1201996" y="1790592"/>
+          <a:ext cx="9546686" cy="5067408"/>
+        </p:xfrm>
+        <a:graphic>
+          <a:graphicData uri="http://schemas.openxmlformats.org/drawingml/2006/table">
+            <a:tbl>
+              <a:tblPr/>
+              <a:tblGrid>
+                <a:gridCol w="4773343">
+                  <a:extLst>
+                    <a:ext uri="{9D8B030D-6E8A-4147-A177-3AD203B41FA5}">
+                      <a16:colId xmlns:a16="http://schemas.microsoft.com/office/drawing/2014/main" val="666680440"/>
+                    </a:ext>
+                  </a:extLst>
+                </a:gridCol>
+                <a:gridCol w="4773343">
+                  <a:extLst>
+                    <a:ext uri="{9D8B030D-6E8A-4147-A177-3AD203B41FA5}">
+                      <a16:colId xmlns:a16="http://schemas.microsoft.com/office/drawing/2014/main" val="3897872875"/>
+                    </a:ext>
+                  </a:extLst>
+                </a:gridCol>
+              </a:tblGrid>
+              <a:tr h="210383">
+                <a:tc>
+                  <a:txBody>
+                    <a:bodyPr/>
+                    <a:lstStyle/>
+                    <a:p>
+                      <a:pPr>
+                        <a:buNone/>
+                      </a:pPr>
+                      <a:r>
+                        <a:rPr lang="en-US" sz="1200" b="1"/>
+                        <a:t>Property</a:t>
+                      </a:r>
+                      <a:endParaRPr lang="en-US" sz="1200"/>
+                    </a:p>
+                  </a:txBody>
+                  <a:tcPr marL="35962" marR="35962" marT="17981" marB="17981" anchor="ctr">
+                    <a:lnL>
+                      <a:noFill/>
+                    </a:lnL>
+                    <a:lnR>
+                      <a:noFill/>
+                    </a:lnR>
+                    <a:lnT>
+                      <a:noFill/>
+                    </a:lnT>
+                    <a:lnB>
+                      <a:noFill/>
+                    </a:lnB>
+                    <a:noFill/>
+                  </a:tcPr>
+                </a:tc>
+                <a:tc>
+                  <a:txBody>
+                    <a:bodyPr/>
+                    <a:lstStyle/>
+                    <a:p>
+                      <a:pPr>
+                        <a:buNone/>
+                      </a:pPr>
+                      <a:r>
+                        <a:rPr lang="en-US" sz="1200" b="1"/>
+                        <a:t>Function</a:t>
+                      </a:r>
+                      <a:endParaRPr lang="en-US" sz="1200"/>
+                    </a:p>
+                  </a:txBody>
+                  <a:tcPr marL="35962" marR="35962" marT="17981" marB="17981" anchor="ctr">
+                    <a:lnL>
+                      <a:noFill/>
+                    </a:lnL>
+                    <a:lnR>
+                      <a:noFill/>
+                    </a:lnR>
+                    <a:lnT>
+                      <a:noFill/>
+                    </a:lnT>
+                    <a:lnB>
+                      <a:noFill/>
+                    </a:lnB>
+                    <a:noFill/>
+                  </a:tcPr>
+                </a:tc>
+                <a:extLst>
+                  <a:ext uri="{0D108BD9-81ED-4DB2-BD59-A6C34878D82A}">
+                    <a16:rowId xmlns:a16="http://schemas.microsoft.com/office/drawing/2014/main" val="2920242796"/>
+                  </a:ext>
+                </a:extLst>
+              </a:tr>
+              <a:tr h="210383">
+                <a:tc>
+                  <a:txBody>
+                    <a:bodyPr/>
+                    <a:lstStyle/>
+                    <a:p>
+                      <a:pPr>
+                        <a:buNone/>
+                      </a:pPr>
+                      <a:r>
+                        <a:rPr lang="en-US" sz="1200">
+                          <a:latin typeface="Courier New" panose="02070309020205020404" pitchFamily="49" charset="0"/>
+                        </a:rPr>
+                        <a:t>background-image</a:t>
+                      </a:r>
+                      <a:endParaRPr lang="en-US" sz="1200"/>
+                    </a:p>
+                  </a:txBody>
+                  <a:tcPr marL="35962" marR="35962" marT="17981" marB="17981" anchor="ctr">
+                    <a:lnL>
+                      <a:noFill/>
+                    </a:lnL>
+                    <a:lnR>
+                      <a:noFill/>
+                    </a:lnR>
+                    <a:lnT>
+                      <a:noFill/>
+                    </a:lnT>
+                    <a:lnB>
+                      <a:noFill/>
+                    </a:lnB>
+                    <a:noFill/>
+                  </a:tcPr>
+                </a:tc>
+                <a:tc>
+                  <a:txBody>
+                    <a:bodyPr/>
+                    <a:lstStyle/>
+                    <a:p>
+                      <a:pPr>
+                        <a:buNone/>
+                      </a:pPr>
+                      <a:r>
+                        <a:rPr lang="en-US" sz="1200"/>
+                        <a:t>Adds an image as a background.</a:t>
+                      </a:r>
+                    </a:p>
+                  </a:txBody>
+                  <a:tcPr marL="35962" marR="35962" marT="17981" marB="17981" anchor="ctr">
+                    <a:lnL>
+                      <a:noFill/>
+                    </a:lnL>
+                    <a:lnR>
+                      <a:noFill/>
+                    </a:lnR>
+                    <a:lnT>
+                      <a:noFill/>
+                    </a:lnT>
+                    <a:lnB>
+                      <a:noFill/>
+                    </a:lnB>
+                    <a:noFill/>
+                  </a:tcPr>
+                </a:tc>
+                <a:extLst>
+                  <a:ext uri="{0D108BD9-81ED-4DB2-BD59-A6C34878D82A}">
+                    <a16:rowId xmlns:a16="http://schemas.microsoft.com/office/drawing/2014/main" val="3995184655"/>
+                  </a:ext>
+                </a:extLst>
+              </a:tr>
+              <a:tr h="210383">
+                <a:tc>
+                  <a:txBody>
+                    <a:bodyPr/>
+                    <a:lstStyle/>
+                    <a:p>
+                      <a:pPr>
+                        <a:buNone/>
+                      </a:pPr>
+                      <a:r>
+                        <a:rPr lang="en-US" sz="1200">
+                          <a:latin typeface="Courier New" panose="02070309020205020404" pitchFamily="49" charset="0"/>
+                        </a:rPr>
+                        <a:t>font-size</a:t>
+                      </a:r>
+                      <a:endParaRPr lang="en-US" sz="1200"/>
+                    </a:p>
+                  </a:txBody>
+                  <a:tcPr marL="35962" marR="35962" marT="17981" marB="17981" anchor="ctr">
+                    <a:lnL>
+                      <a:noFill/>
+                    </a:lnL>
+                    <a:lnR>
+                      <a:noFill/>
+                    </a:lnR>
+                    <a:lnT>
+                      <a:noFill/>
+                    </a:lnT>
+                    <a:lnB>
+                      <a:noFill/>
+                    </a:lnB>
+                    <a:noFill/>
+                  </a:tcPr>
+                </a:tc>
+                <a:tc>
+                  <a:txBody>
+                    <a:bodyPr/>
+                    <a:lstStyle/>
+                    <a:p>
+                      <a:pPr>
+                        <a:buNone/>
+                      </a:pPr>
+                      <a:r>
+                        <a:rPr lang="en-US" sz="1200"/>
+                        <a:t>Controls the size of text.</a:t>
+                      </a:r>
+                    </a:p>
+                  </a:txBody>
+                  <a:tcPr marL="35962" marR="35962" marT="17981" marB="17981" anchor="ctr">
+                    <a:lnL>
+                      <a:noFill/>
+                    </a:lnL>
+                    <a:lnR>
+                      <a:noFill/>
+                    </a:lnR>
+                    <a:lnT>
+                      <a:noFill/>
+                    </a:lnT>
+                    <a:lnB>
+                      <a:noFill/>
+                    </a:lnB>
+                    <a:noFill/>
+                  </a:tcPr>
+                </a:tc>
+                <a:extLst>
+                  <a:ext uri="{0D108BD9-81ED-4DB2-BD59-A6C34878D82A}">
+                    <a16:rowId xmlns:a16="http://schemas.microsoft.com/office/drawing/2014/main" val="3347501919"/>
+                  </a:ext>
+                </a:extLst>
+              </a:tr>
+              <a:tr h="210383">
+                <a:tc>
+                  <a:txBody>
+                    <a:bodyPr/>
+                    <a:lstStyle/>
+                    <a:p>
+                      <a:pPr>
+                        <a:buNone/>
+                      </a:pPr>
+                      <a:r>
+                        <a:rPr lang="en-US" sz="1200">
+                          <a:latin typeface="Courier New" panose="02070309020205020404" pitchFamily="49" charset="0"/>
+                        </a:rPr>
+                        <a:t>font-family</a:t>
+                      </a:r>
+                      <a:endParaRPr lang="en-US" sz="1200"/>
+                    </a:p>
+                  </a:txBody>
+                  <a:tcPr marL="35962" marR="35962" marT="17981" marB="17981" anchor="ctr">
+                    <a:lnL>
+                      <a:noFill/>
+                    </a:lnL>
+                    <a:lnR>
+                      <a:noFill/>
+                    </a:lnR>
+                    <a:lnT>
+                      <a:noFill/>
+                    </a:lnT>
+                    <a:lnB>
+                      <a:noFill/>
+                    </a:lnB>
+                    <a:noFill/>
+                  </a:tcPr>
+                </a:tc>
+                <a:tc>
+                  <a:txBody>
+                    <a:bodyPr/>
+                    <a:lstStyle/>
+                    <a:p>
+                      <a:pPr>
+                        <a:buNone/>
+                      </a:pPr>
+                      <a:r>
+                        <a:rPr lang="en-US" sz="1200"/>
+                        <a:t>Defines the typeface (e.g., Arial, Times New Roman).</a:t>
+                      </a:r>
+                    </a:p>
+                  </a:txBody>
+                  <a:tcPr marL="35962" marR="35962" marT="17981" marB="17981" anchor="ctr">
+                    <a:lnL>
+                      <a:noFill/>
+                    </a:lnL>
+                    <a:lnR>
+                      <a:noFill/>
+                    </a:lnR>
+                    <a:lnT>
+                      <a:noFill/>
+                    </a:lnT>
+                    <a:lnB>
+                      <a:noFill/>
+                    </a:lnB>
+                    <a:noFill/>
+                  </a:tcPr>
+                </a:tc>
+                <a:extLst>
+                  <a:ext uri="{0D108BD9-81ED-4DB2-BD59-A6C34878D82A}">
+                    <a16:rowId xmlns:a16="http://schemas.microsoft.com/office/drawing/2014/main" val="640413648"/>
+                  </a:ext>
+                </a:extLst>
+              </a:tr>
+              <a:tr h="210383">
+                <a:tc>
+                  <a:txBody>
+                    <a:bodyPr/>
+                    <a:lstStyle/>
+                    <a:p>
+                      <a:pPr>
+                        <a:buNone/>
+                      </a:pPr>
+                      <a:r>
+                        <a:rPr lang="en-US" sz="1200">
+                          <a:latin typeface="Courier New" panose="02070309020205020404" pitchFamily="49" charset="0"/>
+                        </a:rPr>
+                        <a:t>font-weight</a:t>
+                      </a:r>
+                      <a:endParaRPr lang="en-US" sz="1200"/>
+                    </a:p>
+                  </a:txBody>
+                  <a:tcPr marL="35962" marR="35962" marT="17981" marB="17981" anchor="ctr">
+                    <a:lnL>
+                      <a:noFill/>
+                    </a:lnL>
+                    <a:lnR>
+                      <a:noFill/>
+                    </a:lnR>
+                    <a:lnT>
+                      <a:noFill/>
+                    </a:lnT>
+                    <a:lnB>
+                      <a:noFill/>
+                    </a:lnB>
+                    <a:noFill/>
+                  </a:tcPr>
+                </a:tc>
+                <a:tc>
+                  <a:txBody>
+                    <a:bodyPr/>
+                    <a:lstStyle/>
+                    <a:p>
+                      <a:pPr>
+                        <a:buNone/>
+                      </a:pPr>
+                      <a:r>
+                        <a:rPr lang="en-US" sz="1200"/>
+                        <a:t>Sets the thickness of text (e.g., </a:t>
+                      </a:r>
+                      <a:r>
+                        <a:rPr lang="en-US" sz="1200">
+                          <a:latin typeface="Courier New" panose="02070309020205020404" pitchFamily="49" charset="0"/>
+                        </a:rPr>
+                        <a:t>normal</a:t>
+                      </a:r>
+                      <a:r>
+                        <a:rPr lang="en-US" sz="1200"/>
+                        <a:t>, </a:t>
+                      </a:r>
+                      <a:r>
+                        <a:rPr lang="en-US" sz="1200">
+                          <a:latin typeface="Courier New" panose="02070309020205020404" pitchFamily="49" charset="0"/>
+                        </a:rPr>
+                        <a:t>bold</a:t>
+                      </a:r>
+                      <a:r>
+                        <a:rPr lang="en-US" sz="1200"/>
+                        <a:t>, </a:t>
+                      </a:r>
+                      <a:r>
+                        <a:rPr lang="en-US" sz="1200">
+                          <a:latin typeface="Courier New" panose="02070309020205020404" pitchFamily="49" charset="0"/>
+                        </a:rPr>
+                        <a:t>400</a:t>
+                      </a:r>
+                      <a:r>
+                        <a:rPr lang="en-US" sz="1200"/>
+                        <a:t>).</a:t>
+                      </a:r>
+                    </a:p>
+                  </a:txBody>
+                  <a:tcPr marL="35962" marR="35962" marT="17981" marB="17981" anchor="ctr">
+                    <a:lnL>
+                      <a:noFill/>
+                    </a:lnL>
+                    <a:lnR>
+                      <a:noFill/>
+                    </a:lnR>
+                    <a:lnT>
+                      <a:noFill/>
+                    </a:lnT>
+                    <a:lnB>
+                      <a:noFill/>
+                    </a:lnB>
+                    <a:noFill/>
+                  </a:tcPr>
+                </a:tc>
+                <a:extLst>
+                  <a:ext uri="{0D108BD9-81ED-4DB2-BD59-A6C34878D82A}">
+                    <a16:rowId xmlns:a16="http://schemas.microsoft.com/office/drawing/2014/main" val="997599495"/>
+                  </a:ext>
+                </a:extLst>
+              </a:tr>
+              <a:tr h="300044">
+                <a:tc>
+                  <a:txBody>
+                    <a:bodyPr/>
+                    <a:lstStyle/>
+                    <a:p>
+                      <a:pPr>
+                        <a:buNone/>
+                      </a:pPr>
+                      <a:r>
+                        <a:rPr lang="en-US" sz="1200">
+                          <a:latin typeface="Courier New" panose="02070309020205020404" pitchFamily="49" charset="0"/>
+                        </a:rPr>
+                        <a:t>text-align</a:t>
+                      </a:r>
+                      <a:endParaRPr lang="en-US" sz="1200"/>
+                    </a:p>
+                  </a:txBody>
+                  <a:tcPr marL="35962" marR="35962" marT="17981" marB="17981" anchor="ctr">
+                    <a:lnL>
+                      <a:noFill/>
+                    </a:lnL>
+                    <a:lnR>
+                      <a:noFill/>
+                    </a:lnR>
+                    <a:lnT>
+                      <a:noFill/>
+                    </a:lnT>
+                    <a:lnB>
+                      <a:noFill/>
+                    </a:lnB>
+                    <a:noFill/>
+                  </a:tcPr>
+                </a:tc>
+                <a:tc>
+                  <a:txBody>
+                    <a:bodyPr/>
+                    <a:lstStyle/>
+                    <a:p>
+                      <a:pPr>
+                        <a:buNone/>
+                      </a:pPr>
+                      <a:r>
+                        <a:rPr lang="en-US" sz="1200"/>
+                        <a:t>Aligns text horizontally (</a:t>
+                      </a:r>
+                      <a:r>
+                        <a:rPr lang="en-US" sz="1200">
+                          <a:latin typeface="Courier New" panose="02070309020205020404" pitchFamily="49" charset="0"/>
+                        </a:rPr>
+                        <a:t>left</a:t>
+                      </a:r>
+                      <a:r>
+                        <a:rPr lang="en-US" sz="1200"/>
+                        <a:t>, </a:t>
+                      </a:r>
+                      <a:r>
+                        <a:rPr lang="en-US" sz="1200">
+                          <a:latin typeface="Courier New" panose="02070309020205020404" pitchFamily="49" charset="0"/>
+                        </a:rPr>
+                        <a:t>center</a:t>
+                      </a:r>
+                      <a:r>
+                        <a:rPr lang="en-US" sz="1200"/>
+                        <a:t>, </a:t>
+                      </a:r>
+                      <a:r>
+                        <a:rPr lang="en-US" sz="1200">
+                          <a:latin typeface="Courier New" panose="02070309020205020404" pitchFamily="49" charset="0"/>
+                        </a:rPr>
+                        <a:t>right</a:t>
+                      </a:r>
+                      <a:r>
+                        <a:rPr lang="en-US" sz="1200"/>
+                        <a:t>, </a:t>
+                      </a:r>
+                      <a:r>
+                        <a:rPr lang="en-US" sz="1200">
+                          <a:latin typeface="Courier New" panose="02070309020205020404" pitchFamily="49" charset="0"/>
+                        </a:rPr>
+                        <a:t>justify</a:t>
+                      </a:r>
+                      <a:r>
+                        <a:rPr lang="en-US" sz="1200"/>
+                        <a:t>).</a:t>
+                      </a:r>
+                    </a:p>
+                  </a:txBody>
+                  <a:tcPr marL="35962" marR="35962" marT="17981" marB="17981" anchor="ctr">
+                    <a:lnL>
+                      <a:noFill/>
+                    </a:lnL>
+                    <a:lnR>
+                      <a:noFill/>
+                    </a:lnR>
+                    <a:lnT>
+                      <a:noFill/>
+                    </a:lnT>
+                    <a:lnB>
+                      <a:noFill/>
+                    </a:lnB>
+                    <a:noFill/>
+                  </a:tcPr>
+                </a:tc>
+                <a:extLst>
+                  <a:ext uri="{0D108BD9-81ED-4DB2-BD59-A6C34878D82A}">
+                    <a16:rowId xmlns:a16="http://schemas.microsoft.com/office/drawing/2014/main" val="3668194337"/>
+                  </a:ext>
+                </a:extLst>
+              </a:tr>
+              <a:tr h="300044">
+                <a:tc>
+                  <a:txBody>
+                    <a:bodyPr/>
+                    <a:lstStyle/>
+                    <a:p>
+                      <a:pPr>
+                        <a:buNone/>
+                      </a:pPr>
+                      <a:r>
+                        <a:rPr lang="en-US" sz="1200">
+                          <a:latin typeface="Courier New" panose="02070309020205020404" pitchFamily="49" charset="0"/>
+                        </a:rPr>
+                        <a:t>text-decoration</a:t>
+                      </a:r>
+                      <a:endParaRPr lang="en-US" sz="1200"/>
+                    </a:p>
+                  </a:txBody>
+                  <a:tcPr marL="35962" marR="35962" marT="17981" marB="17981" anchor="ctr">
+                    <a:lnL>
+                      <a:noFill/>
+                    </a:lnL>
+                    <a:lnR>
+                      <a:noFill/>
+                    </a:lnR>
+                    <a:lnT>
+                      <a:noFill/>
+                    </a:lnT>
+                    <a:lnB>
+                      <a:noFill/>
+                    </a:lnB>
+                    <a:noFill/>
+                  </a:tcPr>
+                </a:tc>
+                <a:tc>
+                  <a:txBody>
+                    <a:bodyPr/>
+                    <a:lstStyle/>
+                    <a:p>
+                      <a:pPr>
+                        <a:buNone/>
+                      </a:pPr>
+                      <a:r>
+                        <a:rPr lang="en-US" sz="1200"/>
+                        <a:t>Adds effects like </a:t>
+                      </a:r>
+                      <a:r>
+                        <a:rPr lang="en-US" sz="1200">
+                          <a:latin typeface="Courier New" panose="02070309020205020404" pitchFamily="49" charset="0"/>
+                        </a:rPr>
+                        <a:t>underline</a:t>
+                      </a:r>
+                      <a:r>
+                        <a:rPr lang="en-US" sz="1200"/>
+                        <a:t>, </a:t>
+                      </a:r>
+                      <a:r>
+                        <a:rPr lang="en-US" sz="1200">
+                          <a:latin typeface="Courier New" panose="02070309020205020404" pitchFamily="49" charset="0"/>
+                        </a:rPr>
+                        <a:t>overline</a:t>
+                      </a:r>
+                      <a:r>
+                        <a:rPr lang="en-US" sz="1200"/>
+                        <a:t>, </a:t>
+                      </a:r>
+                      <a:r>
+                        <a:rPr lang="en-US" sz="1200">
+                          <a:latin typeface="Courier New" panose="02070309020205020404" pitchFamily="49" charset="0"/>
+                        </a:rPr>
+                        <a:t>line-through</a:t>
+                      </a:r>
+                      <a:r>
+                        <a:rPr lang="en-US" sz="1200"/>
+                        <a:t>, or removes them.</a:t>
+                      </a:r>
+                    </a:p>
+                  </a:txBody>
+                  <a:tcPr marL="35962" marR="35962" marT="17981" marB="17981" anchor="ctr">
+                    <a:lnL>
+                      <a:noFill/>
+                    </a:lnL>
+                    <a:lnR>
+                      <a:noFill/>
+                    </a:lnR>
+                    <a:lnT>
+                      <a:noFill/>
+                    </a:lnT>
+                    <a:lnB>
+                      <a:noFill/>
+                    </a:lnB>
+                    <a:noFill/>
+                  </a:tcPr>
+                </a:tc>
+                <a:extLst>
+                  <a:ext uri="{0D108BD9-81ED-4DB2-BD59-A6C34878D82A}">
+                    <a16:rowId xmlns:a16="http://schemas.microsoft.com/office/drawing/2014/main" val="3065643786"/>
+                  </a:ext>
+                </a:extLst>
+              </a:tr>
+              <a:tr h="210383">
+                <a:tc>
+                  <a:txBody>
+                    <a:bodyPr/>
+                    <a:lstStyle/>
+                    <a:p>
+                      <a:pPr>
+                        <a:buNone/>
+                      </a:pPr>
+                      <a:r>
+                        <a:rPr lang="en-US" sz="1200">
+                          <a:latin typeface="Courier New" panose="02070309020205020404" pitchFamily="49" charset="0"/>
+                        </a:rPr>
+                        <a:t>line-height</a:t>
+                      </a:r>
+                      <a:endParaRPr lang="en-US" sz="1200"/>
+                    </a:p>
+                  </a:txBody>
+                  <a:tcPr marL="35962" marR="35962" marT="17981" marB="17981" anchor="ctr">
+                    <a:lnL>
+                      <a:noFill/>
+                    </a:lnL>
+                    <a:lnR>
+                      <a:noFill/>
+                    </a:lnR>
+                    <a:lnT>
+                      <a:noFill/>
+                    </a:lnT>
+                    <a:lnB>
+                      <a:noFill/>
+                    </a:lnB>
+                    <a:noFill/>
+                  </a:tcPr>
+                </a:tc>
+                <a:tc>
+                  <a:txBody>
+                    <a:bodyPr/>
+                    <a:lstStyle/>
+                    <a:p>
+                      <a:pPr>
+                        <a:buNone/>
+                      </a:pPr>
+                      <a:r>
+                        <a:rPr lang="en-US" sz="1200"/>
+                        <a:t>Controls vertical spacing between lines of text.</a:t>
+                      </a:r>
+                    </a:p>
+                  </a:txBody>
+                  <a:tcPr marL="35962" marR="35962" marT="17981" marB="17981" anchor="ctr">
+                    <a:lnL>
+                      <a:noFill/>
+                    </a:lnL>
+                    <a:lnR>
+                      <a:noFill/>
+                    </a:lnR>
+                    <a:lnT>
+                      <a:noFill/>
+                    </a:lnT>
+                    <a:lnB>
+                      <a:noFill/>
+                    </a:lnB>
+                    <a:noFill/>
+                  </a:tcPr>
+                </a:tc>
+                <a:extLst>
+                  <a:ext uri="{0D108BD9-81ED-4DB2-BD59-A6C34878D82A}">
+                    <a16:rowId xmlns:a16="http://schemas.microsoft.com/office/drawing/2014/main" val="1810463479"/>
+                  </a:ext>
+                </a:extLst>
+              </a:tr>
+              <a:tr h="210383">
+                <a:tc>
+                  <a:txBody>
+                    <a:bodyPr/>
+                    <a:lstStyle/>
+                    <a:p>
+                      <a:pPr>
+                        <a:buNone/>
+                      </a:pPr>
+                      <a:r>
+                        <a:rPr lang="en-US" sz="1200">
+                          <a:latin typeface="Courier New" panose="02070309020205020404" pitchFamily="49" charset="0"/>
+                        </a:rPr>
+                        <a:t>letter-spacing</a:t>
+                      </a:r>
+                      <a:endParaRPr lang="en-US" sz="1200"/>
+                    </a:p>
+                  </a:txBody>
+                  <a:tcPr marL="35962" marR="35962" marT="17981" marB="17981" anchor="ctr">
+                    <a:lnL>
+                      <a:noFill/>
+                    </a:lnL>
+                    <a:lnR>
+                      <a:noFill/>
+                    </a:lnR>
+                    <a:lnT>
+                      <a:noFill/>
+                    </a:lnT>
+                    <a:lnB>
+                      <a:noFill/>
+                    </a:lnB>
+                    <a:noFill/>
+                  </a:tcPr>
+                </a:tc>
+                <a:tc>
+                  <a:txBody>
+                    <a:bodyPr/>
+                    <a:lstStyle/>
+                    <a:p>
+                      <a:pPr>
+                        <a:buNone/>
+                      </a:pPr>
+                      <a:r>
+                        <a:rPr lang="en-US" sz="1200"/>
+                        <a:t>Adjusts spacing between characters.</a:t>
+                      </a:r>
+                    </a:p>
+                  </a:txBody>
+                  <a:tcPr marL="35962" marR="35962" marT="17981" marB="17981" anchor="ctr">
+                    <a:lnL>
+                      <a:noFill/>
+                    </a:lnL>
+                    <a:lnR>
+                      <a:noFill/>
+                    </a:lnR>
+                    <a:lnT>
+                      <a:noFill/>
+                    </a:lnT>
+                    <a:lnB>
+                      <a:noFill/>
+                    </a:lnB>
+                    <a:noFill/>
+                  </a:tcPr>
+                </a:tc>
+                <a:extLst>
+                  <a:ext uri="{0D108BD9-81ED-4DB2-BD59-A6C34878D82A}">
+                    <a16:rowId xmlns:a16="http://schemas.microsoft.com/office/drawing/2014/main" val="3534033832"/>
+                  </a:ext>
+                </a:extLst>
+              </a:tr>
+              <a:tr h="210383">
+                <a:tc>
+                  <a:txBody>
+                    <a:bodyPr/>
+                    <a:lstStyle/>
+                    <a:p>
+                      <a:pPr>
+                        <a:buNone/>
+                      </a:pPr>
+                      <a:r>
+                        <a:rPr lang="en-US" sz="1200">
+                          <a:latin typeface="Courier New" panose="02070309020205020404" pitchFamily="49" charset="0"/>
+                        </a:rPr>
+                        <a:t>word-spacing</a:t>
+                      </a:r>
+                      <a:endParaRPr lang="en-US" sz="1200"/>
+                    </a:p>
+                  </a:txBody>
+                  <a:tcPr marL="35962" marR="35962" marT="17981" marB="17981" anchor="ctr">
+                    <a:lnL>
+                      <a:noFill/>
+                    </a:lnL>
+                    <a:lnR>
+                      <a:noFill/>
+                    </a:lnR>
+                    <a:lnT>
+                      <a:noFill/>
+                    </a:lnT>
+                    <a:lnB>
+                      <a:noFill/>
+                    </a:lnB>
+                    <a:noFill/>
+                  </a:tcPr>
+                </a:tc>
+                <a:tc>
+                  <a:txBody>
+                    <a:bodyPr/>
+                    <a:lstStyle/>
+                    <a:p>
+                      <a:pPr>
+                        <a:buNone/>
+                      </a:pPr>
+                      <a:r>
+                        <a:rPr lang="en-US" sz="1200"/>
+                        <a:t>Adjusts spacing between words.</a:t>
+                      </a:r>
+                    </a:p>
+                  </a:txBody>
+                  <a:tcPr marL="35962" marR="35962" marT="17981" marB="17981" anchor="ctr">
+                    <a:lnL>
+                      <a:noFill/>
+                    </a:lnL>
+                    <a:lnR>
+                      <a:noFill/>
+                    </a:lnR>
+                    <a:lnT>
+                      <a:noFill/>
+                    </a:lnT>
+                    <a:lnB>
+                      <a:noFill/>
+                    </a:lnB>
+                    <a:noFill/>
+                  </a:tcPr>
+                </a:tc>
+                <a:extLst>
+                  <a:ext uri="{0D108BD9-81ED-4DB2-BD59-A6C34878D82A}">
+                    <a16:rowId xmlns:a16="http://schemas.microsoft.com/office/drawing/2014/main" val="3874288127"/>
+                  </a:ext>
+                </a:extLst>
+              </a:tr>
+              <a:tr h="210383">
+                <a:tc>
+                  <a:txBody>
+                    <a:bodyPr/>
+                    <a:lstStyle/>
+                    <a:p>
+                      <a:pPr>
+                        <a:buNone/>
+                      </a:pPr>
+                      <a:r>
+                        <a:rPr lang="en-US" sz="1200">
+                          <a:latin typeface="Courier New" panose="02070309020205020404" pitchFamily="49" charset="0"/>
+                        </a:rPr>
+                        <a:t>max-width</a:t>
+                      </a:r>
+                      <a:r>
+                        <a:rPr lang="en-US" sz="1200"/>
+                        <a:t> / </a:t>
+                      </a:r>
+                      <a:r>
+                        <a:rPr lang="en-US" sz="1200">
+                          <a:latin typeface="Courier New" panose="02070309020205020404" pitchFamily="49" charset="0"/>
+                        </a:rPr>
+                        <a:t>min-width</a:t>
+                      </a:r>
+                      <a:endParaRPr lang="en-US" sz="1200"/>
+                    </a:p>
+                  </a:txBody>
+                  <a:tcPr marL="35962" marR="35962" marT="17981" marB="17981" anchor="ctr">
+                    <a:lnL>
+                      <a:noFill/>
+                    </a:lnL>
+                    <a:lnR>
+                      <a:noFill/>
+                    </a:lnR>
+                    <a:lnT>
+                      <a:noFill/>
+                    </a:lnT>
+                    <a:lnB>
+                      <a:noFill/>
+                    </a:lnB>
+                    <a:noFill/>
+                  </a:tcPr>
+                </a:tc>
+                <a:tc>
+                  <a:txBody>
+                    <a:bodyPr/>
+                    <a:lstStyle/>
+                    <a:p>
+                      <a:pPr>
+                        <a:buNone/>
+                      </a:pPr>
+                      <a:r>
+                        <a:rPr lang="en-US" sz="1200" dirty="0"/>
+                        <a:t>Restricts how wide an element can grow or shrink.</a:t>
+                      </a:r>
+                    </a:p>
+                  </a:txBody>
+                  <a:tcPr marL="35962" marR="35962" marT="17981" marB="17981" anchor="ctr">
+                    <a:lnL>
+                      <a:noFill/>
+                    </a:lnL>
+                    <a:lnR>
+                      <a:noFill/>
+                    </a:lnR>
+                    <a:lnT>
+                      <a:noFill/>
+                    </a:lnT>
+                    <a:lnB>
+                      <a:noFill/>
+                    </a:lnB>
+                    <a:noFill/>
+                  </a:tcPr>
+                </a:tc>
+                <a:extLst>
+                  <a:ext uri="{0D108BD9-81ED-4DB2-BD59-A6C34878D82A}">
+                    <a16:rowId xmlns:a16="http://schemas.microsoft.com/office/drawing/2014/main" val="3551391474"/>
+                  </a:ext>
+                </a:extLst>
+              </a:tr>
+              <a:tr h="386193">
+                <a:tc>
+                  <a:txBody>
+                    <a:bodyPr/>
+                    <a:lstStyle/>
+                    <a:p>
+                      <a:pPr>
+                        <a:buNone/>
+                      </a:pPr>
+                      <a:r>
+                        <a:rPr lang="en-US" sz="1200">
+                          <a:latin typeface="Courier New" panose="02070309020205020404" pitchFamily="49" charset="0"/>
+                        </a:rPr>
+                        <a:t>overflow</a:t>
+                      </a:r>
+                      <a:endParaRPr lang="en-US" sz="1200"/>
+                    </a:p>
+                  </a:txBody>
+                  <a:tcPr marL="35962" marR="35962" marT="17981" marB="17981" anchor="ctr">
+                    <a:lnL>
+                      <a:noFill/>
+                    </a:lnL>
+                    <a:lnR>
+                      <a:noFill/>
+                    </a:lnR>
+                    <a:lnT>
+                      <a:noFill/>
+                    </a:lnT>
+                    <a:lnB>
+                      <a:noFill/>
+                    </a:lnB>
+                    <a:noFill/>
+                  </a:tcPr>
+                </a:tc>
+                <a:tc>
+                  <a:txBody>
+                    <a:bodyPr/>
+                    <a:lstStyle/>
+                    <a:p>
+                      <a:pPr>
+                        <a:buNone/>
+                      </a:pPr>
+                      <a:r>
+                        <a:rPr lang="en-US" sz="1200"/>
+                        <a:t>Controls what happens to content that overflows a box (</a:t>
+                      </a:r>
+                      <a:r>
+                        <a:rPr lang="en-US" sz="1200">
+                          <a:latin typeface="Courier New" panose="02070309020205020404" pitchFamily="49" charset="0"/>
+                        </a:rPr>
+                        <a:t>visible</a:t>
+                      </a:r>
+                      <a:r>
+                        <a:rPr lang="en-US" sz="1200"/>
+                        <a:t>, </a:t>
+                      </a:r>
+                      <a:r>
+                        <a:rPr lang="en-US" sz="1200">
+                          <a:latin typeface="Courier New" panose="02070309020205020404" pitchFamily="49" charset="0"/>
+                        </a:rPr>
+                        <a:t>hidden</a:t>
+                      </a:r>
+                      <a:r>
+                        <a:rPr lang="en-US" sz="1200"/>
+                        <a:t>, </a:t>
+                      </a:r>
+                      <a:r>
+                        <a:rPr lang="en-US" sz="1200">
+                          <a:latin typeface="Courier New" panose="02070309020205020404" pitchFamily="49" charset="0"/>
+                        </a:rPr>
+                        <a:t>scroll</a:t>
+                      </a:r>
+                      <a:r>
+                        <a:rPr lang="en-US" sz="1200"/>
+                        <a:t>, </a:t>
+                      </a:r>
+                      <a:r>
+                        <a:rPr lang="en-US" sz="1200">
+                          <a:latin typeface="Courier New" panose="02070309020205020404" pitchFamily="49" charset="0"/>
+                        </a:rPr>
+                        <a:t>auto</a:t>
+                      </a:r>
+                      <a:r>
+                        <a:rPr lang="en-US" sz="1200"/>
+                        <a:t>).</a:t>
+                      </a:r>
+                    </a:p>
+                  </a:txBody>
+                  <a:tcPr marL="35962" marR="35962" marT="17981" marB="17981" anchor="ctr">
+                    <a:lnL>
+                      <a:noFill/>
+                    </a:lnL>
+                    <a:lnR>
+                      <a:noFill/>
+                    </a:lnR>
+                    <a:lnT>
+                      <a:noFill/>
+                    </a:lnT>
+                    <a:lnB>
+                      <a:noFill/>
+                    </a:lnB>
+                    <a:noFill/>
+                  </a:tcPr>
+                </a:tc>
+                <a:extLst>
+                  <a:ext uri="{0D108BD9-81ED-4DB2-BD59-A6C34878D82A}">
+                    <a16:rowId xmlns:a16="http://schemas.microsoft.com/office/drawing/2014/main" val="3144277890"/>
+                  </a:ext>
+                </a:extLst>
+              </a:tr>
+              <a:tr h="210383">
+                <a:tc>
+                  <a:txBody>
+                    <a:bodyPr/>
+                    <a:lstStyle/>
+                    <a:p>
+                      <a:pPr>
+                        <a:buNone/>
+                      </a:pPr>
+                      <a:r>
+                        <a:rPr lang="en-US" sz="1200">
+                          <a:latin typeface="Courier New" panose="02070309020205020404" pitchFamily="49" charset="0"/>
+                        </a:rPr>
+                        <a:t>z-index</a:t>
+                      </a:r>
+                      <a:endParaRPr lang="en-US" sz="1200"/>
+                    </a:p>
+                  </a:txBody>
+                  <a:tcPr marL="35962" marR="35962" marT="17981" marB="17981" anchor="ctr">
+                    <a:lnL>
+                      <a:noFill/>
+                    </a:lnL>
+                    <a:lnR>
+                      <a:noFill/>
+                    </a:lnR>
+                    <a:lnT>
+                      <a:noFill/>
+                    </a:lnT>
+                    <a:lnB>
+                      <a:noFill/>
+                    </a:lnB>
+                    <a:noFill/>
+                  </a:tcPr>
+                </a:tc>
+                <a:tc>
+                  <a:txBody>
+                    <a:bodyPr/>
+                    <a:lstStyle/>
+                    <a:p>
+                      <a:pPr>
+                        <a:buNone/>
+                      </a:pPr>
+                      <a:r>
+                        <a:rPr lang="en-US" sz="1200"/>
+                        <a:t>Sets the stacking order of elements (higher = in front).</a:t>
+                      </a:r>
+                    </a:p>
+                  </a:txBody>
+                  <a:tcPr marL="35962" marR="35962" marT="17981" marB="17981" anchor="ctr">
+                    <a:lnL>
+                      <a:noFill/>
+                    </a:lnL>
+                    <a:lnR>
+                      <a:noFill/>
+                    </a:lnR>
+                    <a:lnT>
+                      <a:noFill/>
+                    </a:lnT>
+                    <a:lnB>
+                      <a:noFill/>
+                    </a:lnB>
+                    <a:noFill/>
+                  </a:tcPr>
+                </a:tc>
+                <a:extLst>
+                  <a:ext uri="{0D108BD9-81ED-4DB2-BD59-A6C34878D82A}">
+                    <a16:rowId xmlns:a16="http://schemas.microsoft.com/office/drawing/2014/main" val="3510073270"/>
+                  </a:ext>
+                </a:extLst>
+              </a:tr>
+              <a:tr h="300044">
+                <a:tc>
+                  <a:txBody>
+                    <a:bodyPr/>
+                    <a:lstStyle/>
+                    <a:p>
+                      <a:pPr>
+                        <a:buNone/>
+                      </a:pPr>
+                      <a:r>
+                        <a:rPr lang="en-US" sz="1200">
+                          <a:latin typeface="Courier New" panose="02070309020205020404" pitchFamily="49" charset="0"/>
+                        </a:rPr>
+                        <a:t>opacity</a:t>
+                      </a:r>
+                      <a:endParaRPr lang="en-US" sz="1200"/>
+                    </a:p>
+                  </a:txBody>
+                  <a:tcPr marL="35962" marR="35962" marT="17981" marB="17981" anchor="ctr">
+                    <a:lnL>
+                      <a:noFill/>
+                    </a:lnL>
+                    <a:lnR>
+                      <a:noFill/>
+                    </a:lnR>
+                    <a:lnT>
+                      <a:noFill/>
+                    </a:lnT>
+                    <a:lnB>
+                      <a:noFill/>
+                    </a:lnB>
+                    <a:noFill/>
+                  </a:tcPr>
+                </a:tc>
+                <a:tc>
+                  <a:txBody>
+                    <a:bodyPr/>
+                    <a:lstStyle/>
+                    <a:p>
+                      <a:pPr>
+                        <a:buNone/>
+                      </a:pPr>
+                      <a:r>
+                        <a:rPr lang="en-US" sz="1200"/>
+                        <a:t>Controls transparency (0 = fully transparent, 1 = fully visible).</a:t>
+                      </a:r>
+                    </a:p>
+                  </a:txBody>
+                  <a:tcPr marL="35962" marR="35962" marT="17981" marB="17981" anchor="ctr">
+                    <a:lnL>
+                      <a:noFill/>
+                    </a:lnL>
+                    <a:lnR>
+                      <a:noFill/>
+                    </a:lnR>
+                    <a:lnT>
+                      <a:noFill/>
+                    </a:lnT>
+                    <a:lnB>
+                      <a:noFill/>
+                    </a:lnB>
+                    <a:noFill/>
+                  </a:tcPr>
+                </a:tc>
+                <a:extLst>
+                  <a:ext uri="{0D108BD9-81ED-4DB2-BD59-A6C34878D82A}">
+                    <a16:rowId xmlns:a16="http://schemas.microsoft.com/office/drawing/2014/main" val="682732983"/>
+                  </a:ext>
+                </a:extLst>
+              </a:tr>
+              <a:tr h="300044">
+                <a:tc>
+                  <a:txBody>
+                    <a:bodyPr/>
+                    <a:lstStyle/>
+                    <a:p>
+                      <a:pPr>
+                        <a:buNone/>
+                      </a:pPr>
+                      <a:r>
+                        <a:rPr lang="en-US" sz="1200">
+                          <a:latin typeface="Courier New" panose="02070309020205020404" pitchFamily="49" charset="0"/>
+                        </a:rPr>
+                        <a:t>cursor</a:t>
+                      </a:r>
+                      <a:endParaRPr lang="en-US" sz="1200"/>
+                    </a:p>
+                  </a:txBody>
+                  <a:tcPr marL="35962" marR="35962" marT="17981" marB="17981" anchor="ctr">
+                    <a:lnL>
+                      <a:noFill/>
+                    </a:lnL>
+                    <a:lnR>
+                      <a:noFill/>
+                    </a:lnR>
+                    <a:lnT>
+                      <a:noFill/>
+                    </a:lnT>
+                    <a:lnB>
+                      <a:noFill/>
+                    </a:lnB>
+                    <a:noFill/>
+                  </a:tcPr>
+                </a:tc>
+                <a:tc>
+                  <a:txBody>
+                    <a:bodyPr/>
+                    <a:lstStyle/>
+                    <a:p>
+                      <a:pPr>
+                        <a:buNone/>
+                      </a:pPr>
+                      <a:r>
+                        <a:rPr lang="en-US" sz="1200"/>
+                        <a:t>Changes the mouse cursor when hovering over an element.</a:t>
+                      </a:r>
+                    </a:p>
+                  </a:txBody>
+                  <a:tcPr marL="35962" marR="35962" marT="17981" marB="17981" anchor="ctr">
+                    <a:lnL>
+                      <a:noFill/>
+                    </a:lnL>
+                    <a:lnR>
+                      <a:noFill/>
+                    </a:lnR>
+                    <a:lnT>
+                      <a:noFill/>
+                    </a:lnT>
+                    <a:lnB>
+                      <a:noFill/>
+                    </a:lnB>
+                    <a:noFill/>
+                  </a:tcPr>
+                </a:tc>
+                <a:extLst>
+                  <a:ext uri="{0D108BD9-81ED-4DB2-BD59-A6C34878D82A}">
+                    <a16:rowId xmlns:a16="http://schemas.microsoft.com/office/drawing/2014/main" val="2508868338"/>
+                  </a:ext>
+                </a:extLst>
+              </a:tr>
+              <a:tr h="300044">
+                <a:tc>
+                  <a:txBody>
+                    <a:bodyPr/>
+                    <a:lstStyle/>
+                    <a:p>
+                      <a:pPr>
+                        <a:buNone/>
+                      </a:pPr>
+                      <a:r>
+                        <a:rPr lang="en-US" sz="1200">
+                          <a:latin typeface="Courier New" panose="02070309020205020404" pitchFamily="49" charset="0"/>
+                        </a:rPr>
+                        <a:t>transition</a:t>
+                      </a:r>
+                      <a:endParaRPr lang="en-US" sz="1200"/>
+                    </a:p>
+                  </a:txBody>
+                  <a:tcPr marL="35962" marR="35962" marT="17981" marB="17981" anchor="ctr">
+                    <a:lnL>
+                      <a:noFill/>
+                    </a:lnL>
+                    <a:lnR>
+                      <a:noFill/>
+                    </a:lnR>
+                    <a:lnT>
+                      <a:noFill/>
+                    </a:lnT>
+                    <a:lnB>
+                      <a:noFill/>
+                    </a:lnB>
+                    <a:noFill/>
+                  </a:tcPr>
+                </a:tc>
+                <a:tc>
+                  <a:txBody>
+                    <a:bodyPr/>
+                    <a:lstStyle/>
+                    <a:p>
+                      <a:pPr>
+                        <a:buNone/>
+                      </a:pPr>
+                      <a:r>
+                        <a:rPr lang="en-US" sz="1200"/>
+                        <a:t>Defines animation effects when properties change (e.g., hover effects).</a:t>
+                      </a:r>
+                    </a:p>
+                  </a:txBody>
+                  <a:tcPr marL="35962" marR="35962" marT="17981" marB="17981" anchor="ctr">
+                    <a:lnL>
+                      <a:noFill/>
+                    </a:lnL>
+                    <a:lnR>
+                      <a:noFill/>
+                    </a:lnR>
+                    <a:lnT>
+                      <a:noFill/>
+                    </a:lnT>
+                    <a:lnB>
+                      <a:noFill/>
+                    </a:lnB>
+                    <a:noFill/>
+                  </a:tcPr>
+                </a:tc>
+                <a:extLst>
+                  <a:ext uri="{0D108BD9-81ED-4DB2-BD59-A6C34878D82A}">
+                    <a16:rowId xmlns:a16="http://schemas.microsoft.com/office/drawing/2014/main" val="984989321"/>
+                  </a:ext>
+                </a:extLst>
+              </a:tr>
+              <a:tr h="210383">
+                <a:tc>
+                  <a:txBody>
+                    <a:bodyPr/>
+                    <a:lstStyle/>
+                    <a:p>
+                      <a:pPr>
+                        <a:buNone/>
+                      </a:pPr>
+                      <a:r>
+                        <a:rPr lang="en-US" sz="1200">
+                          <a:latin typeface="Courier New" panose="02070309020205020404" pitchFamily="49" charset="0"/>
+                        </a:rPr>
+                        <a:t>transform</a:t>
+                      </a:r>
+                      <a:endParaRPr lang="en-US" sz="1200"/>
+                    </a:p>
+                  </a:txBody>
+                  <a:tcPr marL="35962" marR="35962" marT="17981" marB="17981" anchor="ctr">
+                    <a:lnL>
+                      <a:noFill/>
+                    </a:lnL>
+                    <a:lnR>
+                      <a:noFill/>
+                    </a:lnR>
+                    <a:lnT>
+                      <a:noFill/>
+                    </a:lnT>
+                    <a:lnB>
+                      <a:noFill/>
+                    </a:lnB>
+                    <a:noFill/>
+                  </a:tcPr>
+                </a:tc>
+                <a:tc>
+                  <a:txBody>
+                    <a:bodyPr/>
+                    <a:lstStyle/>
+                    <a:p>
+                      <a:pPr>
+                        <a:buNone/>
+                      </a:pPr>
+                      <a:r>
+                        <a:rPr lang="en-US" sz="1200"/>
+                        <a:t>Rotates, scales, skews, or moves elements.</a:t>
+                      </a:r>
+                    </a:p>
+                  </a:txBody>
+                  <a:tcPr marL="35962" marR="35962" marT="17981" marB="17981" anchor="ctr">
+                    <a:lnL>
+                      <a:noFill/>
+                    </a:lnL>
+                    <a:lnR>
+                      <a:noFill/>
+                    </a:lnR>
+                    <a:lnT>
+                      <a:noFill/>
+                    </a:lnT>
+                    <a:lnB>
+                      <a:noFill/>
+                    </a:lnB>
+                    <a:noFill/>
+                  </a:tcPr>
+                </a:tc>
+                <a:extLst>
+                  <a:ext uri="{0D108BD9-81ED-4DB2-BD59-A6C34878D82A}">
+                    <a16:rowId xmlns:a16="http://schemas.microsoft.com/office/drawing/2014/main" val="2578597064"/>
+                  </a:ext>
+                </a:extLst>
+              </a:tr>
+              <a:tr h="210383">
+                <a:tc>
+                  <a:txBody>
+                    <a:bodyPr/>
+                    <a:lstStyle/>
+                    <a:p>
+                      <a:pPr>
+                        <a:buNone/>
+                      </a:pPr>
+                      <a:r>
+                        <a:rPr lang="en-US" sz="1200">
+                          <a:latin typeface="Courier New" panose="02070309020205020404" pitchFamily="49" charset="0"/>
+                        </a:rPr>
+                        <a:t>box-shadow</a:t>
+                      </a:r>
+                      <a:endParaRPr lang="en-US" sz="1200"/>
+                    </a:p>
+                  </a:txBody>
+                  <a:tcPr marL="35962" marR="35962" marT="17981" marB="17981" anchor="ctr">
+                    <a:lnL>
+                      <a:noFill/>
+                    </a:lnL>
+                    <a:lnR>
+                      <a:noFill/>
+                    </a:lnR>
+                    <a:lnT>
+                      <a:noFill/>
+                    </a:lnT>
+                    <a:lnB>
+                      <a:noFill/>
+                    </a:lnB>
+                    <a:noFill/>
+                  </a:tcPr>
+                </a:tc>
+                <a:tc>
+                  <a:txBody>
+                    <a:bodyPr/>
+                    <a:lstStyle/>
+                    <a:p>
+                      <a:pPr>
+                        <a:buNone/>
+                      </a:pPr>
+                      <a:r>
+                        <a:rPr lang="en-US" sz="1200"/>
+                        <a:t>Adds shadow effects around an element’s box.</a:t>
+                      </a:r>
+                    </a:p>
+                  </a:txBody>
+                  <a:tcPr marL="35962" marR="35962" marT="17981" marB="17981" anchor="ctr">
+                    <a:lnL>
+                      <a:noFill/>
+                    </a:lnL>
+                    <a:lnR>
+                      <a:noFill/>
+                    </a:lnR>
+                    <a:lnT>
+                      <a:noFill/>
+                    </a:lnT>
+                    <a:lnB>
+                      <a:noFill/>
+                    </a:lnB>
+                    <a:noFill/>
+                  </a:tcPr>
+                </a:tc>
+                <a:extLst>
+                  <a:ext uri="{0D108BD9-81ED-4DB2-BD59-A6C34878D82A}">
+                    <a16:rowId xmlns:a16="http://schemas.microsoft.com/office/drawing/2014/main" val="4108609793"/>
+                  </a:ext>
+                </a:extLst>
+              </a:tr>
+              <a:tr h="210383">
+                <a:tc>
+                  <a:txBody>
+                    <a:bodyPr/>
+                    <a:lstStyle/>
+                    <a:p>
+                      <a:pPr>
+                        <a:buNone/>
+                      </a:pPr>
+                      <a:r>
+                        <a:rPr lang="en-US" sz="1200">
+                          <a:latin typeface="Courier New" panose="02070309020205020404" pitchFamily="49" charset="0"/>
+                        </a:rPr>
+                        <a:t>text-shadow</a:t>
+                      </a:r>
+                      <a:endParaRPr lang="en-US" sz="1200"/>
+                    </a:p>
+                  </a:txBody>
+                  <a:tcPr marL="35962" marR="35962" marT="17981" marB="17981" anchor="ctr">
+                    <a:lnL>
+                      <a:noFill/>
+                    </a:lnL>
+                    <a:lnR>
+                      <a:noFill/>
+                    </a:lnR>
+                    <a:lnT>
+                      <a:noFill/>
+                    </a:lnT>
+                    <a:lnB>
+                      <a:noFill/>
+                    </a:lnB>
+                    <a:noFill/>
+                  </a:tcPr>
+                </a:tc>
+                <a:tc>
+                  <a:txBody>
+                    <a:bodyPr/>
+                    <a:lstStyle/>
+                    <a:p>
+                      <a:pPr>
+                        <a:buNone/>
+                      </a:pPr>
+                      <a:r>
+                        <a:rPr lang="en-US" sz="1200"/>
+                        <a:t>Adds shadow effects to text.</a:t>
+                      </a:r>
+                    </a:p>
+                  </a:txBody>
+                  <a:tcPr marL="35962" marR="35962" marT="17981" marB="17981" anchor="ctr">
+                    <a:lnL>
+                      <a:noFill/>
+                    </a:lnL>
+                    <a:lnR>
+                      <a:noFill/>
+                    </a:lnR>
+                    <a:lnT>
+                      <a:noFill/>
+                    </a:lnT>
+                    <a:lnB>
+                      <a:noFill/>
+                    </a:lnB>
+                    <a:noFill/>
+                  </a:tcPr>
+                </a:tc>
+                <a:extLst>
+                  <a:ext uri="{0D108BD9-81ED-4DB2-BD59-A6C34878D82A}">
+                    <a16:rowId xmlns:a16="http://schemas.microsoft.com/office/drawing/2014/main" val="1219162536"/>
+                  </a:ext>
+                </a:extLst>
+              </a:tr>
+              <a:tr h="210383">
+                <a:tc>
+                  <a:txBody>
+                    <a:bodyPr/>
+                    <a:lstStyle/>
+                    <a:p>
+                      <a:pPr>
+                        <a:buNone/>
+                      </a:pPr>
+                      <a:r>
+                        <a:rPr lang="en-US" sz="1200">
+                          <a:latin typeface="Courier New" panose="02070309020205020404" pitchFamily="49" charset="0"/>
+                        </a:rPr>
+                        <a:t>border-radius</a:t>
+                      </a:r>
+                      <a:endParaRPr lang="en-US" sz="1200"/>
+                    </a:p>
+                  </a:txBody>
+                  <a:tcPr marL="35962" marR="35962" marT="17981" marB="17981" anchor="ctr">
+                    <a:lnL>
+                      <a:noFill/>
+                    </a:lnL>
+                    <a:lnR>
+                      <a:noFill/>
+                    </a:lnR>
+                    <a:lnT>
+                      <a:noFill/>
+                    </a:lnT>
+                    <a:lnB>
+                      <a:noFill/>
+                    </a:lnB>
+                    <a:noFill/>
+                  </a:tcPr>
+                </a:tc>
+                <a:tc>
+                  <a:txBody>
+                    <a:bodyPr/>
+                    <a:lstStyle/>
+                    <a:p>
+                      <a:pPr>
+                        <a:buNone/>
+                      </a:pPr>
+                      <a:r>
+                        <a:rPr lang="en-US" sz="1200" dirty="0"/>
+                        <a:t>Rounds the corners of an element.</a:t>
+                      </a:r>
+                    </a:p>
+                  </a:txBody>
+                  <a:tcPr marL="35962" marR="35962" marT="17981" marB="17981" anchor="ctr">
+                    <a:lnL>
+                      <a:noFill/>
+                    </a:lnL>
+                    <a:lnR>
+                      <a:noFill/>
+                    </a:lnR>
+                    <a:lnT>
+                      <a:noFill/>
+                    </a:lnT>
+                    <a:lnB>
+                      <a:noFill/>
+                    </a:lnB>
+                    <a:noFill/>
+                  </a:tcPr>
+                </a:tc>
+                <a:extLst>
+                  <a:ext uri="{0D108BD9-81ED-4DB2-BD59-A6C34878D82A}">
+                    <a16:rowId xmlns:a16="http://schemas.microsoft.com/office/drawing/2014/main" val="212085757"/>
+                  </a:ext>
+                </a:extLst>
+              </a:tr>
+            </a:tbl>
+          </a:graphicData>
+        </a:graphic>
+      </p:graphicFrame>
+    </p:spTree>
+    <p:extLst>
+      <p:ext uri="{BB962C8B-B14F-4D97-AF65-F5344CB8AC3E}">
+        <p14:creationId xmlns:p14="http://schemas.microsoft.com/office/powerpoint/2010/main" val="360719414"/>
+      </p:ext>
+    </p:extLst>
+  </p:cSld>
+  <p:clrMapOvr>
+    <a:masterClrMapping/>
+  </p:clrMapOvr>
+</p:sld>
+</file>
+
+<file path=ppt/slides/slide43.xml><?xml version="1.0" encoding="utf-8"?>
+<p:sld xmlns:a="http://schemas.openxmlformats.org/drawingml/2006/main" xmlns:r="http://schemas.openxmlformats.org/officeDocument/2006/relationships" xmlns:p="http://schemas.openxmlformats.org/presentationml/2006/main">
+  <p:cSld>
+    <p:spTree>
+      <p:nvGrpSpPr>
+        <p:cNvPr id="1" name=""/>
+        <p:cNvGrpSpPr/>
+        <p:nvPr/>
+      </p:nvGrpSpPr>
+      <p:grpSpPr>
+        <a:xfrm>
+          <a:off x="0" y="0"/>
+          <a:ext cx="0" cy="0"/>
+          <a:chOff x="0" y="0"/>
+          <a:chExt cx="0" cy="0"/>
+        </a:xfrm>
+      </p:grpSpPr>
+      <p:sp>
+        <p:nvSpPr>
+          <p:cNvPr id="2" name="Title 1">
+            <a:extLst>
+              <a:ext uri="{FF2B5EF4-FFF2-40B4-BE49-F238E27FC236}">
+                <a16:creationId xmlns:a16="http://schemas.microsoft.com/office/drawing/2014/main" id="{F2CDDE54-C215-C1A4-A3D4-E8D929889366}"/>
+              </a:ext>
+            </a:extLst>
+          </p:cNvPr>
+          <p:cNvSpPr>
+            <a:spLocks noGrp="1"/>
+          </p:cNvSpPr>
+          <p:nvPr>
+            <p:ph type="title"/>
+          </p:nvPr>
+        </p:nvSpPr>
+        <p:spPr/>
+        <p:txBody>
+          <a:bodyPr/>
+          <a:lstStyle/>
+          <a:p>
+            <a:r>
+              <a:rPr lang="en-US" dirty="0"/>
+              <a:t>Additional CSS Resource</a:t>
+            </a:r>
+          </a:p>
+        </p:txBody>
+      </p:sp>
+      <p:pic>
+        <p:nvPicPr>
+          <p:cNvPr id="5" name="Picture 4">
+            <a:extLst>
+              <a:ext uri="{FF2B5EF4-FFF2-40B4-BE49-F238E27FC236}">
+                <a16:creationId xmlns:a16="http://schemas.microsoft.com/office/drawing/2014/main" id="{B025C39B-72F6-0496-6747-3E0A57647631}"/>
+              </a:ext>
+            </a:extLst>
+          </p:cNvPr>
+          <p:cNvPicPr>
+            <a:picLocks noChangeAspect="1"/>
+          </p:cNvPicPr>
+          <p:nvPr/>
+        </p:nvPicPr>
+        <p:blipFill>
+          <a:blip r:embed="rId2"/>
+          <a:stretch>
+            <a:fillRect/>
+          </a:stretch>
+        </p:blipFill>
+        <p:spPr>
+          <a:xfrm>
+            <a:off x="581192" y="2180461"/>
+            <a:ext cx="11029616" cy="4214373"/>
+          </a:xfrm>
+          <a:prstGeom prst="rect">
+            <a:avLst/>
+          </a:prstGeom>
+        </p:spPr>
+      </p:pic>
+    </p:spTree>
+    <p:extLst>
+      <p:ext uri="{BB962C8B-B14F-4D97-AF65-F5344CB8AC3E}">
+        <p14:creationId xmlns:p14="http://schemas.microsoft.com/office/powerpoint/2010/main" val="533231895"/>
       </p:ext>
     </p:extLst>
   </p:cSld>

--- a/Week_1/003-HTML_&_CSS/HTML-CSS.pptx
+++ b/Week_1/003-HTML_&_CSS/HTML-CSS.pptx
@@ -46,8 +46,9 @@
     <p:sldId id="296" r:id="rId40"/>
     <p:sldId id="297" r:id="rId41"/>
     <p:sldId id="299" r:id="rId42"/>
-    <p:sldId id="298" r:id="rId43"/>
-    <p:sldId id="303" r:id="rId44"/>
+    <p:sldId id="304" r:id="rId43"/>
+    <p:sldId id="298" r:id="rId44"/>
+    <p:sldId id="303" r:id="rId45"/>
   </p:sldIdLst>
   <p:sldSz cx="12192000" cy="6858000"/>
   <p:notesSz cx="6858000" cy="9144000"/>
@@ -7349,7 +7350,7 @@
           <a:p>
             <a:r>
               <a:rPr lang="en-US" dirty="0"/>
-              <a:t>Other common HTML Elements</a:t>
+              <a:t>Other Less common HTML Elements</a:t>
             </a:r>
           </a:p>
         </p:txBody>
@@ -11643,6 +11644,24 @@
           <a:p>
             <a:r>
               <a:rPr lang="en-US" dirty="0"/>
+              <a:t>Definition: </a:t>
+            </a:r>
+            <a:r>
+              <a:rPr lang="en-US" dirty="0">
+                <a:solidFill>
+                  <a:schemeClr val="accent2"/>
+                </a:solidFill>
+              </a:rPr>
+              <a:t>The Box Model </a:t>
+            </a:r>
+            <a:r>
+              <a:rPr lang="en-US" dirty="0"/>
+              <a:t>– responsible for controlling the spacing between elements and their neighboring elements</a:t>
+            </a:r>
+          </a:p>
+          <a:p>
+            <a:r>
+              <a:rPr lang="en-US" dirty="0"/>
               <a:t>Margin – the space between an element and other elements on the page</a:t>
             </a:r>
           </a:p>
@@ -14336,8 +14355,8 @@
         </p:nvSpPr>
         <p:spPr>
           <a:xfrm>
-            <a:off x="6545749" y="2772078"/>
-            <a:ext cx="4661642" cy="3639113"/>
+            <a:off x="6402314" y="2985247"/>
+            <a:ext cx="4661642" cy="2054344"/>
           </a:xfrm>
           <a:prstGeom prst="rect">
             <a:avLst/>
@@ -14596,6 +14615,134 @@
           <p:cNvPr id="2" name="Title 1">
             <a:extLst>
               <a:ext uri="{FF2B5EF4-FFF2-40B4-BE49-F238E27FC236}">
+                <a16:creationId xmlns:a16="http://schemas.microsoft.com/office/drawing/2014/main" id="{6F17C381-1878-360B-64DC-893412A5E7D9}"/>
+              </a:ext>
+            </a:extLst>
+          </p:cNvPr>
+          <p:cNvSpPr>
+            <a:spLocks noGrp="1"/>
+          </p:cNvSpPr>
+          <p:nvPr>
+            <p:ph type="title"/>
+          </p:nvPr>
+        </p:nvSpPr>
+        <p:spPr/>
+        <p:txBody>
+          <a:bodyPr/>
+          <a:lstStyle/>
+          <a:p>
+            <a:r>
+              <a:rPr lang="en-US" dirty="0"/>
+              <a:t>Media Queries</a:t>
+            </a:r>
+          </a:p>
+        </p:txBody>
+      </p:sp>
+      <p:sp>
+        <p:nvSpPr>
+          <p:cNvPr id="3" name="Content Placeholder 2">
+            <a:extLst>
+              <a:ext uri="{FF2B5EF4-FFF2-40B4-BE49-F238E27FC236}">
+                <a16:creationId xmlns:a16="http://schemas.microsoft.com/office/drawing/2014/main" id="{84C75E8B-5F58-5E1B-F924-4638BBA5BB87}"/>
+              </a:ext>
+            </a:extLst>
+          </p:cNvPr>
+          <p:cNvSpPr>
+            <a:spLocks noGrp="1"/>
+          </p:cNvSpPr>
+          <p:nvPr>
+            <p:ph idx="1"/>
+          </p:nvPr>
+        </p:nvSpPr>
+        <p:spPr>
+          <a:xfrm>
+            <a:off x="581192" y="2180496"/>
+            <a:ext cx="4842455" cy="3678303"/>
+          </a:xfrm>
+        </p:spPr>
+        <p:txBody>
+          <a:bodyPr/>
+          <a:lstStyle/>
+          <a:p>
+            <a:r>
+              <a:rPr lang="en-US" dirty="0"/>
+              <a:t>Definition: Media Queries – let us apply different styles depending on the host device’s characteristics, such as screen size, resolution, or orientation.</a:t>
+            </a:r>
+          </a:p>
+          <a:p>
+            <a:pPr lvl="1"/>
+            <a:r>
+              <a:rPr lang="en-US" dirty="0"/>
+              <a:t>Used to make site more responsive</a:t>
+            </a:r>
+          </a:p>
+        </p:txBody>
+      </p:sp>
+      <p:pic>
+        <p:nvPicPr>
+          <p:cNvPr id="5" name="Picture 4">
+            <a:extLst>
+              <a:ext uri="{FF2B5EF4-FFF2-40B4-BE49-F238E27FC236}">
+                <a16:creationId xmlns:a16="http://schemas.microsoft.com/office/drawing/2014/main" id="{2CB00760-0908-E276-5336-3ED412C72994}"/>
+              </a:ext>
+            </a:extLst>
+          </p:cNvPr>
+          <p:cNvPicPr>
+            <a:picLocks noChangeAspect="1"/>
+          </p:cNvPicPr>
+          <p:nvPr/>
+        </p:nvPicPr>
+        <p:blipFill>
+          <a:blip r:embed="rId2"/>
+          <a:stretch>
+            <a:fillRect/>
+          </a:stretch>
+        </p:blipFill>
+        <p:spPr>
+          <a:xfrm>
+            <a:off x="5909829" y="2269723"/>
+            <a:ext cx="5700979" cy="3678303"/>
+          </a:xfrm>
+          <a:prstGeom prst="rect">
+            <a:avLst/>
+          </a:prstGeom>
+        </p:spPr>
+      </p:pic>
+    </p:spTree>
+    <p:extLst>
+      <p:ext uri="{BB962C8B-B14F-4D97-AF65-F5344CB8AC3E}">
+        <p14:creationId xmlns:p14="http://schemas.microsoft.com/office/powerpoint/2010/main" val="2074041263"/>
+      </p:ext>
+    </p:extLst>
+  </p:cSld>
+  <p:clrMapOvr>
+    <a:masterClrMapping/>
+  </p:clrMapOvr>
+</p:sld>
+</file>
+
+<file path=ppt/slides/slide43.xml><?xml version="1.0" encoding="utf-8"?>
+<p:sld xmlns:a="http://schemas.openxmlformats.org/drawingml/2006/main" xmlns:r="http://schemas.openxmlformats.org/officeDocument/2006/relationships" xmlns:p="http://schemas.openxmlformats.org/presentationml/2006/main">
+  <p:cSld>
+    <p:spTree>
+      <p:nvGrpSpPr>
+        <p:cNvPr id="1" name=""/>
+        <p:cNvGrpSpPr/>
+        <p:nvPr/>
+      </p:nvGrpSpPr>
+      <p:grpSpPr>
+        <a:xfrm>
+          <a:off x="0" y="0"/>
+          <a:ext cx="0" cy="0"/>
+          <a:chOff x="0" y="0"/>
+          <a:chExt cx="0" cy="0"/>
+        </a:xfrm>
+      </p:grpSpPr>
+      <p:sp>
+        <p:nvSpPr>
+          <p:cNvPr id="2" name="Title 1">
+            <a:extLst>
+              <a:ext uri="{FF2B5EF4-FFF2-40B4-BE49-F238E27FC236}">
                 <a16:creationId xmlns:a16="http://schemas.microsoft.com/office/drawing/2014/main" id="{36CA66F2-D21A-3BA9-9E7B-940782FFAD50}"/>
               </a:ext>
             </a:extLst>
@@ -16229,7 +16376,7 @@
 </p:sld>
 </file>
 
-<file path=ppt/slides/slide43.xml><?xml version="1.0" encoding="utf-8"?>
+<file path=ppt/slides/slide44.xml><?xml version="1.0" encoding="utf-8"?>
 <p:sld xmlns:a="http://schemas.openxmlformats.org/drawingml/2006/main" xmlns:r="http://schemas.openxmlformats.org/officeDocument/2006/relationships" xmlns:p="http://schemas.openxmlformats.org/presentationml/2006/main">
   <p:cSld>
     <p:spTree>
